--- a/pptx/data_statistics_2.pptx
+++ b/pptx/data_statistics_2.pptx
@@ -546,6 +546,90 @@
     <p:extLst>
       <p:ext uri="{BB962C8B-B14F-4D97-AF65-F5344CB8AC3E}">
         <p14:creationId xmlns:p14="http://schemas.microsoft.com/office/powerpoint/2010/main" val="1117675449"/>
+      </p:ext>
+    </p:extLst>
+  </p:cSld>
+  <p:clrMapOvr>
+    <a:masterClrMapping/>
+  </p:clrMapOvr>
+</p:notes>
+</file>
+
+<file path=ppt/notesSlides/notesSlide2.xml><?xml version="1.0" encoding="utf-8"?>
+<p:notes xmlns:a="http://schemas.openxmlformats.org/drawingml/2006/main" xmlns:r="http://schemas.openxmlformats.org/officeDocument/2006/relationships" xmlns:p="http://schemas.openxmlformats.org/presentationml/2006/main">
+  <p:cSld>
+    <p:spTree>
+      <p:nvGrpSpPr>
+        <p:cNvPr id="1" name=""/>
+        <p:cNvGrpSpPr/>
+        <p:nvPr/>
+      </p:nvGrpSpPr>
+      <p:grpSpPr>
+        <a:xfrm>
+          <a:off x="0" y="0"/>
+          <a:ext cx="0" cy="0"/>
+          <a:chOff x="0" y="0"/>
+          <a:chExt cx="0" cy="0"/>
+        </a:xfrm>
+      </p:grpSpPr>
+      <p:sp>
+        <p:nvSpPr>
+          <p:cNvPr id="2" name="幻灯片图像占位符 1"/>
+          <p:cNvSpPr>
+            <a:spLocks noGrp="1" noRot="1" noChangeAspect="1"/>
+          </p:cNvSpPr>
+          <p:nvPr>
+            <p:ph type="sldImg"/>
+          </p:nvPr>
+        </p:nvSpPr>
+        <p:spPr/>
+      </p:sp>
+      <p:sp>
+        <p:nvSpPr>
+          <p:cNvPr id="3" name="备注占位符 2"/>
+          <p:cNvSpPr>
+            <a:spLocks noGrp="1"/>
+          </p:cNvSpPr>
+          <p:nvPr>
+            <p:ph type="body" idx="1"/>
+          </p:nvPr>
+        </p:nvSpPr>
+        <p:spPr/>
+        <p:txBody>
+          <a:bodyPr/>
+          <a:lstStyle/>
+          <a:p>
+            <a:endParaRPr kumimoji="1" lang="zh-CN" altLang="en-US" dirty="0"/>
+          </a:p>
+        </p:txBody>
+      </p:sp>
+      <p:sp>
+        <p:nvSpPr>
+          <p:cNvPr id="4" name="灯片编号占位符 3"/>
+          <p:cNvSpPr>
+            <a:spLocks noGrp="1"/>
+          </p:cNvSpPr>
+          <p:nvPr>
+            <p:ph type="sldNum" sz="quarter" idx="5"/>
+          </p:nvPr>
+        </p:nvSpPr>
+        <p:spPr/>
+        <p:txBody>
+          <a:bodyPr/>
+          <a:lstStyle/>
+          <a:p>
+            <a:fld id="{3EB3BADC-B76F-7A4B-9A8D-CCDCA140DB71}" type="slidenum">
+              <a:rPr kumimoji="1" lang="zh-CN" altLang="en-US" smtClean="0"/>
+              <a:t>3</a:t>
+            </a:fld>
+            <a:endParaRPr kumimoji="1" lang="zh-CN" altLang="en-US"/>
+          </a:p>
+        </p:txBody>
+      </p:sp>
+    </p:spTree>
+    <p:extLst>
+      <p:ext uri="{BB962C8B-B14F-4D97-AF65-F5344CB8AC3E}">
+        <p14:creationId xmlns:p14="http://schemas.microsoft.com/office/powerpoint/2010/main" val="2783169288"/>
       </p:ext>
     </p:extLst>
   </p:cSld>
@@ -7487,10 +7571,10 @@
       </p:grpSpPr>
       <p:pic>
         <p:nvPicPr>
-          <p:cNvPr id="3" name="图形 2">
-            <a:extLst>
-              <a:ext uri="{FF2B5EF4-FFF2-40B4-BE49-F238E27FC236}">
-                <a16:creationId xmlns:a16="http://schemas.microsoft.com/office/drawing/2014/main" id="{26B3A36F-7FED-AA2A-49BE-5CC9093A2015}"/>
+          <p:cNvPr id="165" name="图形 164">
+            <a:extLst>
+              <a:ext uri="{FF2B5EF4-FFF2-40B4-BE49-F238E27FC236}">
+                <a16:creationId xmlns:a16="http://schemas.microsoft.com/office/drawing/2014/main" id="{1A8A7B57-D49D-DEC2-D4B0-6A98C89463A4}"/>
               </a:ext>
             </a:extLst>
           </p:cNvPr>
@@ -7503,7 +7587,7 @@
           <a:blip>
             <a:extLst>
               <a:ext uri="{96DAC541-7B7A-43D3-8B79-37D633B846F1}">
-                <asvg:svgBlip xmlns:asvg="http://schemas.microsoft.com/office/drawing/2016/SVG/main" r:embed="rId2"/>
+                <asvg:svgBlip xmlns:asvg="http://schemas.microsoft.com/office/drawing/2016/SVG/main" r:embed="rId3"/>
               </a:ext>
             </a:extLst>
           </a:blip>
@@ -7513,990 +7597,20 @@
         </p:blipFill>
         <p:spPr>
           <a:xfrm>
-            <a:off x="3286799" y="988346"/>
-            <a:ext cx="20165034" cy="10800000"/>
+            <a:off x="7246800" y="13187933"/>
+            <a:ext cx="6071317" cy="3671999"/>
           </a:xfrm>
           <a:prstGeom prst="rect">
             <a:avLst/>
           </a:prstGeom>
         </p:spPr>
       </p:pic>
-      <p:sp>
-        <p:nvSpPr>
-          <p:cNvPr id="4" name="文本框 3">
-            <a:extLst>
-              <a:ext uri="{FF2B5EF4-FFF2-40B4-BE49-F238E27FC236}">
-                <a16:creationId xmlns:a16="http://schemas.microsoft.com/office/drawing/2014/main" id="{B9C61D78-2BD8-995E-1BAF-5146680CC60F}"/>
-              </a:ext>
-            </a:extLst>
-          </p:cNvPr>
-          <p:cNvSpPr txBox="1"/>
-          <p:nvPr/>
-        </p:nvSpPr>
-        <p:spPr>
-          <a:xfrm>
-            <a:off x="4687106" y="1436872"/>
-            <a:ext cx="2182669" cy="523220"/>
-          </a:xfrm>
-          <a:prstGeom prst="rect">
-            <a:avLst/>
-          </a:prstGeom>
-          <a:noFill/>
-        </p:spPr>
-        <p:txBody>
-          <a:bodyPr wrap="square" rtlCol="0">
-            <a:spAutoFit/>
-          </a:bodyPr>
-          <a:lstStyle/>
-          <a:p>
-            <a:r>
-              <a:rPr kumimoji="1" lang="en-US" altLang="zh-CN" sz="2800" dirty="0">
-                <a:latin typeface="Arial" panose="020B0604020202020204" pitchFamily="34" charset="0"/>
-                <a:cs typeface="Arial" panose="020B0604020202020204" pitchFamily="34" charset="0"/>
-              </a:rPr>
-              <a:t>Benign</a:t>
-            </a:r>
-            <a:endParaRPr kumimoji="1" lang="zh-CN" altLang="en-US" sz="2800" dirty="0">
-              <a:latin typeface="Arial" panose="020B0604020202020204" pitchFamily="34" charset="0"/>
-              <a:cs typeface="Arial" panose="020B0604020202020204" pitchFamily="34" charset="0"/>
-            </a:endParaRPr>
-          </a:p>
-        </p:txBody>
-      </p:sp>
-      <p:sp>
-        <p:nvSpPr>
-          <p:cNvPr id="5" name="文本框 4">
-            <a:extLst>
-              <a:ext uri="{FF2B5EF4-FFF2-40B4-BE49-F238E27FC236}">
-                <a16:creationId xmlns:a16="http://schemas.microsoft.com/office/drawing/2014/main" id="{3076C164-896A-EEE0-0B0A-FF3BA0A2F049}"/>
-              </a:ext>
-            </a:extLst>
-          </p:cNvPr>
-          <p:cNvSpPr txBox="1"/>
-          <p:nvPr/>
-        </p:nvSpPr>
-        <p:spPr>
-          <a:xfrm>
-            <a:off x="4687106" y="1894398"/>
-            <a:ext cx="2182669" cy="523220"/>
-          </a:xfrm>
-          <a:prstGeom prst="rect">
-            <a:avLst/>
-          </a:prstGeom>
-          <a:noFill/>
-        </p:spPr>
-        <p:txBody>
-          <a:bodyPr wrap="square" rtlCol="0">
-            <a:spAutoFit/>
-          </a:bodyPr>
-          <a:lstStyle/>
-          <a:p>
-            <a:r>
-              <a:rPr kumimoji="1" lang="en-US" altLang="zh-CN" sz="2800" dirty="0">
-                <a:latin typeface="Arial" panose="020B0604020202020204" pitchFamily="34" charset="0"/>
-                <a:cs typeface="Arial" panose="020B0604020202020204" pitchFamily="34" charset="0"/>
-              </a:rPr>
-              <a:t>Malignant</a:t>
-            </a:r>
-          </a:p>
-        </p:txBody>
-      </p:sp>
-      <p:sp>
-        <p:nvSpPr>
-          <p:cNvPr id="7" name="文本框 6">
-            <a:extLst>
-              <a:ext uri="{FF2B5EF4-FFF2-40B4-BE49-F238E27FC236}">
-                <a16:creationId xmlns:a16="http://schemas.microsoft.com/office/drawing/2014/main" id="{C3949334-2C39-A4BC-3619-85632EBBBAA7}"/>
-              </a:ext>
-            </a:extLst>
-          </p:cNvPr>
-          <p:cNvSpPr txBox="1"/>
-          <p:nvPr/>
-        </p:nvSpPr>
-        <p:spPr>
-          <a:xfrm>
-            <a:off x="19628989" y="3681775"/>
-            <a:ext cx="1283369" cy="523220"/>
-          </a:xfrm>
-          <a:prstGeom prst="rect">
-            <a:avLst/>
-          </a:prstGeom>
-          <a:noFill/>
-        </p:spPr>
-        <p:txBody>
-          <a:bodyPr wrap="square" rtlCol="0">
-            <a:spAutoFit/>
-          </a:bodyPr>
-          <a:lstStyle/>
-          <a:p>
-            <a:pPr algn="ctr"/>
-            <a:r>
-              <a:rPr kumimoji="1" lang="en-US" altLang="zh-CN" sz="2800" dirty="0">
-                <a:latin typeface="Arial" panose="020B0604020202020204" pitchFamily="34" charset="0"/>
-                <a:cs typeface="Arial" panose="020B0604020202020204" pitchFamily="34" charset="0"/>
-              </a:rPr>
-              <a:t>3,202</a:t>
-            </a:r>
-            <a:endParaRPr kumimoji="1" lang="zh-CN" altLang="en-US" sz="2800" dirty="0">
-              <a:latin typeface="Arial" panose="020B0604020202020204" pitchFamily="34" charset="0"/>
-              <a:cs typeface="Arial" panose="020B0604020202020204" pitchFamily="34" charset="0"/>
-            </a:endParaRPr>
-          </a:p>
-        </p:txBody>
-      </p:sp>
-      <p:sp>
-        <p:nvSpPr>
-          <p:cNvPr id="8" name="文本框 7">
-            <a:extLst>
-              <a:ext uri="{FF2B5EF4-FFF2-40B4-BE49-F238E27FC236}">
-                <a16:creationId xmlns:a16="http://schemas.microsoft.com/office/drawing/2014/main" id="{BA471242-39F4-9E35-6EBE-5F9A76811557}"/>
-              </a:ext>
-            </a:extLst>
-          </p:cNvPr>
-          <p:cNvSpPr txBox="1"/>
-          <p:nvPr/>
-        </p:nvSpPr>
-        <p:spPr>
-          <a:xfrm>
-            <a:off x="15791207" y="7100599"/>
-            <a:ext cx="1283369" cy="523220"/>
-          </a:xfrm>
-          <a:prstGeom prst="rect">
-            <a:avLst/>
-          </a:prstGeom>
-          <a:noFill/>
-        </p:spPr>
-        <p:txBody>
-          <a:bodyPr wrap="square" rtlCol="0">
-            <a:spAutoFit/>
-          </a:bodyPr>
-          <a:lstStyle/>
-          <a:p>
-            <a:pPr algn="ctr"/>
-            <a:r>
-              <a:rPr kumimoji="1" lang="en-US" altLang="zh-CN" sz="2800" dirty="0">
-                <a:latin typeface="Arial" panose="020B0604020202020204" pitchFamily="34" charset="0"/>
-                <a:cs typeface="Arial" panose="020B0604020202020204" pitchFamily="34" charset="0"/>
-              </a:rPr>
-              <a:t>304</a:t>
-            </a:r>
-            <a:endParaRPr kumimoji="1" lang="zh-CN" altLang="en-US" sz="2800" dirty="0">
-              <a:latin typeface="Arial" panose="020B0604020202020204" pitchFamily="34" charset="0"/>
-              <a:cs typeface="Arial" panose="020B0604020202020204" pitchFamily="34" charset="0"/>
-            </a:endParaRPr>
-          </a:p>
-        </p:txBody>
-      </p:sp>
-      <p:sp>
-        <p:nvSpPr>
-          <p:cNvPr id="9" name="文本框 8">
-            <a:extLst>
-              <a:ext uri="{FF2B5EF4-FFF2-40B4-BE49-F238E27FC236}">
-                <a16:creationId xmlns:a16="http://schemas.microsoft.com/office/drawing/2014/main" id="{376B2C5D-DBD7-C0F8-EC31-253AB2EA7933}"/>
-              </a:ext>
-            </a:extLst>
-          </p:cNvPr>
-          <p:cNvSpPr txBox="1"/>
-          <p:nvPr/>
-        </p:nvSpPr>
-        <p:spPr>
-          <a:xfrm>
-            <a:off x="17205043" y="9895186"/>
-            <a:ext cx="1283369" cy="523220"/>
-          </a:xfrm>
-          <a:prstGeom prst="rect">
-            <a:avLst/>
-          </a:prstGeom>
-          <a:noFill/>
-        </p:spPr>
-        <p:txBody>
-          <a:bodyPr wrap="square" rtlCol="0">
-            <a:spAutoFit/>
-          </a:bodyPr>
-          <a:lstStyle/>
-          <a:p>
-            <a:pPr algn="ctr"/>
-            <a:r>
-              <a:rPr kumimoji="1" lang="en-US" altLang="zh-CN" sz="2800" dirty="0">
-                <a:latin typeface="Arial" panose="020B0604020202020204" pitchFamily="34" charset="0"/>
-                <a:cs typeface="Arial" panose="020B0604020202020204" pitchFamily="34" charset="0"/>
-              </a:rPr>
-              <a:t>45</a:t>
-            </a:r>
-            <a:endParaRPr kumimoji="1" lang="zh-CN" altLang="en-US" sz="2800" dirty="0">
-              <a:latin typeface="Arial" panose="020B0604020202020204" pitchFamily="34" charset="0"/>
-              <a:cs typeface="Arial" panose="020B0604020202020204" pitchFamily="34" charset="0"/>
-            </a:endParaRPr>
-          </a:p>
-        </p:txBody>
-      </p:sp>
-      <p:sp>
-        <p:nvSpPr>
-          <p:cNvPr id="10" name="文本框 9">
-            <a:extLst>
-              <a:ext uri="{FF2B5EF4-FFF2-40B4-BE49-F238E27FC236}">
-                <a16:creationId xmlns:a16="http://schemas.microsoft.com/office/drawing/2014/main" id="{6B19436A-FCEF-4366-693F-29F13ADA77C9}"/>
-              </a:ext>
-            </a:extLst>
-          </p:cNvPr>
-          <p:cNvSpPr txBox="1"/>
-          <p:nvPr/>
-        </p:nvSpPr>
-        <p:spPr>
-          <a:xfrm>
-            <a:off x="13430336" y="3582712"/>
-            <a:ext cx="1283369" cy="523220"/>
-          </a:xfrm>
-          <a:prstGeom prst="rect">
-            <a:avLst/>
-          </a:prstGeom>
-          <a:noFill/>
-        </p:spPr>
-        <p:txBody>
-          <a:bodyPr wrap="square" rtlCol="0">
-            <a:spAutoFit/>
-          </a:bodyPr>
-          <a:lstStyle/>
-          <a:p>
-            <a:pPr algn="ctr"/>
-            <a:r>
-              <a:rPr kumimoji="1" lang="en-US" altLang="zh-CN" sz="2800" dirty="0">
-                <a:latin typeface="Arial" panose="020B0604020202020204" pitchFamily="34" charset="0"/>
-                <a:cs typeface="Arial" panose="020B0604020202020204" pitchFamily="34" charset="0"/>
-              </a:rPr>
-              <a:t>3,459</a:t>
-            </a:r>
-            <a:endParaRPr kumimoji="1" lang="zh-CN" altLang="en-US" sz="2800" dirty="0">
-              <a:latin typeface="Arial" panose="020B0604020202020204" pitchFamily="34" charset="0"/>
-              <a:cs typeface="Arial" panose="020B0604020202020204" pitchFamily="34" charset="0"/>
-            </a:endParaRPr>
-          </a:p>
-        </p:txBody>
-      </p:sp>
-      <p:sp>
-        <p:nvSpPr>
-          <p:cNvPr id="11" name="文本框 10">
-            <a:extLst>
-              <a:ext uri="{FF2B5EF4-FFF2-40B4-BE49-F238E27FC236}">
-                <a16:creationId xmlns:a16="http://schemas.microsoft.com/office/drawing/2014/main" id="{87E3DE10-5352-02A3-C052-0B64D1265787}"/>
-              </a:ext>
-            </a:extLst>
-          </p:cNvPr>
-          <p:cNvSpPr txBox="1"/>
-          <p:nvPr/>
-        </p:nvSpPr>
-        <p:spPr>
-          <a:xfrm>
-            <a:off x="12085947" y="2328837"/>
-            <a:ext cx="1283369" cy="523220"/>
-          </a:xfrm>
-          <a:prstGeom prst="rect">
-            <a:avLst/>
-          </a:prstGeom>
-          <a:noFill/>
-        </p:spPr>
-        <p:txBody>
-          <a:bodyPr wrap="square" rtlCol="0">
-            <a:spAutoFit/>
-          </a:bodyPr>
-          <a:lstStyle/>
-          <a:p>
-            <a:pPr algn="ctr"/>
-            <a:r>
-              <a:rPr kumimoji="1" lang="en-US" altLang="zh-CN" sz="2800" dirty="0">
-                <a:latin typeface="Arial" panose="020B0604020202020204" pitchFamily="34" charset="0"/>
-                <a:cs typeface="Arial" panose="020B0604020202020204" pitchFamily="34" charset="0"/>
-              </a:rPr>
-              <a:t>8,172</a:t>
-            </a:r>
-            <a:endParaRPr kumimoji="1" lang="zh-CN" altLang="en-US" sz="2800" dirty="0">
-              <a:latin typeface="Arial" panose="020B0604020202020204" pitchFamily="34" charset="0"/>
-              <a:cs typeface="Arial" panose="020B0604020202020204" pitchFamily="34" charset="0"/>
-            </a:endParaRPr>
-          </a:p>
-        </p:txBody>
-      </p:sp>
-      <p:sp>
-        <p:nvSpPr>
-          <p:cNvPr id="12" name="文本框 11">
-            <a:extLst>
-              <a:ext uri="{FF2B5EF4-FFF2-40B4-BE49-F238E27FC236}">
-                <a16:creationId xmlns:a16="http://schemas.microsoft.com/office/drawing/2014/main" id="{F922BECA-4DEA-CB07-E305-78FE583A5CA2}"/>
-              </a:ext>
-            </a:extLst>
-          </p:cNvPr>
-          <p:cNvSpPr txBox="1"/>
-          <p:nvPr/>
-        </p:nvSpPr>
-        <p:spPr>
-          <a:xfrm>
-            <a:off x="9657930" y="3493873"/>
-            <a:ext cx="1283369" cy="523220"/>
-          </a:xfrm>
-          <a:prstGeom prst="rect">
-            <a:avLst/>
-          </a:prstGeom>
-          <a:noFill/>
-        </p:spPr>
-        <p:txBody>
-          <a:bodyPr wrap="square" rtlCol="0">
-            <a:spAutoFit/>
-          </a:bodyPr>
-          <a:lstStyle/>
-          <a:p>
-            <a:pPr algn="ctr"/>
-            <a:r>
-              <a:rPr kumimoji="1" lang="en-US" altLang="zh-CN" sz="2800" dirty="0">
-                <a:latin typeface="Arial" panose="020B0604020202020204" pitchFamily="34" charset="0"/>
-                <a:cs typeface="Arial" panose="020B0604020202020204" pitchFamily="34" charset="0"/>
-              </a:rPr>
-              <a:t>3,574</a:t>
-            </a:r>
-            <a:endParaRPr kumimoji="1" lang="zh-CN" altLang="en-US" sz="2800" dirty="0">
-              <a:latin typeface="Arial" panose="020B0604020202020204" pitchFamily="34" charset="0"/>
-              <a:cs typeface="Arial" panose="020B0604020202020204" pitchFamily="34" charset="0"/>
-            </a:endParaRPr>
-          </a:p>
-        </p:txBody>
-      </p:sp>
-      <p:sp>
-        <p:nvSpPr>
-          <p:cNvPr id="13" name="文本框 12">
-            <a:extLst>
-              <a:ext uri="{FF2B5EF4-FFF2-40B4-BE49-F238E27FC236}">
-                <a16:creationId xmlns:a16="http://schemas.microsoft.com/office/drawing/2014/main" id="{639B900F-1A3A-9AD2-ADC9-3499F0349825}"/>
-              </a:ext>
-            </a:extLst>
-          </p:cNvPr>
-          <p:cNvSpPr txBox="1"/>
-          <p:nvPr/>
-        </p:nvSpPr>
-        <p:spPr>
-          <a:xfrm>
-            <a:off x="8269690" y="4807017"/>
-            <a:ext cx="1283369" cy="523220"/>
-          </a:xfrm>
-          <a:prstGeom prst="rect">
-            <a:avLst/>
-          </a:prstGeom>
-          <a:noFill/>
-        </p:spPr>
-        <p:txBody>
-          <a:bodyPr wrap="square" rtlCol="0">
-            <a:spAutoFit/>
-          </a:bodyPr>
-          <a:lstStyle/>
-          <a:p>
-            <a:pPr algn="ctr"/>
-            <a:r>
-              <a:rPr kumimoji="1" lang="en-US" altLang="zh-CN" sz="2800" dirty="0">
-                <a:latin typeface="Arial" panose="020B0604020202020204" pitchFamily="34" charset="0"/>
-                <a:cs typeface="Arial" panose="020B0604020202020204" pitchFamily="34" charset="0"/>
-              </a:rPr>
-              <a:t>1,426</a:t>
-            </a:r>
-            <a:endParaRPr kumimoji="1" lang="zh-CN" altLang="en-US" sz="2800" dirty="0">
-              <a:latin typeface="Arial" panose="020B0604020202020204" pitchFamily="34" charset="0"/>
-              <a:cs typeface="Arial" panose="020B0604020202020204" pitchFamily="34" charset="0"/>
-            </a:endParaRPr>
-          </a:p>
-        </p:txBody>
-      </p:sp>
-      <p:sp>
-        <p:nvSpPr>
-          <p:cNvPr id="14" name="文本框 13">
-            <a:extLst>
-              <a:ext uri="{FF2B5EF4-FFF2-40B4-BE49-F238E27FC236}">
-                <a16:creationId xmlns:a16="http://schemas.microsoft.com/office/drawing/2014/main" id="{3FDB9D25-7073-6ACC-8F3A-ECD365EDDE0A}"/>
-              </a:ext>
-            </a:extLst>
-          </p:cNvPr>
-          <p:cNvSpPr txBox="1"/>
-          <p:nvPr/>
-        </p:nvSpPr>
-        <p:spPr>
-          <a:xfrm>
-            <a:off x="5830680" y="3878984"/>
-            <a:ext cx="1283369" cy="523220"/>
-          </a:xfrm>
-          <a:prstGeom prst="rect">
-            <a:avLst/>
-          </a:prstGeom>
-          <a:noFill/>
-        </p:spPr>
-        <p:txBody>
-          <a:bodyPr wrap="square" rtlCol="0">
-            <a:spAutoFit/>
-          </a:bodyPr>
-          <a:lstStyle/>
-          <a:p>
-            <a:pPr algn="ctr"/>
-            <a:r>
-              <a:rPr kumimoji="1" lang="en-US" altLang="zh-CN" sz="2800" dirty="0">
-                <a:latin typeface="Arial" panose="020B0604020202020204" pitchFamily="34" charset="0"/>
-                <a:cs typeface="Arial" panose="020B0604020202020204" pitchFamily="34" charset="0"/>
-              </a:rPr>
-              <a:t>2,638</a:t>
-            </a:r>
-            <a:endParaRPr kumimoji="1" lang="zh-CN" altLang="en-US" sz="2800" dirty="0">
-              <a:latin typeface="Arial" panose="020B0604020202020204" pitchFamily="34" charset="0"/>
-              <a:cs typeface="Arial" panose="020B0604020202020204" pitchFamily="34" charset="0"/>
-            </a:endParaRPr>
-          </a:p>
-        </p:txBody>
-      </p:sp>
-      <p:sp>
-        <p:nvSpPr>
-          <p:cNvPr id="15" name="文本框 14">
-            <a:extLst>
-              <a:ext uri="{FF2B5EF4-FFF2-40B4-BE49-F238E27FC236}">
-                <a16:creationId xmlns:a16="http://schemas.microsoft.com/office/drawing/2014/main" id="{0F2AFDF2-FA71-94BA-9613-2882696EE939}"/>
-              </a:ext>
-            </a:extLst>
-          </p:cNvPr>
-          <p:cNvSpPr txBox="1"/>
-          <p:nvPr/>
-        </p:nvSpPr>
-        <p:spPr>
-          <a:xfrm>
-            <a:off x="4619760" y="3827773"/>
-            <a:ext cx="1283369" cy="523220"/>
-          </a:xfrm>
-          <a:prstGeom prst="rect">
-            <a:avLst/>
-          </a:prstGeom>
-          <a:noFill/>
-        </p:spPr>
-        <p:txBody>
-          <a:bodyPr wrap="square" rtlCol="0">
-            <a:spAutoFit/>
-          </a:bodyPr>
-          <a:lstStyle/>
-          <a:p>
-            <a:pPr algn="ctr"/>
-            <a:r>
-              <a:rPr kumimoji="1" lang="en-US" altLang="zh-CN" sz="2800" dirty="0">
-                <a:latin typeface="Arial" panose="020B0604020202020204" pitchFamily="34" charset="0"/>
-                <a:cs typeface="Arial" panose="020B0604020202020204" pitchFamily="34" charset="0"/>
-              </a:rPr>
-              <a:t>2,709</a:t>
-            </a:r>
-            <a:endParaRPr kumimoji="1" lang="zh-CN" altLang="en-US" sz="2800" dirty="0">
-              <a:latin typeface="Arial" panose="020B0604020202020204" pitchFamily="34" charset="0"/>
-              <a:cs typeface="Arial" panose="020B0604020202020204" pitchFamily="34" charset="0"/>
-            </a:endParaRPr>
-          </a:p>
-        </p:txBody>
-      </p:sp>
-      <p:sp>
-        <p:nvSpPr>
-          <p:cNvPr id="17" name="文本框 16">
-            <a:extLst>
-              <a:ext uri="{FF2B5EF4-FFF2-40B4-BE49-F238E27FC236}">
-                <a16:creationId xmlns:a16="http://schemas.microsoft.com/office/drawing/2014/main" id="{3665BFF3-D880-1C8E-F2A8-EDF17CA51057}"/>
-              </a:ext>
-            </a:extLst>
-          </p:cNvPr>
-          <p:cNvSpPr txBox="1"/>
-          <p:nvPr/>
-        </p:nvSpPr>
-        <p:spPr>
-          <a:xfrm>
-            <a:off x="4570622" y="11541670"/>
-            <a:ext cx="2582780" cy="584775"/>
-          </a:xfrm>
-          <a:prstGeom prst="rect">
-            <a:avLst/>
-          </a:prstGeom>
-          <a:noFill/>
-        </p:spPr>
-        <p:txBody>
-          <a:bodyPr wrap="square" rtlCol="0">
-            <a:spAutoFit/>
-          </a:bodyPr>
-          <a:lstStyle/>
-          <a:p>
-            <a:pPr algn="ctr"/>
-            <a:r>
-              <a:rPr kumimoji="1" lang="en-US" altLang="zh-CN" sz="3200" dirty="0">
-                <a:latin typeface="Arial" panose="020B0604020202020204" pitchFamily="34" charset="0"/>
-                <a:cs typeface="Arial" panose="020B0604020202020204" pitchFamily="34" charset="0"/>
-              </a:rPr>
-              <a:t>TN3K</a:t>
-            </a:r>
-          </a:p>
-        </p:txBody>
-      </p:sp>
-      <p:sp>
-        <p:nvSpPr>
-          <p:cNvPr id="18" name="文本框 17">
-            <a:extLst>
-              <a:ext uri="{FF2B5EF4-FFF2-40B4-BE49-F238E27FC236}">
-                <a16:creationId xmlns:a16="http://schemas.microsoft.com/office/drawing/2014/main" id="{5137A78C-8D4D-7A90-5F39-F3F1E0CE5C8D}"/>
-              </a:ext>
-            </a:extLst>
-          </p:cNvPr>
-          <p:cNvSpPr txBox="1"/>
-          <p:nvPr/>
-        </p:nvSpPr>
-        <p:spPr>
-          <a:xfrm>
-            <a:off x="8269690" y="11541671"/>
-            <a:ext cx="2582780" cy="584775"/>
-          </a:xfrm>
-          <a:prstGeom prst="rect">
-            <a:avLst/>
-          </a:prstGeom>
-          <a:noFill/>
-        </p:spPr>
-        <p:txBody>
-          <a:bodyPr wrap="square" rtlCol="0">
-            <a:spAutoFit/>
-          </a:bodyPr>
-          <a:lstStyle/>
-          <a:p>
-            <a:pPr algn="ctr"/>
-            <a:r>
-              <a:rPr kumimoji="1" lang="en-US" altLang="zh-CN" sz="3200" dirty="0">
-                <a:latin typeface="Arial" panose="020B0604020202020204" pitchFamily="34" charset="0"/>
-                <a:cs typeface="Arial" panose="020B0604020202020204" pitchFamily="34" charset="0"/>
-              </a:rPr>
-              <a:t>TN5K</a:t>
-            </a:r>
-          </a:p>
-        </p:txBody>
-      </p:sp>
-      <p:sp>
-        <p:nvSpPr>
-          <p:cNvPr id="19" name="文本框 18">
-            <a:extLst>
-              <a:ext uri="{FF2B5EF4-FFF2-40B4-BE49-F238E27FC236}">
-                <a16:creationId xmlns:a16="http://schemas.microsoft.com/office/drawing/2014/main" id="{50E1005D-F42A-5943-10B4-51392AC89D9C}"/>
-              </a:ext>
-            </a:extLst>
-          </p:cNvPr>
-          <p:cNvSpPr txBox="1"/>
-          <p:nvPr/>
-        </p:nvSpPr>
-        <p:spPr>
-          <a:xfrm>
-            <a:off x="12138946" y="11486317"/>
-            <a:ext cx="2582780" cy="584775"/>
-          </a:xfrm>
-          <a:prstGeom prst="rect">
-            <a:avLst/>
-          </a:prstGeom>
-          <a:noFill/>
-        </p:spPr>
-        <p:txBody>
-          <a:bodyPr wrap="square" rtlCol="0">
-            <a:spAutoFit/>
-          </a:bodyPr>
-          <a:lstStyle/>
-          <a:p>
-            <a:pPr algn="ctr"/>
-            <a:r>
-              <a:rPr kumimoji="1" lang="en-US" altLang="zh-CN" sz="3200" dirty="0" err="1">
-                <a:latin typeface="Arial" panose="020B0604020202020204" pitchFamily="34" charset="0"/>
-                <a:cs typeface="Arial" panose="020B0604020202020204" pitchFamily="34" charset="0"/>
-              </a:rPr>
-              <a:t>ThyroidXL</a:t>
-            </a:r>
-            <a:endParaRPr kumimoji="1" lang="en-US" altLang="zh-CN" sz="3200" dirty="0">
-              <a:latin typeface="Arial" panose="020B0604020202020204" pitchFamily="34" charset="0"/>
-              <a:cs typeface="Arial" panose="020B0604020202020204" pitchFamily="34" charset="0"/>
-            </a:endParaRPr>
-          </a:p>
-        </p:txBody>
-      </p:sp>
-      <p:sp>
-        <p:nvSpPr>
-          <p:cNvPr id="20" name="文本框 19">
-            <a:extLst>
-              <a:ext uri="{FF2B5EF4-FFF2-40B4-BE49-F238E27FC236}">
-                <a16:creationId xmlns:a16="http://schemas.microsoft.com/office/drawing/2014/main" id="{BC7DC142-CAB1-8C6C-319D-9579F2C70590}"/>
-              </a:ext>
-            </a:extLst>
-          </p:cNvPr>
-          <p:cNvSpPr txBox="1"/>
-          <p:nvPr/>
-        </p:nvSpPr>
-        <p:spPr>
-          <a:xfrm>
-            <a:off x="15872542" y="11541672"/>
-            <a:ext cx="2582780" cy="584775"/>
-          </a:xfrm>
-          <a:prstGeom prst="rect">
-            <a:avLst/>
-          </a:prstGeom>
-          <a:noFill/>
-        </p:spPr>
-        <p:txBody>
-          <a:bodyPr wrap="square" rtlCol="0">
-            <a:spAutoFit/>
-          </a:bodyPr>
-          <a:lstStyle/>
-          <a:p>
-            <a:pPr algn="ctr"/>
-            <a:r>
-              <a:rPr kumimoji="1" lang="en-US" altLang="zh-CN" sz="3200" dirty="0">
-                <a:latin typeface="Arial" panose="020B0604020202020204" pitchFamily="34" charset="0"/>
-                <a:cs typeface="Arial" panose="020B0604020202020204" pitchFamily="34" charset="0"/>
-              </a:rPr>
-              <a:t>DDTI</a:t>
-            </a:r>
-          </a:p>
-        </p:txBody>
-      </p:sp>
-      <p:sp>
-        <p:nvSpPr>
-          <p:cNvPr id="21" name="文本框 20">
-            <a:extLst>
-              <a:ext uri="{FF2B5EF4-FFF2-40B4-BE49-F238E27FC236}">
-                <a16:creationId xmlns:a16="http://schemas.microsoft.com/office/drawing/2014/main" id="{727E6C83-27E5-44DC-9977-5E3132595CDA}"/>
-              </a:ext>
-            </a:extLst>
-          </p:cNvPr>
-          <p:cNvSpPr txBox="1"/>
-          <p:nvPr/>
-        </p:nvSpPr>
-        <p:spPr>
-          <a:xfrm>
-            <a:off x="19628989" y="11547187"/>
-            <a:ext cx="2582780" cy="584775"/>
-          </a:xfrm>
-          <a:prstGeom prst="rect">
-            <a:avLst/>
-          </a:prstGeom>
-          <a:noFill/>
-        </p:spPr>
-        <p:txBody>
-          <a:bodyPr wrap="square" rtlCol="0">
-            <a:spAutoFit/>
-          </a:bodyPr>
-          <a:lstStyle/>
-          <a:p>
-            <a:pPr algn="ctr"/>
-            <a:r>
-              <a:rPr kumimoji="1" lang="en-US" altLang="zh-CN" sz="3200" dirty="0">
-                <a:latin typeface="Arial" panose="020B0604020202020204" pitchFamily="34" charset="0"/>
-                <a:cs typeface="Arial" panose="020B0604020202020204" pitchFamily="34" charset="0"/>
-              </a:rPr>
-              <a:t>ZJH-8K</a:t>
-            </a:r>
-          </a:p>
-        </p:txBody>
-      </p:sp>
-      <p:sp>
-        <p:nvSpPr>
-          <p:cNvPr id="22" name="文本框 21">
-            <a:extLst>
-              <a:ext uri="{FF2B5EF4-FFF2-40B4-BE49-F238E27FC236}">
-                <a16:creationId xmlns:a16="http://schemas.microsoft.com/office/drawing/2014/main" id="{EA81A3CB-D338-BBB8-0DEA-CA5A5A2F3F58}"/>
-              </a:ext>
-            </a:extLst>
-          </p:cNvPr>
-          <p:cNvSpPr txBox="1"/>
-          <p:nvPr/>
-        </p:nvSpPr>
-        <p:spPr>
-          <a:xfrm>
-            <a:off x="3898387" y="12014011"/>
-            <a:ext cx="19302663" cy="707886"/>
-          </a:xfrm>
-          <a:prstGeom prst="rect">
-            <a:avLst/>
-          </a:prstGeom>
-          <a:noFill/>
-        </p:spPr>
-        <p:txBody>
-          <a:bodyPr wrap="square" rtlCol="0">
-            <a:spAutoFit/>
-          </a:bodyPr>
-          <a:lstStyle/>
-          <a:p>
-            <a:pPr algn="ctr"/>
-            <a:r>
-              <a:rPr kumimoji="1" lang="en-US" altLang="zh-CN" sz="4000" dirty="0">
-                <a:latin typeface="Arial" panose="020B0604020202020204" pitchFamily="34" charset="0"/>
-                <a:cs typeface="Arial" panose="020B0604020202020204" pitchFamily="34" charset="0"/>
-              </a:rPr>
-              <a:t>Dataset</a:t>
-            </a:r>
-            <a:endParaRPr kumimoji="1" lang="zh-CN" altLang="en-US" sz="4000" dirty="0">
-              <a:latin typeface="Arial" panose="020B0604020202020204" pitchFamily="34" charset="0"/>
-              <a:cs typeface="Arial" panose="020B0604020202020204" pitchFamily="34" charset="0"/>
-            </a:endParaRPr>
-          </a:p>
-        </p:txBody>
-      </p:sp>
-      <p:sp>
-        <p:nvSpPr>
-          <p:cNvPr id="23" name="文本框 22">
-            <a:extLst>
-              <a:ext uri="{FF2B5EF4-FFF2-40B4-BE49-F238E27FC236}">
-                <a16:creationId xmlns:a16="http://schemas.microsoft.com/office/drawing/2014/main" id="{5530AE19-4BB4-23EE-EF79-4297C6EDF5F6}"/>
-              </a:ext>
-            </a:extLst>
-          </p:cNvPr>
-          <p:cNvSpPr txBox="1"/>
-          <p:nvPr/>
-        </p:nvSpPr>
-        <p:spPr>
-          <a:xfrm>
-            <a:off x="2658432" y="2237688"/>
-            <a:ext cx="1080000" cy="646331"/>
-          </a:xfrm>
-          <a:prstGeom prst="rect">
-            <a:avLst/>
-          </a:prstGeom>
-          <a:noFill/>
-        </p:spPr>
-        <p:txBody>
-          <a:bodyPr wrap="square" rtlCol="0">
-            <a:spAutoFit/>
-          </a:bodyPr>
-          <a:lstStyle/>
-          <a:p>
-            <a:r>
-              <a:rPr kumimoji="1" lang="en-US" altLang="zh-CN" sz="3600" dirty="0">
-                <a:latin typeface="Arial" panose="020B0604020202020204" pitchFamily="34" charset="0"/>
-                <a:cs typeface="Arial" panose="020B0604020202020204" pitchFamily="34" charset="0"/>
-              </a:rPr>
-              <a:t>10</a:t>
-            </a:r>
-            <a:r>
-              <a:rPr kumimoji="1" lang="en-US" altLang="zh-CN" sz="3600" baseline="30000" dirty="0">
-                <a:latin typeface="Arial" panose="020B0604020202020204" pitchFamily="34" charset="0"/>
-                <a:cs typeface="Arial" panose="020B0604020202020204" pitchFamily="34" charset="0"/>
-              </a:rPr>
-              <a:t>4</a:t>
-            </a:r>
-            <a:endParaRPr kumimoji="1" lang="zh-CN" altLang="en-US" sz="3600" dirty="0">
-              <a:latin typeface="Arial" panose="020B0604020202020204" pitchFamily="34" charset="0"/>
-              <a:cs typeface="Arial" panose="020B0604020202020204" pitchFamily="34" charset="0"/>
-            </a:endParaRPr>
-          </a:p>
-        </p:txBody>
-      </p:sp>
-      <p:sp>
-        <p:nvSpPr>
-          <p:cNvPr id="24" name="文本框 23">
-            <a:extLst>
-              <a:ext uri="{FF2B5EF4-FFF2-40B4-BE49-F238E27FC236}">
-                <a16:creationId xmlns:a16="http://schemas.microsoft.com/office/drawing/2014/main" id="{865586DB-A7C8-452F-5F40-F25D879A89FF}"/>
-              </a:ext>
-            </a:extLst>
-          </p:cNvPr>
-          <p:cNvSpPr txBox="1"/>
-          <p:nvPr/>
-        </p:nvSpPr>
-        <p:spPr>
-          <a:xfrm>
-            <a:off x="2610455" y="5623344"/>
-            <a:ext cx="1080000" cy="646331"/>
-          </a:xfrm>
-          <a:prstGeom prst="rect">
-            <a:avLst/>
-          </a:prstGeom>
-          <a:noFill/>
-        </p:spPr>
-        <p:txBody>
-          <a:bodyPr wrap="square" rtlCol="0">
-            <a:spAutoFit/>
-          </a:bodyPr>
-          <a:lstStyle/>
-          <a:p>
-            <a:r>
-              <a:rPr kumimoji="1" lang="en-US" altLang="zh-CN" sz="3600" dirty="0">
-                <a:latin typeface="Arial" panose="020B0604020202020204" pitchFamily="34" charset="0"/>
-                <a:cs typeface="Arial" panose="020B0604020202020204" pitchFamily="34" charset="0"/>
-              </a:rPr>
-              <a:t>10</a:t>
-            </a:r>
-            <a:r>
-              <a:rPr kumimoji="1" lang="en-US" altLang="zh-CN" sz="3600" baseline="30000" dirty="0">
-                <a:latin typeface="Arial" panose="020B0604020202020204" pitchFamily="34" charset="0"/>
-                <a:cs typeface="Arial" panose="020B0604020202020204" pitchFamily="34" charset="0"/>
-              </a:rPr>
-              <a:t>3</a:t>
-            </a:r>
-            <a:endParaRPr kumimoji="1" lang="zh-CN" altLang="en-US" sz="3600" dirty="0">
-              <a:latin typeface="Arial" panose="020B0604020202020204" pitchFamily="34" charset="0"/>
-              <a:cs typeface="Arial" panose="020B0604020202020204" pitchFamily="34" charset="0"/>
-            </a:endParaRPr>
-          </a:p>
-        </p:txBody>
-      </p:sp>
-      <p:sp>
-        <p:nvSpPr>
-          <p:cNvPr id="25" name="文本框 24">
-            <a:extLst>
-              <a:ext uri="{FF2B5EF4-FFF2-40B4-BE49-F238E27FC236}">
-                <a16:creationId xmlns:a16="http://schemas.microsoft.com/office/drawing/2014/main" id="{5CE07596-8E64-D701-7164-F54A93C71E72}"/>
-              </a:ext>
-            </a:extLst>
-          </p:cNvPr>
-          <p:cNvSpPr txBox="1"/>
-          <p:nvPr/>
-        </p:nvSpPr>
-        <p:spPr>
-          <a:xfrm>
-            <a:off x="2658432" y="8922367"/>
-            <a:ext cx="1080000" cy="646331"/>
-          </a:xfrm>
-          <a:prstGeom prst="rect">
-            <a:avLst/>
-          </a:prstGeom>
-          <a:noFill/>
-        </p:spPr>
-        <p:txBody>
-          <a:bodyPr wrap="square" rtlCol="0">
-            <a:spAutoFit/>
-          </a:bodyPr>
-          <a:lstStyle/>
-          <a:p>
-            <a:r>
-              <a:rPr kumimoji="1" lang="en-US" altLang="zh-CN" sz="3600" dirty="0">
-                <a:latin typeface="Arial" panose="020B0604020202020204" pitchFamily="34" charset="0"/>
-                <a:cs typeface="Arial" panose="020B0604020202020204" pitchFamily="34" charset="0"/>
-              </a:rPr>
-              <a:t>10</a:t>
-            </a:r>
-            <a:r>
-              <a:rPr kumimoji="1" lang="en-US" altLang="zh-CN" sz="3600" baseline="30000" dirty="0">
-                <a:latin typeface="Arial" panose="020B0604020202020204" pitchFamily="34" charset="0"/>
-                <a:cs typeface="Arial" panose="020B0604020202020204" pitchFamily="34" charset="0"/>
-              </a:rPr>
-              <a:t>2</a:t>
-            </a:r>
-            <a:endParaRPr kumimoji="1" lang="zh-CN" altLang="en-US" sz="3600" dirty="0">
-              <a:latin typeface="Arial" panose="020B0604020202020204" pitchFamily="34" charset="0"/>
-              <a:cs typeface="Arial" panose="020B0604020202020204" pitchFamily="34" charset="0"/>
-            </a:endParaRPr>
-          </a:p>
-        </p:txBody>
-      </p:sp>
-      <p:sp>
-        <p:nvSpPr>
-          <p:cNvPr id="26" name="文本框 25">
-            <a:extLst>
-              <a:ext uri="{FF2B5EF4-FFF2-40B4-BE49-F238E27FC236}">
-                <a16:creationId xmlns:a16="http://schemas.microsoft.com/office/drawing/2014/main" id="{0D068ECF-737B-D132-944E-E2EF5A74F0BA}"/>
-              </a:ext>
-            </a:extLst>
-          </p:cNvPr>
-          <p:cNvSpPr txBox="1"/>
-          <p:nvPr/>
-        </p:nvSpPr>
-        <p:spPr>
-          <a:xfrm rot="16200000">
-            <a:off x="-2312270" y="6229295"/>
-            <a:ext cx="9145328" cy="769441"/>
-          </a:xfrm>
-          <a:prstGeom prst="rect">
-            <a:avLst/>
-          </a:prstGeom>
-          <a:noFill/>
-        </p:spPr>
-        <p:txBody>
-          <a:bodyPr wrap="square" rtlCol="0">
-            <a:spAutoFit/>
-          </a:bodyPr>
-          <a:lstStyle/>
-          <a:p>
-            <a:pPr algn="ctr"/>
-            <a:r>
-              <a:rPr kumimoji="1" lang="en-US" altLang="zh-CN" sz="4400" dirty="0">
-                <a:latin typeface="Arial" panose="020B0604020202020204" pitchFamily="34" charset="0"/>
-                <a:cs typeface="Arial" panose="020B0604020202020204" pitchFamily="34" charset="0"/>
-              </a:rPr>
-              <a:t>Number</a:t>
-            </a:r>
-            <a:r>
-              <a:rPr kumimoji="1" lang="zh-CN" altLang="en-US" sz="4400" dirty="0">
-                <a:latin typeface="Arial" panose="020B0604020202020204" pitchFamily="34" charset="0"/>
-                <a:cs typeface="Arial" panose="020B0604020202020204" pitchFamily="34" charset="0"/>
-              </a:rPr>
-              <a:t> </a:t>
-            </a:r>
-            <a:r>
-              <a:rPr kumimoji="1" lang="en-US" altLang="zh-CN" sz="4400" dirty="0">
-                <a:latin typeface="Arial" panose="020B0604020202020204" pitchFamily="34" charset="0"/>
-                <a:cs typeface="Arial" panose="020B0604020202020204" pitchFamily="34" charset="0"/>
-              </a:rPr>
-              <a:t>of</a:t>
-            </a:r>
-            <a:r>
-              <a:rPr kumimoji="1" lang="zh-CN" altLang="en-US" sz="4400" dirty="0">
-                <a:latin typeface="Arial" panose="020B0604020202020204" pitchFamily="34" charset="0"/>
-                <a:cs typeface="Arial" panose="020B0604020202020204" pitchFamily="34" charset="0"/>
-              </a:rPr>
-              <a:t> </a:t>
-            </a:r>
-            <a:r>
-              <a:rPr kumimoji="1" lang="en-US" altLang="zh-CN" sz="4400" dirty="0">
-                <a:latin typeface="Arial" panose="020B0604020202020204" pitchFamily="34" charset="0"/>
-                <a:cs typeface="Arial" panose="020B0604020202020204" pitchFamily="34" charset="0"/>
-              </a:rPr>
-              <a:t>Images</a:t>
-            </a:r>
-            <a:endParaRPr kumimoji="1" lang="zh-CN" altLang="en-US" sz="4400" dirty="0">
-              <a:latin typeface="Arial" panose="020B0604020202020204" pitchFamily="34" charset="0"/>
-              <a:cs typeface="Arial" panose="020B0604020202020204" pitchFamily="34" charset="0"/>
-            </a:endParaRPr>
-          </a:p>
-        </p:txBody>
-      </p:sp>
-      <p:sp>
-        <p:nvSpPr>
-          <p:cNvPr id="27" name="文本框 26">
-            <a:extLst>
-              <a:ext uri="{FF2B5EF4-FFF2-40B4-BE49-F238E27FC236}">
-                <a16:creationId xmlns:a16="http://schemas.microsoft.com/office/drawing/2014/main" id="{6905D575-FB01-AF51-DDD0-25B8C009FF46}"/>
-              </a:ext>
-            </a:extLst>
-          </p:cNvPr>
-          <p:cNvSpPr txBox="1"/>
-          <p:nvPr/>
-        </p:nvSpPr>
-        <p:spPr>
-          <a:xfrm>
-            <a:off x="21021934" y="3138552"/>
-            <a:ext cx="1283369" cy="523220"/>
-          </a:xfrm>
-          <a:prstGeom prst="rect">
-            <a:avLst/>
-          </a:prstGeom>
-          <a:noFill/>
-        </p:spPr>
-        <p:txBody>
-          <a:bodyPr wrap="square" rtlCol="0">
-            <a:spAutoFit/>
-          </a:bodyPr>
-          <a:lstStyle/>
-          <a:p>
-            <a:pPr algn="ctr"/>
-            <a:r>
-              <a:rPr kumimoji="1" lang="en-US" altLang="zh-CN" sz="2800" dirty="0">
-                <a:latin typeface="Arial" panose="020B0604020202020204" pitchFamily="34" charset="0"/>
-                <a:cs typeface="Arial" panose="020B0604020202020204" pitchFamily="34" charset="0"/>
-              </a:rPr>
-              <a:t>4,756</a:t>
-            </a:r>
-            <a:endParaRPr kumimoji="1" lang="zh-CN" altLang="en-US" sz="2800" dirty="0">
-              <a:latin typeface="Arial" panose="020B0604020202020204" pitchFamily="34" charset="0"/>
-              <a:cs typeface="Arial" panose="020B0604020202020204" pitchFamily="34" charset="0"/>
-            </a:endParaRPr>
-          </a:p>
-        </p:txBody>
-      </p:sp>
       <p:pic>
         <p:nvPicPr>
-          <p:cNvPr id="36" name="图形 35">
-            <a:extLst>
-              <a:ext uri="{FF2B5EF4-FFF2-40B4-BE49-F238E27FC236}">
-                <a16:creationId xmlns:a16="http://schemas.microsoft.com/office/drawing/2014/main" id="{BE6EEB2A-6D3C-B8E7-8FEB-EF6837E75547}"/>
+          <p:cNvPr id="167" name="图形 166">
+            <a:extLst>
+              <a:ext uri="{FF2B5EF4-FFF2-40B4-BE49-F238E27FC236}">
+                <a16:creationId xmlns:a16="http://schemas.microsoft.com/office/drawing/2014/main" id="{0D9954E4-434D-6F30-D37C-24E071DBE551}"/>
               </a:ext>
             </a:extLst>
           </p:cNvPr>
@@ -8509,7 +7623,7 @@
           <a:blip>
             <a:extLst>
               <a:ext uri="{96DAC541-7B7A-43D3-8B79-37D633B846F1}">
-                <asvg:svgBlip xmlns:asvg="http://schemas.microsoft.com/office/drawing/2016/SVG/main" r:embed="rId3"/>
+                <asvg:svgBlip xmlns:asvg="http://schemas.microsoft.com/office/drawing/2016/SVG/main" r:embed="rId4"/>
               </a:ext>
             </a:extLst>
           </a:blip>
@@ -8519,8 +7633,8 @@
         </p:blipFill>
         <p:spPr>
           <a:xfrm>
-            <a:off x="15271176" y="13056230"/>
-            <a:ext cx="3606800" cy="3606800"/>
+            <a:off x="18198000" y="13187933"/>
+            <a:ext cx="5987862" cy="3671999"/>
           </a:xfrm>
           <a:prstGeom prst="rect">
             <a:avLst/>
@@ -8529,10 +7643,10 @@
       </p:pic>
       <p:pic>
         <p:nvPicPr>
-          <p:cNvPr id="38" name="图形 37">
-            <a:extLst>
-              <a:ext uri="{FF2B5EF4-FFF2-40B4-BE49-F238E27FC236}">
-                <a16:creationId xmlns:a16="http://schemas.microsoft.com/office/drawing/2014/main" id="{86979A50-2718-16F5-B974-B86990AA5730}"/>
+          <p:cNvPr id="169" name="图形 168">
+            <a:extLst>
+              <a:ext uri="{FF2B5EF4-FFF2-40B4-BE49-F238E27FC236}">
+                <a16:creationId xmlns:a16="http://schemas.microsoft.com/office/drawing/2014/main" id="{E972FC37-E479-E2B1-4F0D-2825EDB177EE}"/>
               </a:ext>
             </a:extLst>
           </p:cNvPr>
@@ -8545,7 +7659,7 @@
           <a:blip>
             <a:extLst>
               <a:ext uri="{96DAC541-7B7A-43D3-8B79-37D633B846F1}">
-                <asvg:svgBlip xmlns:asvg="http://schemas.microsoft.com/office/drawing/2016/SVG/main" r:embed="rId4"/>
+                <asvg:svgBlip xmlns:asvg="http://schemas.microsoft.com/office/drawing/2016/SVG/main" r:embed="rId5"/>
               </a:ext>
             </a:extLst>
           </a:blip>
@@ -8555,8 +7669,8 @@
         </p:blipFill>
         <p:spPr>
           <a:xfrm>
-            <a:off x="11565916" y="13056230"/>
-            <a:ext cx="3606800" cy="3606800"/>
+            <a:off x="7246800" y="17864333"/>
+            <a:ext cx="5987862" cy="3671999"/>
           </a:xfrm>
           <a:prstGeom prst="rect">
             <a:avLst/>
@@ -8565,10 +7679,10 @@
       </p:pic>
       <p:pic>
         <p:nvPicPr>
-          <p:cNvPr id="40" name="图形 39">
-            <a:extLst>
-              <a:ext uri="{FF2B5EF4-FFF2-40B4-BE49-F238E27FC236}">
-                <a16:creationId xmlns:a16="http://schemas.microsoft.com/office/drawing/2014/main" id="{84179F7E-4E72-288C-8084-B0E6E6F9943E}"/>
+          <p:cNvPr id="171" name="图形 170">
+            <a:extLst>
+              <a:ext uri="{FF2B5EF4-FFF2-40B4-BE49-F238E27FC236}">
+                <a16:creationId xmlns:a16="http://schemas.microsoft.com/office/drawing/2014/main" id="{69A29ECC-C4DB-5E9F-7A42-9DFED1791CC1}"/>
               </a:ext>
             </a:extLst>
           </p:cNvPr>
@@ -8581,7 +7695,7 @@
           <a:blip>
             <a:extLst>
               <a:ext uri="{96DAC541-7B7A-43D3-8B79-37D633B846F1}">
-                <asvg:svgBlip xmlns:asvg="http://schemas.microsoft.com/office/drawing/2016/SVG/main" r:embed="rId5"/>
+                <asvg:svgBlip xmlns:asvg="http://schemas.microsoft.com/office/drawing/2016/SVG/main" r:embed="rId6"/>
               </a:ext>
             </a:extLst>
           </a:blip>
@@ -8591,8 +7705,8 @@
         </p:blipFill>
         <p:spPr>
           <a:xfrm>
-            <a:off x="3975040" y="13009283"/>
-            <a:ext cx="3606800" cy="3606800"/>
+            <a:off x="18198000" y="17864333"/>
+            <a:ext cx="5946135" cy="3671999"/>
           </a:xfrm>
           <a:prstGeom prst="rect">
             <a:avLst/>
@@ -8601,10 +7715,10 @@
       </p:pic>
       <p:pic>
         <p:nvPicPr>
-          <p:cNvPr id="42" name="图形 41">
-            <a:extLst>
-              <a:ext uri="{FF2B5EF4-FFF2-40B4-BE49-F238E27FC236}">
-                <a16:creationId xmlns:a16="http://schemas.microsoft.com/office/drawing/2014/main" id="{0C6D7088-B6E0-7BEC-B6E3-AEB44ABF8D36}"/>
+          <p:cNvPr id="173" name="图形 172">
+            <a:extLst>
+              <a:ext uri="{FF2B5EF4-FFF2-40B4-BE49-F238E27FC236}">
+                <a16:creationId xmlns:a16="http://schemas.microsoft.com/office/drawing/2014/main" id="{612297E4-F5EF-E14B-490E-BAF051CA6349}"/>
               </a:ext>
             </a:extLst>
           </p:cNvPr>
@@ -8617,7 +7731,7 @@
           <a:blip>
             <a:extLst>
               <a:ext uri="{96DAC541-7B7A-43D3-8B79-37D633B846F1}">
-                <asvg:svgBlip xmlns:asvg="http://schemas.microsoft.com/office/drawing/2016/SVG/main" r:embed="rId6"/>
+                <asvg:svgBlip xmlns:asvg="http://schemas.microsoft.com/office/drawing/2016/SVG/main" r:embed="rId7"/>
               </a:ext>
             </a:extLst>
           </a:blip>
@@ -8627,8 +7741,8 @@
         </p:blipFill>
         <p:spPr>
           <a:xfrm>
-            <a:off x="7757680" y="13054404"/>
-            <a:ext cx="3606800" cy="3606800"/>
+            <a:off x="7246800" y="22627133"/>
+            <a:ext cx="6071317" cy="3671999"/>
           </a:xfrm>
           <a:prstGeom prst="rect">
             <a:avLst/>
@@ -8637,10 +7751,10 @@
       </p:pic>
       <p:pic>
         <p:nvPicPr>
-          <p:cNvPr id="44" name="图形 43">
-            <a:extLst>
-              <a:ext uri="{FF2B5EF4-FFF2-40B4-BE49-F238E27FC236}">
-                <a16:creationId xmlns:a16="http://schemas.microsoft.com/office/drawing/2014/main" id="{DC8C75C5-5136-B846-9301-A92352B5851E}"/>
+          <p:cNvPr id="175" name="图形 174">
+            <a:extLst>
+              <a:ext uri="{FF2B5EF4-FFF2-40B4-BE49-F238E27FC236}">
+                <a16:creationId xmlns:a16="http://schemas.microsoft.com/office/drawing/2014/main" id="{8ABAD078-CC29-6B42-A97E-30A669F2F67C}"/>
               </a:ext>
             </a:extLst>
           </p:cNvPr>
@@ -8653,7 +7767,7 @@
           <a:blip>
             <a:extLst>
               <a:ext uri="{96DAC541-7B7A-43D3-8B79-37D633B846F1}">
-                <asvg:svgBlip xmlns:asvg="http://schemas.microsoft.com/office/drawing/2016/SVG/main" r:embed="rId7"/>
+                <asvg:svgBlip xmlns:asvg="http://schemas.microsoft.com/office/drawing/2016/SVG/main" r:embed="rId8"/>
               </a:ext>
             </a:extLst>
           </a:blip>
@@ -8663,7 +7777,1049 @@
         </p:blipFill>
         <p:spPr>
           <a:xfrm>
-            <a:off x="18976436" y="13054404"/>
+            <a:off x="18198000" y="22627133"/>
+            <a:ext cx="6071317" cy="3671999"/>
+          </a:xfrm>
+          <a:prstGeom prst="rect">
+            <a:avLst/>
+          </a:prstGeom>
+        </p:spPr>
+      </p:pic>
+      <p:pic>
+        <p:nvPicPr>
+          <p:cNvPr id="3" name="图形 2">
+            <a:extLst>
+              <a:ext uri="{FF2B5EF4-FFF2-40B4-BE49-F238E27FC236}">
+                <a16:creationId xmlns:a16="http://schemas.microsoft.com/office/drawing/2014/main" id="{26B3A36F-7FED-AA2A-49BE-5CC9093A2015}"/>
+              </a:ext>
+            </a:extLst>
+          </p:cNvPr>
+          <p:cNvPicPr>
+            <a:picLocks noChangeAspect="1"/>
+          </p:cNvPicPr>
+          <p:nvPr/>
+        </p:nvPicPr>
+        <p:blipFill>
+          <a:blip>
+            <a:extLst>
+              <a:ext uri="{96DAC541-7B7A-43D3-8B79-37D633B846F1}">
+                <asvg:svgBlip xmlns:asvg="http://schemas.microsoft.com/office/drawing/2016/SVG/main" r:embed="rId9"/>
+              </a:ext>
+            </a:extLst>
+          </a:blip>
+          <a:stretch>
+            <a:fillRect/>
+          </a:stretch>
+        </p:blipFill>
+        <p:spPr>
+          <a:xfrm>
+            <a:off x="3211627" y="791328"/>
+            <a:ext cx="20880000" cy="11182922"/>
+          </a:xfrm>
+          <a:prstGeom prst="rect">
+            <a:avLst/>
+          </a:prstGeom>
+        </p:spPr>
+      </p:pic>
+      <p:sp>
+        <p:nvSpPr>
+          <p:cNvPr id="4" name="文本框 3">
+            <a:extLst>
+              <a:ext uri="{FF2B5EF4-FFF2-40B4-BE49-F238E27FC236}">
+                <a16:creationId xmlns:a16="http://schemas.microsoft.com/office/drawing/2014/main" id="{B9C61D78-2BD8-995E-1BAF-5146680CC60F}"/>
+              </a:ext>
+            </a:extLst>
+          </p:cNvPr>
+          <p:cNvSpPr txBox="1"/>
+          <p:nvPr/>
+        </p:nvSpPr>
+        <p:spPr>
+          <a:xfrm>
+            <a:off x="4687106" y="1280116"/>
+            <a:ext cx="2182669" cy="523220"/>
+          </a:xfrm>
+          <a:prstGeom prst="rect">
+            <a:avLst/>
+          </a:prstGeom>
+          <a:noFill/>
+        </p:spPr>
+        <p:txBody>
+          <a:bodyPr wrap="square" rtlCol="0">
+            <a:spAutoFit/>
+          </a:bodyPr>
+          <a:lstStyle/>
+          <a:p>
+            <a:r>
+              <a:rPr kumimoji="1" lang="en-US" altLang="zh-CN" sz="2800" dirty="0">
+                <a:latin typeface="Arial" panose="020B0604020202020204" pitchFamily="34" charset="0"/>
+                <a:cs typeface="Arial" panose="020B0604020202020204" pitchFamily="34" charset="0"/>
+              </a:rPr>
+              <a:t>Benign</a:t>
+            </a:r>
+            <a:endParaRPr kumimoji="1" lang="zh-CN" altLang="en-US" sz="2800" dirty="0">
+              <a:latin typeface="Arial" panose="020B0604020202020204" pitchFamily="34" charset="0"/>
+              <a:cs typeface="Arial" panose="020B0604020202020204" pitchFamily="34" charset="0"/>
+            </a:endParaRPr>
+          </a:p>
+        </p:txBody>
+      </p:sp>
+      <p:sp>
+        <p:nvSpPr>
+          <p:cNvPr id="5" name="文本框 4">
+            <a:extLst>
+              <a:ext uri="{FF2B5EF4-FFF2-40B4-BE49-F238E27FC236}">
+                <a16:creationId xmlns:a16="http://schemas.microsoft.com/office/drawing/2014/main" id="{3076C164-896A-EEE0-0B0A-FF3BA0A2F049}"/>
+              </a:ext>
+            </a:extLst>
+          </p:cNvPr>
+          <p:cNvSpPr txBox="1"/>
+          <p:nvPr/>
+        </p:nvSpPr>
+        <p:spPr>
+          <a:xfrm>
+            <a:off x="4687106" y="1789894"/>
+            <a:ext cx="2182669" cy="523220"/>
+          </a:xfrm>
+          <a:prstGeom prst="rect">
+            <a:avLst/>
+          </a:prstGeom>
+          <a:noFill/>
+        </p:spPr>
+        <p:txBody>
+          <a:bodyPr wrap="square" rtlCol="0">
+            <a:spAutoFit/>
+          </a:bodyPr>
+          <a:lstStyle/>
+          <a:p>
+            <a:r>
+              <a:rPr kumimoji="1" lang="en-US" altLang="zh-CN" sz="2800" dirty="0">
+                <a:latin typeface="Arial" panose="020B0604020202020204" pitchFamily="34" charset="0"/>
+                <a:cs typeface="Arial" panose="020B0604020202020204" pitchFamily="34" charset="0"/>
+              </a:rPr>
+              <a:t>Malignant</a:t>
+            </a:r>
+          </a:p>
+        </p:txBody>
+      </p:sp>
+      <p:sp>
+        <p:nvSpPr>
+          <p:cNvPr id="7" name="文本框 6">
+            <a:extLst>
+              <a:ext uri="{FF2B5EF4-FFF2-40B4-BE49-F238E27FC236}">
+                <a16:creationId xmlns:a16="http://schemas.microsoft.com/office/drawing/2014/main" id="{C3949334-2C39-A4BC-3619-85632EBBBAA7}"/>
+              </a:ext>
+            </a:extLst>
+          </p:cNvPr>
+          <p:cNvSpPr txBox="1"/>
+          <p:nvPr/>
+        </p:nvSpPr>
+        <p:spPr>
+          <a:xfrm>
+            <a:off x="20096994" y="3617374"/>
+            <a:ext cx="1283369" cy="523220"/>
+          </a:xfrm>
+          <a:prstGeom prst="rect">
+            <a:avLst/>
+          </a:prstGeom>
+          <a:noFill/>
+        </p:spPr>
+        <p:txBody>
+          <a:bodyPr wrap="square" rtlCol="0">
+            <a:spAutoFit/>
+          </a:bodyPr>
+          <a:lstStyle/>
+          <a:p>
+            <a:pPr algn="ctr"/>
+            <a:r>
+              <a:rPr kumimoji="1" lang="en-US" altLang="zh-CN" sz="2800" dirty="0">
+                <a:latin typeface="Arial" panose="020B0604020202020204" pitchFamily="34" charset="0"/>
+                <a:cs typeface="Arial" panose="020B0604020202020204" pitchFamily="34" charset="0"/>
+              </a:rPr>
+              <a:t>3,202</a:t>
+            </a:r>
+            <a:endParaRPr kumimoji="1" lang="zh-CN" altLang="en-US" sz="2800" dirty="0">
+              <a:latin typeface="Arial" panose="020B0604020202020204" pitchFamily="34" charset="0"/>
+              <a:cs typeface="Arial" panose="020B0604020202020204" pitchFamily="34" charset="0"/>
+            </a:endParaRPr>
+          </a:p>
+        </p:txBody>
+      </p:sp>
+      <p:sp>
+        <p:nvSpPr>
+          <p:cNvPr id="8" name="文本框 7">
+            <a:extLst>
+              <a:ext uri="{FF2B5EF4-FFF2-40B4-BE49-F238E27FC236}">
+                <a16:creationId xmlns:a16="http://schemas.microsoft.com/office/drawing/2014/main" id="{BA471242-39F4-9E35-6EBE-5F9A76811557}"/>
+              </a:ext>
+            </a:extLst>
+          </p:cNvPr>
+          <p:cNvSpPr txBox="1"/>
+          <p:nvPr/>
+        </p:nvSpPr>
+        <p:spPr>
+          <a:xfrm>
+            <a:off x="16288897" y="7081772"/>
+            <a:ext cx="1283369" cy="523220"/>
+          </a:xfrm>
+          <a:prstGeom prst="rect">
+            <a:avLst/>
+          </a:prstGeom>
+          <a:noFill/>
+        </p:spPr>
+        <p:txBody>
+          <a:bodyPr wrap="square" rtlCol="0">
+            <a:spAutoFit/>
+          </a:bodyPr>
+          <a:lstStyle/>
+          <a:p>
+            <a:pPr algn="ctr"/>
+            <a:r>
+              <a:rPr kumimoji="1" lang="en-US" altLang="zh-CN" sz="2800" dirty="0">
+                <a:latin typeface="Arial" panose="020B0604020202020204" pitchFamily="34" charset="0"/>
+                <a:cs typeface="Arial" panose="020B0604020202020204" pitchFamily="34" charset="0"/>
+              </a:rPr>
+              <a:t>304</a:t>
+            </a:r>
+            <a:endParaRPr kumimoji="1" lang="zh-CN" altLang="en-US" sz="2800" dirty="0">
+              <a:latin typeface="Arial" panose="020B0604020202020204" pitchFamily="34" charset="0"/>
+              <a:cs typeface="Arial" panose="020B0604020202020204" pitchFamily="34" charset="0"/>
+            </a:endParaRPr>
+          </a:p>
+        </p:txBody>
+      </p:sp>
+      <p:sp>
+        <p:nvSpPr>
+          <p:cNvPr id="9" name="文本框 8">
+            <a:extLst>
+              <a:ext uri="{FF2B5EF4-FFF2-40B4-BE49-F238E27FC236}">
+                <a16:creationId xmlns:a16="http://schemas.microsoft.com/office/drawing/2014/main" id="{376B2C5D-DBD7-C0F8-EC31-253AB2EA7933}"/>
+              </a:ext>
+            </a:extLst>
+          </p:cNvPr>
+          <p:cNvSpPr txBox="1"/>
+          <p:nvPr/>
+        </p:nvSpPr>
+        <p:spPr>
+          <a:xfrm>
+            <a:off x="17596785" y="10026604"/>
+            <a:ext cx="1283369" cy="523220"/>
+          </a:xfrm>
+          <a:prstGeom prst="rect">
+            <a:avLst/>
+          </a:prstGeom>
+          <a:noFill/>
+        </p:spPr>
+        <p:txBody>
+          <a:bodyPr wrap="square" rtlCol="0">
+            <a:spAutoFit/>
+          </a:bodyPr>
+          <a:lstStyle/>
+          <a:p>
+            <a:pPr algn="ctr"/>
+            <a:r>
+              <a:rPr kumimoji="1" lang="en-US" altLang="zh-CN" sz="2800" dirty="0">
+                <a:latin typeface="Arial" panose="020B0604020202020204" pitchFamily="34" charset="0"/>
+                <a:cs typeface="Arial" panose="020B0604020202020204" pitchFamily="34" charset="0"/>
+              </a:rPr>
+              <a:t>45</a:t>
+            </a:r>
+            <a:endParaRPr kumimoji="1" lang="zh-CN" altLang="en-US" sz="2800" dirty="0">
+              <a:latin typeface="Arial" panose="020B0604020202020204" pitchFamily="34" charset="0"/>
+              <a:cs typeface="Arial" panose="020B0604020202020204" pitchFamily="34" charset="0"/>
+            </a:endParaRPr>
+          </a:p>
+        </p:txBody>
+      </p:sp>
+      <p:sp>
+        <p:nvSpPr>
+          <p:cNvPr id="10" name="文本框 9">
+            <a:extLst>
+              <a:ext uri="{FF2B5EF4-FFF2-40B4-BE49-F238E27FC236}">
+                <a16:creationId xmlns:a16="http://schemas.microsoft.com/office/drawing/2014/main" id="{6B19436A-FCEF-4366-693F-29F13ADA77C9}"/>
+              </a:ext>
+            </a:extLst>
+          </p:cNvPr>
+          <p:cNvSpPr txBox="1"/>
+          <p:nvPr/>
+        </p:nvSpPr>
+        <p:spPr>
+          <a:xfrm>
+            <a:off x="13716118" y="3476588"/>
+            <a:ext cx="1283369" cy="523220"/>
+          </a:xfrm>
+          <a:prstGeom prst="rect">
+            <a:avLst/>
+          </a:prstGeom>
+          <a:noFill/>
+        </p:spPr>
+        <p:txBody>
+          <a:bodyPr wrap="square" rtlCol="0">
+            <a:spAutoFit/>
+          </a:bodyPr>
+          <a:lstStyle/>
+          <a:p>
+            <a:pPr algn="ctr"/>
+            <a:r>
+              <a:rPr kumimoji="1" lang="en-US" altLang="zh-CN" sz="2800" dirty="0">
+                <a:latin typeface="Arial" panose="020B0604020202020204" pitchFamily="34" charset="0"/>
+                <a:cs typeface="Arial" panose="020B0604020202020204" pitchFamily="34" charset="0"/>
+              </a:rPr>
+              <a:t>3,459</a:t>
+            </a:r>
+            <a:endParaRPr kumimoji="1" lang="zh-CN" altLang="en-US" sz="2800" dirty="0">
+              <a:latin typeface="Arial" panose="020B0604020202020204" pitchFamily="34" charset="0"/>
+              <a:cs typeface="Arial" panose="020B0604020202020204" pitchFamily="34" charset="0"/>
+            </a:endParaRPr>
+          </a:p>
+        </p:txBody>
+      </p:sp>
+      <p:sp>
+        <p:nvSpPr>
+          <p:cNvPr id="11" name="文本框 10">
+            <a:extLst>
+              <a:ext uri="{FF2B5EF4-FFF2-40B4-BE49-F238E27FC236}">
+                <a16:creationId xmlns:a16="http://schemas.microsoft.com/office/drawing/2014/main" id="{87E3DE10-5352-02A3-C052-0B64D1265787}"/>
+              </a:ext>
+            </a:extLst>
+          </p:cNvPr>
+          <p:cNvSpPr txBox="1"/>
+          <p:nvPr/>
+        </p:nvSpPr>
+        <p:spPr>
+          <a:xfrm>
+            <a:off x="12324202" y="2194510"/>
+            <a:ext cx="1283369" cy="523220"/>
+          </a:xfrm>
+          <a:prstGeom prst="rect">
+            <a:avLst/>
+          </a:prstGeom>
+          <a:noFill/>
+        </p:spPr>
+        <p:txBody>
+          <a:bodyPr wrap="square" rtlCol="0">
+            <a:spAutoFit/>
+          </a:bodyPr>
+          <a:lstStyle/>
+          <a:p>
+            <a:pPr algn="ctr"/>
+            <a:r>
+              <a:rPr kumimoji="1" lang="en-US" altLang="zh-CN" sz="2800" dirty="0">
+                <a:latin typeface="Arial" panose="020B0604020202020204" pitchFamily="34" charset="0"/>
+                <a:cs typeface="Arial" panose="020B0604020202020204" pitchFamily="34" charset="0"/>
+              </a:rPr>
+              <a:t>8,172</a:t>
+            </a:r>
+            <a:endParaRPr kumimoji="1" lang="zh-CN" altLang="en-US" sz="2800" dirty="0">
+              <a:latin typeface="Arial" panose="020B0604020202020204" pitchFamily="34" charset="0"/>
+              <a:cs typeface="Arial" panose="020B0604020202020204" pitchFamily="34" charset="0"/>
+            </a:endParaRPr>
+          </a:p>
+        </p:txBody>
+      </p:sp>
+      <p:sp>
+        <p:nvSpPr>
+          <p:cNvPr id="12" name="文本框 11">
+            <a:extLst>
+              <a:ext uri="{FF2B5EF4-FFF2-40B4-BE49-F238E27FC236}">
+                <a16:creationId xmlns:a16="http://schemas.microsoft.com/office/drawing/2014/main" id="{F922BECA-4DEA-CB07-E305-78FE583A5CA2}"/>
+              </a:ext>
+            </a:extLst>
+          </p:cNvPr>
+          <p:cNvSpPr txBox="1"/>
+          <p:nvPr/>
+        </p:nvSpPr>
+        <p:spPr>
+          <a:xfrm>
+            <a:off x="9877956" y="3491605"/>
+            <a:ext cx="1283369" cy="523220"/>
+          </a:xfrm>
+          <a:prstGeom prst="rect">
+            <a:avLst/>
+          </a:prstGeom>
+          <a:noFill/>
+        </p:spPr>
+        <p:txBody>
+          <a:bodyPr wrap="square" rtlCol="0">
+            <a:spAutoFit/>
+          </a:bodyPr>
+          <a:lstStyle/>
+          <a:p>
+            <a:pPr algn="ctr"/>
+            <a:r>
+              <a:rPr kumimoji="1" lang="en-US" altLang="zh-CN" sz="2800" dirty="0">
+                <a:latin typeface="Arial" panose="020B0604020202020204" pitchFamily="34" charset="0"/>
+                <a:cs typeface="Arial" panose="020B0604020202020204" pitchFamily="34" charset="0"/>
+              </a:rPr>
+              <a:t>3,574</a:t>
+            </a:r>
+            <a:endParaRPr kumimoji="1" lang="zh-CN" altLang="en-US" sz="2800" dirty="0">
+              <a:latin typeface="Arial" panose="020B0604020202020204" pitchFamily="34" charset="0"/>
+              <a:cs typeface="Arial" panose="020B0604020202020204" pitchFamily="34" charset="0"/>
+            </a:endParaRPr>
+          </a:p>
+        </p:txBody>
+      </p:sp>
+      <p:sp>
+        <p:nvSpPr>
+          <p:cNvPr id="13" name="文本框 12">
+            <a:extLst>
+              <a:ext uri="{FF2B5EF4-FFF2-40B4-BE49-F238E27FC236}">
+                <a16:creationId xmlns:a16="http://schemas.microsoft.com/office/drawing/2014/main" id="{639B900F-1A3A-9AD2-ADC9-3499F0349825}"/>
+              </a:ext>
+            </a:extLst>
+          </p:cNvPr>
+          <p:cNvSpPr txBox="1"/>
+          <p:nvPr/>
+        </p:nvSpPr>
+        <p:spPr>
+          <a:xfrm>
+            <a:off x="8460848" y="4833143"/>
+            <a:ext cx="1283369" cy="523220"/>
+          </a:xfrm>
+          <a:prstGeom prst="rect">
+            <a:avLst/>
+          </a:prstGeom>
+          <a:noFill/>
+        </p:spPr>
+        <p:txBody>
+          <a:bodyPr wrap="square" rtlCol="0">
+            <a:spAutoFit/>
+          </a:bodyPr>
+          <a:lstStyle/>
+          <a:p>
+            <a:pPr algn="ctr"/>
+            <a:r>
+              <a:rPr kumimoji="1" lang="en-US" altLang="zh-CN" sz="2800" dirty="0">
+                <a:latin typeface="Arial" panose="020B0604020202020204" pitchFamily="34" charset="0"/>
+                <a:cs typeface="Arial" panose="020B0604020202020204" pitchFamily="34" charset="0"/>
+              </a:rPr>
+              <a:t>1,426</a:t>
+            </a:r>
+            <a:endParaRPr kumimoji="1" lang="zh-CN" altLang="en-US" sz="2800" dirty="0">
+              <a:latin typeface="Arial" panose="020B0604020202020204" pitchFamily="34" charset="0"/>
+              <a:cs typeface="Arial" panose="020B0604020202020204" pitchFamily="34" charset="0"/>
+            </a:endParaRPr>
+          </a:p>
+        </p:txBody>
+      </p:sp>
+      <p:sp>
+        <p:nvSpPr>
+          <p:cNvPr id="14" name="文本框 13">
+            <a:extLst>
+              <a:ext uri="{FF2B5EF4-FFF2-40B4-BE49-F238E27FC236}">
+                <a16:creationId xmlns:a16="http://schemas.microsoft.com/office/drawing/2014/main" id="{3FDB9D25-7073-6ACC-8F3A-ECD365EDDE0A}"/>
+              </a:ext>
+            </a:extLst>
+          </p:cNvPr>
+          <p:cNvSpPr txBox="1"/>
+          <p:nvPr/>
+        </p:nvSpPr>
+        <p:spPr>
+          <a:xfrm>
+            <a:off x="5830680" y="3878984"/>
+            <a:ext cx="1283369" cy="523220"/>
+          </a:xfrm>
+          <a:prstGeom prst="rect">
+            <a:avLst/>
+          </a:prstGeom>
+          <a:noFill/>
+        </p:spPr>
+        <p:txBody>
+          <a:bodyPr wrap="square" rtlCol="0">
+            <a:spAutoFit/>
+          </a:bodyPr>
+          <a:lstStyle/>
+          <a:p>
+            <a:pPr algn="ctr"/>
+            <a:r>
+              <a:rPr kumimoji="1" lang="en-US" altLang="zh-CN" sz="2800" dirty="0">
+                <a:latin typeface="Arial" panose="020B0604020202020204" pitchFamily="34" charset="0"/>
+                <a:cs typeface="Arial" panose="020B0604020202020204" pitchFamily="34" charset="0"/>
+              </a:rPr>
+              <a:t>2,638</a:t>
+            </a:r>
+            <a:endParaRPr kumimoji="1" lang="zh-CN" altLang="en-US" sz="2800" dirty="0">
+              <a:latin typeface="Arial" panose="020B0604020202020204" pitchFamily="34" charset="0"/>
+              <a:cs typeface="Arial" panose="020B0604020202020204" pitchFamily="34" charset="0"/>
+            </a:endParaRPr>
+          </a:p>
+        </p:txBody>
+      </p:sp>
+      <p:sp>
+        <p:nvSpPr>
+          <p:cNvPr id="15" name="文本框 14">
+            <a:extLst>
+              <a:ext uri="{FF2B5EF4-FFF2-40B4-BE49-F238E27FC236}">
+                <a16:creationId xmlns:a16="http://schemas.microsoft.com/office/drawing/2014/main" id="{0F2AFDF2-FA71-94BA-9613-2882696EE939}"/>
+              </a:ext>
+            </a:extLst>
+          </p:cNvPr>
+          <p:cNvSpPr txBox="1"/>
+          <p:nvPr/>
+        </p:nvSpPr>
+        <p:spPr>
+          <a:xfrm>
+            <a:off x="4619760" y="3827773"/>
+            <a:ext cx="1283369" cy="523220"/>
+          </a:xfrm>
+          <a:prstGeom prst="rect">
+            <a:avLst/>
+          </a:prstGeom>
+          <a:noFill/>
+        </p:spPr>
+        <p:txBody>
+          <a:bodyPr wrap="square" rtlCol="0">
+            <a:spAutoFit/>
+          </a:bodyPr>
+          <a:lstStyle/>
+          <a:p>
+            <a:pPr algn="ctr"/>
+            <a:r>
+              <a:rPr kumimoji="1" lang="en-US" altLang="zh-CN" sz="2800" dirty="0">
+                <a:latin typeface="Arial" panose="020B0604020202020204" pitchFamily="34" charset="0"/>
+                <a:cs typeface="Arial" panose="020B0604020202020204" pitchFamily="34" charset="0"/>
+              </a:rPr>
+              <a:t>2,709</a:t>
+            </a:r>
+            <a:endParaRPr kumimoji="1" lang="zh-CN" altLang="en-US" sz="2800" dirty="0">
+              <a:latin typeface="Arial" panose="020B0604020202020204" pitchFamily="34" charset="0"/>
+              <a:cs typeface="Arial" panose="020B0604020202020204" pitchFamily="34" charset="0"/>
+            </a:endParaRPr>
+          </a:p>
+        </p:txBody>
+      </p:sp>
+      <p:sp>
+        <p:nvSpPr>
+          <p:cNvPr id="17" name="文本框 16">
+            <a:extLst>
+              <a:ext uri="{FF2B5EF4-FFF2-40B4-BE49-F238E27FC236}">
+                <a16:creationId xmlns:a16="http://schemas.microsoft.com/office/drawing/2014/main" id="{3665BFF3-D880-1C8E-F2A8-EDF17CA51057}"/>
+              </a:ext>
+            </a:extLst>
+          </p:cNvPr>
+          <p:cNvSpPr txBox="1"/>
+          <p:nvPr/>
+        </p:nvSpPr>
+        <p:spPr>
+          <a:xfrm>
+            <a:off x="4569991" y="11642400"/>
+            <a:ext cx="2582780" cy="584775"/>
+          </a:xfrm>
+          <a:prstGeom prst="rect">
+            <a:avLst/>
+          </a:prstGeom>
+          <a:noFill/>
+        </p:spPr>
+        <p:txBody>
+          <a:bodyPr wrap="square" rtlCol="0">
+            <a:spAutoFit/>
+          </a:bodyPr>
+          <a:lstStyle/>
+          <a:p>
+            <a:pPr algn="ctr"/>
+            <a:r>
+              <a:rPr kumimoji="1" lang="en-US" altLang="zh-CN" sz="3200" dirty="0">
+                <a:latin typeface="Arial" panose="020B0604020202020204" pitchFamily="34" charset="0"/>
+                <a:cs typeface="Arial" panose="020B0604020202020204" pitchFamily="34" charset="0"/>
+              </a:rPr>
+              <a:t>TN3K</a:t>
+            </a:r>
+          </a:p>
+        </p:txBody>
+      </p:sp>
+      <p:sp>
+        <p:nvSpPr>
+          <p:cNvPr id="18" name="文本框 17">
+            <a:extLst>
+              <a:ext uri="{FF2B5EF4-FFF2-40B4-BE49-F238E27FC236}">
+                <a16:creationId xmlns:a16="http://schemas.microsoft.com/office/drawing/2014/main" id="{5137A78C-8D4D-7A90-5F39-F3F1E0CE5C8D}"/>
+              </a:ext>
+            </a:extLst>
+          </p:cNvPr>
+          <p:cNvSpPr txBox="1"/>
+          <p:nvPr/>
+        </p:nvSpPr>
+        <p:spPr>
+          <a:xfrm>
+            <a:off x="8460848" y="11642400"/>
+            <a:ext cx="2582780" cy="584775"/>
+          </a:xfrm>
+          <a:prstGeom prst="rect">
+            <a:avLst/>
+          </a:prstGeom>
+          <a:noFill/>
+        </p:spPr>
+        <p:txBody>
+          <a:bodyPr wrap="square" rtlCol="0">
+            <a:spAutoFit/>
+          </a:bodyPr>
+          <a:lstStyle/>
+          <a:p>
+            <a:pPr algn="ctr"/>
+            <a:r>
+              <a:rPr kumimoji="1" lang="en-US" altLang="zh-CN" sz="3200" dirty="0">
+                <a:latin typeface="Arial" panose="020B0604020202020204" pitchFamily="34" charset="0"/>
+                <a:cs typeface="Arial" panose="020B0604020202020204" pitchFamily="34" charset="0"/>
+              </a:rPr>
+              <a:t>TN5K</a:t>
+            </a:r>
+          </a:p>
+        </p:txBody>
+      </p:sp>
+      <p:sp>
+        <p:nvSpPr>
+          <p:cNvPr id="19" name="文本框 18">
+            <a:extLst>
+              <a:ext uri="{FF2B5EF4-FFF2-40B4-BE49-F238E27FC236}">
+                <a16:creationId xmlns:a16="http://schemas.microsoft.com/office/drawing/2014/main" id="{50E1005D-F42A-5943-10B4-51392AC89D9C}"/>
+              </a:ext>
+            </a:extLst>
+          </p:cNvPr>
+          <p:cNvSpPr txBox="1"/>
+          <p:nvPr/>
+        </p:nvSpPr>
+        <p:spPr>
+          <a:xfrm>
+            <a:off x="12406668" y="11642400"/>
+            <a:ext cx="2582780" cy="584775"/>
+          </a:xfrm>
+          <a:prstGeom prst="rect">
+            <a:avLst/>
+          </a:prstGeom>
+          <a:noFill/>
+        </p:spPr>
+        <p:txBody>
+          <a:bodyPr wrap="square" rtlCol="0">
+            <a:spAutoFit/>
+          </a:bodyPr>
+          <a:lstStyle/>
+          <a:p>
+            <a:pPr algn="ctr"/>
+            <a:r>
+              <a:rPr kumimoji="1" lang="en-US" altLang="zh-CN" sz="3200" dirty="0" err="1">
+                <a:latin typeface="Arial" panose="020B0604020202020204" pitchFamily="34" charset="0"/>
+                <a:cs typeface="Arial" panose="020B0604020202020204" pitchFamily="34" charset="0"/>
+              </a:rPr>
+              <a:t>ThyroidXL</a:t>
+            </a:r>
+            <a:endParaRPr kumimoji="1" lang="en-US" altLang="zh-CN" sz="3200" dirty="0">
+              <a:latin typeface="Arial" panose="020B0604020202020204" pitchFamily="34" charset="0"/>
+              <a:cs typeface="Arial" panose="020B0604020202020204" pitchFamily="34" charset="0"/>
+            </a:endParaRPr>
+          </a:p>
+        </p:txBody>
+      </p:sp>
+      <p:sp>
+        <p:nvSpPr>
+          <p:cNvPr id="20" name="文本框 19">
+            <a:extLst>
+              <a:ext uri="{FF2B5EF4-FFF2-40B4-BE49-F238E27FC236}">
+                <a16:creationId xmlns:a16="http://schemas.microsoft.com/office/drawing/2014/main" id="{BC7DC142-CAB1-8C6C-319D-9579F2C70590}"/>
+              </a:ext>
+            </a:extLst>
+          </p:cNvPr>
+          <p:cNvSpPr txBox="1"/>
+          <p:nvPr/>
+        </p:nvSpPr>
+        <p:spPr>
+          <a:xfrm>
+            <a:off x="16347812" y="11642400"/>
+            <a:ext cx="2582780" cy="584775"/>
+          </a:xfrm>
+          <a:prstGeom prst="rect">
+            <a:avLst/>
+          </a:prstGeom>
+          <a:noFill/>
+        </p:spPr>
+        <p:txBody>
+          <a:bodyPr wrap="square" rtlCol="0">
+            <a:spAutoFit/>
+          </a:bodyPr>
+          <a:lstStyle/>
+          <a:p>
+            <a:pPr algn="ctr"/>
+            <a:r>
+              <a:rPr kumimoji="1" lang="en-US" altLang="zh-CN" sz="3200" dirty="0">
+                <a:latin typeface="Arial" panose="020B0604020202020204" pitchFamily="34" charset="0"/>
+                <a:cs typeface="Arial" panose="020B0604020202020204" pitchFamily="34" charset="0"/>
+              </a:rPr>
+              <a:t>DDTI</a:t>
+            </a:r>
+          </a:p>
+        </p:txBody>
+      </p:sp>
+      <p:sp>
+        <p:nvSpPr>
+          <p:cNvPr id="21" name="文本框 20">
+            <a:extLst>
+              <a:ext uri="{FF2B5EF4-FFF2-40B4-BE49-F238E27FC236}">
+                <a16:creationId xmlns:a16="http://schemas.microsoft.com/office/drawing/2014/main" id="{727E6C83-27E5-44DC-9977-5E3132595CDA}"/>
+              </a:ext>
+            </a:extLst>
+          </p:cNvPr>
+          <p:cNvSpPr txBox="1"/>
+          <p:nvPr/>
+        </p:nvSpPr>
+        <p:spPr>
+          <a:xfrm>
+            <a:off x="20238669" y="11642400"/>
+            <a:ext cx="2582780" cy="584775"/>
+          </a:xfrm>
+          <a:prstGeom prst="rect">
+            <a:avLst/>
+          </a:prstGeom>
+          <a:noFill/>
+        </p:spPr>
+        <p:txBody>
+          <a:bodyPr wrap="square" rtlCol="0">
+            <a:spAutoFit/>
+          </a:bodyPr>
+          <a:lstStyle/>
+          <a:p>
+            <a:pPr algn="ctr"/>
+            <a:r>
+              <a:rPr kumimoji="1" lang="en-US" altLang="zh-CN" sz="3200" dirty="0">
+                <a:latin typeface="Arial" panose="020B0604020202020204" pitchFamily="34" charset="0"/>
+                <a:cs typeface="Arial" panose="020B0604020202020204" pitchFamily="34" charset="0"/>
+              </a:rPr>
+              <a:t>ZJH-8K</a:t>
+            </a:r>
+          </a:p>
+        </p:txBody>
+      </p:sp>
+      <p:sp>
+        <p:nvSpPr>
+          <p:cNvPr id="22" name="文本框 21">
+            <a:extLst>
+              <a:ext uri="{FF2B5EF4-FFF2-40B4-BE49-F238E27FC236}">
+                <a16:creationId xmlns:a16="http://schemas.microsoft.com/office/drawing/2014/main" id="{EA81A3CB-D338-BBB8-0DEA-CA5A5A2F3F58}"/>
+              </a:ext>
+            </a:extLst>
+          </p:cNvPr>
+          <p:cNvSpPr txBox="1"/>
+          <p:nvPr/>
+        </p:nvSpPr>
+        <p:spPr>
+          <a:xfrm>
+            <a:off x="9186213" y="12093375"/>
+            <a:ext cx="8930828" cy="707886"/>
+          </a:xfrm>
+          <a:prstGeom prst="rect">
+            <a:avLst/>
+          </a:prstGeom>
+          <a:noFill/>
+        </p:spPr>
+        <p:txBody>
+          <a:bodyPr wrap="square" rtlCol="0">
+            <a:spAutoFit/>
+          </a:bodyPr>
+          <a:lstStyle/>
+          <a:p>
+            <a:pPr algn="ctr"/>
+            <a:r>
+              <a:rPr kumimoji="1" lang="en-US" altLang="zh-CN" sz="4000" dirty="0">
+                <a:latin typeface="Arial" panose="020B0604020202020204" pitchFamily="34" charset="0"/>
+                <a:cs typeface="Arial" panose="020B0604020202020204" pitchFamily="34" charset="0"/>
+              </a:rPr>
+              <a:t>Dataset</a:t>
+            </a:r>
+            <a:endParaRPr kumimoji="1" lang="zh-CN" altLang="en-US" sz="4000" dirty="0">
+              <a:latin typeface="Arial" panose="020B0604020202020204" pitchFamily="34" charset="0"/>
+              <a:cs typeface="Arial" panose="020B0604020202020204" pitchFamily="34" charset="0"/>
+            </a:endParaRPr>
+          </a:p>
+        </p:txBody>
+      </p:sp>
+      <p:sp>
+        <p:nvSpPr>
+          <p:cNvPr id="23" name="文本框 22">
+            <a:extLst>
+              <a:ext uri="{FF2B5EF4-FFF2-40B4-BE49-F238E27FC236}">
+                <a16:creationId xmlns:a16="http://schemas.microsoft.com/office/drawing/2014/main" id="{5530AE19-4BB4-23EE-EF79-4297C6EDF5F6}"/>
+              </a:ext>
+            </a:extLst>
+          </p:cNvPr>
+          <p:cNvSpPr txBox="1"/>
+          <p:nvPr/>
+        </p:nvSpPr>
+        <p:spPr>
+          <a:xfrm>
+            <a:off x="2658432" y="2237688"/>
+            <a:ext cx="1080000" cy="646331"/>
+          </a:xfrm>
+          <a:prstGeom prst="rect">
+            <a:avLst/>
+          </a:prstGeom>
+          <a:noFill/>
+        </p:spPr>
+        <p:txBody>
+          <a:bodyPr wrap="square" rtlCol="0">
+            <a:spAutoFit/>
+          </a:bodyPr>
+          <a:lstStyle/>
+          <a:p>
+            <a:r>
+              <a:rPr kumimoji="1" lang="en-US" altLang="zh-CN" sz="3600" dirty="0">
+                <a:latin typeface="Arial" panose="020B0604020202020204" pitchFamily="34" charset="0"/>
+                <a:cs typeface="Arial" panose="020B0604020202020204" pitchFamily="34" charset="0"/>
+              </a:rPr>
+              <a:t>10</a:t>
+            </a:r>
+            <a:r>
+              <a:rPr kumimoji="1" lang="en-US" altLang="zh-CN" sz="3600" baseline="30000" dirty="0">
+                <a:latin typeface="Arial" panose="020B0604020202020204" pitchFamily="34" charset="0"/>
+                <a:cs typeface="Arial" panose="020B0604020202020204" pitchFamily="34" charset="0"/>
+              </a:rPr>
+              <a:t>4</a:t>
+            </a:r>
+            <a:endParaRPr kumimoji="1" lang="zh-CN" altLang="en-US" sz="3600" dirty="0">
+              <a:latin typeface="Arial" panose="020B0604020202020204" pitchFamily="34" charset="0"/>
+              <a:cs typeface="Arial" panose="020B0604020202020204" pitchFamily="34" charset="0"/>
+            </a:endParaRPr>
+          </a:p>
+        </p:txBody>
+      </p:sp>
+      <p:sp>
+        <p:nvSpPr>
+          <p:cNvPr id="24" name="文本框 23">
+            <a:extLst>
+              <a:ext uri="{FF2B5EF4-FFF2-40B4-BE49-F238E27FC236}">
+                <a16:creationId xmlns:a16="http://schemas.microsoft.com/office/drawing/2014/main" id="{865586DB-A7C8-452F-5F40-F25D879A89FF}"/>
+              </a:ext>
+            </a:extLst>
+          </p:cNvPr>
+          <p:cNvSpPr txBox="1"/>
+          <p:nvPr/>
+        </p:nvSpPr>
+        <p:spPr>
+          <a:xfrm>
+            <a:off x="2610455" y="5623344"/>
+            <a:ext cx="1080000" cy="646331"/>
+          </a:xfrm>
+          <a:prstGeom prst="rect">
+            <a:avLst/>
+          </a:prstGeom>
+          <a:noFill/>
+        </p:spPr>
+        <p:txBody>
+          <a:bodyPr wrap="square" rtlCol="0">
+            <a:spAutoFit/>
+          </a:bodyPr>
+          <a:lstStyle/>
+          <a:p>
+            <a:r>
+              <a:rPr kumimoji="1" lang="en-US" altLang="zh-CN" sz="3600" dirty="0">
+                <a:latin typeface="Arial" panose="020B0604020202020204" pitchFamily="34" charset="0"/>
+                <a:cs typeface="Arial" panose="020B0604020202020204" pitchFamily="34" charset="0"/>
+              </a:rPr>
+              <a:t>10</a:t>
+            </a:r>
+            <a:r>
+              <a:rPr kumimoji="1" lang="en-US" altLang="zh-CN" sz="3600" baseline="30000" dirty="0">
+                <a:latin typeface="Arial" panose="020B0604020202020204" pitchFamily="34" charset="0"/>
+                <a:cs typeface="Arial" panose="020B0604020202020204" pitchFamily="34" charset="0"/>
+              </a:rPr>
+              <a:t>3</a:t>
+            </a:r>
+            <a:endParaRPr kumimoji="1" lang="zh-CN" altLang="en-US" sz="3600" dirty="0">
+              <a:latin typeface="Arial" panose="020B0604020202020204" pitchFamily="34" charset="0"/>
+              <a:cs typeface="Arial" panose="020B0604020202020204" pitchFamily="34" charset="0"/>
+            </a:endParaRPr>
+          </a:p>
+        </p:txBody>
+      </p:sp>
+      <p:sp>
+        <p:nvSpPr>
+          <p:cNvPr id="25" name="文本框 24">
+            <a:extLst>
+              <a:ext uri="{FF2B5EF4-FFF2-40B4-BE49-F238E27FC236}">
+                <a16:creationId xmlns:a16="http://schemas.microsoft.com/office/drawing/2014/main" id="{5CE07596-8E64-D701-7164-F54A93C71E72}"/>
+              </a:ext>
+            </a:extLst>
+          </p:cNvPr>
+          <p:cNvSpPr txBox="1"/>
+          <p:nvPr/>
+        </p:nvSpPr>
+        <p:spPr>
+          <a:xfrm>
+            <a:off x="2658432" y="8922367"/>
+            <a:ext cx="1080000" cy="646331"/>
+          </a:xfrm>
+          <a:prstGeom prst="rect">
+            <a:avLst/>
+          </a:prstGeom>
+          <a:noFill/>
+        </p:spPr>
+        <p:txBody>
+          <a:bodyPr wrap="square" rtlCol="0">
+            <a:spAutoFit/>
+          </a:bodyPr>
+          <a:lstStyle/>
+          <a:p>
+            <a:r>
+              <a:rPr kumimoji="1" lang="en-US" altLang="zh-CN" sz="3600" dirty="0">
+                <a:latin typeface="Arial" panose="020B0604020202020204" pitchFamily="34" charset="0"/>
+                <a:cs typeface="Arial" panose="020B0604020202020204" pitchFamily="34" charset="0"/>
+              </a:rPr>
+              <a:t>10</a:t>
+            </a:r>
+            <a:r>
+              <a:rPr kumimoji="1" lang="en-US" altLang="zh-CN" sz="3600" baseline="30000" dirty="0">
+                <a:latin typeface="Arial" panose="020B0604020202020204" pitchFamily="34" charset="0"/>
+                <a:cs typeface="Arial" panose="020B0604020202020204" pitchFamily="34" charset="0"/>
+              </a:rPr>
+              <a:t>2</a:t>
+            </a:r>
+            <a:endParaRPr kumimoji="1" lang="zh-CN" altLang="en-US" sz="3600" dirty="0">
+              <a:latin typeface="Arial" panose="020B0604020202020204" pitchFamily="34" charset="0"/>
+              <a:cs typeface="Arial" panose="020B0604020202020204" pitchFamily="34" charset="0"/>
+            </a:endParaRPr>
+          </a:p>
+        </p:txBody>
+      </p:sp>
+      <p:sp>
+        <p:nvSpPr>
+          <p:cNvPr id="26" name="文本框 25">
+            <a:extLst>
+              <a:ext uri="{FF2B5EF4-FFF2-40B4-BE49-F238E27FC236}">
+                <a16:creationId xmlns:a16="http://schemas.microsoft.com/office/drawing/2014/main" id="{0D068ECF-737B-D132-944E-E2EF5A74F0BA}"/>
+              </a:ext>
+            </a:extLst>
+          </p:cNvPr>
+          <p:cNvSpPr txBox="1"/>
+          <p:nvPr/>
+        </p:nvSpPr>
+        <p:spPr>
+          <a:xfrm rot="16200000">
+            <a:off x="-2312270" y="6229295"/>
+            <a:ext cx="9145328" cy="769441"/>
+          </a:xfrm>
+          <a:prstGeom prst="rect">
+            <a:avLst/>
+          </a:prstGeom>
+          <a:noFill/>
+        </p:spPr>
+        <p:txBody>
+          <a:bodyPr wrap="square" rtlCol="0">
+            <a:spAutoFit/>
+          </a:bodyPr>
+          <a:lstStyle/>
+          <a:p>
+            <a:pPr algn="ctr"/>
+            <a:r>
+              <a:rPr kumimoji="1" lang="en-US" altLang="zh-CN" sz="4400" dirty="0">
+                <a:latin typeface="Arial" panose="020B0604020202020204" pitchFamily="34" charset="0"/>
+                <a:cs typeface="Arial" panose="020B0604020202020204" pitchFamily="34" charset="0"/>
+              </a:rPr>
+              <a:t>Number</a:t>
+            </a:r>
+            <a:r>
+              <a:rPr kumimoji="1" lang="zh-CN" altLang="en-US" sz="4400" dirty="0">
+                <a:latin typeface="Arial" panose="020B0604020202020204" pitchFamily="34" charset="0"/>
+                <a:cs typeface="Arial" panose="020B0604020202020204" pitchFamily="34" charset="0"/>
+              </a:rPr>
+              <a:t> </a:t>
+            </a:r>
+            <a:r>
+              <a:rPr kumimoji="1" lang="en-US" altLang="zh-CN" sz="4400" dirty="0">
+                <a:latin typeface="Arial" panose="020B0604020202020204" pitchFamily="34" charset="0"/>
+                <a:cs typeface="Arial" panose="020B0604020202020204" pitchFamily="34" charset="0"/>
+              </a:rPr>
+              <a:t>of</a:t>
+            </a:r>
+            <a:r>
+              <a:rPr kumimoji="1" lang="zh-CN" altLang="en-US" sz="4400" dirty="0">
+                <a:latin typeface="Arial" panose="020B0604020202020204" pitchFamily="34" charset="0"/>
+                <a:cs typeface="Arial" panose="020B0604020202020204" pitchFamily="34" charset="0"/>
+              </a:rPr>
+              <a:t> </a:t>
+            </a:r>
+            <a:r>
+              <a:rPr kumimoji="1" lang="en-US" altLang="zh-CN" sz="4400" dirty="0">
+                <a:latin typeface="Arial" panose="020B0604020202020204" pitchFamily="34" charset="0"/>
+                <a:cs typeface="Arial" panose="020B0604020202020204" pitchFamily="34" charset="0"/>
+              </a:rPr>
+              <a:t>Images</a:t>
+            </a:r>
+            <a:endParaRPr kumimoji="1" lang="zh-CN" altLang="en-US" sz="4400" dirty="0">
+              <a:latin typeface="Arial" panose="020B0604020202020204" pitchFamily="34" charset="0"/>
+              <a:cs typeface="Arial" panose="020B0604020202020204" pitchFamily="34" charset="0"/>
+            </a:endParaRPr>
+          </a:p>
+        </p:txBody>
+      </p:sp>
+      <p:sp>
+        <p:nvSpPr>
+          <p:cNvPr id="27" name="文本框 26">
+            <a:extLst>
+              <a:ext uri="{FF2B5EF4-FFF2-40B4-BE49-F238E27FC236}">
+                <a16:creationId xmlns:a16="http://schemas.microsoft.com/office/drawing/2014/main" id="{6905D575-FB01-AF51-DDD0-25B8C009FF46}"/>
+              </a:ext>
+            </a:extLst>
+          </p:cNvPr>
+          <p:cNvSpPr txBox="1"/>
+          <p:nvPr/>
+        </p:nvSpPr>
+        <p:spPr>
+          <a:xfrm>
+            <a:off x="21530059" y="3068414"/>
+            <a:ext cx="1283369" cy="523220"/>
+          </a:xfrm>
+          <a:prstGeom prst="rect">
+            <a:avLst/>
+          </a:prstGeom>
+          <a:noFill/>
+        </p:spPr>
+        <p:txBody>
+          <a:bodyPr wrap="square" rtlCol="0">
+            <a:spAutoFit/>
+          </a:bodyPr>
+          <a:lstStyle/>
+          <a:p>
+            <a:pPr algn="ctr"/>
+            <a:r>
+              <a:rPr kumimoji="1" lang="en-US" altLang="zh-CN" sz="2800" dirty="0">
+                <a:latin typeface="Arial" panose="020B0604020202020204" pitchFamily="34" charset="0"/>
+                <a:cs typeface="Arial" panose="020B0604020202020204" pitchFamily="34" charset="0"/>
+              </a:rPr>
+              <a:t>4,756</a:t>
+            </a:r>
+            <a:endParaRPr kumimoji="1" lang="zh-CN" altLang="en-US" sz="2800" dirty="0">
+              <a:latin typeface="Arial" panose="020B0604020202020204" pitchFamily="34" charset="0"/>
+              <a:cs typeface="Arial" panose="020B0604020202020204" pitchFamily="34" charset="0"/>
+            </a:endParaRPr>
+          </a:p>
+        </p:txBody>
+      </p:sp>
+      <p:pic>
+        <p:nvPicPr>
+          <p:cNvPr id="36" name="图形 35">
+            <a:extLst>
+              <a:ext uri="{FF2B5EF4-FFF2-40B4-BE49-F238E27FC236}">
+                <a16:creationId xmlns:a16="http://schemas.microsoft.com/office/drawing/2014/main" id="{BE6EEB2A-6D3C-B8E7-8FEB-EF6837E75547}"/>
+              </a:ext>
+            </a:extLst>
+          </p:cNvPr>
+          <p:cNvPicPr>
+            <a:picLocks noChangeAspect="1"/>
+          </p:cNvPicPr>
+          <p:nvPr/>
+        </p:nvPicPr>
+        <p:blipFill>
+          <a:blip>
+            <a:extLst>
+              <a:ext uri="{96DAC541-7B7A-43D3-8B79-37D633B846F1}">
+                <asvg:svgBlip xmlns:asvg="http://schemas.microsoft.com/office/drawing/2016/SVG/main" r:embed="rId10"/>
+              </a:ext>
+            </a:extLst>
+          </a:blip>
+          <a:stretch>
+            <a:fillRect/>
+          </a:stretch>
+        </p:blipFill>
+        <p:spPr>
+          <a:xfrm>
+            <a:off x="13965852" y="17864333"/>
             <a:ext cx="3606800" cy="3606800"/>
           </a:xfrm>
           <a:prstGeom prst="rect">
@@ -8671,6 +8827,150 @@
           </a:prstGeom>
         </p:spPr>
       </p:pic>
+      <p:pic>
+        <p:nvPicPr>
+          <p:cNvPr id="38" name="图形 37">
+            <a:extLst>
+              <a:ext uri="{FF2B5EF4-FFF2-40B4-BE49-F238E27FC236}">
+                <a16:creationId xmlns:a16="http://schemas.microsoft.com/office/drawing/2014/main" id="{86979A50-2718-16F5-B974-B86990AA5730}"/>
+              </a:ext>
+            </a:extLst>
+          </p:cNvPr>
+          <p:cNvPicPr>
+            <a:picLocks noChangeAspect="1"/>
+          </p:cNvPicPr>
+          <p:nvPr/>
+        </p:nvPicPr>
+        <p:blipFill>
+          <a:blip>
+            <a:extLst>
+              <a:ext uri="{96DAC541-7B7A-43D3-8B79-37D633B846F1}">
+                <asvg:svgBlip xmlns:asvg="http://schemas.microsoft.com/office/drawing/2016/SVG/main" r:embed="rId11"/>
+              </a:ext>
+            </a:extLst>
+          </a:blip>
+          <a:stretch>
+            <a:fillRect/>
+          </a:stretch>
+        </p:blipFill>
+        <p:spPr>
+          <a:xfrm>
+            <a:off x="3167214" y="17864333"/>
+            <a:ext cx="3606800" cy="3606800"/>
+          </a:xfrm>
+          <a:prstGeom prst="rect">
+            <a:avLst/>
+          </a:prstGeom>
+        </p:spPr>
+      </p:pic>
+      <p:pic>
+        <p:nvPicPr>
+          <p:cNvPr id="40" name="图形 39">
+            <a:extLst>
+              <a:ext uri="{FF2B5EF4-FFF2-40B4-BE49-F238E27FC236}">
+                <a16:creationId xmlns:a16="http://schemas.microsoft.com/office/drawing/2014/main" id="{84179F7E-4E72-288C-8084-B0E6E6F9943E}"/>
+              </a:ext>
+            </a:extLst>
+          </p:cNvPr>
+          <p:cNvPicPr>
+            <a:picLocks noChangeAspect="1"/>
+          </p:cNvPicPr>
+          <p:nvPr/>
+        </p:nvPicPr>
+        <p:blipFill>
+          <a:blip>
+            <a:extLst>
+              <a:ext uri="{96DAC541-7B7A-43D3-8B79-37D633B846F1}">
+                <asvg:svgBlip xmlns:asvg="http://schemas.microsoft.com/office/drawing/2016/SVG/main" r:embed="rId12"/>
+              </a:ext>
+            </a:extLst>
+          </a:blip>
+          <a:stretch>
+            <a:fillRect/>
+          </a:stretch>
+        </p:blipFill>
+        <p:spPr>
+          <a:xfrm>
+            <a:off x="3167214" y="13187933"/>
+            <a:ext cx="3607200" cy="3607200"/>
+          </a:xfrm>
+          <a:prstGeom prst="rect">
+            <a:avLst/>
+          </a:prstGeom>
+        </p:spPr>
+      </p:pic>
+      <p:pic>
+        <p:nvPicPr>
+          <p:cNvPr id="42" name="图形 41">
+            <a:extLst>
+              <a:ext uri="{FF2B5EF4-FFF2-40B4-BE49-F238E27FC236}">
+                <a16:creationId xmlns:a16="http://schemas.microsoft.com/office/drawing/2014/main" id="{0C6D7088-B6E0-7BEC-B6E3-AEB44ABF8D36}"/>
+              </a:ext>
+            </a:extLst>
+          </p:cNvPr>
+          <p:cNvPicPr>
+            <a:picLocks noChangeAspect="1"/>
+          </p:cNvPicPr>
+          <p:nvPr/>
+        </p:nvPicPr>
+        <p:blipFill>
+          <a:blip>
+            <a:extLst>
+              <a:ext uri="{96DAC541-7B7A-43D3-8B79-37D633B846F1}">
+                <asvg:svgBlip xmlns:asvg="http://schemas.microsoft.com/office/drawing/2016/SVG/main" r:embed="rId13"/>
+              </a:ext>
+            </a:extLst>
+          </a:blip>
+          <a:stretch>
+            <a:fillRect/>
+          </a:stretch>
+        </p:blipFill>
+        <p:spPr>
+          <a:xfrm>
+            <a:off x="13965852" y="13187933"/>
+            <a:ext cx="3607200" cy="3607200"/>
+          </a:xfrm>
+          <a:prstGeom prst="rect">
+            <a:avLst/>
+          </a:prstGeom>
+        </p:spPr>
+      </p:pic>
+      <p:pic>
+        <p:nvPicPr>
+          <p:cNvPr id="44" name="图形 43">
+            <a:extLst>
+              <a:ext uri="{FF2B5EF4-FFF2-40B4-BE49-F238E27FC236}">
+                <a16:creationId xmlns:a16="http://schemas.microsoft.com/office/drawing/2014/main" id="{DC8C75C5-5136-B846-9301-A92352B5851E}"/>
+              </a:ext>
+            </a:extLst>
+          </p:cNvPr>
+          <p:cNvPicPr>
+            <a:picLocks noChangeAspect="1"/>
+          </p:cNvPicPr>
+          <p:nvPr/>
+        </p:nvPicPr>
+        <p:blipFill>
+          <a:blip>
+            <a:extLst>
+              <a:ext uri="{96DAC541-7B7A-43D3-8B79-37D633B846F1}">
+                <asvg:svgBlip xmlns:asvg="http://schemas.microsoft.com/office/drawing/2016/SVG/main" r:embed="rId14"/>
+              </a:ext>
+            </a:extLst>
+          </a:blip>
+          <a:stretch>
+            <a:fillRect/>
+          </a:stretch>
+        </p:blipFill>
+        <p:spPr>
+          <a:xfrm>
+            <a:off x="3167214" y="22627133"/>
+            <a:ext cx="3606800" cy="3606800"/>
+          </a:xfrm>
+          <a:prstGeom prst="rect">
+            <a:avLst/>
+          </a:prstGeom>
+        </p:spPr>
+      </p:pic>
       <p:sp>
         <p:nvSpPr>
           <p:cNvPr id="45" name="文本框 44">
@@ -8685,8 +8985,8 @@
         </p:nvSpPr>
         <p:spPr>
           <a:xfrm>
-            <a:off x="3435040" y="14527671"/>
-            <a:ext cx="1080000" cy="461665"/>
+            <a:off x="2627214" y="14658470"/>
+            <a:ext cx="720000" cy="461665"/>
           </a:xfrm>
           <a:prstGeom prst="rect">
             <a:avLst/>
@@ -8727,8 +9027,8 @@
         </p:nvSpPr>
         <p:spPr>
           <a:xfrm>
-            <a:off x="3435040" y="12929760"/>
-            <a:ext cx="1080000" cy="461665"/>
+            <a:off x="2627214" y="13060559"/>
+            <a:ext cx="720000" cy="461665"/>
           </a:xfrm>
           <a:prstGeom prst="rect">
             <a:avLst/>
@@ -8769,8 +9069,8 @@
         </p:nvSpPr>
         <p:spPr>
           <a:xfrm>
-            <a:off x="3482583" y="16233941"/>
-            <a:ext cx="1080000" cy="461665"/>
+            <a:off x="2674757" y="16364740"/>
+            <a:ext cx="720000" cy="461665"/>
           </a:xfrm>
           <a:prstGeom prst="rect">
             <a:avLst/>
@@ -8811,8 +9111,8 @@
         </p:nvSpPr>
         <p:spPr>
           <a:xfrm rot="16200000">
-            <a:off x="1593064" y="14344713"/>
-            <a:ext cx="3269855" cy="646331"/>
+            <a:off x="747499" y="14586390"/>
+            <a:ext cx="3269855" cy="523220"/>
           </a:xfrm>
           <a:prstGeom prst="rect">
             <a:avLst/>
@@ -8827,13 +9127,5370 @@
           <a:p>
             <a:pPr algn="ctr"/>
             <a:r>
-              <a:rPr kumimoji="1" lang="en-US" altLang="zh-CN" sz="3600" dirty="0" err="1">
+              <a:rPr kumimoji="1" lang="en-US" altLang="zh-CN" sz="2800" dirty="0" err="1">
                 <a:latin typeface="Arial" panose="020B0604020202020204" pitchFamily="34" charset="0"/>
                 <a:cs typeface="Arial" panose="020B0604020202020204" pitchFamily="34" charset="0"/>
               </a:rPr>
               <a:t>Pos_y</a:t>
             </a:r>
-            <a:endParaRPr kumimoji="1" lang="zh-CN" altLang="en-US" sz="3600" dirty="0">
+            <a:endParaRPr kumimoji="1" lang="zh-CN" altLang="en-US" sz="2800" dirty="0">
+              <a:latin typeface="Arial" panose="020B0604020202020204" pitchFamily="34" charset="0"/>
+              <a:cs typeface="Arial" panose="020B0604020202020204" pitchFamily="34" charset="0"/>
+            </a:endParaRPr>
+          </a:p>
+        </p:txBody>
+      </p:sp>
+      <p:pic>
+        <p:nvPicPr>
+          <p:cNvPr id="50" name="图形 49">
+            <a:extLst>
+              <a:ext uri="{FF2B5EF4-FFF2-40B4-BE49-F238E27FC236}">
+                <a16:creationId xmlns:a16="http://schemas.microsoft.com/office/drawing/2014/main" id="{72EAB873-8686-CED6-8026-23AA05CD2A05}"/>
+              </a:ext>
+            </a:extLst>
+          </p:cNvPr>
+          <p:cNvPicPr>
+            <a:picLocks noChangeAspect="1"/>
+          </p:cNvPicPr>
+          <p:nvPr/>
+        </p:nvPicPr>
+        <p:blipFill>
+          <a:blip>
+            <a:extLst>
+              <a:ext uri="{96DAC541-7B7A-43D3-8B79-37D633B846F1}">
+                <asvg:svgBlip xmlns:asvg="http://schemas.microsoft.com/office/drawing/2016/SVG/main" r:embed="rId15"/>
+              </a:ext>
+            </a:extLst>
+          </a:blip>
+          <a:stretch>
+            <a:fillRect/>
+          </a:stretch>
+        </p:blipFill>
+        <p:spPr>
+          <a:xfrm>
+            <a:off x="13965852" y="22627133"/>
+            <a:ext cx="3606800" cy="3606800"/>
+          </a:xfrm>
+          <a:prstGeom prst="rect">
+            <a:avLst/>
+          </a:prstGeom>
+        </p:spPr>
+      </p:pic>
+      <p:sp>
+        <p:nvSpPr>
+          <p:cNvPr id="84" name="文本框 83">
+            <a:extLst>
+              <a:ext uri="{FF2B5EF4-FFF2-40B4-BE49-F238E27FC236}">
+                <a16:creationId xmlns:a16="http://schemas.microsoft.com/office/drawing/2014/main" id="{6BE5837D-79F8-937C-C3AD-3F82F5C1913D}"/>
+              </a:ext>
+            </a:extLst>
+          </p:cNvPr>
+          <p:cNvSpPr txBox="1"/>
+          <p:nvPr/>
+        </p:nvSpPr>
+        <p:spPr>
+          <a:xfrm>
+            <a:off x="3061758" y="16641363"/>
+            <a:ext cx="720000" cy="461665"/>
+          </a:xfrm>
+          <a:prstGeom prst="rect">
+            <a:avLst/>
+          </a:prstGeom>
+          <a:noFill/>
+        </p:spPr>
+        <p:txBody>
+          <a:bodyPr wrap="square" rtlCol="0">
+            <a:spAutoFit/>
+          </a:bodyPr>
+          <a:lstStyle/>
+          <a:p>
+            <a:r>
+              <a:rPr kumimoji="1" lang="en-US" altLang="zh-CN" sz="2400" dirty="0">
+                <a:latin typeface="Arial" panose="020B0604020202020204" pitchFamily="34" charset="0"/>
+                <a:cs typeface="Arial" panose="020B0604020202020204" pitchFamily="34" charset="0"/>
+              </a:rPr>
+              <a:t>0.0</a:t>
+            </a:r>
+            <a:endParaRPr kumimoji="1" lang="zh-CN" altLang="en-US" sz="2400" dirty="0">
+              <a:latin typeface="Arial" panose="020B0604020202020204" pitchFamily="34" charset="0"/>
+              <a:cs typeface="Arial" panose="020B0604020202020204" pitchFamily="34" charset="0"/>
+            </a:endParaRPr>
+          </a:p>
+        </p:txBody>
+      </p:sp>
+      <p:sp>
+        <p:nvSpPr>
+          <p:cNvPr id="85" name="文本框 84">
+            <a:extLst>
+              <a:ext uri="{FF2B5EF4-FFF2-40B4-BE49-F238E27FC236}">
+                <a16:creationId xmlns:a16="http://schemas.microsoft.com/office/drawing/2014/main" id="{7644898E-381A-4E54-184B-D07666B84B44}"/>
+              </a:ext>
+            </a:extLst>
+          </p:cNvPr>
+          <p:cNvSpPr txBox="1"/>
+          <p:nvPr/>
+        </p:nvSpPr>
+        <p:spPr>
+          <a:xfrm>
+            <a:off x="4662617" y="16641363"/>
+            <a:ext cx="720000" cy="461665"/>
+          </a:xfrm>
+          <a:prstGeom prst="rect">
+            <a:avLst/>
+          </a:prstGeom>
+          <a:noFill/>
+        </p:spPr>
+        <p:txBody>
+          <a:bodyPr wrap="square" rtlCol="0">
+            <a:spAutoFit/>
+          </a:bodyPr>
+          <a:lstStyle/>
+          <a:p>
+            <a:r>
+              <a:rPr kumimoji="1" lang="en-US" altLang="zh-CN" sz="2400" dirty="0">
+                <a:latin typeface="Arial" panose="020B0604020202020204" pitchFamily="34" charset="0"/>
+                <a:cs typeface="Arial" panose="020B0604020202020204" pitchFamily="34" charset="0"/>
+              </a:rPr>
+              <a:t>0.5</a:t>
+            </a:r>
+            <a:endParaRPr kumimoji="1" lang="zh-CN" altLang="en-US" sz="2400" dirty="0">
+              <a:latin typeface="Arial" panose="020B0604020202020204" pitchFamily="34" charset="0"/>
+              <a:cs typeface="Arial" panose="020B0604020202020204" pitchFamily="34" charset="0"/>
+            </a:endParaRPr>
+          </a:p>
+        </p:txBody>
+      </p:sp>
+      <p:sp>
+        <p:nvSpPr>
+          <p:cNvPr id="86" name="文本框 85">
+            <a:extLst>
+              <a:ext uri="{FF2B5EF4-FFF2-40B4-BE49-F238E27FC236}">
+                <a16:creationId xmlns:a16="http://schemas.microsoft.com/office/drawing/2014/main" id="{B4642290-BA1C-FA15-AF22-46155544C74A}"/>
+              </a:ext>
+            </a:extLst>
+          </p:cNvPr>
+          <p:cNvSpPr txBox="1"/>
+          <p:nvPr/>
+        </p:nvSpPr>
+        <p:spPr>
+          <a:xfrm>
+            <a:off x="6311026" y="16641363"/>
+            <a:ext cx="720000" cy="461665"/>
+          </a:xfrm>
+          <a:prstGeom prst="rect">
+            <a:avLst/>
+          </a:prstGeom>
+          <a:noFill/>
+        </p:spPr>
+        <p:txBody>
+          <a:bodyPr wrap="square" rtlCol="0">
+            <a:spAutoFit/>
+          </a:bodyPr>
+          <a:lstStyle/>
+          <a:p>
+            <a:r>
+              <a:rPr kumimoji="1" lang="en-US" altLang="zh-CN" sz="2400" dirty="0">
+                <a:latin typeface="Arial" panose="020B0604020202020204" pitchFamily="34" charset="0"/>
+                <a:cs typeface="Arial" panose="020B0604020202020204" pitchFamily="34" charset="0"/>
+              </a:rPr>
+              <a:t>1.0</a:t>
+            </a:r>
+            <a:endParaRPr kumimoji="1" lang="zh-CN" altLang="en-US" sz="2400" dirty="0">
+              <a:latin typeface="Arial" panose="020B0604020202020204" pitchFamily="34" charset="0"/>
+              <a:cs typeface="Arial" panose="020B0604020202020204" pitchFamily="34" charset="0"/>
+            </a:endParaRPr>
+          </a:p>
+        </p:txBody>
+      </p:sp>
+      <p:sp>
+        <p:nvSpPr>
+          <p:cNvPr id="94" name="文本框 93">
+            <a:extLst>
+              <a:ext uri="{FF2B5EF4-FFF2-40B4-BE49-F238E27FC236}">
+                <a16:creationId xmlns:a16="http://schemas.microsoft.com/office/drawing/2014/main" id="{4F2FEEB3-0868-19A4-9A31-9ADC0B97C59A}"/>
+              </a:ext>
+            </a:extLst>
+          </p:cNvPr>
+          <p:cNvSpPr txBox="1"/>
+          <p:nvPr/>
+        </p:nvSpPr>
+        <p:spPr>
+          <a:xfrm>
+            <a:off x="2620823" y="19407303"/>
+            <a:ext cx="720000" cy="461665"/>
+          </a:xfrm>
+          <a:prstGeom prst="rect">
+            <a:avLst/>
+          </a:prstGeom>
+          <a:noFill/>
+        </p:spPr>
+        <p:txBody>
+          <a:bodyPr wrap="square" rtlCol="0">
+            <a:spAutoFit/>
+          </a:bodyPr>
+          <a:lstStyle/>
+          <a:p>
+            <a:r>
+              <a:rPr kumimoji="1" lang="en-US" altLang="zh-CN" sz="2400" dirty="0">
+                <a:latin typeface="Arial" panose="020B0604020202020204" pitchFamily="34" charset="0"/>
+                <a:cs typeface="Arial" panose="020B0604020202020204" pitchFamily="34" charset="0"/>
+              </a:rPr>
+              <a:t>0.5</a:t>
+            </a:r>
+            <a:endParaRPr kumimoji="1" lang="zh-CN" altLang="en-US" sz="2400" dirty="0">
+              <a:latin typeface="Arial" panose="020B0604020202020204" pitchFamily="34" charset="0"/>
+              <a:cs typeface="Arial" panose="020B0604020202020204" pitchFamily="34" charset="0"/>
+            </a:endParaRPr>
+          </a:p>
+        </p:txBody>
+      </p:sp>
+      <p:sp>
+        <p:nvSpPr>
+          <p:cNvPr id="95" name="文本框 94">
+            <a:extLst>
+              <a:ext uri="{FF2B5EF4-FFF2-40B4-BE49-F238E27FC236}">
+                <a16:creationId xmlns:a16="http://schemas.microsoft.com/office/drawing/2014/main" id="{E2626427-8A71-51F8-7881-DA22323FE796}"/>
+              </a:ext>
+            </a:extLst>
+          </p:cNvPr>
+          <p:cNvSpPr txBox="1"/>
+          <p:nvPr/>
+        </p:nvSpPr>
+        <p:spPr>
+          <a:xfrm>
+            <a:off x="2620823" y="17809392"/>
+            <a:ext cx="720000" cy="461665"/>
+          </a:xfrm>
+          <a:prstGeom prst="rect">
+            <a:avLst/>
+          </a:prstGeom>
+          <a:noFill/>
+        </p:spPr>
+        <p:txBody>
+          <a:bodyPr wrap="square" rtlCol="0">
+            <a:spAutoFit/>
+          </a:bodyPr>
+          <a:lstStyle/>
+          <a:p>
+            <a:r>
+              <a:rPr kumimoji="1" lang="en-US" altLang="zh-CN" sz="2400" dirty="0">
+                <a:latin typeface="Arial" panose="020B0604020202020204" pitchFamily="34" charset="0"/>
+                <a:cs typeface="Arial" panose="020B0604020202020204" pitchFamily="34" charset="0"/>
+              </a:rPr>
+              <a:t>0.0</a:t>
+            </a:r>
+            <a:endParaRPr kumimoji="1" lang="zh-CN" altLang="en-US" sz="2400" dirty="0">
+              <a:latin typeface="Arial" panose="020B0604020202020204" pitchFamily="34" charset="0"/>
+              <a:cs typeface="Arial" panose="020B0604020202020204" pitchFamily="34" charset="0"/>
+            </a:endParaRPr>
+          </a:p>
+        </p:txBody>
+      </p:sp>
+      <p:sp>
+        <p:nvSpPr>
+          <p:cNvPr id="96" name="文本框 95">
+            <a:extLst>
+              <a:ext uri="{FF2B5EF4-FFF2-40B4-BE49-F238E27FC236}">
+                <a16:creationId xmlns:a16="http://schemas.microsoft.com/office/drawing/2014/main" id="{878F4E6D-F2D6-B3C3-E883-6FAB210C306F}"/>
+              </a:ext>
+            </a:extLst>
+          </p:cNvPr>
+          <p:cNvSpPr txBox="1"/>
+          <p:nvPr/>
+        </p:nvSpPr>
+        <p:spPr>
+          <a:xfrm>
+            <a:off x="2668366" y="21113573"/>
+            <a:ext cx="720000" cy="461665"/>
+          </a:xfrm>
+          <a:prstGeom prst="rect">
+            <a:avLst/>
+          </a:prstGeom>
+          <a:noFill/>
+        </p:spPr>
+        <p:txBody>
+          <a:bodyPr wrap="square" rtlCol="0">
+            <a:spAutoFit/>
+          </a:bodyPr>
+          <a:lstStyle/>
+          <a:p>
+            <a:r>
+              <a:rPr kumimoji="1" lang="en-US" altLang="zh-CN" sz="2400" dirty="0">
+                <a:latin typeface="Arial" panose="020B0604020202020204" pitchFamily="34" charset="0"/>
+                <a:cs typeface="Arial" panose="020B0604020202020204" pitchFamily="34" charset="0"/>
+              </a:rPr>
+              <a:t>1.0</a:t>
+            </a:r>
+            <a:endParaRPr kumimoji="1" lang="zh-CN" altLang="en-US" sz="2400" dirty="0">
+              <a:latin typeface="Arial" panose="020B0604020202020204" pitchFamily="34" charset="0"/>
+              <a:cs typeface="Arial" panose="020B0604020202020204" pitchFamily="34" charset="0"/>
+            </a:endParaRPr>
+          </a:p>
+        </p:txBody>
+      </p:sp>
+      <p:sp>
+        <p:nvSpPr>
+          <p:cNvPr id="97" name="文本框 96">
+            <a:extLst>
+              <a:ext uri="{FF2B5EF4-FFF2-40B4-BE49-F238E27FC236}">
+                <a16:creationId xmlns:a16="http://schemas.microsoft.com/office/drawing/2014/main" id="{1BDCA916-633F-0146-F442-FD9820A3EBDE}"/>
+              </a:ext>
+            </a:extLst>
+          </p:cNvPr>
+          <p:cNvSpPr txBox="1"/>
+          <p:nvPr/>
+        </p:nvSpPr>
+        <p:spPr>
+          <a:xfrm rot="16200000">
+            <a:off x="741108" y="19335223"/>
+            <a:ext cx="3269855" cy="523220"/>
+          </a:xfrm>
+          <a:prstGeom prst="rect">
+            <a:avLst/>
+          </a:prstGeom>
+          <a:noFill/>
+        </p:spPr>
+        <p:txBody>
+          <a:bodyPr wrap="square" rtlCol="0">
+            <a:spAutoFit/>
+          </a:bodyPr>
+          <a:lstStyle/>
+          <a:p>
+            <a:pPr algn="ctr"/>
+            <a:r>
+              <a:rPr kumimoji="1" lang="en-US" altLang="zh-CN" sz="2800" dirty="0" err="1">
+                <a:latin typeface="Arial" panose="020B0604020202020204" pitchFamily="34" charset="0"/>
+                <a:cs typeface="Arial" panose="020B0604020202020204" pitchFamily="34" charset="0"/>
+              </a:rPr>
+              <a:t>Pos_y</a:t>
+            </a:r>
+            <a:endParaRPr kumimoji="1" lang="zh-CN" altLang="en-US" sz="2800" dirty="0">
+              <a:latin typeface="Arial" panose="020B0604020202020204" pitchFamily="34" charset="0"/>
+              <a:cs typeface="Arial" panose="020B0604020202020204" pitchFamily="34" charset="0"/>
+            </a:endParaRPr>
+          </a:p>
+        </p:txBody>
+      </p:sp>
+      <p:sp>
+        <p:nvSpPr>
+          <p:cNvPr id="98" name="文本框 97">
+            <a:extLst>
+              <a:ext uri="{FF2B5EF4-FFF2-40B4-BE49-F238E27FC236}">
+                <a16:creationId xmlns:a16="http://schemas.microsoft.com/office/drawing/2014/main" id="{5C6279BE-0DF3-8FE9-8AFE-5A3A528971AD}"/>
+              </a:ext>
+            </a:extLst>
+          </p:cNvPr>
+          <p:cNvSpPr txBox="1"/>
+          <p:nvPr/>
+        </p:nvSpPr>
+        <p:spPr>
+          <a:xfrm>
+            <a:off x="3055367" y="21390196"/>
+            <a:ext cx="720000" cy="461665"/>
+          </a:xfrm>
+          <a:prstGeom prst="rect">
+            <a:avLst/>
+          </a:prstGeom>
+          <a:noFill/>
+        </p:spPr>
+        <p:txBody>
+          <a:bodyPr wrap="square" rtlCol="0">
+            <a:spAutoFit/>
+          </a:bodyPr>
+          <a:lstStyle/>
+          <a:p>
+            <a:r>
+              <a:rPr kumimoji="1" lang="en-US" altLang="zh-CN" sz="2400" dirty="0">
+                <a:latin typeface="Arial" panose="020B0604020202020204" pitchFamily="34" charset="0"/>
+                <a:cs typeface="Arial" panose="020B0604020202020204" pitchFamily="34" charset="0"/>
+              </a:rPr>
+              <a:t>0.0</a:t>
+            </a:r>
+            <a:endParaRPr kumimoji="1" lang="zh-CN" altLang="en-US" sz="2400" dirty="0">
+              <a:latin typeface="Arial" panose="020B0604020202020204" pitchFamily="34" charset="0"/>
+              <a:cs typeface="Arial" panose="020B0604020202020204" pitchFamily="34" charset="0"/>
+            </a:endParaRPr>
+          </a:p>
+        </p:txBody>
+      </p:sp>
+      <p:sp>
+        <p:nvSpPr>
+          <p:cNvPr id="99" name="文本框 98">
+            <a:extLst>
+              <a:ext uri="{FF2B5EF4-FFF2-40B4-BE49-F238E27FC236}">
+                <a16:creationId xmlns:a16="http://schemas.microsoft.com/office/drawing/2014/main" id="{925C533B-FEDC-7ECC-8436-E8DE7D25961B}"/>
+              </a:ext>
+            </a:extLst>
+          </p:cNvPr>
+          <p:cNvSpPr txBox="1"/>
+          <p:nvPr/>
+        </p:nvSpPr>
+        <p:spPr>
+          <a:xfrm>
+            <a:off x="4656226" y="21390196"/>
+            <a:ext cx="720000" cy="461665"/>
+          </a:xfrm>
+          <a:prstGeom prst="rect">
+            <a:avLst/>
+          </a:prstGeom>
+          <a:noFill/>
+        </p:spPr>
+        <p:txBody>
+          <a:bodyPr wrap="square" rtlCol="0">
+            <a:spAutoFit/>
+          </a:bodyPr>
+          <a:lstStyle/>
+          <a:p>
+            <a:r>
+              <a:rPr kumimoji="1" lang="en-US" altLang="zh-CN" sz="2400" dirty="0">
+                <a:latin typeface="Arial" panose="020B0604020202020204" pitchFamily="34" charset="0"/>
+                <a:cs typeface="Arial" panose="020B0604020202020204" pitchFamily="34" charset="0"/>
+              </a:rPr>
+              <a:t>0.5</a:t>
+            </a:r>
+            <a:endParaRPr kumimoji="1" lang="zh-CN" altLang="en-US" sz="2400" dirty="0">
+              <a:latin typeface="Arial" panose="020B0604020202020204" pitchFamily="34" charset="0"/>
+              <a:cs typeface="Arial" panose="020B0604020202020204" pitchFamily="34" charset="0"/>
+            </a:endParaRPr>
+          </a:p>
+        </p:txBody>
+      </p:sp>
+      <p:sp>
+        <p:nvSpPr>
+          <p:cNvPr id="100" name="文本框 99">
+            <a:extLst>
+              <a:ext uri="{FF2B5EF4-FFF2-40B4-BE49-F238E27FC236}">
+                <a16:creationId xmlns:a16="http://schemas.microsoft.com/office/drawing/2014/main" id="{CF1D624C-A73E-6DAC-F8DC-8972209B8D7E}"/>
+              </a:ext>
+            </a:extLst>
+          </p:cNvPr>
+          <p:cNvSpPr txBox="1"/>
+          <p:nvPr/>
+        </p:nvSpPr>
+        <p:spPr>
+          <a:xfrm>
+            <a:off x="6304635" y="21390196"/>
+            <a:ext cx="720000" cy="461665"/>
+          </a:xfrm>
+          <a:prstGeom prst="rect">
+            <a:avLst/>
+          </a:prstGeom>
+          <a:noFill/>
+        </p:spPr>
+        <p:txBody>
+          <a:bodyPr wrap="square" rtlCol="0">
+            <a:spAutoFit/>
+          </a:bodyPr>
+          <a:lstStyle/>
+          <a:p>
+            <a:r>
+              <a:rPr kumimoji="1" lang="en-US" altLang="zh-CN" sz="2400" dirty="0">
+                <a:latin typeface="Arial" panose="020B0604020202020204" pitchFamily="34" charset="0"/>
+                <a:cs typeface="Arial" panose="020B0604020202020204" pitchFamily="34" charset="0"/>
+              </a:rPr>
+              <a:t>1.0</a:t>
+            </a:r>
+            <a:endParaRPr kumimoji="1" lang="zh-CN" altLang="en-US" sz="2400" dirty="0">
+              <a:latin typeface="Arial" panose="020B0604020202020204" pitchFamily="34" charset="0"/>
+              <a:cs typeface="Arial" panose="020B0604020202020204" pitchFamily="34" charset="0"/>
+            </a:endParaRPr>
+          </a:p>
+        </p:txBody>
+      </p:sp>
+      <p:sp>
+        <p:nvSpPr>
+          <p:cNvPr id="101" name="文本框 100">
+            <a:extLst>
+              <a:ext uri="{FF2B5EF4-FFF2-40B4-BE49-F238E27FC236}">
+                <a16:creationId xmlns:a16="http://schemas.microsoft.com/office/drawing/2014/main" id="{8C2D9BEE-F52F-2EBB-3EFE-E35F8E39073D}"/>
+              </a:ext>
+            </a:extLst>
+          </p:cNvPr>
+          <p:cNvSpPr txBox="1"/>
+          <p:nvPr/>
+        </p:nvSpPr>
+        <p:spPr>
+          <a:xfrm>
+            <a:off x="2620823" y="24200041"/>
+            <a:ext cx="720000" cy="461665"/>
+          </a:xfrm>
+          <a:prstGeom prst="rect">
+            <a:avLst/>
+          </a:prstGeom>
+          <a:noFill/>
+        </p:spPr>
+        <p:txBody>
+          <a:bodyPr wrap="square" rtlCol="0">
+            <a:spAutoFit/>
+          </a:bodyPr>
+          <a:lstStyle/>
+          <a:p>
+            <a:r>
+              <a:rPr kumimoji="1" lang="en-US" altLang="zh-CN" sz="2400" dirty="0">
+                <a:latin typeface="Arial" panose="020B0604020202020204" pitchFamily="34" charset="0"/>
+                <a:cs typeface="Arial" panose="020B0604020202020204" pitchFamily="34" charset="0"/>
+              </a:rPr>
+              <a:t>0.5</a:t>
+            </a:r>
+            <a:endParaRPr kumimoji="1" lang="zh-CN" altLang="en-US" sz="2400" dirty="0">
+              <a:latin typeface="Arial" panose="020B0604020202020204" pitchFamily="34" charset="0"/>
+              <a:cs typeface="Arial" panose="020B0604020202020204" pitchFamily="34" charset="0"/>
+            </a:endParaRPr>
+          </a:p>
+        </p:txBody>
+      </p:sp>
+      <p:sp>
+        <p:nvSpPr>
+          <p:cNvPr id="102" name="文本框 101">
+            <a:extLst>
+              <a:ext uri="{FF2B5EF4-FFF2-40B4-BE49-F238E27FC236}">
+                <a16:creationId xmlns:a16="http://schemas.microsoft.com/office/drawing/2014/main" id="{9E2FCE65-EF5B-2F83-B8F9-25A17998854E}"/>
+              </a:ext>
+            </a:extLst>
+          </p:cNvPr>
+          <p:cNvSpPr txBox="1"/>
+          <p:nvPr/>
+        </p:nvSpPr>
+        <p:spPr>
+          <a:xfrm>
+            <a:off x="2620823" y="22602130"/>
+            <a:ext cx="720000" cy="461665"/>
+          </a:xfrm>
+          <a:prstGeom prst="rect">
+            <a:avLst/>
+          </a:prstGeom>
+          <a:noFill/>
+        </p:spPr>
+        <p:txBody>
+          <a:bodyPr wrap="square" rtlCol="0">
+            <a:spAutoFit/>
+          </a:bodyPr>
+          <a:lstStyle/>
+          <a:p>
+            <a:r>
+              <a:rPr kumimoji="1" lang="en-US" altLang="zh-CN" sz="2400" dirty="0">
+                <a:latin typeface="Arial" panose="020B0604020202020204" pitchFamily="34" charset="0"/>
+                <a:cs typeface="Arial" panose="020B0604020202020204" pitchFamily="34" charset="0"/>
+              </a:rPr>
+              <a:t>0.0</a:t>
+            </a:r>
+            <a:endParaRPr kumimoji="1" lang="zh-CN" altLang="en-US" sz="2400" dirty="0">
+              <a:latin typeface="Arial" panose="020B0604020202020204" pitchFamily="34" charset="0"/>
+              <a:cs typeface="Arial" panose="020B0604020202020204" pitchFamily="34" charset="0"/>
+            </a:endParaRPr>
+          </a:p>
+        </p:txBody>
+      </p:sp>
+      <p:sp>
+        <p:nvSpPr>
+          <p:cNvPr id="103" name="文本框 102">
+            <a:extLst>
+              <a:ext uri="{FF2B5EF4-FFF2-40B4-BE49-F238E27FC236}">
+                <a16:creationId xmlns:a16="http://schemas.microsoft.com/office/drawing/2014/main" id="{8E67B341-10C2-4932-E668-6FABAE9CBFE0}"/>
+              </a:ext>
+            </a:extLst>
+          </p:cNvPr>
+          <p:cNvSpPr txBox="1"/>
+          <p:nvPr/>
+        </p:nvSpPr>
+        <p:spPr>
+          <a:xfrm>
+            <a:off x="2668366" y="25906311"/>
+            <a:ext cx="720000" cy="461665"/>
+          </a:xfrm>
+          <a:prstGeom prst="rect">
+            <a:avLst/>
+          </a:prstGeom>
+          <a:noFill/>
+        </p:spPr>
+        <p:txBody>
+          <a:bodyPr wrap="square" rtlCol="0">
+            <a:spAutoFit/>
+          </a:bodyPr>
+          <a:lstStyle/>
+          <a:p>
+            <a:r>
+              <a:rPr kumimoji="1" lang="en-US" altLang="zh-CN" sz="2400" dirty="0">
+                <a:latin typeface="Arial" panose="020B0604020202020204" pitchFamily="34" charset="0"/>
+                <a:cs typeface="Arial" panose="020B0604020202020204" pitchFamily="34" charset="0"/>
+              </a:rPr>
+              <a:t>1.0</a:t>
+            </a:r>
+            <a:endParaRPr kumimoji="1" lang="zh-CN" altLang="en-US" sz="2400" dirty="0">
+              <a:latin typeface="Arial" panose="020B0604020202020204" pitchFamily="34" charset="0"/>
+              <a:cs typeface="Arial" panose="020B0604020202020204" pitchFamily="34" charset="0"/>
+            </a:endParaRPr>
+          </a:p>
+        </p:txBody>
+      </p:sp>
+      <p:sp>
+        <p:nvSpPr>
+          <p:cNvPr id="104" name="文本框 103">
+            <a:extLst>
+              <a:ext uri="{FF2B5EF4-FFF2-40B4-BE49-F238E27FC236}">
+                <a16:creationId xmlns:a16="http://schemas.microsoft.com/office/drawing/2014/main" id="{AF5AADAE-D984-91C7-D003-1E7944090515}"/>
+              </a:ext>
+            </a:extLst>
+          </p:cNvPr>
+          <p:cNvSpPr txBox="1"/>
+          <p:nvPr/>
+        </p:nvSpPr>
+        <p:spPr>
+          <a:xfrm rot="16200000">
+            <a:off x="741108" y="24127961"/>
+            <a:ext cx="3269855" cy="523220"/>
+          </a:xfrm>
+          <a:prstGeom prst="rect">
+            <a:avLst/>
+          </a:prstGeom>
+          <a:noFill/>
+        </p:spPr>
+        <p:txBody>
+          <a:bodyPr wrap="square" rtlCol="0">
+            <a:spAutoFit/>
+          </a:bodyPr>
+          <a:lstStyle/>
+          <a:p>
+            <a:pPr algn="ctr"/>
+            <a:r>
+              <a:rPr kumimoji="1" lang="en-US" altLang="zh-CN" sz="2800" dirty="0" err="1">
+                <a:latin typeface="Arial" panose="020B0604020202020204" pitchFamily="34" charset="0"/>
+                <a:cs typeface="Arial" panose="020B0604020202020204" pitchFamily="34" charset="0"/>
+              </a:rPr>
+              <a:t>Pos_y</a:t>
+            </a:r>
+            <a:endParaRPr kumimoji="1" lang="zh-CN" altLang="en-US" sz="2800" dirty="0">
+              <a:latin typeface="Arial" panose="020B0604020202020204" pitchFamily="34" charset="0"/>
+              <a:cs typeface="Arial" panose="020B0604020202020204" pitchFamily="34" charset="0"/>
+            </a:endParaRPr>
+          </a:p>
+        </p:txBody>
+      </p:sp>
+      <p:sp>
+        <p:nvSpPr>
+          <p:cNvPr id="105" name="文本框 104">
+            <a:extLst>
+              <a:ext uri="{FF2B5EF4-FFF2-40B4-BE49-F238E27FC236}">
+                <a16:creationId xmlns:a16="http://schemas.microsoft.com/office/drawing/2014/main" id="{4DCCA08A-F003-154F-23A7-C39D6165C546}"/>
+              </a:ext>
+            </a:extLst>
+          </p:cNvPr>
+          <p:cNvSpPr txBox="1"/>
+          <p:nvPr/>
+        </p:nvSpPr>
+        <p:spPr>
+          <a:xfrm>
+            <a:off x="3055367" y="26182934"/>
+            <a:ext cx="720000" cy="461665"/>
+          </a:xfrm>
+          <a:prstGeom prst="rect">
+            <a:avLst/>
+          </a:prstGeom>
+          <a:noFill/>
+        </p:spPr>
+        <p:txBody>
+          <a:bodyPr wrap="square" rtlCol="0">
+            <a:spAutoFit/>
+          </a:bodyPr>
+          <a:lstStyle/>
+          <a:p>
+            <a:r>
+              <a:rPr kumimoji="1" lang="en-US" altLang="zh-CN" sz="2400" dirty="0">
+                <a:latin typeface="Arial" panose="020B0604020202020204" pitchFamily="34" charset="0"/>
+                <a:cs typeface="Arial" panose="020B0604020202020204" pitchFamily="34" charset="0"/>
+              </a:rPr>
+              <a:t>0.0</a:t>
+            </a:r>
+            <a:endParaRPr kumimoji="1" lang="zh-CN" altLang="en-US" sz="2400" dirty="0">
+              <a:latin typeface="Arial" panose="020B0604020202020204" pitchFamily="34" charset="0"/>
+              <a:cs typeface="Arial" panose="020B0604020202020204" pitchFamily="34" charset="0"/>
+            </a:endParaRPr>
+          </a:p>
+        </p:txBody>
+      </p:sp>
+      <p:sp>
+        <p:nvSpPr>
+          <p:cNvPr id="106" name="文本框 105">
+            <a:extLst>
+              <a:ext uri="{FF2B5EF4-FFF2-40B4-BE49-F238E27FC236}">
+                <a16:creationId xmlns:a16="http://schemas.microsoft.com/office/drawing/2014/main" id="{8D44EC18-AC37-F193-E64C-536ABF64F62F}"/>
+              </a:ext>
+            </a:extLst>
+          </p:cNvPr>
+          <p:cNvSpPr txBox="1"/>
+          <p:nvPr/>
+        </p:nvSpPr>
+        <p:spPr>
+          <a:xfrm>
+            <a:off x="4656226" y="26182934"/>
+            <a:ext cx="720000" cy="461665"/>
+          </a:xfrm>
+          <a:prstGeom prst="rect">
+            <a:avLst/>
+          </a:prstGeom>
+          <a:noFill/>
+        </p:spPr>
+        <p:txBody>
+          <a:bodyPr wrap="square" rtlCol="0">
+            <a:spAutoFit/>
+          </a:bodyPr>
+          <a:lstStyle/>
+          <a:p>
+            <a:r>
+              <a:rPr kumimoji="1" lang="en-US" altLang="zh-CN" sz="2400" dirty="0">
+                <a:latin typeface="Arial" panose="020B0604020202020204" pitchFamily="34" charset="0"/>
+                <a:cs typeface="Arial" panose="020B0604020202020204" pitchFamily="34" charset="0"/>
+              </a:rPr>
+              <a:t>0.5</a:t>
+            </a:r>
+            <a:endParaRPr kumimoji="1" lang="zh-CN" altLang="en-US" sz="2400" dirty="0">
+              <a:latin typeface="Arial" panose="020B0604020202020204" pitchFamily="34" charset="0"/>
+              <a:cs typeface="Arial" panose="020B0604020202020204" pitchFamily="34" charset="0"/>
+            </a:endParaRPr>
+          </a:p>
+        </p:txBody>
+      </p:sp>
+      <p:sp>
+        <p:nvSpPr>
+          <p:cNvPr id="107" name="文本框 106">
+            <a:extLst>
+              <a:ext uri="{FF2B5EF4-FFF2-40B4-BE49-F238E27FC236}">
+                <a16:creationId xmlns:a16="http://schemas.microsoft.com/office/drawing/2014/main" id="{920B3A2E-1E67-C3D6-8263-07C1BBE954FE}"/>
+              </a:ext>
+            </a:extLst>
+          </p:cNvPr>
+          <p:cNvSpPr txBox="1"/>
+          <p:nvPr/>
+        </p:nvSpPr>
+        <p:spPr>
+          <a:xfrm>
+            <a:off x="6304635" y="26182934"/>
+            <a:ext cx="720000" cy="461665"/>
+          </a:xfrm>
+          <a:prstGeom prst="rect">
+            <a:avLst/>
+          </a:prstGeom>
+          <a:noFill/>
+        </p:spPr>
+        <p:txBody>
+          <a:bodyPr wrap="square" rtlCol="0">
+            <a:spAutoFit/>
+          </a:bodyPr>
+          <a:lstStyle/>
+          <a:p>
+            <a:r>
+              <a:rPr kumimoji="1" lang="en-US" altLang="zh-CN" sz="2400" dirty="0">
+                <a:latin typeface="Arial" panose="020B0604020202020204" pitchFamily="34" charset="0"/>
+                <a:cs typeface="Arial" panose="020B0604020202020204" pitchFamily="34" charset="0"/>
+              </a:rPr>
+              <a:t>1.0</a:t>
+            </a:r>
+            <a:endParaRPr kumimoji="1" lang="zh-CN" altLang="en-US" sz="2400" dirty="0">
+              <a:latin typeface="Arial" panose="020B0604020202020204" pitchFamily="34" charset="0"/>
+              <a:cs typeface="Arial" panose="020B0604020202020204" pitchFamily="34" charset="0"/>
+            </a:endParaRPr>
+          </a:p>
+        </p:txBody>
+      </p:sp>
+      <p:sp>
+        <p:nvSpPr>
+          <p:cNvPr id="108" name="文本框 107">
+            <a:extLst>
+              <a:ext uri="{FF2B5EF4-FFF2-40B4-BE49-F238E27FC236}">
+                <a16:creationId xmlns:a16="http://schemas.microsoft.com/office/drawing/2014/main" id="{E62812B8-E254-7C35-1F82-A4BD99AE8513}"/>
+              </a:ext>
+            </a:extLst>
+          </p:cNvPr>
+          <p:cNvSpPr txBox="1"/>
+          <p:nvPr/>
+        </p:nvSpPr>
+        <p:spPr>
+          <a:xfrm>
+            <a:off x="13475639" y="14758415"/>
+            <a:ext cx="720000" cy="461665"/>
+          </a:xfrm>
+          <a:prstGeom prst="rect">
+            <a:avLst/>
+          </a:prstGeom>
+          <a:noFill/>
+        </p:spPr>
+        <p:txBody>
+          <a:bodyPr wrap="square" rtlCol="0">
+            <a:spAutoFit/>
+          </a:bodyPr>
+          <a:lstStyle/>
+          <a:p>
+            <a:r>
+              <a:rPr kumimoji="1" lang="en-US" altLang="zh-CN" sz="2400" dirty="0">
+                <a:latin typeface="Arial" panose="020B0604020202020204" pitchFamily="34" charset="0"/>
+                <a:cs typeface="Arial" panose="020B0604020202020204" pitchFamily="34" charset="0"/>
+              </a:rPr>
+              <a:t>0.5</a:t>
+            </a:r>
+            <a:endParaRPr kumimoji="1" lang="zh-CN" altLang="en-US" sz="2400" dirty="0">
+              <a:latin typeface="Arial" panose="020B0604020202020204" pitchFamily="34" charset="0"/>
+              <a:cs typeface="Arial" panose="020B0604020202020204" pitchFamily="34" charset="0"/>
+            </a:endParaRPr>
+          </a:p>
+        </p:txBody>
+      </p:sp>
+      <p:sp>
+        <p:nvSpPr>
+          <p:cNvPr id="109" name="文本框 108">
+            <a:extLst>
+              <a:ext uri="{FF2B5EF4-FFF2-40B4-BE49-F238E27FC236}">
+                <a16:creationId xmlns:a16="http://schemas.microsoft.com/office/drawing/2014/main" id="{BDD66FBF-5227-3517-5356-0F90B03F6C29}"/>
+              </a:ext>
+            </a:extLst>
+          </p:cNvPr>
+          <p:cNvSpPr txBox="1"/>
+          <p:nvPr/>
+        </p:nvSpPr>
+        <p:spPr>
+          <a:xfrm>
+            <a:off x="13475639" y="13160504"/>
+            <a:ext cx="720000" cy="461665"/>
+          </a:xfrm>
+          <a:prstGeom prst="rect">
+            <a:avLst/>
+          </a:prstGeom>
+          <a:noFill/>
+        </p:spPr>
+        <p:txBody>
+          <a:bodyPr wrap="square" rtlCol="0">
+            <a:spAutoFit/>
+          </a:bodyPr>
+          <a:lstStyle/>
+          <a:p>
+            <a:r>
+              <a:rPr kumimoji="1" lang="en-US" altLang="zh-CN" sz="2400" dirty="0">
+                <a:latin typeface="Arial" panose="020B0604020202020204" pitchFamily="34" charset="0"/>
+                <a:cs typeface="Arial" panose="020B0604020202020204" pitchFamily="34" charset="0"/>
+              </a:rPr>
+              <a:t>0.0</a:t>
+            </a:r>
+            <a:endParaRPr kumimoji="1" lang="zh-CN" altLang="en-US" sz="2400" dirty="0">
+              <a:latin typeface="Arial" panose="020B0604020202020204" pitchFamily="34" charset="0"/>
+              <a:cs typeface="Arial" panose="020B0604020202020204" pitchFamily="34" charset="0"/>
+            </a:endParaRPr>
+          </a:p>
+        </p:txBody>
+      </p:sp>
+      <p:sp>
+        <p:nvSpPr>
+          <p:cNvPr id="110" name="文本框 109">
+            <a:extLst>
+              <a:ext uri="{FF2B5EF4-FFF2-40B4-BE49-F238E27FC236}">
+                <a16:creationId xmlns:a16="http://schemas.microsoft.com/office/drawing/2014/main" id="{748A8936-74A5-B48C-D000-913C6AD29D46}"/>
+              </a:ext>
+            </a:extLst>
+          </p:cNvPr>
+          <p:cNvSpPr txBox="1"/>
+          <p:nvPr/>
+        </p:nvSpPr>
+        <p:spPr>
+          <a:xfrm>
+            <a:off x="13523182" y="16464685"/>
+            <a:ext cx="720000" cy="461665"/>
+          </a:xfrm>
+          <a:prstGeom prst="rect">
+            <a:avLst/>
+          </a:prstGeom>
+          <a:noFill/>
+        </p:spPr>
+        <p:txBody>
+          <a:bodyPr wrap="square" rtlCol="0">
+            <a:spAutoFit/>
+          </a:bodyPr>
+          <a:lstStyle/>
+          <a:p>
+            <a:r>
+              <a:rPr kumimoji="1" lang="en-US" altLang="zh-CN" sz="2400" dirty="0">
+                <a:latin typeface="Arial" panose="020B0604020202020204" pitchFamily="34" charset="0"/>
+                <a:cs typeface="Arial" panose="020B0604020202020204" pitchFamily="34" charset="0"/>
+              </a:rPr>
+              <a:t>1.0</a:t>
+            </a:r>
+            <a:endParaRPr kumimoji="1" lang="zh-CN" altLang="en-US" sz="2400" dirty="0">
+              <a:latin typeface="Arial" panose="020B0604020202020204" pitchFamily="34" charset="0"/>
+              <a:cs typeface="Arial" panose="020B0604020202020204" pitchFamily="34" charset="0"/>
+            </a:endParaRPr>
+          </a:p>
+        </p:txBody>
+      </p:sp>
+      <p:sp>
+        <p:nvSpPr>
+          <p:cNvPr id="111" name="文本框 110">
+            <a:extLst>
+              <a:ext uri="{FF2B5EF4-FFF2-40B4-BE49-F238E27FC236}">
+                <a16:creationId xmlns:a16="http://schemas.microsoft.com/office/drawing/2014/main" id="{44B5DD74-45EC-FDB8-8E70-7BDD1DB9C2B9}"/>
+              </a:ext>
+            </a:extLst>
+          </p:cNvPr>
+          <p:cNvSpPr txBox="1"/>
+          <p:nvPr/>
+        </p:nvSpPr>
+        <p:spPr>
+          <a:xfrm rot="16200000">
+            <a:off x="11778806" y="14686335"/>
+            <a:ext cx="3269855" cy="523220"/>
+          </a:xfrm>
+          <a:prstGeom prst="rect">
+            <a:avLst/>
+          </a:prstGeom>
+          <a:noFill/>
+        </p:spPr>
+        <p:txBody>
+          <a:bodyPr wrap="square" rtlCol="0">
+            <a:spAutoFit/>
+          </a:bodyPr>
+          <a:lstStyle/>
+          <a:p>
+            <a:pPr algn="ctr"/>
+            <a:r>
+              <a:rPr kumimoji="1" lang="en-US" altLang="zh-CN" sz="2800" dirty="0" err="1">
+                <a:latin typeface="Arial" panose="020B0604020202020204" pitchFamily="34" charset="0"/>
+                <a:cs typeface="Arial" panose="020B0604020202020204" pitchFamily="34" charset="0"/>
+              </a:rPr>
+              <a:t>Pos_y</a:t>
+            </a:r>
+            <a:endParaRPr kumimoji="1" lang="zh-CN" altLang="en-US" sz="2800" dirty="0">
+              <a:latin typeface="Arial" panose="020B0604020202020204" pitchFamily="34" charset="0"/>
+              <a:cs typeface="Arial" panose="020B0604020202020204" pitchFamily="34" charset="0"/>
+            </a:endParaRPr>
+          </a:p>
+        </p:txBody>
+      </p:sp>
+      <p:sp>
+        <p:nvSpPr>
+          <p:cNvPr id="112" name="文本框 111">
+            <a:extLst>
+              <a:ext uri="{FF2B5EF4-FFF2-40B4-BE49-F238E27FC236}">
+                <a16:creationId xmlns:a16="http://schemas.microsoft.com/office/drawing/2014/main" id="{D9C08986-73F9-D722-95F2-97C370DDBC9F}"/>
+              </a:ext>
+            </a:extLst>
+          </p:cNvPr>
+          <p:cNvSpPr txBox="1"/>
+          <p:nvPr/>
+        </p:nvSpPr>
+        <p:spPr>
+          <a:xfrm>
+            <a:off x="13910183" y="16741308"/>
+            <a:ext cx="720000" cy="461665"/>
+          </a:xfrm>
+          <a:prstGeom prst="rect">
+            <a:avLst/>
+          </a:prstGeom>
+          <a:noFill/>
+        </p:spPr>
+        <p:txBody>
+          <a:bodyPr wrap="square" rtlCol="0">
+            <a:spAutoFit/>
+          </a:bodyPr>
+          <a:lstStyle/>
+          <a:p>
+            <a:r>
+              <a:rPr kumimoji="1" lang="en-US" altLang="zh-CN" sz="2400" dirty="0">
+                <a:latin typeface="Arial" panose="020B0604020202020204" pitchFamily="34" charset="0"/>
+                <a:cs typeface="Arial" panose="020B0604020202020204" pitchFamily="34" charset="0"/>
+              </a:rPr>
+              <a:t>0.0</a:t>
+            </a:r>
+            <a:endParaRPr kumimoji="1" lang="zh-CN" altLang="en-US" sz="2400" dirty="0">
+              <a:latin typeface="Arial" panose="020B0604020202020204" pitchFamily="34" charset="0"/>
+              <a:cs typeface="Arial" panose="020B0604020202020204" pitchFamily="34" charset="0"/>
+            </a:endParaRPr>
+          </a:p>
+        </p:txBody>
+      </p:sp>
+      <p:sp>
+        <p:nvSpPr>
+          <p:cNvPr id="113" name="文本框 112">
+            <a:extLst>
+              <a:ext uri="{FF2B5EF4-FFF2-40B4-BE49-F238E27FC236}">
+                <a16:creationId xmlns:a16="http://schemas.microsoft.com/office/drawing/2014/main" id="{97C13A37-401C-B6F5-A30D-FE60D2F61F55}"/>
+              </a:ext>
+            </a:extLst>
+          </p:cNvPr>
+          <p:cNvSpPr txBox="1"/>
+          <p:nvPr/>
+        </p:nvSpPr>
+        <p:spPr>
+          <a:xfrm>
+            <a:off x="15511042" y="16741308"/>
+            <a:ext cx="720000" cy="461665"/>
+          </a:xfrm>
+          <a:prstGeom prst="rect">
+            <a:avLst/>
+          </a:prstGeom>
+          <a:noFill/>
+        </p:spPr>
+        <p:txBody>
+          <a:bodyPr wrap="square" rtlCol="0">
+            <a:spAutoFit/>
+          </a:bodyPr>
+          <a:lstStyle/>
+          <a:p>
+            <a:r>
+              <a:rPr kumimoji="1" lang="en-US" altLang="zh-CN" sz="2400" dirty="0">
+                <a:latin typeface="Arial" panose="020B0604020202020204" pitchFamily="34" charset="0"/>
+                <a:cs typeface="Arial" panose="020B0604020202020204" pitchFamily="34" charset="0"/>
+              </a:rPr>
+              <a:t>0.5</a:t>
+            </a:r>
+            <a:endParaRPr kumimoji="1" lang="zh-CN" altLang="en-US" sz="2400" dirty="0">
+              <a:latin typeface="Arial" panose="020B0604020202020204" pitchFamily="34" charset="0"/>
+              <a:cs typeface="Arial" panose="020B0604020202020204" pitchFamily="34" charset="0"/>
+            </a:endParaRPr>
+          </a:p>
+        </p:txBody>
+      </p:sp>
+      <p:sp>
+        <p:nvSpPr>
+          <p:cNvPr id="114" name="文本框 113">
+            <a:extLst>
+              <a:ext uri="{FF2B5EF4-FFF2-40B4-BE49-F238E27FC236}">
+                <a16:creationId xmlns:a16="http://schemas.microsoft.com/office/drawing/2014/main" id="{BB3D26F1-02E5-CA22-F76A-A6C4EB0FD572}"/>
+              </a:ext>
+            </a:extLst>
+          </p:cNvPr>
+          <p:cNvSpPr txBox="1"/>
+          <p:nvPr/>
+        </p:nvSpPr>
+        <p:spPr>
+          <a:xfrm>
+            <a:off x="17342333" y="16741308"/>
+            <a:ext cx="720000" cy="461665"/>
+          </a:xfrm>
+          <a:prstGeom prst="rect">
+            <a:avLst/>
+          </a:prstGeom>
+          <a:noFill/>
+        </p:spPr>
+        <p:txBody>
+          <a:bodyPr wrap="square" rtlCol="0">
+            <a:spAutoFit/>
+          </a:bodyPr>
+          <a:lstStyle/>
+          <a:p>
+            <a:r>
+              <a:rPr kumimoji="1" lang="en-US" altLang="zh-CN" sz="2400" dirty="0">
+                <a:latin typeface="Arial" panose="020B0604020202020204" pitchFamily="34" charset="0"/>
+                <a:cs typeface="Arial" panose="020B0604020202020204" pitchFamily="34" charset="0"/>
+              </a:rPr>
+              <a:t>1.0</a:t>
+            </a:r>
+            <a:endParaRPr kumimoji="1" lang="zh-CN" altLang="en-US" sz="2400" dirty="0">
+              <a:latin typeface="Arial" panose="020B0604020202020204" pitchFamily="34" charset="0"/>
+              <a:cs typeface="Arial" panose="020B0604020202020204" pitchFamily="34" charset="0"/>
+            </a:endParaRPr>
+          </a:p>
+        </p:txBody>
+      </p:sp>
+      <p:sp>
+        <p:nvSpPr>
+          <p:cNvPr id="122" name="文本框 121">
+            <a:extLst>
+              <a:ext uri="{FF2B5EF4-FFF2-40B4-BE49-F238E27FC236}">
+                <a16:creationId xmlns:a16="http://schemas.microsoft.com/office/drawing/2014/main" id="{8BF56FEE-72CA-1D6B-927B-1D904062EECE}"/>
+              </a:ext>
+            </a:extLst>
+          </p:cNvPr>
+          <p:cNvSpPr txBox="1"/>
+          <p:nvPr/>
+        </p:nvSpPr>
+        <p:spPr>
+          <a:xfrm>
+            <a:off x="13481747" y="19432883"/>
+            <a:ext cx="720000" cy="461665"/>
+          </a:xfrm>
+          <a:prstGeom prst="rect">
+            <a:avLst/>
+          </a:prstGeom>
+          <a:noFill/>
+        </p:spPr>
+        <p:txBody>
+          <a:bodyPr wrap="square" rtlCol="0">
+            <a:spAutoFit/>
+          </a:bodyPr>
+          <a:lstStyle/>
+          <a:p>
+            <a:r>
+              <a:rPr kumimoji="1" lang="en-US" altLang="zh-CN" sz="2400" dirty="0">
+                <a:latin typeface="Arial" panose="020B0604020202020204" pitchFamily="34" charset="0"/>
+                <a:cs typeface="Arial" panose="020B0604020202020204" pitchFamily="34" charset="0"/>
+              </a:rPr>
+              <a:t>0.5</a:t>
+            </a:r>
+            <a:endParaRPr kumimoji="1" lang="zh-CN" altLang="en-US" sz="2400" dirty="0">
+              <a:latin typeface="Arial" panose="020B0604020202020204" pitchFamily="34" charset="0"/>
+              <a:cs typeface="Arial" panose="020B0604020202020204" pitchFamily="34" charset="0"/>
+            </a:endParaRPr>
+          </a:p>
+        </p:txBody>
+      </p:sp>
+      <p:sp>
+        <p:nvSpPr>
+          <p:cNvPr id="123" name="文本框 122">
+            <a:extLst>
+              <a:ext uri="{FF2B5EF4-FFF2-40B4-BE49-F238E27FC236}">
+                <a16:creationId xmlns:a16="http://schemas.microsoft.com/office/drawing/2014/main" id="{449ACFBC-474F-038E-196E-68F8DEB7AB16}"/>
+              </a:ext>
+            </a:extLst>
+          </p:cNvPr>
+          <p:cNvSpPr txBox="1"/>
+          <p:nvPr/>
+        </p:nvSpPr>
+        <p:spPr>
+          <a:xfrm>
+            <a:off x="13481747" y="17834972"/>
+            <a:ext cx="720000" cy="461665"/>
+          </a:xfrm>
+          <a:prstGeom prst="rect">
+            <a:avLst/>
+          </a:prstGeom>
+          <a:noFill/>
+        </p:spPr>
+        <p:txBody>
+          <a:bodyPr wrap="square" rtlCol="0">
+            <a:spAutoFit/>
+          </a:bodyPr>
+          <a:lstStyle/>
+          <a:p>
+            <a:r>
+              <a:rPr kumimoji="1" lang="en-US" altLang="zh-CN" sz="2400" dirty="0">
+                <a:latin typeface="Arial" panose="020B0604020202020204" pitchFamily="34" charset="0"/>
+                <a:cs typeface="Arial" panose="020B0604020202020204" pitchFamily="34" charset="0"/>
+              </a:rPr>
+              <a:t>0.0</a:t>
+            </a:r>
+            <a:endParaRPr kumimoji="1" lang="zh-CN" altLang="en-US" sz="2400" dirty="0">
+              <a:latin typeface="Arial" panose="020B0604020202020204" pitchFamily="34" charset="0"/>
+              <a:cs typeface="Arial" panose="020B0604020202020204" pitchFamily="34" charset="0"/>
+            </a:endParaRPr>
+          </a:p>
+        </p:txBody>
+      </p:sp>
+      <p:sp>
+        <p:nvSpPr>
+          <p:cNvPr id="124" name="文本框 123">
+            <a:extLst>
+              <a:ext uri="{FF2B5EF4-FFF2-40B4-BE49-F238E27FC236}">
+                <a16:creationId xmlns:a16="http://schemas.microsoft.com/office/drawing/2014/main" id="{A8ACB8DD-760E-FF8D-0695-7A123822717A}"/>
+              </a:ext>
+            </a:extLst>
+          </p:cNvPr>
+          <p:cNvSpPr txBox="1"/>
+          <p:nvPr/>
+        </p:nvSpPr>
+        <p:spPr>
+          <a:xfrm>
+            <a:off x="13529290" y="21139153"/>
+            <a:ext cx="720000" cy="461665"/>
+          </a:xfrm>
+          <a:prstGeom prst="rect">
+            <a:avLst/>
+          </a:prstGeom>
+          <a:noFill/>
+        </p:spPr>
+        <p:txBody>
+          <a:bodyPr wrap="square" rtlCol="0">
+            <a:spAutoFit/>
+          </a:bodyPr>
+          <a:lstStyle/>
+          <a:p>
+            <a:r>
+              <a:rPr kumimoji="1" lang="en-US" altLang="zh-CN" sz="2400" dirty="0">
+                <a:latin typeface="Arial" panose="020B0604020202020204" pitchFamily="34" charset="0"/>
+                <a:cs typeface="Arial" panose="020B0604020202020204" pitchFamily="34" charset="0"/>
+              </a:rPr>
+              <a:t>1.0</a:t>
+            </a:r>
+            <a:endParaRPr kumimoji="1" lang="zh-CN" altLang="en-US" sz="2400" dirty="0">
+              <a:latin typeface="Arial" panose="020B0604020202020204" pitchFamily="34" charset="0"/>
+              <a:cs typeface="Arial" panose="020B0604020202020204" pitchFamily="34" charset="0"/>
+            </a:endParaRPr>
+          </a:p>
+        </p:txBody>
+      </p:sp>
+      <p:sp>
+        <p:nvSpPr>
+          <p:cNvPr id="125" name="文本框 124">
+            <a:extLst>
+              <a:ext uri="{FF2B5EF4-FFF2-40B4-BE49-F238E27FC236}">
+                <a16:creationId xmlns:a16="http://schemas.microsoft.com/office/drawing/2014/main" id="{CC10D5CB-707A-0EEB-59D6-5431AD920790}"/>
+              </a:ext>
+            </a:extLst>
+          </p:cNvPr>
+          <p:cNvSpPr txBox="1"/>
+          <p:nvPr/>
+        </p:nvSpPr>
+        <p:spPr>
+          <a:xfrm rot="16200000">
+            <a:off x="11654284" y="19360803"/>
+            <a:ext cx="3269855" cy="523220"/>
+          </a:xfrm>
+          <a:prstGeom prst="rect">
+            <a:avLst/>
+          </a:prstGeom>
+          <a:noFill/>
+        </p:spPr>
+        <p:txBody>
+          <a:bodyPr wrap="square" rtlCol="0">
+            <a:spAutoFit/>
+          </a:bodyPr>
+          <a:lstStyle/>
+          <a:p>
+            <a:pPr algn="ctr"/>
+            <a:r>
+              <a:rPr kumimoji="1" lang="en-US" altLang="zh-CN" sz="2800" dirty="0" err="1">
+                <a:latin typeface="Arial" panose="020B0604020202020204" pitchFamily="34" charset="0"/>
+                <a:cs typeface="Arial" panose="020B0604020202020204" pitchFamily="34" charset="0"/>
+              </a:rPr>
+              <a:t>Pos_y</a:t>
+            </a:r>
+            <a:endParaRPr kumimoji="1" lang="zh-CN" altLang="en-US" sz="2800" dirty="0">
+              <a:latin typeface="Arial" panose="020B0604020202020204" pitchFamily="34" charset="0"/>
+              <a:cs typeface="Arial" panose="020B0604020202020204" pitchFamily="34" charset="0"/>
+            </a:endParaRPr>
+          </a:p>
+        </p:txBody>
+      </p:sp>
+      <p:sp>
+        <p:nvSpPr>
+          <p:cNvPr id="126" name="文本框 125">
+            <a:extLst>
+              <a:ext uri="{FF2B5EF4-FFF2-40B4-BE49-F238E27FC236}">
+                <a16:creationId xmlns:a16="http://schemas.microsoft.com/office/drawing/2014/main" id="{1476A310-0B5E-37D8-F264-E1BDE779FC8C}"/>
+              </a:ext>
+            </a:extLst>
+          </p:cNvPr>
+          <p:cNvSpPr txBox="1"/>
+          <p:nvPr/>
+        </p:nvSpPr>
+        <p:spPr>
+          <a:xfrm>
+            <a:off x="13785661" y="21415776"/>
+            <a:ext cx="720000" cy="461665"/>
+          </a:xfrm>
+          <a:prstGeom prst="rect">
+            <a:avLst/>
+          </a:prstGeom>
+          <a:noFill/>
+        </p:spPr>
+        <p:txBody>
+          <a:bodyPr wrap="square" rtlCol="0">
+            <a:spAutoFit/>
+          </a:bodyPr>
+          <a:lstStyle/>
+          <a:p>
+            <a:r>
+              <a:rPr kumimoji="1" lang="en-US" altLang="zh-CN" sz="2400" dirty="0">
+                <a:latin typeface="Arial" panose="020B0604020202020204" pitchFamily="34" charset="0"/>
+                <a:cs typeface="Arial" panose="020B0604020202020204" pitchFamily="34" charset="0"/>
+              </a:rPr>
+              <a:t>0.0</a:t>
+            </a:r>
+            <a:endParaRPr kumimoji="1" lang="zh-CN" altLang="en-US" sz="2400" dirty="0">
+              <a:latin typeface="Arial" panose="020B0604020202020204" pitchFamily="34" charset="0"/>
+              <a:cs typeface="Arial" panose="020B0604020202020204" pitchFamily="34" charset="0"/>
+            </a:endParaRPr>
+          </a:p>
+        </p:txBody>
+      </p:sp>
+      <p:sp>
+        <p:nvSpPr>
+          <p:cNvPr id="127" name="文本框 126">
+            <a:extLst>
+              <a:ext uri="{FF2B5EF4-FFF2-40B4-BE49-F238E27FC236}">
+                <a16:creationId xmlns:a16="http://schemas.microsoft.com/office/drawing/2014/main" id="{07E37951-9D3B-7846-68D0-8BAF90460DC2}"/>
+              </a:ext>
+            </a:extLst>
+          </p:cNvPr>
+          <p:cNvSpPr txBox="1"/>
+          <p:nvPr/>
+        </p:nvSpPr>
+        <p:spPr>
+          <a:xfrm>
+            <a:off x="15386520" y="21415776"/>
+            <a:ext cx="720000" cy="461665"/>
+          </a:xfrm>
+          <a:prstGeom prst="rect">
+            <a:avLst/>
+          </a:prstGeom>
+          <a:noFill/>
+        </p:spPr>
+        <p:txBody>
+          <a:bodyPr wrap="square" rtlCol="0">
+            <a:spAutoFit/>
+          </a:bodyPr>
+          <a:lstStyle/>
+          <a:p>
+            <a:r>
+              <a:rPr kumimoji="1" lang="en-US" altLang="zh-CN" sz="2400" dirty="0">
+                <a:latin typeface="Arial" panose="020B0604020202020204" pitchFamily="34" charset="0"/>
+                <a:cs typeface="Arial" panose="020B0604020202020204" pitchFamily="34" charset="0"/>
+              </a:rPr>
+              <a:t>0.5</a:t>
+            </a:r>
+            <a:endParaRPr kumimoji="1" lang="zh-CN" altLang="en-US" sz="2400" dirty="0">
+              <a:latin typeface="Arial" panose="020B0604020202020204" pitchFamily="34" charset="0"/>
+              <a:cs typeface="Arial" panose="020B0604020202020204" pitchFamily="34" charset="0"/>
+            </a:endParaRPr>
+          </a:p>
+        </p:txBody>
+      </p:sp>
+      <p:sp>
+        <p:nvSpPr>
+          <p:cNvPr id="128" name="文本框 127">
+            <a:extLst>
+              <a:ext uri="{FF2B5EF4-FFF2-40B4-BE49-F238E27FC236}">
+                <a16:creationId xmlns:a16="http://schemas.microsoft.com/office/drawing/2014/main" id="{C648099B-91F5-7271-1EB1-92E911742D8B}"/>
+              </a:ext>
+            </a:extLst>
+          </p:cNvPr>
+          <p:cNvSpPr txBox="1"/>
+          <p:nvPr/>
+        </p:nvSpPr>
+        <p:spPr>
+          <a:xfrm>
+            <a:off x="17034929" y="21415776"/>
+            <a:ext cx="720000" cy="461665"/>
+          </a:xfrm>
+          <a:prstGeom prst="rect">
+            <a:avLst/>
+          </a:prstGeom>
+          <a:noFill/>
+        </p:spPr>
+        <p:txBody>
+          <a:bodyPr wrap="square" rtlCol="0">
+            <a:spAutoFit/>
+          </a:bodyPr>
+          <a:lstStyle/>
+          <a:p>
+            <a:r>
+              <a:rPr kumimoji="1" lang="en-US" altLang="zh-CN" sz="2400" dirty="0">
+                <a:latin typeface="Arial" panose="020B0604020202020204" pitchFamily="34" charset="0"/>
+                <a:cs typeface="Arial" panose="020B0604020202020204" pitchFamily="34" charset="0"/>
+              </a:rPr>
+              <a:t>1.0</a:t>
+            </a:r>
+            <a:endParaRPr kumimoji="1" lang="zh-CN" altLang="en-US" sz="2400" dirty="0">
+              <a:latin typeface="Arial" panose="020B0604020202020204" pitchFamily="34" charset="0"/>
+              <a:cs typeface="Arial" panose="020B0604020202020204" pitchFamily="34" charset="0"/>
+            </a:endParaRPr>
+          </a:p>
+        </p:txBody>
+      </p:sp>
+      <p:sp>
+        <p:nvSpPr>
+          <p:cNvPr id="129" name="文本框 128">
+            <a:extLst>
+              <a:ext uri="{FF2B5EF4-FFF2-40B4-BE49-F238E27FC236}">
+                <a16:creationId xmlns:a16="http://schemas.microsoft.com/office/drawing/2014/main" id="{AC4A445E-9842-3F5D-B99B-5A72570E7031}"/>
+              </a:ext>
+            </a:extLst>
+          </p:cNvPr>
+          <p:cNvSpPr txBox="1"/>
+          <p:nvPr/>
+        </p:nvSpPr>
+        <p:spPr>
+          <a:xfrm>
+            <a:off x="13469248" y="24199641"/>
+            <a:ext cx="720000" cy="461665"/>
+          </a:xfrm>
+          <a:prstGeom prst="rect">
+            <a:avLst/>
+          </a:prstGeom>
+          <a:noFill/>
+        </p:spPr>
+        <p:txBody>
+          <a:bodyPr wrap="square" rtlCol="0">
+            <a:spAutoFit/>
+          </a:bodyPr>
+          <a:lstStyle/>
+          <a:p>
+            <a:r>
+              <a:rPr kumimoji="1" lang="en-US" altLang="zh-CN" sz="2400" dirty="0">
+                <a:latin typeface="Arial" panose="020B0604020202020204" pitchFamily="34" charset="0"/>
+                <a:cs typeface="Arial" panose="020B0604020202020204" pitchFamily="34" charset="0"/>
+              </a:rPr>
+              <a:t>0.5</a:t>
+            </a:r>
+            <a:endParaRPr kumimoji="1" lang="zh-CN" altLang="en-US" sz="2400" dirty="0">
+              <a:latin typeface="Arial" panose="020B0604020202020204" pitchFamily="34" charset="0"/>
+              <a:cs typeface="Arial" panose="020B0604020202020204" pitchFamily="34" charset="0"/>
+            </a:endParaRPr>
+          </a:p>
+        </p:txBody>
+      </p:sp>
+      <p:sp>
+        <p:nvSpPr>
+          <p:cNvPr id="130" name="文本框 129">
+            <a:extLst>
+              <a:ext uri="{FF2B5EF4-FFF2-40B4-BE49-F238E27FC236}">
+                <a16:creationId xmlns:a16="http://schemas.microsoft.com/office/drawing/2014/main" id="{F470C93A-9F25-43D1-84F0-EDF81D6DD6F6}"/>
+              </a:ext>
+            </a:extLst>
+          </p:cNvPr>
+          <p:cNvSpPr txBox="1"/>
+          <p:nvPr/>
+        </p:nvSpPr>
+        <p:spPr>
+          <a:xfrm>
+            <a:off x="13469248" y="22601730"/>
+            <a:ext cx="720000" cy="461665"/>
+          </a:xfrm>
+          <a:prstGeom prst="rect">
+            <a:avLst/>
+          </a:prstGeom>
+          <a:noFill/>
+        </p:spPr>
+        <p:txBody>
+          <a:bodyPr wrap="square" rtlCol="0">
+            <a:spAutoFit/>
+          </a:bodyPr>
+          <a:lstStyle/>
+          <a:p>
+            <a:r>
+              <a:rPr kumimoji="1" lang="en-US" altLang="zh-CN" sz="2400" dirty="0">
+                <a:latin typeface="Arial" panose="020B0604020202020204" pitchFamily="34" charset="0"/>
+                <a:cs typeface="Arial" panose="020B0604020202020204" pitchFamily="34" charset="0"/>
+              </a:rPr>
+              <a:t>0.0</a:t>
+            </a:r>
+            <a:endParaRPr kumimoji="1" lang="zh-CN" altLang="en-US" sz="2400" dirty="0">
+              <a:latin typeface="Arial" panose="020B0604020202020204" pitchFamily="34" charset="0"/>
+              <a:cs typeface="Arial" panose="020B0604020202020204" pitchFamily="34" charset="0"/>
+            </a:endParaRPr>
+          </a:p>
+        </p:txBody>
+      </p:sp>
+      <p:sp>
+        <p:nvSpPr>
+          <p:cNvPr id="131" name="文本框 130">
+            <a:extLst>
+              <a:ext uri="{FF2B5EF4-FFF2-40B4-BE49-F238E27FC236}">
+                <a16:creationId xmlns:a16="http://schemas.microsoft.com/office/drawing/2014/main" id="{F9D153CC-4E4D-697E-02EC-5C7B94945A6F}"/>
+              </a:ext>
+            </a:extLst>
+          </p:cNvPr>
+          <p:cNvSpPr txBox="1"/>
+          <p:nvPr/>
+        </p:nvSpPr>
+        <p:spPr>
+          <a:xfrm>
+            <a:off x="13516791" y="25905911"/>
+            <a:ext cx="720000" cy="461665"/>
+          </a:xfrm>
+          <a:prstGeom prst="rect">
+            <a:avLst/>
+          </a:prstGeom>
+          <a:noFill/>
+        </p:spPr>
+        <p:txBody>
+          <a:bodyPr wrap="square" rtlCol="0">
+            <a:spAutoFit/>
+          </a:bodyPr>
+          <a:lstStyle/>
+          <a:p>
+            <a:r>
+              <a:rPr kumimoji="1" lang="en-US" altLang="zh-CN" sz="2400" dirty="0">
+                <a:latin typeface="Arial" panose="020B0604020202020204" pitchFamily="34" charset="0"/>
+                <a:cs typeface="Arial" panose="020B0604020202020204" pitchFamily="34" charset="0"/>
+              </a:rPr>
+              <a:t>1.0</a:t>
+            </a:r>
+            <a:endParaRPr kumimoji="1" lang="zh-CN" altLang="en-US" sz="2400" dirty="0">
+              <a:latin typeface="Arial" panose="020B0604020202020204" pitchFamily="34" charset="0"/>
+              <a:cs typeface="Arial" panose="020B0604020202020204" pitchFamily="34" charset="0"/>
+            </a:endParaRPr>
+          </a:p>
+        </p:txBody>
+      </p:sp>
+      <p:sp>
+        <p:nvSpPr>
+          <p:cNvPr id="132" name="文本框 131">
+            <a:extLst>
+              <a:ext uri="{FF2B5EF4-FFF2-40B4-BE49-F238E27FC236}">
+                <a16:creationId xmlns:a16="http://schemas.microsoft.com/office/drawing/2014/main" id="{E9693531-B406-556D-1CD4-F0F44FDF7436}"/>
+              </a:ext>
+            </a:extLst>
+          </p:cNvPr>
+          <p:cNvSpPr txBox="1"/>
+          <p:nvPr/>
+        </p:nvSpPr>
+        <p:spPr>
+          <a:xfrm rot="16200000">
+            <a:off x="11772415" y="24127561"/>
+            <a:ext cx="3269855" cy="523220"/>
+          </a:xfrm>
+          <a:prstGeom prst="rect">
+            <a:avLst/>
+          </a:prstGeom>
+          <a:noFill/>
+        </p:spPr>
+        <p:txBody>
+          <a:bodyPr wrap="square" rtlCol="0">
+            <a:spAutoFit/>
+          </a:bodyPr>
+          <a:lstStyle/>
+          <a:p>
+            <a:pPr algn="ctr"/>
+            <a:r>
+              <a:rPr kumimoji="1" lang="en-US" altLang="zh-CN" sz="2800" dirty="0" err="1">
+                <a:latin typeface="Arial" panose="020B0604020202020204" pitchFamily="34" charset="0"/>
+                <a:cs typeface="Arial" panose="020B0604020202020204" pitchFamily="34" charset="0"/>
+              </a:rPr>
+              <a:t>Pos_y</a:t>
+            </a:r>
+            <a:endParaRPr kumimoji="1" lang="zh-CN" altLang="en-US" sz="2800" dirty="0">
+              <a:latin typeface="Arial" panose="020B0604020202020204" pitchFamily="34" charset="0"/>
+              <a:cs typeface="Arial" panose="020B0604020202020204" pitchFamily="34" charset="0"/>
+            </a:endParaRPr>
+          </a:p>
+        </p:txBody>
+      </p:sp>
+      <p:sp>
+        <p:nvSpPr>
+          <p:cNvPr id="133" name="文本框 132">
+            <a:extLst>
+              <a:ext uri="{FF2B5EF4-FFF2-40B4-BE49-F238E27FC236}">
+                <a16:creationId xmlns:a16="http://schemas.microsoft.com/office/drawing/2014/main" id="{DCDE3138-3D42-74CA-9A23-7035496557DE}"/>
+              </a:ext>
+            </a:extLst>
+          </p:cNvPr>
+          <p:cNvSpPr txBox="1"/>
+          <p:nvPr/>
+        </p:nvSpPr>
+        <p:spPr>
+          <a:xfrm>
+            <a:off x="13903792" y="26182534"/>
+            <a:ext cx="720000" cy="461665"/>
+          </a:xfrm>
+          <a:prstGeom prst="rect">
+            <a:avLst/>
+          </a:prstGeom>
+          <a:noFill/>
+        </p:spPr>
+        <p:txBody>
+          <a:bodyPr wrap="square" rtlCol="0">
+            <a:spAutoFit/>
+          </a:bodyPr>
+          <a:lstStyle/>
+          <a:p>
+            <a:r>
+              <a:rPr kumimoji="1" lang="en-US" altLang="zh-CN" sz="2400" dirty="0">
+                <a:latin typeface="Arial" panose="020B0604020202020204" pitchFamily="34" charset="0"/>
+                <a:cs typeface="Arial" panose="020B0604020202020204" pitchFamily="34" charset="0"/>
+              </a:rPr>
+              <a:t>0.0</a:t>
+            </a:r>
+            <a:endParaRPr kumimoji="1" lang="zh-CN" altLang="en-US" sz="2400" dirty="0">
+              <a:latin typeface="Arial" panose="020B0604020202020204" pitchFamily="34" charset="0"/>
+              <a:cs typeface="Arial" panose="020B0604020202020204" pitchFamily="34" charset="0"/>
+            </a:endParaRPr>
+          </a:p>
+        </p:txBody>
+      </p:sp>
+      <p:sp>
+        <p:nvSpPr>
+          <p:cNvPr id="134" name="文本框 133">
+            <a:extLst>
+              <a:ext uri="{FF2B5EF4-FFF2-40B4-BE49-F238E27FC236}">
+                <a16:creationId xmlns:a16="http://schemas.microsoft.com/office/drawing/2014/main" id="{D635DE51-3F3D-39B1-D23B-CBBD1D244A5B}"/>
+              </a:ext>
+            </a:extLst>
+          </p:cNvPr>
+          <p:cNvSpPr txBox="1"/>
+          <p:nvPr/>
+        </p:nvSpPr>
+        <p:spPr>
+          <a:xfrm>
+            <a:off x="15504651" y="26182534"/>
+            <a:ext cx="720000" cy="461665"/>
+          </a:xfrm>
+          <a:prstGeom prst="rect">
+            <a:avLst/>
+          </a:prstGeom>
+          <a:noFill/>
+        </p:spPr>
+        <p:txBody>
+          <a:bodyPr wrap="square" rtlCol="0">
+            <a:spAutoFit/>
+          </a:bodyPr>
+          <a:lstStyle/>
+          <a:p>
+            <a:r>
+              <a:rPr kumimoji="1" lang="en-US" altLang="zh-CN" sz="2400" dirty="0">
+                <a:latin typeface="Arial" panose="020B0604020202020204" pitchFamily="34" charset="0"/>
+                <a:cs typeface="Arial" panose="020B0604020202020204" pitchFamily="34" charset="0"/>
+              </a:rPr>
+              <a:t>0.5</a:t>
+            </a:r>
+            <a:endParaRPr kumimoji="1" lang="zh-CN" altLang="en-US" sz="2400" dirty="0">
+              <a:latin typeface="Arial" panose="020B0604020202020204" pitchFamily="34" charset="0"/>
+              <a:cs typeface="Arial" panose="020B0604020202020204" pitchFamily="34" charset="0"/>
+            </a:endParaRPr>
+          </a:p>
+        </p:txBody>
+      </p:sp>
+      <p:sp>
+        <p:nvSpPr>
+          <p:cNvPr id="135" name="文本框 134">
+            <a:extLst>
+              <a:ext uri="{FF2B5EF4-FFF2-40B4-BE49-F238E27FC236}">
+                <a16:creationId xmlns:a16="http://schemas.microsoft.com/office/drawing/2014/main" id="{51E6B37B-5B05-A05F-22E6-4196E415BF8C}"/>
+              </a:ext>
+            </a:extLst>
+          </p:cNvPr>
+          <p:cNvSpPr txBox="1"/>
+          <p:nvPr/>
+        </p:nvSpPr>
+        <p:spPr>
+          <a:xfrm>
+            <a:off x="17335942" y="26182534"/>
+            <a:ext cx="720000" cy="461665"/>
+          </a:xfrm>
+          <a:prstGeom prst="rect">
+            <a:avLst/>
+          </a:prstGeom>
+          <a:noFill/>
+        </p:spPr>
+        <p:txBody>
+          <a:bodyPr wrap="square" rtlCol="0">
+            <a:spAutoFit/>
+          </a:bodyPr>
+          <a:lstStyle/>
+          <a:p>
+            <a:r>
+              <a:rPr kumimoji="1" lang="en-US" altLang="zh-CN" sz="2400" dirty="0">
+                <a:latin typeface="Arial" panose="020B0604020202020204" pitchFamily="34" charset="0"/>
+                <a:cs typeface="Arial" panose="020B0604020202020204" pitchFamily="34" charset="0"/>
+              </a:rPr>
+              <a:t>1.0</a:t>
+            </a:r>
+            <a:endParaRPr kumimoji="1" lang="zh-CN" altLang="en-US" sz="2400" dirty="0">
+              <a:latin typeface="Arial" panose="020B0604020202020204" pitchFamily="34" charset="0"/>
+              <a:cs typeface="Arial" panose="020B0604020202020204" pitchFamily="34" charset="0"/>
+            </a:endParaRPr>
+          </a:p>
+        </p:txBody>
+      </p:sp>
+      <p:sp>
+        <p:nvSpPr>
+          <p:cNvPr id="136" name="文本框 135">
+            <a:extLst>
+              <a:ext uri="{FF2B5EF4-FFF2-40B4-BE49-F238E27FC236}">
+                <a16:creationId xmlns:a16="http://schemas.microsoft.com/office/drawing/2014/main" id="{DBB693BB-80BD-C720-6485-4989BC6558AE}"/>
+              </a:ext>
+            </a:extLst>
+          </p:cNvPr>
+          <p:cNvSpPr txBox="1"/>
+          <p:nvPr/>
+        </p:nvSpPr>
+        <p:spPr>
+          <a:xfrm>
+            <a:off x="3408238" y="16924212"/>
+            <a:ext cx="3269855" cy="523220"/>
+          </a:xfrm>
+          <a:prstGeom prst="rect">
+            <a:avLst/>
+          </a:prstGeom>
+          <a:noFill/>
+        </p:spPr>
+        <p:txBody>
+          <a:bodyPr wrap="square" rtlCol="0">
+            <a:spAutoFit/>
+          </a:bodyPr>
+          <a:lstStyle/>
+          <a:p>
+            <a:pPr algn="ctr"/>
+            <a:r>
+              <a:rPr kumimoji="1" lang="en-US" altLang="zh-CN" sz="2800" dirty="0" err="1">
+                <a:latin typeface="Arial" panose="020B0604020202020204" pitchFamily="34" charset="0"/>
+                <a:cs typeface="Arial" panose="020B0604020202020204" pitchFamily="34" charset="0"/>
+              </a:rPr>
+              <a:t>Pos_x</a:t>
+            </a:r>
+            <a:endParaRPr kumimoji="1" lang="zh-CN" altLang="en-US" sz="2800" dirty="0">
+              <a:latin typeface="Arial" panose="020B0604020202020204" pitchFamily="34" charset="0"/>
+              <a:cs typeface="Arial" panose="020B0604020202020204" pitchFamily="34" charset="0"/>
+            </a:endParaRPr>
+          </a:p>
+        </p:txBody>
+      </p:sp>
+      <p:sp>
+        <p:nvSpPr>
+          <p:cNvPr id="137" name="文本框 136">
+            <a:extLst>
+              <a:ext uri="{FF2B5EF4-FFF2-40B4-BE49-F238E27FC236}">
+                <a16:creationId xmlns:a16="http://schemas.microsoft.com/office/drawing/2014/main" id="{1AC1E619-858F-63C1-1C54-569B77D6C162}"/>
+              </a:ext>
+            </a:extLst>
+          </p:cNvPr>
+          <p:cNvSpPr txBox="1"/>
+          <p:nvPr/>
+        </p:nvSpPr>
+        <p:spPr>
+          <a:xfrm>
+            <a:off x="3405817" y="21669533"/>
+            <a:ext cx="3269855" cy="523220"/>
+          </a:xfrm>
+          <a:prstGeom prst="rect">
+            <a:avLst/>
+          </a:prstGeom>
+          <a:noFill/>
+        </p:spPr>
+        <p:txBody>
+          <a:bodyPr wrap="square" rtlCol="0">
+            <a:spAutoFit/>
+          </a:bodyPr>
+          <a:lstStyle/>
+          <a:p>
+            <a:pPr algn="ctr"/>
+            <a:r>
+              <a:rPr kumimoji="1" lang="en-US" altLang="zh-CN" sz="2800" dirty="0" err="1">
+                <a:latin typeface="Arial" panose="020B0604020202020204" pitchFamily="34" charset="0"/>
+                <a:cs typeface="Arial" panose="020B0604020202020204" pitchFamily="34" charset="0"/>
+              </a:rPr>
+              <a:t>Pos_x</a:t>
+            </a:r>
+            <a:endParaRPr kumimoji="1" lang="zh-CN" altLang="en-US" sz="2800" dirty="0">
+              <a:latin typeface="Arial" panose="020B0604020202020204" pitchFamily="34" charset="0"/>
+              <a:cs typeface="Arial" panose="020B0604020202020204" pitchFamily="34" charset="0"/>
+            </a:endParaRPr>
+          </a:p>
+        </p:txBody>
+      </p:sp>
+      <p:sp>
+        <p:nvSpPr>
+          <p:cNvPr id="138" name="文本框 137">
+            <a:extLst>
+              <a:ext uri="{FF2B5EF4-FFF2-40B4-BE49-F238E27FC236}">
+                <a16:creationId xmlns:a16="http://schemas.microsoft.com/office/drawing/2014/main" id="{CA68F7FC-AA6F-BAF5-1BBF-F307C6DC2F01}"/>
+              </a:ext>
+            </a:extLst>
+          </p:cNvPr>
+          <p:cNvSpPr txBox="1"/>
+          <p:nvPr/>
+        </p:nvSpPr>
+        <p:spPr>
+          <a:xfrm>
+            <a:off x="3381298" y="26446733"/>
+            <a:ext cx="3269855" cy="523220"/>
+          </a:xfrm>
+          <a:prstGeom prst="rect">
+            <a:avLst/>
+          </a:prstGeom>
+          <a:noFill/>
+        </p:spPr>
+        <p:txBody>
+          <a:bodyPr wrap="square" rtlCol="0">
+            <a:spAutoFit/>
+          </a:bodyPr>
+          <a:lstStyle/>
+          <a:p>
+            <a:pPr algn="ctr"/>
+            <a:r>
+              <a:rPr kumimoji="1" lang="en-US" altLang="zh-CN" sz="2800" dirty="0" err="1">
+                <a:latin typeface="Arial" panose="020B0604020202020204" pitchFamily="34" charset="0"/>
+                <a:cs typeface="Arial" panose="020B0604020202020204" pitchFamily="34" charset="0"/>
+              </a:rPr>
+              <a:t>Pos_x</a:t>
+            </a:r>
+            <a:endParaRPr kumimoji="1" lang="zh-CN" altLang="en-US" sz="2800" dirty="0">
+              <a:latin typeface="Arial" panose="020B0604020202020204" pitchFamily="34" charset="0"/>
+              <a:cs typeface="Arial" panose="020B0604020202020204" pitchFamily="34" charset="0"/>
+            </a:endParaRPr>
+          </a:p>
+        </p:txBody>
+      </p:sp>
+      <p:sp>
+        <p:nvSpPr>
+          <p:cNvPr id="139" name="文本框 138">
+            <a:extLst>
+              <a:ext uri="{FF2B5EF4-FFF2-40B4-BE49-F238E27FC236}">
+                <a16:creationId xmlns:a16="http://schemas.microsoft.com/office/drawing/2014/main" id="{9D3A8B86-7632-F3A9-F132-A8CC644E8C0F}"/>
+              </a:ext>
+            </a:extLst>
+          </p:cNvPr>
+          <p:cNvSpPr txBox="1"/>
+          <p:nvPr/>
+        </p:nvSpPr>
+        <p:spPr>
+          <a:xfrm>
+            <a:off x="14146469" y="16991877"/>
+            <a:ext cx="3269855" cy="523220"/>
+          </a:xfrm>
+          <a:prstGeom prst="rect">
+            <a:avLst/>
+          </a:prstGeom>
+          <a:noFill/>
+        </p:spPr>
+        <p:txBody>
+          <a:bodyPr wrap="square" rtlCol="0">
+            <a:spAutoFit/>
+          </a:bodyPr>
+          <a:lstStyle/>
+          <a:p>
+            <a:pPr algn="ctr"/>
+            <a:r>
+              <a:rPr kumimoji="1" lang="en-US" altLang="zh-CN" sz="2800" dirty="0" err="1">
+                <a:latin typeface="Arial" panose="020B0604020202020204" pitchFamily="34" charset="0"/>
+                <a:cs typeface="Arial" panose="020B0604020202020204" pitchFamily="34" charset="0"/>
+              </a:rPr>
+              <a:t>Pos_x</a:t>
+            </a:r>
+            <a:endParaRPr kumimoji="1" lang="zh-CN" altLang="en-US" sz="2800" dirty="0">
+              <a:latin typeface="Arial" panose="020B0604020202020204" pitchFamily="34" charset="0"/>
+              <a:cs typeface="Arial" panose="020B0604020202020204" pitchFamily="34" charset="0"/>
+            </a:endParaRPr>
+          </a:p>
+        </p:txBody>
+      </p:sp>
+      <p:sp>
+        <p:nvSpPr>
+          <p:cNvPr id="140" name="文本框 139">
+            <a:extLst>
+              <a:ext uri="{FF2B5EF4-FFF2-40B4-BE49-F238E27FC236}">
+                <a16:creationId xmlns:a16="http://schemas.microsoft.com/office/drawing/2014/main" id="{CF073FD6-0685-7B1E-823F-E267FAE83918}"/>
+              </a:ext>
+            </a:extLst>
+          </p:cNvPr>
+          <p:cNvSpPr txBox="1"/>
+          <p:nvPr/>
+        </p:nvSpPr>
+        <p:spPr>
+          <a:xfrm>
+            <a:off x="14144048" y="21669533"/>
+            <a:ext cx="3269855" cy="523220"/>
+          </a:xfrm>
+          <a:prstGeom prst="rect">
+            <a:avLst/>
+          </a:prstGeom>
+          <a:noFill/>
+        </p:spPr>
+        <p:txBody>
+          <a:bodyPr wrap="square" rtlCol="0">
+            <a:spAutoFit/>
+          </a:bodyPr>
+          <a:lstStyle/>
+          <a:p>
+            <a:pPr algn="ctr"/>
+            <a:r>
+              <a:rPr kumimoji="1" lang="en-US" altLang="zh-CN" sz="2800" dirty="0" err="1">
+                <a:latin typeface="Arial" panose="020B0604020202020204" pitchFamily="34" charset="0"/>
+                <a:cs typeface="Arial" panose="020B0604020202020204" pitchFamily="34" charset="0"/>
+              </a:rPr>
+              <a:t>Pos_x</a:t>
+            </a:r>
+            <a:endParaRPr kumimoji="1" lang="zh-CN" altLang="en-US" sz="2800" dirty="0">
+              <a:latin typeface="Arial" panose="020B0604020202020204" pitchFamily="34" charset="0"/>
+              <a:cs typeface="Arial" panose="020B0604020202020204" pitchFamily="34" charset="0"/>
+            </a:endParaRPr>
+          </a:p>
+        </p:txBody>
+      </p:sp>
+      <p:sp>
+        <p:nvSpPr>
+          <p:cNvPr id="141" name="文本框 140">
+            <a:extLst>
+              <a:ext uri="{FF2B5EF4-FFF2-40B4-BE49-F238E27FC236}">
+                <a16:creationId xmlns:a16="http://schemas.microsoft.com/office/drawing/2014/main" id="{32185761-A765-615F-B3D1-8A58E1053FD7}"/>
+              </a:ext>
+            </a:extLst>
+          </p:cNvPr>
+          <p:cNvSpPr txBox="1"/>
+          <p:nvPr/>
+        </p:nvSpPr>
+        <p:spPr>
+          <a:xfrm>
+            <a:off x="14119529" y="26446733"/>
+            <a:ext cx="3269855" cy="523220"/>
+          </a:xfrm>
+          <a:prstGeom prst="rect">
+            <a:avLst/>
+          </a:prstGeom>
+          <a:noFill/>
+        </p:spPr>
+        <p:txBody>
+          <a:bodyPr wrap="square" rtlCol="0">
+            <a:spAutoFit/>
+          </a:bodyPr>
+          <a:lstStyle/>
+          <a:p>
+            <a:pPr algn="ctr"/>
+            <a:r>
+              <a:rPr kumimoji="1" lang="en-US" altLang="zh-CN" sz="2800" dirty="0" err="1">
+                <a:latin typeface="Arial" panose="020B0604020202020204" pitchFamily="34" charset="0"/>
+                <a:cs typeface="Arial" panose="020B0604020202020204" pitchFamily="34" charset="0"/>
+              </a:rPr>
+              <a:t>Pos_x</a:t>
+            </a:r>
+            <a:endParaRPr kumimoji="1" lang="zh-CN" altLang="en-US" sz="2800" dirty="0">
+              <a:latin typeface="Arial" panose="020B0604020202020204" pitchFamily="34" charset="0"/>
+              <a:cs typeface="Arial" panose="020B0604020202020204" pitchFamily="34" charset="0"/>
+            </a:endParaRPr>
+          </a:p>
+        </p:txBody>
+      </p:sp>
+      <p:sp>
+        <p:nvSpPr>
+          <p:cNvPr id="142" name="文本框 141">
+            <a:extLst>
+              <a:ext uri="{FF2B5EF4-FFF2-40B4-BE49-F238E27FC236}">
+                <a16:creationId xmlns:a16="http://schemas.microsoft.com/office/drawing/2014/main" id="{0C375F38-0DD7-9E02-E73E-AA233EA4CB5E}"/>
+              </a:ext>
+            </a:extLst>
+          </p:cNvPr>
+          <p:cNvSpPr txBox="1"/>
+          <p:nvPr/>
+        </p:nvSpPr>
+        <p:spPr>
+          <a:xfrm>
+            <a:off x="3308400" y="12667580"/>
+            <a:ext cx="8640000" cy="720000"/>
+          </a:xfrm>
+          <a:prstGeom prst="rect">
+            <a:avLst/>
+          </a:prstGeom>
+          <a:noFill/>
+        </p:spPr>
+        <p:txBody>
+          <a:bodyPr wrap="square" rtlCol="0">
+            <a:spAutoFit/>
+          </a:bodyPr>
+          <a:lstStyle/>
+          <a:p>
+            <a:pPr algn="ctr"/>
+            <a:r>
+              <a:rPr kumimoji="1" lang="en-US" altLang="zh-CN" sz="3200" dirty="0">
+                <a:latin typeface="Arial" panose="020B0604020202020204" pitchFamily="34" charset="0"/>
+                <a:cs typeface="Arial" panose="020B0604020202020204" pitchFamily="34" charset="0"/>
+              </a:rPr>
+              <a:t>TN3K</a:t>
+            </a:r>
+            <a:r>
+              <a:rPr kumimoji="1" lang="zh-CN" altLang="en-US" sz="3200" dirty="0">
+                <a:latin typeface="Arial" panose="020B0604020202020204" pitchFamily="34" charset="0"/>
+                <a:cs typeface="Arial" panose="020B0604020202020204" pitchFamily="34" charset="0"/>
+              </a:rPr>
+              <a:t> </a:t>
+            </a:r>
+            <a:r>
+              <a:rPr kumimoji="1" lang="en-US" altLang="zh-CN" sz="3200" dirty="0">
+                <a:latin typeface="Arial" panose="020B0604020202020204" pitchFamily="34" charset="0"/>
+                <a:cs typeface="Arial" panose="020B0604020202020204" pitchFamily="34" charset="0"/>
+              </a:rPr>
+              <a:t>(N=5,347)</a:t>
+            </a:r>
+            <a:endParaRPr kumimoji="1" lang="zh-CN" altLang="en-US" sz="3200" dirty="0">
+              <a:latin typeface="Arial" panose="020B0604020202020204" pitchFamily="34" charset="0"/>
+              <a:cs typeface="Arial" panose="020B0604020202020204" pitchFamily="34" charset="0"/>
+            </a:endParaRPr>
+          </a:p>
+        </p:txBody>
+      </p:sp>
+      <p:sp>
+        <p:nvSpPr>
+          <p:cNvPr id="159" name="文本框 158">
+            <a:extLst>
+              <a:ext uri="{FF2B5EF4-FFF2-40B4-BE49-F238E27FC236}">
+                <a16:creationId xmlns:a16="http://schemas.microsoft.com/office/drawing/2014/main" id="{CB8AEFAB-3CDA-134B-39D4-1E2007FB8454}"/>
+              </a:ext>
+            </a:extLst>
+          </p:cNvPr>
+          <p:cNvSpPr txBox="1"/>
+          <p:nvPr/>
+        </p:nvSpPr>
+        <p:spPr>
+          <a:xfrm>
+            <a:off x="14637600" y="12691224"/>
+            <a:ext cx="8640000" cy="720000"/>
+          </a:xfrm>
+          <a:prstGeom prst="rect">
+            <a:avLst/>
+          </a:prstGeom>
+          <a:noFill/>
+        </p:spPr>
+        <p:txBody>
+          <a:bodyPr wrap="square" rtlCol="0">
+            <a:spAutoFit/>
+          </a:bodyPr>
+          <a:lstStyle/>
+          <a:p>
+            <a:pPr algn="ctr"/>
+            <a:r>
+              <a:rPr kumimoji="1" lang="en-US" altLang="zh-CN" sz="3200" dirty="0">
+                <a:latin typeface="Arial" panose="020B0604020202020204" pitchFamily="34" charset="0"/>
+                <a:cs typeface="Arial" panose="020B0604020202020204" pitchFamily="34" charset="0"/>
+              </a:rPr>
+              <a:t>TN5K</a:t>
+            </a:r>
+            <a:r>
+              <a:rPr kumimoji="1" lang="zh-CN" altLang="en-US" sz="3200" dirty="0">
+                <a:latin typeface="Arial" panose="020B0604020202020204" pitchFamily="34" charset="0"/>
+                <a:cs typeface="Arial" panose="020B0604020202020204" pitchFamily="34" charset="0"/>
+              </a:rPr>
+              <a:t> </a:t>
+            </a:r>
+            <a:r>
+              <a:rPr kumimoji="1" lang="en-US" altLang="zh-CN" sz="3200" dirty="0">
+                <a:latin typeface="Arial" panose="020B0604020202020204" pitchFamily="34" charset="0"/>
+                <a:cs typeface="Arial" panose="020B0604020202020204" pitchFamily="34" charset="0"/>
+              </a:rPr>
+              <a:t>(N=5,000)</a:t>
+            </a:r>
+            <a:endParaRPr kumimoji="1" lang="zh-CN" altLang="en-US" sz="3200" dirty="0">
+              <a:latin typeface="Arial" panose="020B0604020202020204" pitchFamily="34" charset="0"/>
+              <a:cs typeface="Arial" panose="020B0604020202020204" pitchFamily="34" charset="0"/>
+            </a:endParaRPr>
+          </a:p>
+        </p:txBody>
+      </p:sp>
+      <p:sp>
+        <p:nvSpPr>
+          <p:cNvPr id="160" name="文本框 159">
+            <a:extLst>
+              <a:ext uri="{FF2B5EF4-FFF2-40B4-BE49-F238E27FC236}">
+                <a16:creationId xmlns:a16="http://schemas.microsoft.com/office/drawing/2014/main" id="{C6C17B4F-6BD8-6777-E3E4-38D76CEDB202}"/>
+              </a:ext>
+            </a:extLst>
+          </p:cNvPr>
+          <p:cNvSpPr txBox="1"/>
+          <p:nvPr/>
+        </p:nvSpPr>
+        <p:spPr>
+          <a:xfrm>
+            <a:off x="3308400" y="17312503"/>
+            <a:ext cx="8640000" cy="584775"/>
+          </a:xfrm>
+          <a:prstGeom prst="rect">
+            <a:avLst/>
+          </a:prstGeom>
+          <a:noFill/>
+        </p:spPr>
+        <p:txBody>
+          <a:bodyPr wrap="square" rtlCol="0">
+            <a:spAutoFit/>
+          </a:bodyPr>
+          <a:lstStyle/>
+          <a:p>
+            <a:pPr algn="ctr"/>
+            <a:r>
+              <a:rPr kumimoji="1" lang="en-US" altLang="zh-CN" sz="3200" dirty="0" err="1">
+                <a:latin typeface="Arial" panose="020B0604020202020204" pitchFamily="34" charset="0"/>
+                <a:cs typeface="Arial" panose="020B0604020202020204" pitchFamily="34" charset="0"/>
+              </a:rPr>
+              <a:t>ThyroidXL</a:t>
+            </a:r>
+            <a:r>
+              <a:rPr kumimoji="1" lang="zh-CN" altLang="en-US" sz="3200" dirty="0">
+                <a:latin typeface="Arial" panose="020B0604020202020204" pitchFamily="34" charset="0"/>
+                <a:cs typeface="Arial" panose="020B0604020202020204" pitchFamily="34" charset="0"/>
+              </a:rPr>
+              <a:t> </a:t>
+            </a:r>
+            <a:r>
+              <a:rPr kumimoji="1" lang="en-US" altLang="zh-CN" sz="3200" dirty="0">
+                <a:latin typeface="Arial" panose="020B0604020202020204" pitchFamily="34" charset="0"/>
+                <a:cs typeface="Arial" panose="020B0604020202020204" pitchFamily="34" charset="0"/>
+              </a:rPr>
+              <a:t>(N=11,631)</a:t>
+            </a:r>
+            <a:endParaRPr kumimoji="1" lang="zh-CN" altLang="en-US" sz="3200" dirty="0">
+              <a:latin typeface="Arial" panose="020B0604020202020204" pitchFamily="34" charset="0"/>
+              <a:cs typeface="Arial" panose="020B0604020202020204" pitchFamily="34" charset="0"/>
+            </a:endParaRPr>
+          </a:p>
+        </p:txBody>
+      </p:sp>
+      <p:sp>
+        <p:nvSpPr>
+          <p:cNvPr id="161" name="文本框 160">
+            <a:extLst>
+              <a:ext uri="{FF2B5EF4-FFF2-40B4-BE49-F238E27FC236}">
+                <a16:creationId xmlns:a16="http://schemas.microsoft.com/office/drawing/2014/main" id="{49417108-DB68-410A-DBF0-279602FA2301}"/>
+              </a:ext>
+            </a:extLst>
+          </p:cNvPr>
+          <p:cNvSpPr txBox="1"/>
+          <p:nvPr/>
+        </p:nvSpPr>
+        <p:spPr>
+          <a:xfrm>
+            <a:off x="14637600" y="17312503"/>
+            <a:ext cx="8640000" cy="584775"/>
+          </a:xfrm>
+          <a:prstGeom prst="rect">
+            <a:avLst/>
+          </a:prstGeom>
+          <a:noFill/>
+        </p:spPr>
+        <p:txBody>
+          <a:bodyPr wrap="square" rtlCol="0">
+            <a:spAutoFit/>
+          </a:bodyPr>
+          <a:lstStyle/>
+          <a:p>
+            <a:pPr algn="ctr"/>
+            <a:r>
+              <a:rPr kumimoji="1" lang="en-US" altLang="zh-CN" sz="3200" dirty="0">
+                <a:latin typeface="Arial" panose="020B0604020202020204" pitchFamily="34" charset="0"/>
+                <a:cs typeface="Arial" panose="020B0604020202020204" pitchFamily="34" charset="0"/>
+              </a:rPr>
+              <a:t>DDTI</a:t>
+            </a:r>
+            <a:r>
+              <a:rPr kumimoji="1" lang="zh-CN" altLang="en-US" sz="3200" dirty="0">
+                <a:latin typeface="Arial" panose="020B0604020202020204" pitchFamily="34" charset="0"/>
+                <a:cs typeface="Arial" panose="020B0604020202020204" pitchFamily="34" charset="0"/>
+              </a:rPr>
+              <a:t> </a:t>
+            </a:r>
+            <a:r>
+              <a:rPr kumimoji="1" lang="en-US" altLang="zh-CN" sz="3200" dirty="0">
+                <a:latin typeface="Arial" panose="020B0604020202020204" pitchFamily="34" charset="0"/>
+                <a:cs typeface="Arial" panose="020B0604020202020204" pitchFamily="34" charset="0"/>
+              </a:rPr>
+              <a:t>(N=349)</a:t>
+            </a:r>
+            <a:endParaRPr kumimoji="1" lang="zh-CN" altLang="en-US" sz="3200" dirty="0">
+              <a:latin typeface="Arial" panose="020B0604020202020204" pitchFamily="34" charset="0"/>
+              <a:cs typeface="Arial" panose="020B0604020202020204" pitchFamily="34" charset="0"/>
+            </a:endParaRPr>
+          </a:p>
+        </p:txBody>
+      </p:sp>
+      <p:sp>
+        <p:nvSpPr>
+          <p:cNvPr id="162" name="文本框 161">
+            <a:extLst>
+              <a:ext uri="{FF2B5EF4-FFF2-40B4-BE49-F238E27FC236}">
+                <a16:creationId xmlns:a16="http://schemas.microsoft.com/office/drawing/2014/main" id="{FF14CBFE-5226-914B-574A-B54C41F472CD}"/>
+              </a:ext>
+            </a:extLst>
+          </p:cNvPr>
+          <p:cNvSpPr txBox="1"/>
+          <p:nvPr/>
+        </p:nvSpPr>
+        <p:spPr>
+          <a:xfrm>
+            <a:off x="3308400" y="22064900"/>
+            <a:ext cx="8640000" cy="584775"/>
+          </a:xfrm>
+          <a:prstGeom prst="rect">
+            <a:avLst/>
+          </a:prstGeom>
+          <a:noFill/>
+        </p:spPr>
+        <p:txBody>
+          <a:bodyPr wrap="square" rtlCol="0">
+            <a:spAutoFit/>
+          </a:bodyPr>
+          <a:lstStyle/>
+          <a:p>
+            <a:pPr algn="ctr"/>
+            <a:r>
+              <a:rPr kumimoji="1" lang="en-US" altLang="zh-CN" sz="3200" dirty="0">
+                <a:latin typeface="Arial" panose="020B0604020202020204" pitchFamily="34" charset="0"/>
+                <a:cs typeface="Arial" panose="020B0604020202020204" pitchFamily="34" charset="0"/>
+              </a:rPr>
+              <a:t>ZJH-8K</a:t>
+            </a:r>
+            <a:r>
+              <a:rPr kumimoji="1" lang="zh-CN" altLang="en-US" sz="3200" dirty="0">
+                <a:latin typeface="Arial" panose="020B0604020202020204" pitchFamily="34" charset="0"/>
+                <a:cs typeface="Arial" panose="020B0604020202020204" pitchFamily="34" charset="0"/>
+              </a:rPr>
+              <a:t> </a:t>
+            </a:r>
+            <a:r>
+              <a:rPr kumimoji="1" lang="en-US" altLang="zh-CN" sz="3200" dirty="0">
+                <a:latin typeface="Arial" panose="020B0604020202020204" pitchFamily="34" charset="0"/>
+                <a:cs typeface="Arial" panose="020B0604020202020204" pitchFamily="34" charset="0"/>
+              </a:rPr>
+              <a:t>(N=7,958)</a:t>
+            </a:r>
+            <a:endParaRPr kumimoji="1" lang="zh-CN" altLang="en-US" sz="3200" dirty="0">
+              <a:latin typeface="Arial" panose="020B0604020202020204" pitchFamily="34" charset="0"/>
+              <a:cs typeface="Arial" panose="020B0604020202020204" pitchFamily="34" charset="0"/>
+            </a:endParaRPr>
+          </a:p>
+        </p:txBody>
+      </p:sp>
+      <p:sp>
+        <p:nvSpPr>
+          <p:cNvPr id="163" name="文本框 162">
+            <a:extLst>
+              <a:ext uri="{FF2B5EF4-FFF2-40B4-BE49-F238E27FC236}">
+                <a16:creationId xmlns:a16="http://schemas.microsoft.com/office/drawing/2014/main" id="{D94114E9-A577-937C-235D-175ACB6F1699}"/>
+              </a:ext>
+            </a:extLst>
+          </p:cNvPr>
+          <p:cNvSpPr txBox="1"/>
+          <p:nvPr/>
+        </p:nvSpPr>
+        <p:spPr>
+          <a:xfrm>
+            <a:off x="14637600" y="22060296"/>
+            <a:ext cx="8640000" cy="584775"/>
+          </a:xfrm>
+          <a:prstGeom prst="rect">
+            <a:avLst/>
+          </a:prstGeom>
+          <a:noFill/>
+        </p:spPr>
+        <p:txBody>
+          <a:bodyPr wrap="square" rtlCol="0">
+            <a:spAutoFit/>
+          </a:bodyPr>
+          <a:lstStyle/>
+          <a:p>
+            <a:pPr algn="ctr"/>
+            <a:r>
+              <a:rPr kumimoji="1" lang="en-US" altLang="zh-CN" sz="3200" dirty="0">
+                <a:latin typeface="Arial" panose="020B0604020202020204" pitchFamily="34" charset="0"/>
+                <a:cs typeface="Arial" panose="020B0604020202020204" pitchFamily="34" charset="0"/>
+              </a:rPr>
+              <a:t>RJH-7K</a:t>
+            </a:r>
+            <a:r>
+              <a:rPr kumimoji="1" lang="zh-CN" altLang="en-US" sz="3200" dirty="0">
+                <a:latin typeface="Arial" panose="020B0604020202020204" pitchFamily="34" charset="0"/>
+                <a:cs typeface="Arial" panose="020B0604020202020204" pitchFamily="34" charset="0"/>
+              </a:rPr>
+              <a:t> </a:t>
+            </a:r>
+            <a:r>
+              <a:rPr kumimoji="1" lang="en-US" altLang="zh-CN" sz="3200" dirty="0">
+                <a:latin typeface="Arial" panose="020B0604020202020204" pitchFamily="34" charset="0"/>
+                <a:cs typeface="Arial" panose="020B0604020202020204" pitchFamily="34" charset="0"/>
+              </a:rPr>
+              <a:t>(N=7,288)</a:t>
+            </a:r>
+            <a:endParaRPr kumimoji="1" lang="zh-CN" altLang="en-US" sz="3200" dirty="0">
+              <a:latin typeface="Arial" panose="020B0604020202020204" pitchFamily="34" charset="0"/>
+              <a:cs typeface="Arial" panose="020B0604020202020204" pitchFamily="34" charset="0"/>
+            </a:endParaRPr>
+          </a:p>
+        </p:txBody>
+      </p:sp>
+      <p:sp>
+        <p:nvSpPr>
+          <p:cNvPr id="176" name="文本框 175">
+            <a:extLst>
+              <a:ext uri="{FF2B5EF4-FFF2-40B4-BE49-F238E27FC236}">
+                <a16:creationId xmlns:a16="http://schemas.microsoft.com/office/drawing/2014/main" id="{0EB84821-8A19-B7E0-EAB6-CA44466DE4D6}"/>
+              </a:ext>
+            </a:extLst>
+          </p:cNvPr>
+          <p:cNvSpPr txBox="1"/>
+          <p:nvPr/>
+        </p:nvSpPr>
+        <p:spPr>
+          <a:xfrm rot="16200000">
+            <a:off x="5307246" y="14568148"/>
+            <a:ext cx="3269855" cy="523220"/>
+          </a:xfrm>
+          <a:prstGeom prst="rect">
+            <a:avLst/>
+          </a:prstGeom>
+          <a:noFill/>
+        </p:spPr>
+        <p:txBody>
+          <a:bodyPr wrap="square" rtlCol="0">
+            <a:spAutoFit/>
+          </a:bodyPr>
+          <a:lstStyle/>
+          <a:p>
+            <a:pPr algn="ctr"/>
+            <a:r>
+              <a:rPr kumimoji="1" lang="en-US" altLang="zh-CN" sz="2800" dirty="0">
+                <a:latin typeface="Arial" panose="020B0604020202020204" pitchFamily="34" charset="0"/>
+                <a:cs typeface="Arial" panose="020B0604020202020204" pitchFamily="34" charset="0"/>
+              </a:rPr>
+              <a:t>density</a:t>
+            </a:r>
+            <a:endParaRPr kumimoji="1" lang="zh-CN" altLang="en-US" sz="2800" dirty="0">
+              <a:latin typeface="Arial" panose="020B0604020202020204" pitchFamily="34" charset="0"/>
+              <a:cs typeface="Arial" panose="020B0604020202020204" pitchFamily="34" charset="0"/>
+            </a:endParaRPr>
+          </a:p>
+        </p:txBody>
+      </p:sp>
+      <p:sp>
+        <p:nvSpPr>
+          <p:cNvPr id="177" name="文本框 176">
+            <a:extLst>
+              <a:ext uri="{FF2B5EF4-FFF2-40B4-BE49-F238E27FC236}">
+                <a16:creationId xmlns:a16="http://schemas.microsoft.com/office/drawing/2014/main" id="{7851EC8A-33E1-D103-3826-CCC4F6C9496C}"/>
+              </a:ext>
+            </a:extLst>
+          </p:cNvPr>
+          <p:cNvSpPr txBox="1"/>
+          <p:nvPr/>
+        </p:nvSpPr>
+        <p:spPr>
+          <a:xfrm>
+            <a:off x="7085830" y="13502211"/>
+            <a:ext cx="720000" cy="461665"/>
+          </a:xfrm>
+          <a:prstGeom prst="rect">
+            <a:avLst/>
+          </a:prstGeom>
+          <a:noFill/>
+        </p:spPr>
+        <p:txBody>
+          <a:bodyPr wrap="square" rtlCol="0">
+            <a:spAutoFit/>
+          </a:bodyPr>
+          <a:lstStyle/>
+          <a:p>
+            <a:r>
+              <a:rPr kumimoji="1" lang="en-US" altLang="zh-CN" sz="2400" dirty="0">
+                <a:latin typeface="Arial" panose="020B0604020202020204" pitchFamily="34" charset="0"/>
+                <a:cs typeface="Arial" panose="020B0604020202020204" pitchFamily="34" charset="0"/>
+              </a:rPr>
+              <a:t>6</a:t>
+            </a:r>
+            <a:endParaRPr kumimoji="1" lang="zh-CN" altLang="en-US" sz="2400" dirty="0">
+              <a:latin typeface="Arial" panose="020B0604020202020204" pitchFamily="34" charset="0"/>
+              <a:cs typeface="Arial" panose="020B0604020202020204" pitchFamily="34" charset="0"/>
+            </a:endParaRPr>
+          </a:p>
+        </p:txBody>
+      </p:sp>
+      <p:sp>
+        <p:nvSpPr>
+          <p:cNvPr id="178" name="文本框 177">
+            <a:extLst>
+              <a:ext uri="{FF2B5EF4-FFF2-40B4-BE49-F238E27FC236}">
+                <a16:creationId xmlns:a16="http://schemas.microsoft.com/office/drawing/2014/main" id="{9CBF440E-2E9B-3E0B-B6FD-1E6396EBEB14}"/>
+              </a:ext>
+            </a:extLst>
+          </p:cNvPr>
+          <p:cNvSpPr txBox="1"/>
+          <p:nvPr/>
+        </p:nvSpPr>
+        <p:spPr>
+          <a:xfrm>
+            <a:off x="7085830" y="14482017"/>
+            <a:ext cx="720000" cy="461665"/>
+          </a:xfrm>
+          <a:prstGeom prst="rect">
+            <a:avLst/>
+          </a:prstGeom>
+          <a:noFill/>
+        </p:spPr>
+        <p:txBody>
+          <a:bodyPr wrap="square" rtlCol="0">
+            <a:spAutoFit/>
+          </a:bodyPr>
+          <a:lstStyle/>
+          <a:p>
+            <a:r>
+              <a:rPr kumimoji="1" lang="en-US" altLang="zh-CN" sz="2400" dirty="0">
+                <a:latin typeface="Arial" panose="020B0604020202020204" pitchFamily="34" charset="0"/>
+                <a:cs typeface="Arial" panose="020B0604020202020204" pitchFamily="34" charset="0"/>
+              </a:rPr>
+              <a:t>4</a:t>
+            </a:r>
+            <a:endParaRPr kumimoji="1" lang="zh-CN" altLang="en-US" sz="2400" dirty="0">
+              <a:latin typeface="Arial" panose="020B0604020202020204" pitchFamily="34" charset="0"/>
+              <a:cs typeface="Arial" panose="020B0604020202020204" pitchFamily="34" charset="0"/>
+            </a:endParaRPr>
+          </a:p>
+        </p:txBody>
+      </p:sp>
+      <p:sp>
+        <p:nvSpPr>
+          <p:cNvPr id="179" name="文本框 178">
+            <a:extLst>
+              <a:ext uri="{FF2B5EF4-FFF2-40B4-BE49-F238E27FC236}">
+                <a16:creationId xmlns:a16="http://schemas.microsoft.com/office/drawing/2014/main" id="{3E3FF2A0-60E9-70D4-1743-D743779D2FFB}"/>
+              </a:ext>
+            </a:extLst>
+          </p:cNvPr>
+          <p:cNvSpPr txBox="1"/>
+          <p:nvPr/>
+        </p:nvSpPr>
+        <p:spPr>
+          <a:xfrm>
+            <a:off x="7085830" y="15419933"/>
+            <a:ext cx="720000" cy="461665"/>
+          </a:xfrm>
+          <a:prstGeom prst="rect">
+            <a:avLst/>
+          </a:prstGeom>
+          <a:noFill/>
+        </p:spPr>
+        <p:txBody>
+          <a:bodyPr wrap="square" rtlCol="0">
+            <a:spAutoFit/>
+          </a:bodyPr>
+          <a:lstStyle/>
+          <a:p>
+            <a:r>
+              <a:rPr kumimoji="1" lang="en-US" altLang="zh-CN" sz="2400" dirty="0">
+                <a:latin typeface="Arial" panose="020B0604020202020204" pitchFamily="34" charset="0"/>
+                <a:cs typeface="Arial" panose="020B0604020202020204" pitchFamily="34" charset="0"/>
+              </a:rPr>
+              <a:t>2</a:t>
+            </a:r>
+            <a:endParaRPr kumimoji="1" lang="zh-CN" altLang="en-US" sz="2400" dirty="0">
+              <a:latin typeface="Arial" panose="020B0604020202020204" pitchFamily="34" charset="0"/>
+              <a:cs typeface="Arial" panose="020B0604020202020204" pitchFamily="34" charset="0"/>
+            </a:endParaRPr>
+          </a:p>
+        </p:txBody>
+      </p:sp>
+      <p:sp>
+        <p:nvSpPr>
+          <p:cNvPr id="180" name="文本框 179">
+            <a:extLst>
+              <a:ext uri="{FF2B5EF4-FFF2-40B4-BE49-F238E27FC236}">
+                <a16:creationId xmlns:a16="http://schemas.microsoft.com/office/drawing/2014/main" id="{61A41E69-2A29-B9C7-9E2E-448C1BD46308}"/>
+              </a:ext>
+            </a:extLst>
+          </p:cNvPr>
+          <p:cNvSpPr txBox="1"/>
+          <p:nvPr/>
+        </p:nvSpPr>
+        <p:spPr>
+          <a:xfrm>
+            <a:off x="7085830" y="16328065"/>
+            <a:ext cx="720000" cy="461665"/>
+          </a:xfrm>
+          <a:prstGeom prst="rect">
+            <a:avLst/>
+          </a:prstGeom>
+          <a:noFill/>
+        </p:spPr>
+        <p:txBody>
+          <a:bodyPr wrap="square" rtlCol="0">
+            <a:spAutoFit/>
+          </a:bodyPr>
+          <a:lstStyle/>
+          <a:p>
+            <a:r>
+              <a:rPr kumimoji="1" lang="en-US" altLang="zh-CN" sz="2400" dirty="0">
+                <a:latin typeface="Arial" panose="020B0604020202020204" pitchFamily="34" charset="0"/>
+                <a:cs typeface="Arial" panose="020B0604020202020204" pitchFamily="34" charset="0"/>
+              </a:rPr>
+              <a:t>0</a:t>
+            </a:r>
+            <a:endParaRPr kumimoji="1" lang="zh-CN" altLang="en-US" sz="2400" dirty="0">
+              <a:latin typeface="Arial" panose="020B0604020202020204" pitchFamily="34" charset="0"/>
+              <a:cs typeface="Arial" panose="020B0604020202020204" pitchFamily="34" charset="0"/>
+            </a:endParaRPr>
+          </a:p>
+        </p:txBody>
+      </p:sp>
+      <p:sp>
+        <p:nvSpPr>
+          <p:cNvPr id="181" name="文本框 180">
+            <a:extLst>
+              <a:ext uri="{FF2B5EF4-FFF2-40B4-BE49-F238E27FC236}">
+                <a16:creationId xmlns:a16="http://schemas.microsoft.com/office/drawing/2014/main" id="{0EEC70C2-2064-13A1-A7E5-E93A63C72B5B}"/>
+              </a:ext>
+            </a:extLst>
+          </p:cNvPr>
+          <p:cNvSpPr txBox="1"/>
+          <p:nvPr/>
+        </p:nvSpPr>
+        <p:spPr>
+          <a:xfrm>
+            <a:off x="7164832" y="16658229"/>
+            <a:ext cx="720000" cy="461665"/>
+          </a:xfrm>
+          <a:prstGeom prst="rect">
+            <a:avLst/>
+          </a:prstGeom>
+          <a:noFill/>
+        </p:spPr>
+        <p:txBody>
+          <a:bodyPr wrap="square" rtlCol="0">
+            <a:spAutoFit/>
+          </a:bodyPr>
+          <a:lstStyle/>
+          <a:p>
+            <a:r>
+              <a:rPr kumimoji="1" lang="en-US" altLang="zh-CN" sz="2400" dirty="0">
+                <a:latin typeface="Arial" panose="020B0604020202020204" pitchFamily="34" charset="0"/>
+                <a:cs typeface="Arial" panose="020B0604020202020204" pitchFamily="34" charset="0"/>
+              </a:rPr>
+              <a:t>0.0</a:t>
+            </a:r>
+            <a:endParaRPr kumimoji="1" lang="zh-CN" altLang="en-US" sz="2400" dirty="0">
+              <a:latin typeface="Arial" panose="020B0604020202020204" pitchFamily="34" charset="0"/>
+              <a:cs typeface="Arial" panose="020B0604020202020204" pitchFamily="34" charset="0"/>
+            </a:endParaRPr>
+          </a:p>
+        </p:txBody>
+      </p:sp>
+      <p:sp>
+        <p:nvSpPr>
+          <p:cNvPr id="182" name="文本框 181">
+            <a:extLst>
+              <a:ext uri="{FF2B5EF4-FFF2-40B4-BE49-F238E27FC236}">
+                <a16:creationId xmlns:a16="http://schemas.microsoft.com/office/drawing/2014/main" id="{5151A85D-16AC-5E21-7E6F-8C9C655CC7F0}"/>
+              </a:ext>
+            </a:extLst>
+          </p:cNvPr>
+          <p:cNvSpPr txBox="1"/>
+          <p:nvPr/>
+        </p:nvSpPr>
+        <p:spPr>
+          <a:xfrm>
+            <a:off x="8283709" y="16658229"/>
+            <a:ext cx="720000" cy="461665"/>
+          </a:xfrm>
+          <a:prstGeom prst="rect">
+            <a:avLst/>
+          </a:prstGeom>
+          <a:noFill/>
+        </p:spPr>
+        <p:txBody>
+          <a:bodyPr wrap="square" rtlCol="0">
+            <a:spAutoFit/>
+          </a:bodyPr>
+          <a:lstStyle/>
+          <a:p>
+            <a:r>
+              <a:rPr kumimoji="1" lang="en-US" altLang="zh-CN" sz="2400" dirty="0">
+                <a:latin typeface="Arial" panose="020B0604020202020204" pitchFamily="34" charset="0"/>
+                <a:cs typeface="Arial" panose="020B0604020202020204" pitchFamily="34" charset="0"/>
+              </a:rPr>
+              <a:t>0.2</a:t>
+            </a:r>
+            <a:endParaRPr kumimoji="1" lang="zh-CN" altLang="en-US" sz="2400" dirty="0">
+              <a:latin typeface="Arial" panose="020B0604020202020204" pitchFamily="34" charset="0"/>
+              <a:cs typeface="Arial" panose="020B0604020202020204" pitchFamily="34" charset="0"/>
+            </a:endParaRPr>
+          </a:p>
+        </p:txBody>
+      </p:sp>
+      <p:sp>
+        <p:nvSpPr>
+          <p:cNvPr id="183" name="文本框 182">
+            <a:extLst>
+              <a:ext uri="{FF2B5EF4-FFF2-40B4-BE49-F238E27FC236}">
+                <a16:creationId xmlns:a16="http://schemas.microsoft.com/office/drawing/2014/main" id="{7BCC1E2B-4F6E-2FC2-550C-202C148D1CAF}"/>
+              </a:ext>
+            </a:extLst>
+          </p:cNvPr>
+          <p:cNvSpPr txBox="1"/>
+          <p:nvPr/>
+        </p:nvSpPr>
+        <p:spPr>
+          <a:xfrm>
+            <a:off x="9449848" y="16658229"/>
+            <a:ext cx="720000" cy="461665"/>
+          </a:xfrm>
+          <a:prstGeom prst="rect">
+            <a:avLst/>
+          </a:prstGeom>
+          <a:noFill/>
+        </p:spPr>
+        <p:txBody>
+          <a:bodyPr wrap="square" rtlCol="0">
+            <a:spAutoFit/>
+          </a:bodyPr>
+          <a:lstStyle/>
+          <a:p>
+            <a:r>
+              <a:rPr kumimoji="1" lang="en-US" altLang="zh-CN" sz="2400" dirty="0">
+                <a:latin typeface="Arial" panose="020B0604020202020204" pitchFamily="34" charset="0"/>
+                <a:cs typeface="Arial" panose="020B0604020202020204" pitchFamily="34" charset="0"/>
+              </a:rPr>
+              <a:t>0.4</a:t>
+            </a:r>
+            <a:endParaRPr kumimoji="1" lang="zh-CN" altLang="en-US" sz="2400" dirty="0">
+              <a:latin typeface="Arial" panose="020B0604020202020204" pitchFamily="34" charset="0"/>
+              <a:cs typeface="Arial" panose="020B0604020202020204" pitchFamily="34" charset="0"/>
+            </a:endParaRPr>
+          </a:p>
+        </p:txBody>
+      </p:sp>
+      <p:sp>
+        <p:nvSpPr>
+          <p:cNvPr id="184" name="文本框 183">
+            <a:extLst>
+              <a:ext uri="{FF2B5EF4-FFF2-40B4-BE49-F238E27FC236}">
+                <a16:creationId xmlns:a16="http://schemas.microsoft.com/office/drawing/2014/main" id="{D11FB75D-4BA8-D1B5-565E-A5FC82C170C6}"/>
+              </a:ext>
+            </a:extLst>
+          </p:cNvPr>
+          <p:cNvSpPr txBox="1"/>
+          <p:nvPr/>
+        </p:nvSpPr>
+        <p:spPr>
+          <a:xfrm>
+            <a:off x="10598018" y="16658229"/>
+            <a:ext cx="720000" cy="461665"/>
+          </a:xfrm>
+          <a:prstGeom prst="rect">
+            <a:avLst/>
+          </a:prstGeom>
+          <a:noFill/>
+        </p:spPr>
+        <p:txBody>
+          <a:bodyPr wrap="square" rtlCol="0">
+            <a:spAutoFit/>
+          </a:bodyPr>
+          <a:lstStyle/>
+          <a:p>
+            <a:r>
+              <a:rPr kumimoji="1" lang="en-US" altLang="zh-CN" sz="2400" dirty="0">
+                <a:latin typeface="Arial" panose="020B0604020202020204" pitchFamily="34" charset="0"/>
+                <a:cs typeface="Arial" panose="020B0604020202020204" pitchFamily="34" charset="0"/>
+              </a:rPr>
+              <a:t>0.6</a:t>
+            </a:r>
+            <a:endParaRPr kumimoji="1" lang="zh-CN" altLang="en-US" sz="2400" dirty="0">
+              <a:latin typeface="Arial" panose="020B0604020202020204" pitchFamily="34" charset="0"/>
+              <a:cs typeface="Arial" panose="020B0604020202020204" pitchFamily="34" charset="0"/>
+            </a:endParaRPr>
+          </a:p>
+        </p:txBody>
+      </p:sp>
+      <p:sp>
+        <p:nvSpPr>
+          <p:cNvPr id="185" name="文本框 184">
+            <a:extLst>
+              <a:ext uri="{FF2B5EF4-FFF2-40B4-BE49-F238E27FC236}">
+                <a16:creationId xmlns:a16="http://schemas.microsoft.com/office/drawing/2014/main" id="{3BAD88BA-660B-DDDE-D898-0D8842EE6511}"/>
+              </a:ext>
+            </a:extLst>
+          </p:cNvPr>
+          <p:cNvSpPr txBox="1"/>
+          <p:nvPr/>
+        </p:nvSpPr>
+        <p:spPr>
+          <a:xfrm>
+            <a:off x="11738920" y="16658229"/>
+            <a:ext cx="720000" cy="461665"/>
+          </a:xfrm>
+          <a:prstGeom prst="rect">
+            <a:avLst/>
+          </a:prstGeom>
+          <a:noFill/>
+        </p:spPr>
+        <p:txBody>
+          <a:bodyPr wrap="square" rtlCol="0">
+            <a:spAutoFit/>
+          </a:bodyPr>
+          <a:lstStyle/>
+          <a:p>
+            <a:r>
+              <a:rPr kumimoji="1" lang="en-US" altLang="zh-CN" sz="2400" dirty="0">
+                <a:latin typeface="Arial" panose="020B0604020202020204" pitchFamily="34" charset="0"/>
+                <a:cs typeface="Arial" panose="020B0604020202020204" pitchFamily="34" charset="0"/>
+              </a:rPr>
+              <a:t>0.8</a:t>
+            </a:r>
+            <a:endParaRPr kumimoji="1" lang="zh-CN" altLang="en-US" sz="2400" dirty="0">
+              <a:latin typeface="Arial" panose="020B0604020202020204" pitchFamily="34" charset="0"/>
+              <a:cs typeface="Arial" panose="020B0604020202020204" pitchFamily="34" charset="0"/>
+            </a:endParaRPr>
+          </a:p>
+        </p:txBody>
+      </p:sp>
+      <p:sp>
+        <p:nvSpPr>
+          <p:cNvPr id="186" name="文本框 185">
+            <a:extLst>
+              <a:ext uri="{FF2B5EF4-FFF2-40B4-BE49-F238E27FC236}">
+                <a16:creationId xmlns:a16="http://schemas.microsoft.com/office/drawing/2014/main" id="{B9C9FB6A-2A49-9047-A857-5AE583E81C19}"/>
+              </a:ext>
+            </a:extLst>
+          </p:cNvPr>
+          <p:cNvSpPr txBox="1"/>
+          <p:nvPr/>
+        </p:nvSpPr>
+        <p:spPr>
+          <a:xfrm>
+            <a:off x="12807892" y="16658229"/>
+            <a:ext cx="720000" cy="461665"/>
+          </a:xfrm>
+          <a:prstGeom prst="rect">
+            <a:avLst/>
+          </a:prstGeom>
+          <a:noFill/>
+        </p:spPr>
+        <p:txBody>
+          <a:bodyPr wrap="square" rtlCol="0">
+            <a:spAutoFit/>
+          </a:bodyPr>
+          <a:lstStyle/>
+          <a:p>
+            <a:r>
+              <a:rPr kumimoji="1" lang="en-US" altLang="zh-CN" sz="2400" dirty="0">
+                <a:latin typeface="Arial" panose="020B0604020202020204" pitchFamily="34" charset="0"/>
+                <a:cs typeface="Arial" panose="020B0604020202020204" pitchFamily="34" charset="0"/>
+              </a:rPr>
+              <a:t>1.0</a:t>
+            </a:r>
+            <a:endParaRPr kumimoji="1" lang="zh-CN" altLang="en-US" sz="2400" dirty="0">
+              <a:latin typeface="Arial" panose="020B0604020202020204" pitchFamily="34" charset="0"/>
+              <a:cs typeface="Arial" panose="020B0604020202020204" pitchFamily="34" charset="0"/>
+            </a:endParaRPr>
+          </a:p>
+        </p:txBody>
+      </p:sp>
+      <p:sp>
+        <p:nvSpPr>
+          <p:cNvPr id="187" name="文本框 186">
+            <a:extLst>
+              <a:ext uri="{FF2B5EF4-FFF2-40B4-BE49-F238E27FC236}">
+                <a16:creationId xmlns:a16="http://schemas.microsoft.com/office/drawing/2014/main" id="{628265A3-3E42-F244-E535-D16CCAC23A2E}"/>
+              </a:ext>
+            </a:extLst>
+          </p:cNvPr>
+          <p:cNvSpPr txBox="1"/>
+          <p:nvPr/>
+        </p:nvSpPr>
+        <p:spPr>
+          <a:xfrm rot="16200000">
+            <a:off x="5302763" y="19288902"/>
+            <a:ext cx="3269855" cy="523220"/>
+          </a:xfrm>
+          <a:prstGeom prst="rect">
+            <a:avLst/>
+          </a:prstGeom>
+          <a:noFill/>
+        </p:spPr>
+        <p:txBody>
+          <a:bodyPr wrap="square" rtlCol="0">
+            <a:spAutoFit/>
+          </a:bodyPr>
+          <a:lstStyle/>
+          <a:p>
+            <a:pPr algn="ctr"/>
+            <a:r>
+              <a:rPr kumimoji="1" lang="en-US" altLang="zh-CN" sz="2800" dirty="0">
+                <a:latin typeface="Arial" panose="020B0604020202020204" pitchFamily="34" charset="0"/>
+                <a:cs typeface="Arial" panose="020B0604020202020204" pitchFamily="34" charset="0"/>
+              </a:rPr>
+              <a:t>density</a:t>
+            </a:r>
+            <a:endParaRPr kumimoji="1" lang="zh-CN" altLang="en-US" sz="2800" dirty="0">
+              <a:latin typeface="Arial" panose="020B0604020202020204" pitchFamily="34" charset="0"/>
+              <a:cs typeface="Arial" panose="020B0604020202020204" pitchFamily="34" charset="0"/>
+            </a:endParaRPr>
+          </a:p>
+        </p:txBody>
+      </p:sp>
+      <p:sp>
+        <p:nvSpPr>
+          <p:cNvPr id="188" name="文本框 187">
+            <a:extLst>
+              <a:ext uri="{FF2B5EF4-FFF2-40B4-BE49-F238E27FC236}">
+                <a16:creationId xmlns:a16="http://schemas.microsoft.com/office/drawing/2014/main" id="{C8F5D5BA-3470-977F-62BC-1F7F576AC6DA}"/>
+              </a:ext>
+            </a:extLst>
+          </p:cNvPr>
+          <p:cNvSpPr txBox="1"/>
+          <p:nvPr/>
+        </p:nvSpPr>
+        <p:spPr>
+          <a:xfrm>
+            <a:off x="6924592" y="17961705"/>
+            <a:ext cx="720000" cy="461665"/>
+          </a:xfrm>
+          <a:prstGeom prst="rect">
+            <a:avLst/>
+          </a:prstGeom>
+          <a:noFill/>
+        </p:spPr>
+        <p:txBody>
+          <a:bodyPr wrap="square" rtlCol="0">
+            <a:spAutoFit/>
+          </a:bodyPr>
+          <a:lstStyle/>
+          <a:p>
+            <a:r>
+              <a:rPr kumimoji="1" lang="en-US" altLang="zh-CN" sz="2400" dirty="0">
+                <a:latin typeface="Arial" panose="020B0604020202020204" pitchFamily="34" charset="0"/>
+                <a:cs typeface="Arial" panose="020B0604020202020204" pitchFamily="34" charset="0"/>
+              </a:rPr>
+              <a:t>12</a:t>
+            </a:r>
+            <a:endParaRPr kumimoji="1" lang="zh-CN" altLang="en-US" sz="2400" dirty="0">
+              <a:latin typeface="Arial" panose="020B0604020202020204" pitchFamily="34" charset="0"/>
+              <a:cs typeface="Arial" panose="020B0604020202020204" pitchFamily="34" charset="0"/>
+            </a:endParaRPr>
+          </a:p>
+        </p:txBody>
+      </p:sp>
+      <p:sp>
+        <p:nvSpPr>
+          <p:cNvPr id="189" name="文本框 188">
+            <a:extLst>
+              <a:ext uri="{FF2B5EF4-FFF2-40B4-BE49-F238E27FC236}">
+                <a16:creationId xmlns:a16="http://schemas.microsoft.com/office/drawing/2014/main" id="{435C03A3-C1BB-0D04-EF6D-F1FBE11A8E95}"/>
+              </a:ext>
+            </a:extLst>
+          </p:cNvPr>
+          <p:cNvSpPr txBox="1"/>
+          <p:nvPr/>
+        </p:nvSpPr>
+        <p:spPr>
+          <a:xfrm>
+            <a:off x="7081347" y="18993763"/>
+            <a:ext cx="720000" cy="461665"/>
+          </a:xfrm>
+          <a:prstGeom prst="rect">
+            <a:avLst/>
+          </a:prstGeom>
+          <a:noFill/>
+        </p:spPr>
+        <p:txBody>
+          <a:bodyPr wrap="square" rtlCol="0">
+            <a:spAutoFit/>
+          </a:bodyPr>
+          <a:lstStyle/>
+          <a:p>
+            <a:r>
+              <a:rPr kumimoji="1" lang="en-US" altLang="zh-CN" sz="2400" dirty="0">
+                <a:latin typeface="Arial" panose="020B0604020202020204" pitchFamily="34" charset="0"/>
+                <a:cs typeface="Arial" panose="020B0604020202020204" pitchFamily="34" charset="0"/>
+              </a:rPr>
+              <a:t>8</a:t>
+            </a:r>
+            <a:endParaRPr kumimoji="1" lang="zh-CN" altLang="en-US" sz="2400" dirty="0">
+              <a:latin typeface="Arial" panose="020B0604020202020204" pitchFamily="34" charset="0"/>
+              <a:cs typeface="Arial" panose="020B0604020202020204" pitchFamily="34" charset="0"/>
+            </a:endParaRPr>
+          </a:p>
+        </p:txBody>
+      </p:sp>
+      <p:sp>
+        <p:nvSpPr>
+          <p:cNvPr id="190" name="文本框 189">
+            <a:extLst>
+              <a:ext uri="{FF2B5EF4-FFF2-40B4-BE49-F238E27FC236}">
+                <a16:creationId xmlns:a16="http://schemas.microsoft.com/office/drawing/2014/main" id="{4114131E-1E3C-D9FE-CCCF-49ABB1A54A74}"/>
+              </a:ext>
+            </a:extLst>
+          </p:cNvPr>
+          <p:cNvSpPr txBox="1"/>
+          <p:nvPr/>
+        </p:nvSpPr>
+        <p:spPr>
+          <a:xfrm>
+            <a:off x="7081347" y="20010057"/>
+            <a:ext cx="720000" cy="461665"/>
+          </a:xfrm>
+          <a:prstGeom prst="rect">
+            <a:avLst/>
+          </a:prstGeom>
+          <a:noFill/>
+        </p:spPr>
+        <p:txBody>
+          <a:bodyPr wrap="square" rtlCol="0">
+            <a:spAutoFit/>
+          </a:bodyPr>
+          <a:lstStyle/>
+          <a:p>
+            <a:r>
+              <a:rPr kumimoji="1" lang="en-US" altLang="zh-CN" sz="2400" dirty="0">
+                <a:latin typeface="Arial" panose="020B0604020202020204" pitchFamily="34" charset="0"/>
+                <a:cs typeface="Arial" panose="020B0604020202020204" pitchFamily="34" charset="0"/>
+              </a:rPr>
+              <a:t>4</a:t>
+            </a:r>
+            <a:endParaRPr kumimoji="1" lang="zh-CN" altLang="en-US" sz="2400" dirty="0">
+              <a:latin typeface="Arial" panose="020B0604020202020204" pitchFamily="34" charset="0"/>
+              <a:cs typeface="Arial" panose="020B0604020202020204" pitchFamily="34" charset="0"/>
+            </a:endParaRPr>
+          </a:p>
+        </p:txBody>
+      </p:sp>
+      <p:sp>
+        <p:nvSpPr>
+          <p:cNvPr id="191" name="文本框 190">
+            <a:extLst>
+              <a:ext uri="{FF2B5EF4-FFF2-40B4-BE49-F238E27FC236}">
+                <a16:creationId xmlns:a16="http://schemas.microsoft.com/office/drawing/2014/main" id="{90EEAEB8-F783-D24D-DAA2-2C90809B82E7}"/>
+              </a:ext>
+            </a:extLst>
+          </p:cNvPr>
+          <p:cNvSpPr txBox="1"/>
+          <p:nvPr/>
+        </p:nvSpPr>
+        <p:spPr>
+          <a:xfrm>
+            <a:off x="7081347" y="21048819"/>
+            <a:ext cx="720000" cy="461665"/>
+          </a:xfrm>
+          <a:prstGeom prst="rect">
+            <a:avLst/>
+          </a:prstGeom>
+          <a:noFill/>
+        </p:spPr>
+        <p:txBody>
+          <a:bodyPr wrap="square" rtlCol="0">
+            <a:spAutoFit/>
+          </a:bodyPr>
+          <a:lstStyle/>
+          <a:p>
+            <a:r>
+              <a:rPr kumimoji="1" lang="en-US" altLang="zh-CN" sz="2400" dirty="0">
+                <a:latin typeface="Arial" panose="020B0604020202020204" pitchFamily="34" charset="0"/>
+                <a:cs typeface="Arial" panose="020B0604020202020204" pitchFamily="34" charset="0"/>
+              </a:rPr>
+              <a:t>0</a:t>
+            </a:r>
+            <a:endParaRPr kumimoji="1" lang="zh-CN" altLang="en-US" sz="2400" dirty="0">
+              <a:latin typeface="Arial" panose="020B0604020202020204" pitchFamily="34" charset="0"/>
+              <a:cs typeface="Arial" panose="020B0604020202020204" pitchFamily="34" charset="0"/>
+            </a:endParaRPr>
+          </a:p>
+        </p:txBody>
+      </p:sp>
+      <p:sp>
+        <p:nvSpPr>
+          <p:cNvPr id="192" name="文本框 191">
+            <a:extLst>
+              <a:ext uri="{FF2B5EF4-FFF2-40B4-BE49-F238E27FC236}">
+                <a16:creationId xmlns:a16="http://schemas.microsoft.com/office/drawing/2014/main" id="{9C4C2AC5-6F7E-C9FD-27DA-2523664DE6EA}"/>
+              </a:ext>
+            </a:extLst>
+          </p:cNvPr>
+          <p:cNvSpPr txBox="1"/>
+          <p:nvPr/>
+        </p:nvSpPr>
+        <p:spPr>
+          <a:xfrm>
+            <a:off x="7160349" y="21378983"/>
+            <a:ext cx="720000" cy="461665"/>
+          </a:xfrm>
+          <a:prstGeom prst="rect">
+            <a:avLst/>
+          </a:prstGeom>
+          <a:noFill/>
+        </p:spPr>
+        <p:txBody>
+          <a:bodyPr wrap="square" rtlCol="0">
+            <a:spAutoFit/>
+          </a:bodyPr>
+          <a:lstStyle/>
+          <a:p>
+            <a:r>
+              <a:rPr kumimoji="1" lang="en-US" altLang="zh-CN" sz="2400" dirty="0">
+                <a:latin typeface="Arial" panose="020B0604020202020204" pitchFamily="34" charset="0"/>
+                <a:cs typeface="Arial" panose="020B0604020202020204" pitchFamily="34" charset="0"/>
+              </a:rPr>
+              <a:t>0.0</a:t>
+            </a:r>
+            <a:endParaRPr kumimoji="1" lang="zh-CN" altLang="en-US" sz="2400" dirty="0">
+              <a:latin typeface="Arial" panose="020B0604020202020204" pitchFamily="34" charset="0"/>
+              <a:cs typeface="Arial" panose="020B0604020202020204" pitchFamily="34" charset="0"/>
+            </a:endParaRPr>
+          </a:p>
+        </p:txBody>
+      </p:sp>
+      <p:sp>
+        <p:nvSpPr>
+          <p:cNvPr id="193" name="文本框 192">
+            <a:extLst>
+              <a:ext uri="{FF2B5EF4-FFF2-40B4-BE49-F238E27FC236}">
+                <a16:creationId xmlns:a16="http://schemas.microsoft.com/office/drawing/2014/main" id="{7FA0641F-2256-1C8A-DC29-8FBFAD8D95FF}"/>
+              </a:ext>
+            </a:extLst>
+          </p:cNvPr>
+          <p:cNvSpPr txBox="1"/>
+          <p:nvPr/>
+        </p:nvSpPr>
+        <p:spPr>
+          <a:xfrm>
+            <a:off x="8279226" y="21378983"/>
+            <a:ext cx="720000" cy="461665"/>
+          </a:xfrm>
+          <a:prstGeom prst="rect">
+            <a:avLst/>
+          </a:prstGeom>
+          <a:noFill/>
+        </p:spPr>
+        <p:txBody>
+          <a:bodyPr wrap="square" rtlCol="0">
+            <a:spAutoFit/>
+          </a:bodyPr>
+          <a:lstStyle/>
+          <a:p>
+            <a:r>
+              <a:rPr kumimoji="1" lang="en-US" altLang="zh-CN" sz="2400" dirty="0">
+                <a:latin typeface="Arial" panose="020B0604020202020204" pitchFamily="34" charset="0"/>
+                <a:cs typeface="Arial" panose="020B0604020202020204" pitchFamily="34" charset="0"/>
+              </a:rPr>
+              <a:t>0.2</a:t>
+            </a:r>
+            <a:endParaRPr kumimoji="1" lang="zh-CN" altLang="en-US" sz="2400" dirty="0">
+              <a:latin typeface="Arial" panose="020B0604020202020204" pitchFamily="34" charset="0"/>
+              <a:cs typeface="Arial" panose="020B0604020202020204" pitchFamily="34" charset="0"/>
+            </a:endParaRPr>
+          </a:p>
+        </p:txBody>
+      </p:sp>
+      <p:sp>
+        <p:nvSpPr>
+          <p:cNvPr id="194" name="文本框 193">
+            <a:extLst>
+              <a:ext uri="{FF2B5EF4-FFF2-40B4-BE49-F238E27FC236}">
+                <a16:creationId xmlns:a16="http://schemas.microsoft.com/office/drawing/2014/main" id="{389D6B51-6927-5298-805B-9548779D291B}"/>
+              </a:ext>
+            </a:extLst>
+          </p:cNvPr>
+          <p:cNvSpPr txBox="1"/>
+          <p:nvPr/>
+        </p:nvSpPr>
+        <p:spPr>
+          <a:xfrm>
+            <a:off x="9445365" y="21378983"/>
+            <a:ext cx="720000" cy="461665"/>
+          </a:xfrm>
+          <a:prstGeom prst="rect">
+            <a:avLst/>
+          </a:prstGeom>
+          <a:noFill/>
+        </p:spPr>
+        <p:txBody>
+          <a:bodyPr wrap="square" rtlCol="0">
+            <a:spAutoFit/>
+          </a:bodyPr>
+          <a:lstStyle/>
+          <a:p>
+            <a:r>
+              <a:rPr kumimoji="1" lang="en-US" altLang="zh-CN" sz="2400" dirty="0">
+                <a:latin typeface="Arial" panose="020B0604020202020204" pitchFamily="34" charset="0"/>
+                <a:cs typeface="Arial" panose="020B0604020202020204" pitchFamily="34" charset="0"/>
+              </a:rPr>
+              <a:t>0.4</a:t>
+            </a:r>
+            <a:endParaRPr kumimoji="1" lang="zh-CN" altLang="en-US" sz="2400" dirty="0">
+              <a:latin typeface="Arial" panose="020B0604020202020204" pitchFamily="34" charset="0"/>
+              <a:cs typeface="Arial" panose="020B0604020202020204" pitchFamily="34" charset="0"/>
+            </a:endParaRPr>
+          </a:p>
+        </p:txBody>
+      </p:sp>
+      <p:sp>
+        <p:nvSpPr>
+          <p:cNvPr id="195" name="文本框 194">
+            <a:extLst>
+              <a:ext uri="{FF2B5EF4-FFF2-40B4-BE49-F238E27FC236}">
+                <a16:creationId xmlns:a16="http://schemas.microsoft.com/office/drawing/2014/main" id="{205B8A92-BFB5-68E2-6A04-CAF1B187C08F}"/>
+              </a:ext>
+            </a:extLst>
+          </p:cNvPr>
+          <p:cNvSpPr txBox="1"/>
+          <p:nvPr/>
+        </p:nvSpPr>
+        <p:spPr>
+          <a:xfrm>
+            <a:off x="10593535" y="21378983"/>
+            <a:ext cx="720000" cy="461665"/>
+          </a:xfrm>
+          <a:prstGeom prst="rect">
+            <a:avLst/>
+          </a:prstGeom>
+          <a:noFill/>
+        </p:spPr>
+        <p:txBody>
+          <a:bodyPr wrap="square" rtlCol="0">
+            <a:spAutoFit/>
+          </a:bodyPr>
+          <a:lstStyle/>
+          <a:p>
+            <a:r>
+              <a:rPr kumimoji="1" lang="en-US" altLang="zh-CN" sz="2400" dirty="0">
+                <a:latin typeface="Arial" panose="020B0604020202020204" pitchFamily="34" charset="0"/>
+                <a:cs typeface="Arial" panose="020B0604020202020204" pitchFamily="34" charset="0"/>
+              </a:rPr>
+              <a:t>0.6</a:t>
+            </a:r>
+            <a:endParaRPr kumimoji="1" lang="zh-CN" altLang="en-US" sz="2400" dirty="0">
+              <a:latin typeface="Arial" panose="020B0604020202020204" pitchFamily="34" charset="0"/>
+              <a:cs typeface="Arial" panose="020B0604020202020204" pitchFamily="34" charset="0"/>
+            </a:endParaRPr>
+          </a:p>
+        </p:txBody>
+      </p:sp>
+      <p:sp>
+        <p:nvSpPr>
+          <p:cNvPr id="196" name="文本框 195">
+            <a:extLst>
+              <a:ext uri="{FF2B5EF4-FFF2-40B4-BE49-F238E27FC236}">
+                <a16:creationId xmlns:a16="http://schemas.microsoft.com/office/drawing/2014/main" id="{36EA4C7D-8947-11F7-FCC9-36C8CC2CD5C6}"/>
+              </a:ext>
+            </a:extLst>
+          </p:cNvPr>
+          <p:cNvSpPr txBox="1"/>
+          <p:nvPr/>
+        </p:nvSpPr>
+        <p:spPr>
+          <a:xfrm>
+            <a:off x="11734437" y="21378983"/>
+            <a:ext cx="720000" cy="461665"/>
+          </a:xfrm>
+          <a:prstGeom prst="rect">
+            <a:avLst/>
+          </a:prstGeom>
+          <a:noFill/>
+        </p:spPr>
+        <p:txBody>
+          <a:bodyPr wrap="square" rtlCol="0">
+            <a:spAutoFit/>
+          </a:bodyPr>
+          <a:lstStyle/>
+          <a:p>
+            <a:r>
+              <a:rPr kumimoji="1" lang="en-US" altLang="zh-CN" sz="2400" dirty="0">
+                <a:latin typeface="Arial" panose="020B0604020202020204" pitchFamily="34" charset="0"/>
+                <a:cs typeface="Arial" panose="020B0604020202020204" pitchFamily="34" charset="0"/>
+              </a:rPr>
+              <a:t>0.8</a:t>
+            </a:r>
+            <a:endParaRPr kumimoji="1" lang="zh-CN" altLang="en-US" sz="2400" dirty="0">
+              <a:latin typeface="Arial" panose="020B0604020202020204" pitchFamily="34" charset="0"/>
+              <a:cs typeface="Arial" panose="020B0604020202020204" pitchFamily="34" charset="0"/>
+            </a:endParaRPr>
+          </a:p>
+        </p:txBody>
+      </p:sp>
+      <p:sp>
+        <p:nvSpPr>
+          <p:cNvPr id="197" name="文本框 196">
+            <a:extLst>
+              <a:ext uri="{FF2B5EF4-FFF2-40B4-BE49-F238E27FC236}">
+                <a16:creationId xmlns:a16="http://schemas.microsoft.com/office/drawing/2014/main" id="{94B87717-A5EB-18BF-53DF-8218DAE109C1}"/>
+              </a:ext>
+            </a:extLst>
+          </p:cNvPr>
+          <p:cNvSpPr txBox="1"/>
+          <p:nvPr/>
+        </p:nvSpPr>
+        <p:spPr>
+          <a:xfrm>
+            <a:off x="12803409" y="21378983"/>
+            <a:ext cx="720000" cy="461665"/>
+          </a:xfrm>
+          <a:prstGeom prst="rect">
+            <a:avLst/>
+          </a:prstGeom>
+          <a:noFill/>
+        </p:spPr>
+        <p:txBody>
+          <a:bodyPr wrap="square" rtlCol="0">
+            <a:spAutoFit/>
+          </a:bodyPr>
+          <a:lstStyle/>
+          <a:p>
+            <a:r>
+              <a:rPr kumimoji="1" lang="en-US" altLang="zh-CN" sz="2400" dirty="0">
+                <a:latin typeface="Arial" panose="020B0604020202020204" pitchFamily="34" charset="0"/>
+                <a:cs typeface="Arial" panose="020B0604020202020204" pitchFamily="34" charset="0"/>
+              </a:rPr>
+              <a:t>1.0</a:t>
+            </a:r>
+            <a:endParaRPr kumimoji="1" lang="zh-CN" altLang="en-US" sz="2400" dirty="0">
+              <a:latin typeface="Arial" panose="020B0604020202020204" pitchFamily="34" charset="0"/>
+              <a:cs typeface="Arial" panose="020B0604020202020204" pitchFamily="34" charset="0"/>
+            </a:endParaRPr>
+          </a:p>
+        </p:txBody>
+      </p:sp>
+      <p:sp>
+        <p:nvSpPr>
+          <p:cNvPr id="198" name="文本框 197">
+            <a:extLst>
+              <a:ext uri="{FF2B5EF4-FFF2-40B4-BE49-F238E27FC236}">
+                <a16:creationId xmlns:a16="http://schemas.microsoft.com/office/drawing/2014/main" id="{DFBAEFE0-9884-0EAC-D165-6AB6D6FE6E8C}"/>
+              </a:ext>
+            </a:extLst>
+          </p:cNvPr>
+          <p:cNvSpPr txBox="1"/>
+          <p:nvPr/>
+        </p:nvSpPr>
+        <p:spPr>
+          <a:xfrm rot="16200000">
+            <a:off x="5303272" y="23990311"/>
+            <a:ext cx="3269855" cy="523220"/>
+          </a:xfrm>
+          <a:prstGeom prst="rect">
+            <a:avLst/>
+          </a:prstGeom>
+          <a:noFill/>
+        </p:spPr>
+        <p:txBody>
+          <a:bodyPr wrap="square" rtlCol="0">
+            <a:spAutoFit/>
+          </a:bodyPr>
+          <a:lstStyle/>
+          <a:p>
+            <a:pPr algn="ctr"/>
+            <a:r>
+              <a:rPr kumimoji="1" lang="en-US" altLang="zh-CN" sz="2800" dirty="0">
+                <a:latin typeface="Arial" panose="020B0604020202020204" pitchFamily="34" charset="0"/>
+                <a:cs typeface="Arial" panose="020B0604020202020204" pitchFamily="34" charset="0"/>
+              </a:rPr>
+              <a:t>density</a:t>
+            </a:r>
+            <a:endParaRPr kumimoji="1" lang="zh-CN" altLang="en-US" sz="2800" dirty="0">
+              <a:latin typeface="Arial" panose="020B0604020202020204" pitchFamily="34" charset="0"/>
+              <a:cs typeface="Arial" panose="020B0604020202020204" pitchFamily="34" charset="0"/>
+            </a:endParaRPr>
+          </a:p>
+        </p:txBody>
+      </p:sp>
+      <p:sp>
+        <p:nvSpPr>
+          <p:cNvPr id="199" name="文本框 198">
+            <a:extLst>
+              <a:ext uri="{FF2B5EF4-FFF2-40B4-BE49-F238E27FC236}">
+                <a16:creationId xmlns:a16="http://schemas.microsoft.com/office/drawing/2014/main" id="{1757B76E-166A-C0DE-9188-8A36395C330B}"/>
+              </a:ext>
+            </a:extLst>
+          </p:cNvPr>
+          <p:cNvSpPr txBox="1"/>
+          <p:nvPr/>
+        </p:nvSpPr>
+        <p:spPr>
+          <a:xfrm>
+            <a:off x="7081856" y="22924374"/>
+            <a:ext cx="720000" cy="461665"/>
+          </a:xfrm>
+          <a:prstGeom prst="rect">
+            <a:avLst/>
+          </a:prstGeom>
+          <a:noFill/>
+        </p:spPr>
+        <p:txBody>
+          <a:bodyPr wrap="square" rtlCol="0">
+            <a:spAutoFit/>
+          </a:bodyPr>
+          <a:lstStyle/>
+          <a:p>
+            <a:r>
+              <a:rPr kumimoji="1" lang="en-US" altLang="zh-CN" sz="2400" dirty="0">
+                <a:latin typeface="Arial" panose="020B0604020202020204" pitchFamily="34" charset="0"/>
+                <a:cs typeface="Arial" panose="020B0604020202020204" pitchFamily="34" charset="0"/>
+              </a:rPr>
+              <a:t>6</a:t>
+            </a:r>
+            <a:endParaRPr kumimoji="1" lang="zh-CN" altLang="en-US" sz="2400" dirty="0">
+              <a:latin typeface="Arial" panose="020B0604020202020204" pitchFamily="34" charset="0"/>
+              <a:cs typeface="Arial" panose="020B0604020202020204" pitchFamily="34" charset="0"/>
+            </a:endParaRPr>
+          </a:p>
+        </p:txBody>
+      </p:sp>
+      <p:sp>
+        <p:nvSpPr>
+          <p:cNvPr id="200" name="文本框 199">
+            <a:extLst>
+              <a:ext uri="{FF2B5EF4-FFF2-40B4-BE49-F238E27FC236}">
+                <a16:creationId xmlns:a16="http://schemas.microsoft.com/office/drawing/2014/main" id="{1D7D7CB6-D582-347E-8383-FD0529D69C82}"/>
+              </a:ext>
+            </a:extLst>
+          </p:cNvPr>
+          <p:cNvSpPr txBox="1"/>
+          <p:nvPr/>
+        </p:nvSpPr>
+        <p:spPr>
+          <a:xfrm>
+            <a:off x="7081856" y="23904180"/>
+            <a:ext cx="720000" cy="461665"/>
+          </a:xfrm>
+          <a:prstGeom prst="rect">
+            <a:avLst/>
+          </a:prstGeom>
+          <a:noFill/>
+        </p:spPr>
+        <p:txBody>
+          <a:bodyPr wrap="square" rtlCol="0">
+            <a:spAutoFit/>
+          </a:bodyPr>
+          <a:lstStyle/>
+          <a:p>
+            <a:r>
+              <a:rPr kumimoji="1" lang="en-US" altLang="zh-CN" sz="2400" dirty="0">
+                <a:latin typeface="Arial" panose="020B0604020202020204" pitchFamily="34" charset="0"/>
+                <a:cs typeface="Arial" panose="020B0604020202020204" pitchFamily="34" charset="0"/>
+              </a:rPr>
+              <a:t>4</a:t>
+            </a:r>
+            <a:endParaRPr kumimoji="1" lang="zh-CN" altLang="en-US" sz="2400" dirty="0">
+              <a:latin typeface="Arial" panose="020B0604020202020204" pitchFamily="34" charset="0"/>
+              <a:cs typeface="Arial" panose="020B0604020202020204" pitchFamily="34" charset="0"/>
+            </a:endParaRPr>
+          </a:p>
+        </p:txBody>
+      </p:sp>
+      <p:sp>
+        <p:nvSpPr>
+          <p:cNvPr id="201" name="文本框 200">
+            <a:extLst>
+              <a:ext uri="{FF2B5EF4-FFF2-40B4-BE49-F238E27FC236}">
+                <a16:creationId xmlns:a16="http://schemas.microsoft.com/office/drawing/2014/main" id="{35470CAC-4BD3-A290-7C2C-BB5EA6D16210}"/>
+              </a:ext>
+            </a:extLst>
+          </p:cNvPr>
+          <p:cNvSpPr txBox="1"/>
+          <p:nvPr/>
+        </p:nvSpPr>
+        <p:spPr>
+          <a:xfrm>
+            <a:off x="7081856" y="24842096"/>
+            <a:ext cx="720000" cy="461665"/>
+          </a:xfrm>
+          <a:prstGeom prst="rect">
+            <a:avLst/>
+          </a:prstGeom>
+          <a:noFill/>
+        </p:spPr>
+        <p:txBody>
+          <a:bodyPr wrap="square" rtlCol="0">
+            <a:spAutoFit/>
+          </a:bodyPr>
+          <a:lstStyle/>
+          <a:p>
+            <a:r>
+              <a:rPr kumimoji="1" lang="en-US" altLang="zh-CN" sz="2400" dirty="0">
+                <a:latin typeface="Arial" panose="020B0604020202020204" pitchFamily="34" charset="0"/>
+                <a:cs typeface="Arial" panose="020B0604020202020204" pitchFamily="34" charset="0"/>
+              </a:rPr>
+              <a:t>2</a:t>
+            </a:r>
+            <a:endParaRPr kumimoji="1" lang="zh-CN" altLang="en-US" sz="2400" dirty="0">
+              <a:latin typeface="Arial" panose="020B0604020202020204" pitchFamily="34" charset="0"/>
+              <a:cs typeface="Arial" panose="020B0604020202020204" pitchFamily="34" charset="0"/>
+            </a:endParaRPr>
+          </a:p>
+        </p:txBody>
+      </p:sp>
+      <p:sp>
+        <p:nvSpPr>
+          <p:cNvPr id="202" name="文本框 201">
+            <a:extLst>
+              <a:ext uri="{FF2B5EF4-FFF2-40B4-BE49-F238E27FC236}">
+                <a16:creationId xmlns:a16="http://schemas.microsoft.com/office/drawing/2014/main" id="{5A7A5F79-3756-8F4A-E4CB-5CACBF8699C4}"/>
+              </a:ext>
+            </a:extLst>
+          </p:cNvPr>
+          <p:cNvSpPr txBox="1"/>
+          <p:nvPr/>
+        </p:nvSpPr>
+        <p:spPr>
+          <a:xfrm>
+            <a:off x="7081856" y="25750228"/>
+            <a:ext cx="720000" cy="461665"/>
+          </a:xfrm>
+          <a:prstGeom prst="rect">
+            <a:avLst/>
+          </a:prstGeom>
+          <a:noFill/>
+        </p:spPr>
+        <p:txBody>
+          <a:bodyPr wrap="square" rtlCol="0">
+            <a:spAutoFit/>
+          </a:bodyPr>
+          <a:lstStyle/>
+          <a:p>
+            <a:r>
+              <a:rPr kumimoji="1" lang="en-US" altLang="zh-CN" sz="2400" dirty="0">
+                <a:latin typeface="Arial" panose="020B0604020202020204" pitchFamily="34" charset="0"/>
+                <a:cs typeface="Arial" panose="020B0604020202020204" pitchFamily="34" charset="0"/>
+              </a:rPr>
+              <a:t>0</a:t>
+            </a:r>
+            <a:endParaRPr kumimoji="1" lang="zh-CN" altLang="en-US" sz="2400" dirty="0">
+              <a:latin typeface="Arial" panose="020B0604020202020204" pitchFamily="34" charset="0"/>
+              <a:cs typeface="Arial" panose="020B0604020202020204" pitchFamily="34" charset="0"/>
+            </a:endParaRPr>
+          </a:p>
+        </p:txBody>
+      </p:sp>
+      <p:sp>
+        <p:nvSpPr>
+          <p:cNvPr id="203" name="文本框 202">
+            <a:extLst>
+              <a:ext uri="{FF2B5EF4-FFF2-40B4-BE49-F238E27FC236}">
+                <a16:creationId xmlns:a16="http://schemas.microsoft.com/office/drawing/2014/main" id="{23F7201A-D289-0166-A061-1B8407C23A60}"/>
+              </a:ext>
+            </a:extLst>
+          </p:cNvPr>
+          <p:cNvSpPr txBox="1"/>
+          <p:nvPr/>
+        </p:nvSpPr>
+        <p:spPr>
+          <a:xfrm>
+            <a:off x="7160858" y="26080392"/>
+            <a:ext cx="720000" cy="461665"/>
+          </a:xfrm>
+          <a:prstGeom prst="rect">
+            <a:avLst/>
+          </a:prstGeom>
+          <a:noFill/>
+        </p:spPr>
+        <p:txBody>
+          <a:bodyPr wrap="square" rtlCol="0">
+            <a:spAutoFit/>
+          </a:bodyPr>
+          <a:lstStyle/>
+          <a:p>
+            <a:r>
+              <a:rPr kumimoji="1" lang="en-US" altLang="zh-CN" sz="2400" dirty="0">
+                <a:latin typeface="Arial" panose="020B0604020202020204" pitchFamily="34" charset="0"/>
+                <a:cs typeface="Arial" panose="020B0604020202020204" pitchFamily="34" charset="0"/>
+              </a:rPr>
+              <a:t>0.0</a:t>
+            </a:r>
+            <a:endParaRPr kumimoji="1" lang="zh-CN" altLang="en-US" sz="2400" dirty="0">
+              <a:latin typeface="Arial" panose="020B0604020202020204" pitchFamily="34" charset="0"/>
+              <a:cs typeface="Arial" panose="020B0604020202020204" pitchFamily="34" charset="0"/>
+            </a:endParaRPr>
+          </a:p>
+        </p:txBody>
+      </p:sp>
+      <p:sp>
+        <p:nvSpPr>
+          <p:cNvPr id="204" name="文本框 203">
+            <a:extLst>
+              <a:ext uri="{FF2B5EF4-FFF2-40B4-BE49-F238E27FC236}">
+                <a16:creationId xmlns:a16="http://schemas.microsoft.com/office/drawing/2014/main" id="{C6CA55A9-5296-8B19-B2CE-F7D68EC74241}"/>
+              </a:ext>
+            </a:extLst>
+          </p:cNvPr>
+          <p:cNvSpPr txBox="1"/>
+          <p:nvPr/>
+        </p:nvSpPr>
+        <p:spPr>
+          <a:xfrm>
+            <a:off x="8279735" y="26080392"/>
+            <a:ext cx="720000" cy="461665"/>
+          </a:xfrm>
+          <a:prstGeom prst="rect">
+            <a:avLst/>
+          </a:prstGeom>
+          <a:noFill/>
+        </p:spPr>
+        <p:txBody>
+          <a:bodyPr wrap="square" rtlCol="0">
+            <a:spAutoFit/>
+          </a:bodyPr>
+          <a:lstStyle/>
+          <a:p>
+            <a:r>
+              <a:rPr kumimoji="1" lang="en-US" altLang="zh-CN" sz="2400" dirty="0">
+                <a:latin typeface="Arial" panose="020B0604020202020204" pitchFamily="34" charset="0"/>
+                <a:cs typeface="Arial" panose="020B0604020202020204" pitchFamily="34" charset="0"/>
+              </a:rPr>
+              <a:t>0.2</a:t>
+            </a:r>
+            <a:endParaRPr kumimoji="1" lang="zh-CN" altLang="en-US" sz="2400" dirty="0">
+              <a:latin typeface="Arial" panose="020B0604020202020204" pitchFamily="34" charset="0"/>
+              <a:cs typeface="Arial" panose="020B0604020202020204" pitchFamily="34" charset="0"/>
+            </a:endParaRPr>
+          </a:p>
+        </p:txBody>
+      </p:sp>
+      <p:sp>
+        <p:nvSpPr>
+          <p:cNvPr id="205" name="文本框 204">
+            <a:extLst>
+              <a:ext uri="{FF2B5EF4-FFF2-40B4-BE49-F238E27FC236}">
+                <a16:creationId xmlns:a16="http://schemas.microsoft.com/office/drawing/2014/main" id="{7CB48724-033F-ED80-8346-F9084C43E859}"/>
+              </a:ext>
+            </a:extLst>
+          </p:cNvPr>
+          <p:cNvSpPr txBox="1"/>
+          <p:nvPr/>
+        </p:nvSpPr>
+        <p:spPr>
+          <a:xfrm>
+            <a:off x="9445874" y="26080392"/>
+            <a:ext cx="720000" cy="461665"/>
+          </a:xfrm>
+          <a:prstGeom prst="rect">
+            <a:avLst/>
+          </a:prstGeom>
+          <a:noFill/>
+        </p:spPr>
+        <p:txBody>
+          <a:bodyPr wrap="square" rtlCol="0">
+            <a:spAutoFit/>
+          </a:bodyPr>
+          <a:lstStyle/>
+          <a:p>
+            <a:r>
+              <a:rPr kumimoji="1" lang="en-US" altLang="zh-CN" sz="2400" dirty="0">
+                <a:latin typeface="Arial" panose="020B0604020202020204" pitchFamily="34" charset="0"/>
+                <a:cs typeface="Arial" panose="020B0604020202020204" pitchFamily="34" charset="0"/>
+              </a:rPr>
+              <a:t>0.4</a:t>
+            </a:r>
+            <a:endParaRPr kumimoji="1" lang="zh-CN" altLang="en-US" sz="2400" dirty="0">
+              <a:latin typeface="Arial" panose="020B0604020202020204" pitchFamily="34" charset="0"/>
+              <a:cs typeface="Arial" panose="020B0604020202020204" pitchFamily="34" charset="0"/>
+            </a:endParaRPr>
+          </a:p>
+        </p:txBody>
+      </p:sp>
+      <p:sp>
+        <p:nvSpPr>
+          <p:cNvPr id="206" name="文本框 205">
+            <a:extLst>
+              <a:ext uri="{FF2B5EF4-FFF2-40B4-BE49-F238E27FC236}">
+                <a16:creationId xmlns:a16="http://schemas.microsoft.com/office/drawing/2014/main" id="{6CA047C4-C0F2-3EB3-3536-E849B9AD3DA0}"/>
+              </a:ext>
+            </a:extLst>
+          </p:cNvPr>
+          <p:cNvSpPr txBox="1"/>
+          <p:nvPr/>
+        </p:nvSpPr>
+        <p:spPr>
+          <a:xfrm>
+            <a:off x="10594044" y="26080392"/>
+            <a:ext cx="720000" cy="461665"/>
+          </a:xfrm>
+          <a:prstGeom prst="rect">
+            <a:avLst/>
+          </a:prstGeom>
+          <a:noFill/>
+        </p:spPr>
+        <p:txBody>
+          <a:bodyPr wrap="square" rtlCol="0">
+            <a:spAutoFit/>
+          </a:bodyPr>
+          <a:lstStyle/>
+          <a:p>
+            <a:r>
+              <a:rPr kumimoji="1" lang="en-US" altLang="zh-CN" sz="2400" dirty="0">
+                <a:latin typeface="Arial" panose="020B0604020202020204" pitchFamily="34" charset="0"/>
+                <a:cs typeface="Arial" panose="020B0604020202020204" pitchFamily="34" charset="0"/>
+              </a:rPr>
+              <a:t>0.6</a:t>
+            </a:r>
+            <a:endParaRPr kumimoji="1" lang="zh-CN" altLang="en-US" sz="2400" dirty="0">
+              <a:latin typeface="Arial" panose="020B0604020202020204" pitchFamily="34" charset="0"/>
+              <a:cs typeface="Arial" panose="020B0604020202020204" pitchFamily="34" charset="0"/>
+            </a:endParaRPr>
+          </a:p>
+        </p:txBody>
+      </p:sp>
+      <p:sp>
+        <p:nvSpPr>
+          <p:cNvPr id="207" name="文本框 206">
+            <a:extLst>
+              <a:ext uri="{FF2B5EF4-FFF2-40B4-BE49-F238E27FC236}">
+                <a16:creationId xmlns:a16="http://schemas.microsoft.com/office/drawing/2014/main" id="{5D2B5A5F-2ED3-BAE4-48EB-E8A9A087F929}"/>
+              </a:ext>
+            </a:extLst>
+          </p:cNvPr>
+          <p:cNvSpPr txBox="1"/>
+          <p:nvPr/>
+        </p:nvSpPr>
+        <p:spPr>
+          <a:xfrm>
+            <a:off x="11761072" y="26080392"/>
+            <a:ext cx="720000" cy="461665"/>
+          </a:xfrm>
+          <a:prstGeom prst="rect">
+            <a:avLst/>
+          </a:prstGeom>
+          <a:noFill/>
+        </p:spPr>
+        <p:txBody>
+          <a:bodyPr wrap="square" rtlCol="0">
+            <a:spAutoFit/>
+          </a:bodyPr>
+          <a:lstStyle/>
+          <a:p>
+            <a:r>
+              <a:rPr kumimoji="1" lang="en-US" altLang="zh-CN" sz="2400" dirty="0">
+                <a:latin typeface="Arial" panose="020B0604020202020204" pitchFamily="34" charset="0"/>
+                <a:cs typeface="Arial" panose="020B0604020202020204" pitchFamily="34" charset="0"/>
+              </a:rPr>
+              <a:t>0.8</a:t>
+            </a:r>
+            <a:endParaRPr kumimoji="1" lang="zh-CN" altLang="en-US" sz="2400" dirty="0">
+              <a:latin typeface="Arial" panose="020B0604020202020204" pitchFamily="34" charset="0"/>
+              <a:cs typeface="Arial" panose="020B0604020202020204" pitchFamily="34" charset="0"/>
+            </a:endParaRPr>
+          </a:p>
+        </p:txBody>
+      </p:sp>
+      <p:sp>
+        <p:nvSpPr>
+          <p:cNvPr id="208" name="文本框 207">
+            <a:extLst>
+              <a:ext uri="{FF2B5EF4-FFF2-40B4-BE49-F238E27FC236}">
+                <a16:creationId xmlns:a16="http://schemas.microsoft.com/office/drawing/2014/main" id="{DEC74457-EEB6-09C6-BC6B-00544A107676}"/>
+              </a:ext>
+            </a:extLst>
+          </p:cNvPr>
+          <p:cNvSpPr txBox="1"/>
+          <p:nvPr/>
+        </p:nvSpPr>
+        <p:spPr>
+          <a:xfrm>
+            <a:off x="12803918" y="26080392"/>
+            <a:ext cx="720000" cy="461665"/>
+          </a:xfrm>
+          <a:prstGeom prst="rect">
+            <a:avLst/>
+          </a:prstGeom>
+          <a:noFill/>
+        </p:spPr>
+        <p:txBody>
+          <a:bodyPr wrap="square" rtlCol="0">
+            <a:spAutoFit/>
+          </a:bodyPr>
+          <a:lstStyle/>
+          <a:p>
+            <a:r>
+              <a:rPr kumimoji="1" lang="en-US" altLang="zh-CN" sz="2400" dirty="0">
+                <a:latin typeface="Arial" panose="020B0604020202020204" pitchFamily="34" charset="0"/>
+                <a:cs typeface="Arial" panose="020B0604020202020204" pitchFamily="34" charset="0"/>
+              </a:rPr>
+              <a:t>1.0</a:t>
+            </a:r>
+            <a:endParaRPr kumimoji="1" lang="zh-CN" altLang="en-US" sz="2400" dirty="0">
+              <a:latin typeface="Arial" panose="020B0604020202020204" pitchFamily="34" charset="0"/>
+              <a:cs typeface="Arial" panose="020B0604020202020204" pitchFamily="34" charset="0"/>
+            </a:endParaRPr>
+          </a:p>
+        </p:txBody>
+      </p:sp>
+      <p:sp>
+        <p:nvSpPr>
+          <p:cNvPr id="209" name="文本框 208">
+            <a:extLst>
+              <a:ext uri="{FF2B5EF4-FFF2-40B4-BE49-F238E27FC236}">
+                <a16:creationId xmlns:a16="http://schemas.microsoft.com/office/drawing/2014/main" id="{EB349D74-B348-3EF5-4B7B-B619CBF86840}"/>
+              </a:ext>
+            </a:extLst>
+          </p:cNvPr>
+          <p:cNvSpPr txBox="1"/>
+          <p:nvPr/>
+        </p:nvSpPr>
+        <p:spPr>
+          <a:xfrm rot="16200000">
+            <a:off x="16048803" y="14664767"/>
+            <a:ext cx="3269855" cy="523220"/>
+          </a:xfrm>
+          <a:prstGeom prst="rect">
+            <a:avLst/>
+          </a:prstGeom>
+          <a:noFill/>
+        </p:spPr>
+        <p:txBody>
+          <a:bodyPr wrap="square" rtlCol="0">
+            <a:spAutoFit/>
+          </a:bodyPr>
+          <a:lstStyle/>
+          <a:p>
+            <a:pPr algn="ctr"/>
+            <a:r>
+              <a:rPr kumimoji="1" lang="en-US" altLang="zh-CN" sz="2800" dirty="0">
+                <a:latin typeface="Arial" panose="020B0604020202020204" pitchFamily="34" charset="0"/>
+                <a:cs typeface="Arial" panose="020B0604020202020204" pitchFamily="34" charset="0"/>
+              </a:rPr>
+              <a:t>density</a:t>
+            </a:r>
+            <a:endParaRPr kumimoji="1" lang="zh-CN" altLang="en-US" sz="2800" dirty="0">
+              <a:latin typeface="Arial" panose="020B0604020202020204" pitchFamily="34" charset="0"/>
+              <a:cs typeface="Arial" panose="020B0604020202020204" pitchFamily="34" charset="0"/>
+            </a:endParaRPr>
+          </a:p>
+        </p:txBody>
+      </p:sp>
+      <p:sp>
+        <p:nvSpPr>
+          <p:cNvPr id="210" name="文本框 209">
+            <a:extLst>
+              <a:ext uri="{FF2B5EF4-FFF2-40B4-BE49-F238E27FC236}">
+                <a16:creationId xmlns:a16="http://schemas.microsoft.com/office/drawing/2014/main" id="{1DC3723E-35E9-6020-6663-D65196DFC206}"/>
+              </a:ext>
+            </a:extLst>
+          </p:cNvPr>
+          <p:cNvSpPr txBox="1"/>
+          <p:nvPr/>
+        </p:nvSpPr>
+        <p:spPr>
+          <a:xfrm>
+            <a:off x="17879639" y="13755586"/>
+            <a:ext cx="720000" cy="461665"/>
+          </a:xfrm>
+          <a:prstGeom prst="rect">
+            <a:avLst/>
+          </a:prstGeom>
+          <a:noFill/>
+        </p:spPr>
+        <p:txBody>
+          <a:bodyPr wrap="square" rtlCol="0">
+            <a:spAutoFit/>
+          </a:bodyPr>
+          <a:lstStyle/>
+          <a:p>
+            <a:r>
+              <a:rPr kumimoji="1" lang="en-US" altLang="zh-CN" sz="2400" dirty="0">
+                <a:latin typeface="Arial" panose="020B0604020202020204" pitchFamily="34" charset="0"/>
+                <a:cs typeface="Arial" panose="020B0604020202020204" pitchFamily="34" charset="0"/>
+              </a:rPr>
+              <a:t>15</a:t>
+            </a:r>
+            <a:endParaRPr kumimoji="1" lang="zh-CN" altLang="en-US" sz="2400" dirty="0">
+              <a:latin typeface="Arial" panose="020B0604020202020204" pitchFamily="34" charset="0"/>
+              <a:cs typeface="Arial" panose="020B0604020202020204" pitchFamily="34" charset="0"/>
+            </a:endParaRPr>
+          </a:p>
+        </p:txBody>
+      </p:sp>
+      <p:sp>
+        <p:nvSpPr>
+          <p:cNvPr id="211" name="文本框 210">
+            <a:extLst>
+              <a:ext uri="{FF2B5EF4-FFF2-40B4-BE49-F238E27FC236}">
+                <a16:creationId xmlns:a16="http://schemas.microsoft.com/office/drawing/2014/main" id="{65DB0876-5477-A757-C581-203D219F5078}"/>
+              </a:ext>
+            </a:extLst>
+          </p:cNvPr>
+          <p:cNvSpPr txBox="1"/>
+          <p:nvPr/>
+        </p:nvSpPr>
+        <p:spPr>
+          <a:xfrm>
+            <a:off x="17879639" y="14604762"/>
+            <a:ext cx="720000" cy="461665"/>
+          </a:xfrm>
+          <a:prstGeom prst="rect">
+            <a:avLst/>
+          </a:prstGeom>
+          <a:noFill/>
+        </p:spPr>
+        <p:txBody>
+          <a:bodyPr wrap="square" rtlCol="0">
+            <a:spAutoFit/>
+          </a:bodyPr>
+          <a:lstStyle/>
+          <a:p>
+            <a:r>
+              <a:rPr kumimoji="1" lang="en-US" altLang="zh-CN" sz="2400" dirty="0">
+                <a:latin typeface="Arial" panose="020B0604020202020204" pitchFamily="34" charset="0"/>
+                <a:cs typeface="Arial" panose="020B0604020202020204" pitchFamily="34" charset="0"/>
+              </a:rPr>
+              <a:t>10</a:t>
+            </a:r>
+            <a:endParaRPr kumimoji="1" lang="zh-CN" altLang="en-US" sz="2400" dirty="0">
+              <a:latin typeface="Arial" panose="020B0604020202020204" pitchFamily="34" charset="0"/>
+              <a:cs typeface="Arial" panose="020B0604020202020204" pitchFamily="34" charset="0"/>
+            </a:endParaRPr>
+          </a:p>
+        </p:txBody>
+      </p:sp>
+      <p:sp>
+        <p:nvSpPr>
+          <p:cNvPr id="212" name="文本框 211">
+            <a:extLst>
+              <a:ext uri="{FF2B5EF4-FFF2-40B4-BE49-F238E27FC236}">
+                <a16:creationId xmlns:a16="http://schemas.microsoft.com/office/drawing/2014/main" id="{9459208D-0DB2-03FB-C198-4EF202F31813}"/>
+              </a:ext>
+            </a:extLst>
+          </p:cNvPr>
+          <p:cNvSpPr txBox="1"/>
+          <p:nvPr/>
+        </p:nvSpPr>
+        <p:spPr>
+          <a:xfrm>
+            <a:off x="18010269" y="15438174"/>
+            <a:ext cx="720000" cy="461665"/>
+          </a:xfrm>
+          <a:prstGeom prst="rect">
+            <a:avLst/>
+          </a:prstGeom>
+          <a:noFill/>
+        </p:spPr>
+        <p:txBody>
+          <a:bodyPr wrap="square" rtlCol="0">
+            <a:spAutoFit/>
+          </a:bodyPr>
+          <a:lstStyle/>
+          <a:p>
+            <a:r>
+              <a:rPr kumimoji="1" lang="en-US" altLang="zh-CN" sz="2400" dirty="0">
+                <a:latin typeface="Arial" panose="020B0604020202020204" pitchFamily="34" charset="0"/>
+                <a:cs typeface="Arial" panose="020B0604020202020204" pitchFamily="34" charset="0"/>
+              </a:rPr>
+              <a:t>5</a:t>
+            </a:r>
+            <a:endParaRPr kumimoji="1" lang="zh-CN" altLang="en-US" sz="2400" dirty="0">
+              <a:latin typeface="Arial" panose="020B0604020202020204" pitchFamily="34" charset="0"/>
+              <a:cs typeface="Arial" panose="020B0604020202020204" pitchFamily="34" charset="0"/>
+            </a:endParaRPr>
+          </a:p>
+        </p:txBody>
+      </p:sp>
+      <p:sp>
+        <p:nvSpPr>
+          <p:cNvPr id="213" name="文本框 212">
+            <a:extLst>
+              <a:ext uri="{FF2B5EF4-FFF2-40B4-BE49-F238E27FC236}">
+                <a16:creationId xmlns:a16="http://schemas.microsoft.com/office/drawing/2014/main" id="{A9C4A1F5-47AC-1957-896A-84A4D1E1504F}"/>
+              </a:ext>
+            </a:extLst>
+          </p:cNvPr>
+          <p:cNvSpPr txBox="1"/>
+          <p:nvPr/>
+        </p:nvSpPr>
+        <p:spPr>
+          <a:xfrm>
+            <a:off x="18010269" y="16346306"/>
+            <a:ext cx="720000" cy="461665"/>
+          </a:xfrm>
+          <a:prstGeom prst="rect">
+            <a:avLst/>
+          </a:prstGeom>
+          <a:noFill/>
+        </p:spPr>
+        <p:txBody>
+          <a:bodyPr wrap="square" rtlCol="0">
+            <a:spAutoFit/>
+          </a:bodyPr>
+          <a:lstStyle/>
+          <a:p>
+            <a:r>
+              <a:rPr kumimoji="1" lang="en-US" altLang="zh-CN" sz="2400" dirty="0">
+                <a:latin typeface="Arial" panose="020B0604020202020204" pitchFamily="34" charset="0"/>
+                <a:cs typeface="Arial" panose="020B0604020202020204" pitchFamily="34" charset="0"/>
+              </a:rPr>
+              <a:t>0</a:t>
+            </a:r>
+            <a:endParaRPr kumimoji="1" lang="zh-CN" altLang="en-US" sz="2400" dirty="0">
+              <a:latin typeface="Arial" panose="020B0604020202020204" pitchFamily="34" charset="0"/>
+              <a:cs typeface="Arial" panose="020B0604020202020204" pitchFamily="34" charset="0"/>
+            </a:endParaRPr>
+          </a:p>
+        </p:txBody>
+      </p:sp>
+      <p:sp>
+        <p:nvSpPr>
+          <p:cNvPr id="214" name="文本框 213">
+            <a:extLst>
+              <a:ext uri="{FF2B5EF4-FFF2-40B4-BE49-F238E27FC236}">
+                <a16:creationId xmlns:a16="http://schemas.microsoft.com/office/drawing/2014/main" id="{2F91A388-7A21-700E-6A4A-9F7FEFC93F73}"/>
+              </a:ext>
+            </a:extLst>
+          </p:cNvPr>
+          <p:cNvSpPr txBox="1"/>
+          <p:nvPr/>
+        </p:nvSpPr>
+        <p:spPr>
+          <a:xfrm>
+            <a:off x="18089271" y="16676470"/>
+            <a:ext cx="720000" cy="461665"/>
+          </a:xfrm>
+          <a:prstGeom prst="rect">
+            <a:avLst/>
+          </a:prstGeom>
+          <a:noFill/>
+        </p:spPr>
+        <p:txBody>
+          <a:bodyPr wrap="square" rtlCol="0">
+            <a:spAutoFit/>
+          </a:bodyPr>
+          <a:lstStyle/>
+          <a:p>
+            <a:r>
+              <a:rPr kumimoji="1" lang="en-US" altLang="zh-CN" sz="2400" dirty="0">
+                <a:latin typeface="Arial" panose="020B0604020202020204" pitchFamily="34" charset="0"/>
+                <a:cs typeface="Arial" panose="020B0604020202020204" pitchFamily="34" charset="0"/>
+              </a:rPr>
+              <a:t>0.0</a:t>
+            </a:r>
+            <a:endParaRPr kumimoji="1" lang="zh-CN" altLang="en-US" sz="2400" dirty="0">
+              <a:latin typeface="Arial" panose="020B0604020202020204" pitchFamily="34" charset="0"/>
+              <a:cs typeface="Arial" panose="020B0604020202020204" pitchFamily="34" charset="0"/>
+            </a:endParaRPr>
+          </a:p>
+        </p:txBody>
+      </p:sp>
+      <p:sp>
+        <p:nvSpPr>
+          <p:cNvPr id="215" name="文本框 214">
+            <a:extLst>
+              <a:ext uri="{FF2B5EF4-FFF2-40B4-BE49-F238E27FC236}">
+                <a16:creationId xmlns:a16="http://schemas.microsoft.com/office/drawing/2014/main" id="{4B2DB9B5-6A3A-644E-6D3C-591D63EBC233}"/>
+              </a:ext>
+            </a:extLst>
+          </p:cNvPr>
+          <p:cNvSpPr txBox="1"/>
+          <p:nvPr/>
+        </p:nvSpPr>
+        <p:spPr>
+          <a:xfrm>
+            <a:off x="19208148" y="16676470"/>
+            <a:ext cx="720000" cy="461665"/>
+          </a:xfrm>
+          <a:prstGeom prst="rect">
+            <a:avLst/>
+          </a:prstGeom>
+          <a:noFill/>
+        </p:spPr>
+        <p:txBody>
+          <a:bodyPr wrap="square" rtlCol="0">
+            <a:spAutoFit/>
+          </a:bodyPr>
+          <a:lstStyle/>
+          <a:p>
+            <a:r>
+              <a:rPr kumimoji="1" lang="en-US" altLang="zh-CN" sz="2400" dirty="0">
+                <a:latin typeface="Arial" panose="020B0604020202020204" pitchFamily="34" charset="0"/>
+                <a:cs typeface="Arial" panose="020B0604020202020204" pitchFamily="34" charset="0"/>
+              </a:rPr>
+              <a:t>0.2</a:t>
+            </a:r>
+            <a:endParaRPr kumimoji="1" lang="zh-CN" altLang="en-US" sz="2400" dirty="0">
+              <a:latin typeface="Arial" panose="020B0604020202020204" pitchFamily="34" charset="0"/>
+              <a:cs typeface="Arial" panose="020B0604020202020204" pitchFamily="34" charset="0"/>
+            </a:endParaRPr>
+          </a:p>
+        </p:txBody>
+      </p:sp>
+      <p:sp>
+        <p:nvSpPr>
+          <p:cNvPr id="216" name="文本框 215">
+            <a:extLst>
+              <a:ext uri="{FF2B5EF4-FFF2-40B4-BE49-F238E27FC236}">
+                <a16:creationId xmlns:a16="http://schemas.microsoft.com/office/drawing/2014/main" id="{C5BB7C33-BCDD-081E-05D8-617F778B5521}"/>
+              </a:ext>
+            </a:extLst>
+          </p:cNvPr>
+          <p:cNvSpPr txBox="1"/>
+          <p:nvPr/>
+        </p:nvSpPr>
+        <p:spPr>
+          <a:xfrm>
+            <a:off x="20374287" y="16676470"/>
+            <a:ext cx="720000" cy="461665"/>
+          </a:xfrm>
+          <a:prstGeom prst="rect">
+            <a:avLst/>
+          </a:prstGeom>
+          <a:noFill/>
+        </p:spPr>
+        <p:txBody>
+          <a:bodyPr wrap="square" rtlCol="0">
+            <a:spAutoFit/>
+          </a:bodyPr>
+          <a:lstStyle/>
+          <a:p>
+            <a:r>
+              <a:rPr kumimoji="1" lang="en-US" altLang="zh-CN" sz="2400" dirty="0">
+                <a:latin typeface="Arial" panose="020B0604020202020204" pitchFamily="34" charset="0"/>
+                <a:cs typeface="Arial" panose="020B0604020202020204" pitchFamily="34" charset="0"/>
+              </a:rPr>
+              <a:t>0.4</a:t>
+            </a:r>
+            <a:endParaRPr kumimoji="1" lang="zh-CN" altLang="en-US" sz="2400" dirty="0">
+              <a:latin typeface="Arial" panose="020B0604020202020204" pitchFamily="34" charset="0"/>
+              <a:cs typeface="Arial" panose="020B0604020202020204" pitchFamily="34" charset="0"/>
+            </a:endParaRPr>
+          </a:p>
+        </p:txBody>
+      </p:sp>
+      <p:sp>
+        <p:nvSpPr>
+          <p:cNvPr id="217" name="文本框 216">
+            <a:extLst>
+              <a:ext uri="{FF2B5EF4-FFF2-40B4-BE49-F238E27FC236}">
+                <a16:creationId xmlns:a16="http://schemas.microsoft.com/office/drawing/2014/main" id="{FD38068D-A2DB-F38B-708B-D3B40263E369}"/>
+              </a:ext>
+            </a:extLst>
+          </p:cNvPr>
+          <p:cNvSpPr txBox="1"/>
+          <p:nvPr/>
+        </p:nvSpPr>
+        <p:spPr>
+          <a:xfrm>
+            <a:off x="21522457" y="16676470"/>
+            <a:ext cx="720000" cy="461665"/>
+          </a:xfrm>
+          <a:prstGeom prst="rect">
+            <a:avLst/>
+          </a:prstGeom>
+          <a:noFill/>
+        </p:spPr>
+        <p:txBody>
+          <a:bodyPr wrap="square" rtlCol="0">
+            <a:spAutoFit/>
+          </a:bodyPr>
+          <a:lstStyle/>
+          <a:p>
+            <a:r>
+              <a:rPr kumimoji="1" lang="en-US" altLang="zh-CN" sz="2400" dirty="0">
+                <a:latin typeface="Arial" panose="020B0604020202020204" pitchFamily="34" charset="0"/>
+                <a:cs typeface="Arial" panose="020B0604020202020204" pitchFamily="34" charset="0"/>
+              </a:rPr>
+              <a:t>0.6</a:t>
+            </a:r>
+            <a:endParaRPr kumimoji="1" lang="zh-CN" altLang="en-US" sz="2400" dirty="0">
+              <a:latin typeface="Arial" panose="020B0604020202020204" pitchFamily="34" charset="0"/>
+              <a:cs typeface="Arial" panose="020B0604020202020204" pitchFamily="34" charset="0"/>
+            </a:endParaRPr>
+          </a:p>
+        </p:txBody>
+      </p:sp>
+      <p:sp>
+        <p:nvSpPr>
+          <p:cNvPr id="218" name="文本框 217">
+            <a:extLst>
+              <a:ext uri="{FF2B5EF4-FFF2-40B4-BE49-F238E27FC236}">
+                <a16:creationId xmlns:a16="http://schemas.microsoft.com/office/drawing/2014/main" id="{A71B85F6-C757-04C5-38F4-0E7EF4ED186B}"/>
+              </a:ext>
+            </a:extLst>
+          </p:cNvPr>
+          <p:cNvSpPr txBox="1"/>
+          <p:nvPr/>
+        </p:nvSpPr>
+        <p:spPr>
+          <a:xfrm>
+            <a:off x="22663359" y="16676470"/>
+            <a:ext cx="720000" cy="461665"/>
+          </a:xfrm>
+          <a:prstGeom prst="rect">
+            <a:avLst/>
+          </a:prstGeom>
+          <a:noFill/>
+        </p:spPr>
+        <p:txBody>
+          <a:bodyPr wrap="square" rtlCol="0">
+            <a:spAutoFit/>
+          </a:bodyPr>
+          <a:lstStyle/>
+          <a:p>
+            <a:r>
+              <a:rPr kumimoji="1" lang="en-US" altLang="zh-CN" sz="2400" dirty="0">
+                <a:latin typeface="Arial" panose="020B0604020202020204" pitchFamily="34" charset="0"/>
+                <a:cs typeface="Arial" panose="020B0604020202020204" pitchFamily="34" charset="0"/>
+              </a:rPr>
+              <a:t>0.8</a:t>
+            </a:r>
+            <a:endParaRPr kumimoji="1" lang="zh-CN" altLang="en-US" sz="2400" dirty="0">
+              <a:latin typeface="Arial" panose="020B0604020202020204" pitchFamily="34" charset="0"/>
+              <a:cs typeface="Arial" panose="020B0604020202020204" pitchFamily="34" charset="0"/>
+            </a:endParaRPr>
+          </a:p>
+        </p:txBody>
+      </p:sp>
+      <p:sp>
+        <p:nvSpPr>
+          <p:cNvPr id="219" name="文本框 218">
+            <a:extLst>
+              <a:ext uri="{FF2B5EF4-FFF2-40B4-BE49-F238E27FC236}">
+                <a16:creationId xmlns:a16="http://schemas.microsoft.com/office/drawing/2014/main" id="{780DB020-B890-2B5A-31AD-32DAA67DE85C}"/>
+              </a:ext>
+            </a:extLst>
+          </p:cNvPr>
+          <p:cNvSpPr txBox="1"/>
+          <p:nvPr/>
+        </p:nvSpPr>
+        <p:spPr>
+          <a:xfrm>
+            <a:off x="23732331" y="16676470"/>
+            <a:ext cx="720000" cy="461665"/>
+          </a:xfrm>
+          <a:prstGeom prst="rect">
+            <a:avLst/>
+          </a:prstGeom>
+          <a:noFill/>
+        </p:spPr>
+        <p:txBody>
+          <a:bodyPr wrap="square" rtlCol="0">
+            <a:spAutoFit/>
+          </a:bodyPr>
+          <a:lstStyle/>
+          <a:p>
+            <a:r>
+              <a:rPr kumimoji="1" lang="en-US" altLang="zh-CN" sz="2400" dirty="0">
+                <a:latin typeface="Arial" panose="020B0604020202020204" pitchFamily="34" charset="0"/>
+                <a:cs typeface="Arial" panose="020B0604020202020204" pitchFamily="34" charset="0"/>
+              </a:rPr>
+              <a:t>1.0</a:t>
+            </a:r>
+            <a:endParaRPr kumimoji="1" lang="zh-CN" altLang="en-US" sz="2400" dirty="0">
+              <a:latin typeface="Arial" panose="020B0604020202020204" pitchFamily="34" charset="0"/>
+              <a:cs typeface="Arial" panose="020B0604020202020204" pitchFamily="34" charset="0"/>
+            </a:endParaRPr>
+          </a:p>
+        </p:txBody>
+      </p:sp>
+      <p:sp>
+        <p:nvSpPr>
+          <p:cNvPr id="220" name="文本框 219">
+            <a:extLst>
+              <a:ext uri="{FF2B5EF4-FFF2-40B4-BE49-F238E27FC236}">
+                <a16:creationId xmlns:a16="http://schemas.microsoft.com/office/drawing/2014/main" id="{10D2DB65-DC02-5E47-8FA2-B127C30F28D7}"/>
+              </a:ext>
+            </a:extLst>
+          </p:cNvPr>
+          <p:cNvSpPr txBox="1"/>
+          <p:nvPr/>
+        </p:nvSpPr>
+        <p:spPr>
+          <a:xfrm rot="16200000">
+            <a:off x="16044320" y="19385521"/>
+            <a:ext cx="3269855" cy="523220"/>
+          </a:xfrm>
+          <a:prstGeom prst="rect">
+            <a:avLst/>
+          </a:prstGeom>
+          <a:noFill/>
+        </p:spPr>
+        <p:txBody>
+          <a:bodyPr wrap="square" rtlCol="0">
+            <a:spAutoFit/>
+          </a:bodyPr>
+          <a:lstStyle/>
+          <a:p>
+            <a:pPr algn="ctr"/>
+            <a:r>
+              <a:rPr kumimoji="1" lang="en-US" altLang="zh-CN" sz="2800" dirty="0">
+                <a:latin typeface="Arial" panose="020B0604020202020204" pitchFamily="34" charset="0"/>
+                <a:cs typeface="Arial" panose="020B0604020202020204" pitchFamily="34" charset="0"/>
+              </a:rPr>
+              <a:t>density</a:t>
+            </a:r>
+            <a:endParaRPr kumimoji="1" lang="zh-CN" altLang="en-US" sz="2800" dirty="0">
+              <a:latin typeface="Arial" panose="020B0604020202020204" pitchFamily="34" charset="0"/>
+              <a:cs typeface="Arial" panose="020B0604020202020204" pitchFamily="34" charset="0"/>
+            </a:endParaRPr>
+          </a:p>
+        </p:txBody>
+      </p:sp>
+      <p:sp>
+        <p:nvSpPr>
+          <p:cNvPr id="221" name="文本框 220">
+            <a:extLst>
+              <a:ext uri="{FF2B5EF4-FFF2-40B4-BE49-F238E27FC236}">
+                <a16:creationId xmlns:a16="http://schemas.microsoft.com/office/drawing/2014/main" id="{A53AF237-D6DA-84E2-8BC9-DBE379877805}"/>
+              </a:ext>
+            </a:extLst>
+          </p:cNvPr>
+          <p:cNvSpPr txBox="1"/>
+          <p:nvPr/>
+        </p:nvSpPr>
+        <p:spPr>
+          <a:xfrm>
+            <a:off x="17796778" y="17953820"/>
+            <a:ext cx="720000" cy="461665"/>
+          </a:xfrm>
+          <a:prstGeom prst="rect">
+            <a:avLst/>
+          </a:prstGeom>
+          <a:noFill/>
+        </p:spPr>
+        <p:txBody>
+          <a:bodyPr wrap="square" rtlCol="0">
+            <a:spAutoFit/>
+          </a:bodyPr>
+          <a:lstStyle/>
+          <a:p>
+            <a:r>
+              <a:rPr kumimoji="1" lang="en-US" altLang="zh-CN" sz="2400" dirty="0">
+                <a:latin typeface="Arial" panose="020B0604020202020204" pitchFamily="34" charset="0"/>
+                <a:cs typeface="Arial" panose="020B0604020202020204" pitchFamily="34" charset="0"/>
+              </a:rPr>
+              <a:t>4.5</a:t>
+            </a:r>
+            <a:endParaRPr kumimoji="1" lang="zh-CN" altLang="en-US" sz="2400" dirty="0">
+              <a:latin typeface="Arial" panose="020B0604020202020204" pitchFamily="34" charset="0"/>
+              <a:cs typeface="Arial" panose="020B0604020202020204" pitchFamily="34" charset="0"/>
+            </a:endParaRPr>
+          </a:p>
+        </p:txBody>
+      </p:sp>
+      <p:sp>
+        <p:nvSpPr>
+          <p:cNvPr id="222" name="文本框 221">
+            <a:extLst>
+              <a:ext uri="{FF2B5EF4-FFF2-40B4-BE49-F238E27FC236}">
+                <a16:creationId xmlns:a16="http://schemas.microsoft.com/office/drawing/2014/main" id="{F01F9482-5945-4D59-B25E-BB65FE173939}"/>
+              </a:ext>
+            </a:extLst>
+          </p:cNvPr>
+          <p:cNvSpPr txBox="1"/>
+          <p:nvPr/>
+        </p:nvSpPr>
+        <p:spPr>
+          <a:xfrm>
+            <a:off x="17796778" y="19012004"/>
+            <a:ext cx="720000" cy="461665"/>
+          </a:xfrm>
+          <a:prstGeom prst="rect">
+            <a:avLst/>
+          </a:prstGeom>
+          <a:noFill/>
+        </p:spPr>
+        <p:txBody>
+          <a:bodyPr wrap="square" rtlCol="0">
+            <a:spAutoFit/>
+          </a:bodyPr>
+          <a:lstStyle/>
+          <a:p>
+            <a:r>
+              <a:rPr kumimoji="1" lang="en-US" altLang="zh-CN" sz="2400" dirty="0">
+                <a:latin typeface="Arial" panose="020B0604020202020204" pitchFamily="34" charset="0"/>
+                <a:cs typeface="Arial" panose="020B0604020202020204" pitchFamily="34" charset="0"/>
+              </a:rPr>
+              <a:t>3.0</a:t>
+            </a:r>
+            <a:endParaRPr kumimoji="1" lang="zh-CN" altLang="en-US" sz="2400" dirty="0">
+              <a:latin typeface="Arial" panose="020B0604020202020204" pitchFamily="34" charset="0"/>
+              <a:cs typeface="Arial" panose="020B0604020202020204" pitchFamily="34" charset="0"/>
+            </a:endParaRPr>
+          </a:p>
+        </p:txBody>
+      </p:sp>
+      <p:sp>
+        <p:nvSpPr>
+          <p:cNvPr id="223" name="文本框 222">
+            <a:extLst>
+              <a:ext uri="{FF2B5EF4-FFF2-40B4-BE49-F238E27FC236}">
+                <a16:creationId xmlns:a16="http://schemas.microsoft.com/office/drawing/2014/main" id="{B2C98D78-EC18-8E63-1B11-DA09DED0ED78}"/>
+              </a:ext>
+            </a:extLst>
+          </p:cNvPr>
+          <p:cNvSpPr txBox="1"/>
+          <p:nvPr/>
+        </p:nvSpPr>
+        <p:spPr>
+          <a:xfrm>
+            <a:off x="17796778" y="20028298"/>
+            <a:ext cx="720000" cy="461665"/>
+          </a:xfrm>
+          <a:prstGeom prst="rect">
+            <a:avLst/>
+          </a:prstGeom>
+          <a:noFill/>
+        </p:spPr>
+        <p:txBody>
+          <a:bodyPr wrap="square" rtlCol="0">
+            <a:spAutoFit/>
+          </a:bodyPr>
+          <a:lstStyle/>
+          <a:p>
+            <a:r>
+              <a:rPr kumimoji="1" lang="en-US" altLang="zh-CN" sz="2400" dirty="0">
+                <a:latin typeface="Arial" panose="020B0604020202020204" pitchFamily="34" charset="0"/>
+                <a:cs typeface="Arial" panose="020B0604020202020204" pitchFamily="34" charset="0"/>
+              </a:rPr>
+              <a:t>1.5</a:t>
+            </a:r>
+            <a:endParaRPr kumimoji="1" lang="zh-CN" altLang="en-US" sz="2400" dirty="0">
+              <a:latin typeface="Arial" panose="020B0604020202020204" pitchFamily="34" charset="0"/>
+              <a:cs typeface="Arial" panose="020B0604020202020204" pitchFamily="34" charset="0"/>
+            </a:endParaRPr>
+          </a:p>
+        </p:txBody>
+      </p:sp>
+      <p:sp>
+        <p:nvSpPr>
+          <p:cNvPr id="224" name="文本框 223">
+            <a:extLst>
+              <a:ext uri="{FF2B5EF4-FFF2-40B4-BE49-F238E27FC236}">
+                <a16:creationId xmlns:a16="http://schemas.microsoft.com/office/drawing/2014/main" id="{F0CE549B-F79A-CD1D-7E8A-8441AD5411C6}"/>
+              </a:ext>
+            </a:extLst>
+          </p:cNvPr>
+          <p:cNvSpPr txBox="1"/>
+          <p:nvPr/>
+        </p:nvSpPr>
+        <p:spPr>
+          <a:xfrm>
+            <a:off x="17796778" y="21067060"/>
+            <a:ext cx="720000" cy="461665"/>
+          </a:xfrm>
+          <a:prstGeom prst="rect">
+            <a:avLst/>
+          </a:prstGeom>
+          <a:noFill/>
+        </p:spPr>
+        <p:txBody>
+          <a:bodyPr wrap="square" rtlCol="0">
+            <a:spAutoFit/>
+          </a:bodyPr>
+          <a:lstStyle/>
+          <a:p>
+            <a:r>
+              <a:rPr kumimoji="1" lang="en-US" altLang="zh-CN" sz="2400" dirty="0">
+                <a:latin typeface="Arial" panose="020B0604020202020204" pitchFamily="34" charset="0"/>
+                <a:cs typeface="Arial" panose="020B0604020202020204" pitchFamily="34" charset="0"/>
+              </a:rPr>
+              <a:t>0.0</a:t>
+            </a:r>
+            <a:endParaRPr kumimoji="1" lang="zh-CN" altLang="en-US" sz="2400" dirty="0">
+              <a:latin typeface="Arial" panose="020B0604020202020204" pitchFamily="34" charset="0"/>
+              <a:cs typeface="Arial" panose="020B0604020202020204" pitchFamily="34" charset="0"/>
+            </a:endParaRPr>
+          </a:p>
+        </p:txBody>
+      </p:sp>
+      <p:sp>
+        <p:nvSpPr>
+          <p:cNvPr id="225" name="文本框 224">
+            <a:extLst>
+              <a:ext uri="{FF2B5EF4-FFF2-40B4-BE49-F238E27FC236}">
+                <a16:creationId xmlns:a16="http://schemas.microsoft.com/office/drawing/2014/main" id="{9512CD9B-FA7C-115B-D628-3FFA85AEA6EE}"/>
+              </a:ext>
+            </a:extLst>
+          </p:cNvPr>
+          <p:cNvSpPr txBox="1"/>
+          <p:nvPr/>
+        </p:nvSpPr>
+        <p:spPr>
+          <a:xfrm>
+            <a:off x="18084788" y="21397224"/>
+            <a:ext cx="720000" cy="461665"/>
+          </a:xfrm>
+          <a:prstGeom prst="rect">
+            <a:avLst/>
+          </a:prstGeom>
+          <a:noFill/>
+        </p:spPr>
+        <p:txBody>
+          <a:bodyPr wrap="square" rtlCol="0">
+            <a:spAutoFit/>
+          </a:bodyPr>
+          <a:lstStyle/>
+          <a:p>
+            <a:r>
+              <a:rPr kumimoji="1" lang="en-US" altLang="zh-CN" sz="2400" dirty="0">
+                <a:latin typeface="Arial" panose="020B0604020202020204" pitchFamily="34" charset="0"/>
+                <a:cs typeface="Arial" panose="020B0604020202020204" pitchFamily="34" charset="0"/>
+              </a:rPr>
+              <a:t>0.0</a:t>
+            </a:r>
+            <a:endParaRPr kumimoji="1" lang="zh-CN" altLang="en-US" sz="2400" dirty="0">
+              <a:latin typeface="Arial" panose="020B0604020202020204" pitchFamily="34" charset="0"/>
+              <a:cs typeface="Arial" panose="020B0604020202020204" pitchFamily="34" charset="0"/>
+            </a:endParaRPr>
+          </a:p>
+        </p:txBody>
+      </p:sp>
+      <p:sp>
+        <p:nvSpPr>
+          <p:cNvPr id="226" name="文本框 225">
+            <a:extLst>
+              <a:ext uri="{FF2B5EF4-FFF2-40B4-BE49-F238E27FC236}">
+                <a16:creationId xmlns:a16="http://schemas.microsoft.com/office/drawing/2014/main" id="{BDEE1DB6-FB50-288C-6B3B-32FCE2F8911B}"/>
+              </a:ext>
+            </a:extLst>
+          </p:cNvPr>
+          <p:cNvSpPr txBox="1"/>
+          <p:nvPr/>
+        </p:nvSpPr>
+        <p:spPr>
+          <a:xfrm>
+            <a:off x="19203665" y="21397224"/>
+            <a:ext cx="720000" cy="461665"/>
+          </a:xfrm>
+          <a:prstGeom prst="rect">
+            <a:avLst/>
+          </a:prstGeom>
+          <a:noFill/>
+        </p:spPr>
+        <p:txBody>
+          <a:bodyPr wrap="square" rtlCol="0">
+            <a:spAutoFit/>
+          </a:bodyPr>
+          <a:lstStyle/>
+          <a:p>
+            <a:r>
+              <a:rPr kumimoji="1" lang="en-US" altLang="zh-CN" sz="2400" dirty="0">
+                <a:latin typeface="Arial" panose="020B0604020202020204" pitchFamily="34" charset="0"/>
+                <a:cs typeface="Arial" panose="020B0604020202020204" pitchFamily="34" charset="0"/>
+              </a:rPr>
+              <a:t>0.2</a:t>
+            </a:r>
+            <a:endParaRPr kumimoji="1" lang="zh-CN" altLang="en-US" sz="2400" dirty="0">
+              <a:latin typeface="Arial" panose="020B0604020202020204" pitchFamily="34" charset="0"/>
+              <a:cs typeface="Arial" panose="020B0604020202020204" pitchFamily="34" charset="0"/>
+            </a:endParaRPr>
+          </a:p>
+        </p:txBody>
+      </p:sp>
+      <p:sp>
+        <p:nvSpPr>
+          <p:cNvPr id="227" name="文本框 226">
+            <a:extLst>
+              <a:ext uri="{FF2B5EF4-FFF2-40B4-BE49-F238E27FC236}">
+                <a16:creationId xmlns:a16="http://schemas.microsoft.com/office/drawing/2014/main" id="{2ED9A57A-2C1F-CA91-6AEF-A48352402CFE}"/>
+              </a:ext>
+            </a:extLst>
+          </p:cNvPr>
+          <p:cNvSpPr txBox="1"/>
+          <p:nvPr/>
+        </p:nvSpPr>
+        <p:spPr>
+          <a:xfrm>
+            <a:off x="20369804" y="21397224"/>
+            <a:ext cx="720000" cy="461665"/>
+          </a:xfrm>
+          <a:prstGeom prst="rect">
+            <a:avLst/>
+          </a:prstGeom>
+          <a:noFill/>
+        </p:spPr>
+        <p:txBody>
+          <a:bodyPr wrap="square" rtlCol="0">
+            <a:spAutoFit/>
+          </a:bodyPr>
+          <a:lstStyle/>
+          <a:p>
+            <a:r>
+              <a:rPr kumimoji="1" lang="en-US" altLang="zh-CN" sz="2400" dirty="0">
+                <a:latin typeface="Arial" panose="020B0604020202020204" pitchFamily="34" charset="0"/>
+                <a:cs typeface="Arial" panose="020B0604020202020204" pitchFamily="34" charset="0"/>
+              </a:rPr>
+              <a:t>0.4</a:t>
+            </a:r>
+            <a:endParaRPr kumimoji="1" lang="zh-CN" altLang="en-US" sz="2400" dirty="0">
+              <a:latin typeface="Arial" panose="020B0604020202020204" pitchFamily="34" charset="0"/>
+              <a:cs typeface="Arial" panose="020B0604020202020204" pitchFamily="34" charset="0"/>
+            </a:endParaRPr>
+          </a:p>
+        </p:txBody>
+      </p:sp>
+      <p:sp>
+        <p:nvSpPr>
+          <p:cNvPr id="228" name="文本框 227">
+            <a:extLst>
+              <a:ext uri="{FF2B5EF4-FFF2-40B4-BE49-F238E27FC236}">
+                <a16:creationId xmlns:a16="http://schemas.microsoft.com/office/drawing/2014/main" id="{B6C9F93F-CD44-E714-91CC-66659B5AD6E4}"/>
+              </a:ext>
+            </a:extLst>
+          </p:cNvPr>
+          <p:cNvSpPr txBox="1"/>
+          <p:nvPr/>
+        </p:nvSpPr>
+        <p:spPr>
+          <a:xfrm>
+            <a:off x="21517974" y="21397224"/>
+            <a:ext cx="720000" cy="461665"/>
+          </a:xfrm>
+          <a:prstGeom prst="rect">
+            <a:avLst/>
+          </a:prstGeom>
+          <a:noFill/>
+        </p:spPr>
+        <p:txBody>
+          <a:bodyPr wrap="square" rtlCol="0">
+            <a:spAutoFit/>
+          </a:bodyPr>
+          <a:lstStyle/>
+          <a:p>
+            <a:r>
+              <a:rPr kumimoji="1" lang="en-US" altLang="zh-CN" sz="2400" dirty="0">
+                <a:latin typeface="Arial" panose="020B0604020202020204" pitchFamily="34" charset="0"/>
+                <a:cs typeface="Arial" panose="020B0604020202020204" pitchFamily="34" charset="0"/>
+              </a:rPr>
+              <a:t>0.6</a:t>
+            </a:r>
+            <a:endParaRPr kumimoji="1" lang="zh-CN" altLang="en-US" sz="2400" dirty="0">
+              <a:latin typeface="Arial" panose="020B0604020202020204" pitchFamily="34" charset="0"/>
+              <a:cs typeface="Arial" panose="020B0604020202020204" pitchFamily="34" charset="0"/>
+            </a:endParaRPr>
+          </a:p>
+        </p:txBody>
+      </p:sp>
+      <p:sp>
+        <p:nvSpPr>
+          <p:cNvPr id="229" name="文本框 228">
+            <a:extLst>
+              <a:ext uri="{FF2B5EF4-FFF2-40B4-BE49-F238E27FC236}">
+                <a16:creationId xmlns:a16="http://schemas.microsoft.com/office/drawing/2014/main" id="{9998DAAA-A560-6898-D794-B883DDAC243E}"/>
+              </a:ext>
+            </a:extLst>
+          </p:cNvPr>
+          <p:cNvSpPr txBox="1"/>
+          <p:nvPr/>
+        </p:nvSpPr>
+        <p:spPr>
+          <a:xfrm>
+            <a:off x="22658876" y="21397224"/>
+            <a:ext cx="720000" cy="461665"/>
+          </a:xfrm>
+          <a:prstGeom prst="rect">
+            <a:avLst/>
+          </a:prstGeom>
+          <a:noFill/>
+        </p:spPr>
+        <p:txBody>
+          <a:bodyPr wrap="square" rtlCol="0">
+            <a:spAutoFit/>
+          </a:bodyPr>
+          <a:lstStyle/>
+          <a:p>
+            <a:r>
+              <a:rPr kumimoji="1" lang="en-US" altLang="zh-CN" sz="2400" dirty="0">
+                <a:latin typeface="Arial" panose="020B0604020202020204" pitchFamily="34" charset="0"/>
+                <a:cs typeface="Arial" panose="020B0604020202020204" pitchFamily="34" charset="0"/>
+              </a:rPr>
+              <a:t>0.8</a:t>
+            </a:r>
+            <a:endParaRPr kumimoji="1" lang="zh-CN" altLang="en-US" sz="2400" dirty="0">
+              <a:latin typeface="Arial" panose="020B0604020202020204" pitchFamily="34" charset="0"/>
+              <a:cs typeface="Arial" panose="020B0604020202020204" pitchFamily="34" charset="0"/>
+            </a:endParaRPr>
+          </a:p>
+        </p:txBody>
+      </p:sp>
+      <p:sp>
+        <p:nvSpPr>
+          <p:cNvPr id="230" name="文本框 229">
+            <a:extLst>
+              <a:ext uri="{FF2B5EF4-FFF2-40B4-BE49-F238E27FC236}">
+                <a16:creationId xmlns:a16="http://schemas.microsoft.com/office/drawing/2014/main" id="{9CEE0D0E-2C19-74CC-63BE-9292286A2B45}"/>
+              </a:ext>
+            </a:extLst>
+          </p:cNvPr>
+          <p:cNvSpPr txBox="1"/>
+          <p:nvPr/>
+        </p:nvSpPr>
+        <p:spPr>
+          <a:xfrm>
+            <a:off x="23727848" y="21397224"/>
+            <a:ext cx="720000" cy="461665"/>
+          </a:xfrm>
+          <a:prstGeom prst="rect">
+            <a:avLst/>
+          </a:prstGeom>
+          <a:noFill/>
+        </p:spPr>
+        <p:txBody>
+          <a:bodyPr wrap="square" rtlCol="0">
+            <a:spAutoFit/>
+          </a:bodyPr>
+          <a:lstStyle/>
+          <a:p>
+            <a:r>
+              <a:rPr kumimoji="1" lang="en-US" altLang="zh-CN" sz="2400" dirty="0">
+                <a:latin typeface="Arial" panose="020B0604020202020204" pitchFamily="34" charset="0"/>
+                <a:cs typeface="Arial" panose="020B0604020202020204" pitchFamily="34" charset="0"/>
+              </a:rPr>
+              <a:t>1.0</a:t>
+            </a:r>
+            <a:endParaRPr kumimoji="1" lang="zh-CN" altLang="en-US" sz="2400" dirty="0">
+              <a:latin typeface="Arial" panose="020B0604020202020204" pitchFamily="34" charset="0"/>
+              <a:cs typeface="Arial" panose="020B0604020202020204" pitchFamily="34" charset="0"/>
+            </a:endParaRPr>
+          </a:p>
+        </p:txBody>
+      </p:sp>
+      <p:sp>
+        <p:nvSpPr>
+          <p:cNvPr id="231" name="文本框 230">
+            <a:extLst>
+              <a:ext uri="{FF2B5EF4-FFF2-40B4-BE49-F238E27FC236}">
+                <a16:creationId xmlns:a16="http://schemas.microsoft.com/office/drawing/2014/main" id="{F9163616-B376-54DF-B80F-3EFC02D6F751}"/>
+              </a:ext>
+            </a:extLst>
+          </p:cNvPr>
+          <p:cNvSpPr txBox="1"/>
+          <p:nvPr/>
+        </p:nvSpPr>
+        <p:spPr>
+          <a:xfrm rot="16200000">
+            <a:off x="16044829" y="24086930"/>
+            <a:ext cx="3269855" cy="523220"/>
+          </a:xfrm>
+          <a:prstGeom prst="rect">
+            <a:avLst/>
+          </a:prstGeom>
+          <a:noFill/>
+        </p:spPr>
+        <p:txBody>
+          <a:bodyPr wrap="square" rtlCol="0">
+            <a:spAutoFit/>
+          </a:bodyPr>
+          <a:lstStyle/>
+          <a:p>
+            <a:pPr algn="ctr"/>
+            <a:r>
+              <a:rPr kumimoji="1" lang="en-US" altLang="zh-CN" sz="2800" dirty="0">
+                <a:latin typeface="Arial" panose="020B0604020202020204" pitchFamily="34" charset="0"/>
+                <a:cs typeface="Arial" panose="020B0604020202020204" pitchFamily="34" charset="0"/>
+              </a:rPr>
+              <a:t>density</a:t>
+            </a:r>
+            <a:endParaRPr kumimoji="1" lang="zh-CN" altLang="en-US" sz="2800" dirty="0">
+              <a:latin typeface="Arial" panose="020B0604020202020204" pitchFamily="34" charset="0"/>
+              <a:cs typeface="Arial" panose="020B0604020202020204" pitchFamily="34" charset="0"/>
+            </a:endParaRPr>
+          </a:p>
+        </p:txBody>
+      </p:sp>
+      <p:sp>
+        <p:nvSpPr>
+          <p:cNvPr id="232" name="文本框 231">
+            <a:extLst>
+              <a:ext uri="{FF2B5EF4-FFF2-40B4-BE49-F238E27FC236}">
+                <a16:creationId xmlns:a16="http://schemas.microsoft.com/office/drawing/2014/main" id="{684BB58E-41B5-4D26-D6D7-C409FF61C278}"/>
+              </a:ext>
+            </a:extLst>
+          </p:cNvPr>
+          <p:cNvSpPr txBox="1"/>
+          <p:nvPr/>
+        </p:nvSpPr>
+        <p:spPr>
+          <a:xfrm>
+            <a:off x="18006295" y="22942615"/>
+            <a:ext cx="720000" cy="461665"/>
+          </a:xfrm>
+          <a:prstGeom prst="rect">
+            <a:avLst/>
+          </a:prstGeom>
+          <a:noFill/>
+        </p:spPr>
+        <p:txBody>
+          <a:bodyPr wrap="square" rtlCol="0">
+            <a:spAutoFit/>
+          </a:bodyPr>
+          <a:lstStyle/>
+          <a:p>
+            <a:r>
+              <a:rPr kumimoji="1" lang="en-US" altLang="zh-CN" sz="2400" dirty="0">
+                <a:latin typeface="Arial" panose="020B0604020202020204" pitchFamily="34" charset="0"/>
+                <a:cs typeface="Arial" panose="020B0604020202020204" pitchFamily="34" charset="0"/>
+              </a:rPr>
+              <a:t>6</a:t>
+            </a:r>
+            <a:endParaRPr kumimoji="1" lang="zh-CN" altLang="en-US" sz="2400" dirty="0">
+              <a:latin typeface="Arial" panose="020B0604020202020204" pitchFamily="34" charset="0"/>
+              <a:cs typeface="Arial" panose="020B0604020202020204" pitchFamily="34" charset="0"/>
+            </a:endParaRPr>
+          </a:p>
+        </p:txBody>
+      </p:sp>
+      <p:sp>
+        <p:nvSpPr>
+          <p:cNvPr id="233" name="文本框 232">
+            <a:extLst>
+              <a:ext uri="{FF2B5EF4-FFF2-40B4-BE49-F238E27FC236}">
+                <a16:creationId xmlns:a16="http://schemas.microsoft.com/office/drawing/2014/main" id="{9683C46F-8E2A-F888-2E89-5E87BFE55297}"/>
+              </a:ext>
+            </a:extLst>
+          </p:cNvPr>
+          <p:cNvSpPr txBox="1"/>
+          <p:nvPr/>
+        </p:nvSpPr>
+        <p:spPr>
+          <a:xfrm>
+            <a:off x="18006295" y="23922421"/>
+            <a:ext cx="720000" cy="461665"/>
+          </a:xfrm>
+          <a:prstGeom prst="rect">
+            <a:avLst/>
+          </a:prstGeom>
+          <a:noFill/>
+        </p:spPr>
+        <p:txBody>
+          <a:bodyPr wrap="square" rtlCol="0">
+            <a:spAutoFit/>
+          </a:bodyPr>
+          <a:lstStyle/>
+          <a:p>
+            <a:r>
+              <a:rPr kumimoji="1" lang="en-US" altLang="zh-CN" sz="2400" dirty="0">
+                <a:latin typeface="Arial" panose="020B0604020202020204" pitchFamily="34" charset="0"/>
+                <a:cs typeface="Arial" panose="020B0604020202020204" pitchFamily="34" charset="0"/>
+              </a:rPr>
+              <a:t>4</a:t>
+            </a:r>
+            <a:endParaRPr kumimoji="1" lang="zh-CN" altLang="en-US" sz="2400" dirty="0">
+              <a:latin typeface="Arial" panose="020B0604020202020204" pitchFamily="34" charset="0"/>
+              <a:cs typeface="Arial" panose="020B0604020202020204" pitchFamily="34" charset="0"/>
+            </a:endParaRPr>
+          </a:p>
+        </p:txBody>
+      </p:sp>
+      <p:sp>
+        <p:nvSpPr>
+          <p:cNvPr id="234" name="文本框 233">
+            <a:extLst>
+              <a:ext uri="{FF2B5EF4-FFF2-40B4-BE49-F238E27FC236}">
+                <a16:creationId xmlns:a16="http://schemas.microsoft.com/office/drawing/2014/main" id="{80BD8149-AFD8-2DDF-4F1C-A0DE1545E139}"/>
+              </a:ext>
+            </a:extLst>
+          </p:cNvPr>
+          <p:cNvSpPr txBox="1"/>
+          <p:nvPr/>
+        </p:nvSpPr>
+        <p:spPr>
+          <a:xfrm>
+            <a:off x="18006295" y="24860337"/>
+            <a:ext cx="720000" cy="461665"/>
+          </a:xfrm>
+          <a:prstGeom prst="rect">
+            <a:avLst/>
+          </a:prstGeom>
+          <a:noFill/>
+        </p:spPr>
+        <p:txBody>
+          <a:bodyPr wrap="square" rtlCol="0">
+            <a:spAutoFit/>
+          </a:bodyPr>
+          <a:lstStyle/>
+          <a:p>
+            <a:r>
+              <a:rPr kumimoji="1" lang="en-US" altLang="zh-CN" sz="2400" dirty="0">
+                <a:latin typeface="Arial" panose="020B0604020202020204" pitchFamily="34" charset="0"/>
+                <a:cs typeface="Arial" panose="020B0604020202020204" pitchFamily="34" charset="0"/>
+              </a:rPr>
+              <a:t>2</a:t>
+            </a:r>
+            <a:endParaRPr kumimoji="1" lang="zh-CN" altLang="en-US" sz="2400" dirty="0">
+              <a:latin typeface="Arial" panose="020B0604020202020204" pitchFamily="34" charset="0"/>
+              <a:cs typeface="Arial" panose="020B0604020202020204" pitchFamily="34" charset="0"/>
+            </a:endParaRPr>
+          </a:p>
+        </p:txBody>
+      </p:sp>
+      <p:sp>
+        <p:nvSpPr>
+          <p:cNvPr id="235" name="文本框 234">
+            <a:extLst>
+              <a:ext uri="{FF2B5EF4-FFF2-40B4-BE49-F238E27FC236}">
+                <a16:creationId xmlns:a16="http://schemas.microsoft.com/office/drawing/2014/main" id="{5A5BC784-84CA-D408-B697-8661E81A1B79}"/>
+              </a:ext>
+            </a:extLst>
+          </p:cNvPr>
+          <p:cNvSpPr txBox="1"/>
+          <p:nvPr/>
+        </p:nvSpPr>
+        <p:spPr>
+          <a:xfrm>
+            <a:off x="18006295" y="25768469"/>
+            <a:ext cx="720000" cy="461665"/>
+          </a:xfrm>
+          <a:prstGeom prst="rect">
+            <a:avLst/>
+          </a:prstGeom>
+          <a:noFill/>
+        </p:spPr>
+        <p:txBody>
+          <a:bodyPr wrap="square" rtlCol="0">
+            <a:spAutoFit/>
+          </a:bodyPr>
+          <a:lstStyle/>
+          <a:p>
+            <a:r>
+              <a:rPr kumimoji="1" lang="en-US" altLang="zh-CN" sz="2400" dirty="0">
+                <a:latin typeface="Arial" panose="020B0604020202020204" pitchFamily="34" charset="0"/>
+                <a:cs typeface="Arial" panose="020B0604020202020204" pitchFamily="34" charset="0"/>
+              </a:rPr>
+              <a:t>0</a:t>
+            </a:r>
+            <a:endParaRPr kumimoji="1" lang="zh-CN" altLang="en-US" sz="2400" dirty="0">
+              <a:latin typeface="Arial" panose="020B0604020202020204" pitchFamily="34" charset="0"/>
+              <a:cs typeface="Arial" panose="020B0604020202020204" pitchFamily="34" charset="0"/>
+            </a:endParaRPr>
+          </a:p>
+        </p:txBody>
+      </p:sp>
+      <p:sp>
+        <p:nvSpPr>
+          <p:cNvPr id="236" name="文本框 235">
+            <a:extLst>
+              <a:ext uri="{FF2B5EF4-FFF2-40B4-BE49-F238E27FC236}">
+                <a16:creationId xmlns:a16="http://schemas.microsoft.com/office/drawing/2014/main" id="{6C7B05F4-6A3C-14D4-1172-470A15E175FF}"/>
+              </a:ext>
+            </a:extLst>
+          </p:cNvPr>
+          <p:cNvSpPr txBox="1"/>
+          <p:nvPr/>
+        </p:nvSpPr>
+        <p:spPr>
+          <a:xfrm>
+            <a:off x="18085297" y="26098633"/>
+            <a:ext cx="720000" cy="461665"/>
+          </a:xfrm>
+          <a:prstGeom prst="rect">
+            <a:avLst/>
+          </a:prstGeom>
+          <a:noFill/>
+        </p:spPr>
+        <p:txBody>
+          <a:bodyPr wrap="square" rtlCol="0">
+            <a:spAutoFit/>
+          </a:bodyPr>
+          <a:lstStyle/>
+          <a:p>
+            <a:r>
+              <a:rPr kumimoji="1" lang="en-US" altLang="zh-CN" sz="2400" dirty="0">
+                <a:latin typeface="Arial" panose="020B0604020202020204" pitchFamily="34" charset="0"/>
+                <a:cs typeface="Arial" panose="020B0604020202020204" pitchFamily="34" charset="0"/>
+              </a:rPr>
+              <a:t>0.0</a:t>
+            </a:r>
+            <a:endParaRPr kumimoji="1" lang="zh-CN" altLang="en-US" sz="2400" dirty="0">
+              <a:latin typeface="Arial" panose="020B0604020202020204" pitchFamily="34" charset="0"/>
+              <a:cs typeface="Arial" panose="020B0604020202020204" pitchFamily="34" charset="0"/>
+            </a:endParaRPr>
+          </a:p>
+        </p:txBody>
+      </p:sp>
+      <p:sp>
+        <p:nvSpPr>
+          <p:cNvPr id="237" name="文本框 236">
+            <a:extLst>
+              <a:ext uri="{FF2B5EF4-FFF2-40B4-BE49-F238E27FC236}">
+                <a16:creationId xmlns:a16="http://schemas.microsoft.com/office/drawing/2014/main" id="{F46CDC68-131D-451D-6CE7-5D52E3B68346}"/>
+              </a:ext>
+            </a:extLst>
+          </p:cNvPr>
+          <p:cNvSpPr txBox="1"/>
+          <p:nvPr/>
+        </p:nvSpPr>
+        <p:spPr>
+          <a:xfrm>
+            <a:off x="19204174" y="26098633"/>
+            <a:ext cx="720000" cy="461665"/>
+          </a:xfrm>
+          <a:prstGeom prst="rect">
+            <a:avLst/>
+          </a:prstGeom>
+          <a:noFill/>
+        </p:spPr>
+        <p:txBody>
+          <a:bodyPr wrap="square" rtlCol="0">
+            <a:spAutoFit/>
+          </a:bodyPr>
+          <a:lstStyle/>
+          <a:p>
+            <a:r>
+              <a:rPr kumimoji="1" lang="en-US" altLang="zh-CN" sz="2400" dirty="0">
+                <a:latin typeface="Arial" panose="020B0604020202020204" pitchFamily="34" charset="0"/>
+                <a:cs typeface="Arial" panose="020B0604020202020204" pitchFamily="34" charset="0"/>
+              </a:rPr>
+              <a:t>0.2</a:t>
+            </a:r>
+            <a:endParaRPr kumimoji="1" lang="zh-CN" altLang="en-US" sz="2400" dirty="0">
+              <a:latin typeface="Arial" panose="020B0604020202020204" pitchFamily="34" charset="0"/>
+              <a:cs typeface="Arial" panose="020B0604020202020204" pitchFamily="34" charset="0"/>
+            </a:endParaRPr>
+          </a:p>
+        </p:txBody>
+      </p:sp>
+      <p:sp>
+        <p:nvSpPr>
+          <p:cNvPr id="238" name="文本框 237">
+            <a:extLst>
+              <a:ext uri="{FF2B5EF4-FFF2-40B4-BE49-F238E27FC236}">
+                <a16:creationId xmlns:a16="http://schemas.microsoft.com/office/drawing/2014/main" id="{E56EADE4-64FF-5E46-BDE5-4FB80192053F}"/>
+              </a:ext>
+            </a:extLst>
+          </p:cNvPr>
+          <p:cNvSpPr txBox="1"/>
+          <p:nvPr/>
+        </p:nvSpPr>
+        <p:spPr>
+          <a:xfrm>
+            <a:off x="20370313" y="26098633"/>
+            <a:ext cx="720000" cy="461665"/>
+          </a:xfrm>
+          <a:prstGeom prst="rect">
+            <a:avLst/>
+          </a:prstGeom>
+          <a:noFill/>
+        </p:spPr>
+        <p:txBody>
+          <a:bodyPr wrap="square" rtlCol="0">
+            <a:spAutoFit/>
+          </a:bodyPr>
+          <a:lstStyle/>
+          <a:p>
+            <a:r>
+              <a:rPr kumimoji="1" lang="en-US" altLang="zh-CN" sz="2400" dirty="0">
+                <a:latin typeface="Arial" panose="020B0604020202020204" pitchFamily="34" charset="0"/>
+                <a:cs typeface="Arial" panose="020B0604020202020204" pitchFamily="34" charset="0"/>
+              </a:rPr>
+              <a:t>0.4</a:t>
+            </a:r>
+            <a:endParaRPr kumimoji="1" lang="zh-CN" altLang="en-US" sz="2400" dirty="0">
+              <a:latin typeface="Arial" panose="020B0604020202020204" pitchFamily="34" charset="0"/>
+              <a:cs typeface="Arial" panose="020B0604020202020204" pitchFamily="34" charset="0"/>
+            </a:endParaRPr>
+          </a:p>
+        </p:txBody>
+      </p:sp>
+      <p:sp>
+        <p:nvSpPr>
+          <p:cNvPr id="239" name="文本框 238">
+            <a:extLst>
+              <a:ext uri="{FF2B5EF4-FFF2-40B4-BE49-F238E27FC236}">
+                <a16:creationId xmlns:a16="http://schemas.microsoft.com/office/drawing/2014/main" id="{C6E6F2BB-BC8A-A37C-64D4-1F9F08B37AED}"/>
+              </a:ext>
+            </a:extLst>
+          </p:cNvPr>
+          <p:cNvSpPr txBox="1"/>
+          <p:nvPr/>
+        </p:nvSpPr>
+        <p:spPr>
+          <a:xfrm>
+            <a:off x="21518483" y="26098633"/>
+            <a:ext cx="720000" cy="461665"/>
+          </a:xfrm>
+          <a:prstGeom prst="rect">
+            <a:avLst/>
+          </a:prstGeom>
+          <a:noFill/>
+        </p:spPr>
+        <p:txBody>
+          <a:bodyPr wrap="square" rtlCol="0">
+            <a:spAutoFit/>
+          </a:bodyPr>
+          <a:lstStyle/>
+          <a:p>
+            <a:r>
+              <a:rPr kumimoji="1" lang="en-US" altLang="zh-CN" sz="2400" dirty="0">
+                <a:latin typeface="Arial" panose="020B0604020202020204" pitchFamily="34" charset="0"/>
+                <a:cs typeface="Arial" panose="020B0604020202020204" pitchFamily="34" charset="0"/>
+              </a:rPr>
+              <a:t>0.6</a:t>
+            </a:r>
+            <a:endParaRPr kumimoji="1" lang="zh-CN" altLang="en-US" sz="2400" dirty="0">
+              <a:latin typeface="Arial" panose="020B0604020202020204" pitchFamily="34" charset="0"/>
+              <a:cs typeface="Arial" panose="020B0604020202020204" pitchFamily="34" charset="0"/>
+            </a:endParaRPr>
+          </a:p>
+        </p:txBody>
+      </p:sp>
+      <p:sp>
+        <p:nvSpPr>
+          <p:cNvPr id="240" name="文本框 239">
+            <a:extLst>
+              <a:ext uri="{FF2B5EF4-FFF2-40B4-BE49-F238E27FC236}">
+                <a16:creationId xmlns:a16="http://schemas.microsoft.com/office/drawing/2014/main" id="{420DDD61-29CA-87CF-4077-83F49EA1516D}"/>
+              </a:ext>
+            </a:extLst>
+          </p:cNvPr>
+          <p:cNvSpPr txBox="1"/>
+          <p:nvPr/>
+        </p:nvSpPr>
+        <p:spPr>
+          <a:xfrm>
+            <a:off x="22685511" y="26098633"/>
+            <a:ext cx="720000" cy="461665"/>
+          </a:xfrm>
+          <a:prstGeom prst="rect">
+            <a:avLst/>
+          </a:prstGeom>
+          <a:noFill/>
+        </p:spPr>
+        <p:txBody>
+          <a:bodyPr wrap="square" rtlCol="0">
+            <a:spAutoFit/>
+          </a:bodyPr>
+          <a:lstStyle/>
+          <a:p>
+            <a:r>
+              <a:rPr kumimoji="1" lang="en-US" altLang="zh-CN" sz="2400" dirty="0">
+                <a:latin typeface="Arial" panose="020B0604020202020204" pitchFamily="34" charset="0"/>
+                <a:cs typeface="Arial" panose="020B0604020202020204" pitchFamily="34" charset="0"/>
+              </a:rPr>
+              <a:t>0.8</a:t>
+            </a:r>
+            <a:endParaRPr kumimoji="1" lang="zh-CN" altLang="en-US" sz="2400" dirty="0">
+              <a:latin typeface="Arial" panose="020B0604020202020204" pitchFamily="34" charset="0"/>
+              <a:cs typeface="Arial" panose="020B0604020202020204" pitchFamily="34" charset="0"/>
+            </a:endParaRPr>
+          </a:p>
+        </p:txBody>
+      </p:sp>
+      <p:sp>
+        <p:nvSpPr>
+          <p:cNvPr id="241" name="文本框 240">
+            <a:extLst>
+              <a:ext uri="{FF2B5EF4-FFF2-40B4-BE49-F238E27FC236}">
+                <a16:creationId xmlns:a16="http://schemas.microsoft.com/office/drawing/2014/main" id="{26A8B242-F895-6D41-2D99-963F9463CC4B}"/>
+              </a:ext>
+            </a:extLst>
+          </p:cNvPr>
+          <p:cNvSpPr txBox="1"/>
+          <p:nvPr/>
+        </p:nvSpPr>
+        <p:spPr>
+          <a:xfrm>
+            <a:off x="23728357" y="26098633"/>
+            <a:ext cx="720000" cy="461665"/>
+          </a:xfrm>
+          <a:prstGeom prst="rect">
+            <a:avLst/>
+          </a:prstGeom>
+          <a:noFill/>
+        </p:spPr>
+        <p:txBody>
+          <a:bodyPr wrap="square" rtlCol="0">
+            <a:spAutoFit/>
+          </a:bodyPr>
+          <a:lstStyle/>
+          <a:p>
+            <a:r>
+              <a:rPr kumimoji="1" lang="en-US" altLang="zh-CN" sz="2400" dirty="0">
+                <a:latin typeface="Arial" panose="020B0604020202020204" pitchFamily="34" charset="0"/>
+                <a:cs typeface="Arial" panose="020B0604020202020204" pitchFamily="34" charset="0"/>
+              </a:rPr>
+              <a:t>1.0</a:t>
+            </a:r>
+            <a:endParaRPr kumimoji="1" lang="zh-CN" altLang="en-US" sz="2400" dirty="0">
+              <a:latin typeface="Arial" panose="020B0604020202020204" pitchFamily="34" charset="0"/>
+              <a:cs typeface="Arial" panose="020B0604020202020204" pitchFamily="34" charset="0"/>
+            </a:endParaRPr>
+          </a:p>
+        </p:txBody>
+      </p:sp>
+      <p:sp>
+        <p:nvSpPr>
+          <p:cNvPr id="242" name="文本框 241">
+            <a:extLst>
+              <a:ext uri="{FF2B5EF4-FFF2-40B4-BE49-F238E27FC236}">
+                <a16:creationId xmlns:a16="http://schemas.microsoft.com/office/drawing/2014/main" id="{AC99928A-CB73-B38B-4270-72CC896B6A67}"/>
+              </a:ext>
+            </a:extLst>
+          </p:cNvPr>
+          <p:cNvSpPr txBox="1"/>
+          <p:nvPr/>
+        </p:nvSpPr>
+        <p:spPr>
+          <a:xfrm>
+            <a:off x="8460848" y="26446733"/>
+            <a:ext cx="3269855" cy="523220"/>
+          </a:xfrm>
+          <a:prstGeom prst="rect">
+            <a:avLst/>
+          </a:prstGeom>
+          <a:noFill/>
+        </p:spPr>
+        <p:txBody>
+          <a:bodyPr wrap="square" rtlCol="0">
+            <a:spAutoFit/>
+          </a:bodyPr>
+          <a:lstStyle/>
+          <a:p>
+            <a:pPr algn="ctr"/>
+            <a:r>
+              <a:rPr kumimoji="1" lang="en-US" altLang="zh-CN" sz="2800" dirty="0" err="1">
+                <a:latin typeface="Arial" panose="020B0604020202020204" pitchFamily="34" charset="0"/>
+                <a:cs typeface="Arial" panose="020B0604020202020204" pitchFamily="34" charset="0"/>
+              </a:rPr>
+              <a:t>Relative_size</a:t>
+            </a:r>
+            <a:endParaRPr kumimoji="1" lang="zh-CN" altLang="en-US" sz="2800" dirty="0">
+              <a:latin typeface="Arial" panose="020B0604020202020204" pitchFamily="34" charset="0"/>
+              <a:cs typeface="Arial" panose="020B0604020202020204" pitchFamily="34" charset="0"/>
+            </a:endParaRPr>
+          </a:p>
+        </p:txBody>
+      </p:sp>
+      <p:sp>
+        <p:nvSpPr>
+          <p:cNvPr id="243" name="文本框 242">
+            <a:extLst>
+              <a:ext uri="{FF2B5EF4-FFF2-40B4-BE49-F238E27FC236}">
+                <a16:creationId xmlns:a16="http://schemas.microsoft.com/office/drawing/2014/main" id="{580FD30F-DF48-895F-0690-BAC3DC0ED776}"/>
+              </a:ext>
+            </a:extLst>
+          </p:cNvPr>
+          <p:cNvSpPr txBox="1"/>
+          <p:nvPr/>
+        </p:nvSpPr>
+        <p:spPr>
+          <a:xfrm>
+            <a:off x="19923652" y="26446733"/>
+            <a:ext cx="3269855" cy="523220"/>
+          </a:xfrm>
+          <a:prstGeom prst="rect">
+            <a:avLst/>
+          </a:prstGeom>
+          <a:noFill/>
+        </p:spPr>
+        <p:txBody>
+          <a:bodyPr wrap="square" rtlCol="0">
+            <a:spAutoFit/>
+          </a:bodyPr>
+          <a:lstStyle/>
+          <a:p>
+            <a:pPr algn="ctr"/>
+            <a:r>
+              <a:rPr kumimoji="1" lang="en-US" altLang="zh-CN" sz="2800" dirty="0" err="1">
+                <a:latin typeface="Arial" panose="020B0604020202020204" pitchFamily="34" charset="0"/>
+                <a:cs typeface="Arial" panose="020B0604020202020204" pitchFamily="34" charset="0"/>
+              </a:rPr>
+              <a:t>Relative_size</a:t>
+            </a:r>
+            <a:endParaRPr kumimoji="1" lang="zh-CN" altLang="en-US" sz="2800" dirty="0">
+              <a:latin typeface="Arial" panose="020B0604020202020204" pitchFamily="34" charset="0"/>
+              <a:cs typeface="Arial" panose="020B0604020202020204" pitchFamily="34" charset="0"/>
+            </a:endParaRPr>
+          </a:p>
+        </p:txBody>
+      </p:sp>
+      <p:sp>
+        <p:nvSpPr>
+          <p:cNvPr id="244" name="文本框 243">
+            <a:extLst>
+              <a:ext uri="{FF2B5EF4-FFF2-40B4-BE49-F238E27FC236}">
+                <a16:creationId xmlns:a16="http://schemas.microsoft.com/office/drawing/2014/main" id="{F6136F3A-FAF0-6D2E-4206-4A769AD4C666}"/>
+              </a:ext>
+            </a:extLst>
+          </p:cNvPr>
+          <p:cNvSpPr txBox="1"/>
+          <p:nvPr/>
+        </p:nvSpPr>
+        <p:spPr>
+          <a:xfrm>
+            <a:off x="8460848" y="21669533"/>
+            <a:ext cx="3269855" cy="523220"/>
+          </a:xfrm>
+          <a:prstGeom prst="rect">
+            <a:avLst/>
+          </a:prstGeom>
+          <a:noFill/>
+        </p:spPr>
+        <p:txBody>
+          <a:bodyPr wrap="square" rtlCol="0">
+            <a:spAutoFit/>
+          </a:bodyPr>
+          <a:lstStyle/>
+          <a:p>
+            <a:pPr algn="ctr"/>
+            <a:r>
+              <a:rPr kumimoji="1" lang="en-US" altLang="zh-CN" sz="2800" dirty="0" err="1">
+                <a:latin typeface="Arial" panose="020B0604020202020204" pitchFamily="34" charset="0"/>
+                <a:cs typeface="Arial" panose="020B0604020202020204" pitchFamily="34" charset="0"/>
+              </a:rPr>
+              <a:t>Relative_size</a:t>
+            </a:r>
+            <a:endParaRPr kumimoji="1" lang="zh-CN" altLang="en-US" sz="2800" dirty="0">
+              <a:latin typeface="Arial" panose="020B0604020202020204" pitchFamily="34" charset="0"/>
+              <a:cs typeface="Arial" panose="020B0604020202020204" pitchFamily="34" charset="0"/>
+            </a:endParaRPr>
+          </a:p>
+        </p:txBody>
+      </p:sp>
+      <p:sp>
+        <p:nvSpPr>
+          <p:cNvPr id="245" name="文本框 244">
+            <a:extLst>
+              <a:ext uri="{FF2B5EF4-FFF2-40B4-BE49-F238E27FC236}">
+                <a16:creationId xmlns:a16="http://schemas.microsoft.com/office/drawing/2014/main" id="{9FC8023E-1E39-5ABF-02C8-CB4D280AB44C}"/>
+              </a:ext>
+            </a:extLst>
+          </p:cNvPr>
+          <p:cNvSpPr txBox="1"/>
+          <p:nvPr/>
+        </p:nvSpPr>
+        <p:spPr>
+          <a:xfrm>
+            <a:off x="19923652" y="21669533"/>
+            <a:ext cx="3269855" cy="523220"/>
+          </a:xfrm>
+          <a:prstGeom prst="rect">
+            <a:avLst/>
+          </a:prstGeom>
+          <a:noFill/>
+        </p:spPr>
+        <p:txBody>
+          <a:bodyPr wrap="square" rtlCol="0">
+            <a:spAutoFit/>
+          </a:bodyPr>
+          <a:lstStyle/>
+          <a:p>
+            <a:pPr algn="ctr"/>
+            <a:r>
+              <a:rPr kumimoji="1" lang="en-US" altLang="zh-CN" sz="2800" dirty="0" err="1">
+                <a:latin typeface="Arial" panose="020B0604020202020204" pitchFamily="34" charset="0"/>
+                <a:cs typeface="Arial" panose="020B0604020202020204" pitchFamily="34" charset="0"/>
+              </a:rPr>
+              <a:t>Relative_size</a:t>
+            </a:r>
+            <a:endParaRPr kumimoji="1" lang="zh-CN" altLang="en-US" sz="2800" dirty="0">
+              <a:latin typeface="Arial" panose="020B0604020202020204" pitchFamily="34" charset="0"/>
+              <a:cs typeface="Arial" panose="020B0604020202020204" pitchFamily="34" charset="0"/>
+            </a:endParaRPr>
+          </a:p>
+        </p:txBody>
+      </p:sp>
+      <p:sp>
+        <p:nvSpPr>
+          <p:cNvPr id="246" name="文本框 245">
+            <a:extLst>
+              <a:ext uri="{FF2B5EF4-FFF2-40B4-BE49-F238E27FC236}">
+                <a16:creationId xmlns:a16="http://schemas.microsoft.com/office/drawing/2014/main" id="{7591769C-EB25-4EB7-63DC-C0258653EDD0}"/>
+              </a:ext>
+            </a:extLst>
+          </p:cNvPr>
+          <p:cNvSpPr txBox="1"/>
+          <p:nvPr/>
+        </p:nvSpPr>
+        <p:spPr>
+          <a:xfrm>
+            <a:off x="8460848" y="16949898"/>
+            <a:ext cx="3269855" cy="523220"/>
+          </a:xfrm>
+          <a:prstGeom prst="rect">
+            <a:avLst/>
+          </a:prstGeom>
+          <a:noFill/>
+        </p:spPr>
+        <p:txBody>
+          <a:bodyPr wrap="square" rtlCol="0">
+            <a:spAutoFit/>
+          </a:bodyPr>
+          <a:lstStyle/>
+          <a:p>
+            <a:pPr algn="ctr"/>
+            <a:r>
+              <a:rPr kumimoji="1" lang="en-US" altLang="zh-CN" sz="2800" dirty="0" err="1">
+                <a:latin typeface="Arial" panose="020B0604020202020204" pitchFamily="34" charset="0"/>
+                <a:cs typeface="Arial" panose="020B0604020202020204" pitchFamily="34" charset="0"/>
+              </a:rPr>
+              <a:t>Relative_size</a:t>
+            </a:r>
+            <a:endParaRPr kumimoji="1" lang="zh-CN" altLang="en-US" sz="2800" dirty="0">
+              <a:latin typeface="Arial" panose="020B0604020202020204" pitchFamily="34" charset="0"/>
+              <a:cs typeface="Arial" panose="020B0604020202020204" pitchFamily="34" charset="0"/>
+            </a:endParaRPr>
+          </a:p>
+        </p:txBody>
+      </p:sp>
+      <p:sp>
+        <p:nvSpPr>
+          <p:cNvPr id="247" name="文本框 246">
+            <a:extLst>
+              <a:ext uri="{FF2B5EF4-FFF2-40B4-BE49-F238E27FC236}">
+                <a16:creationId xmlns:a16="http://schemas.microsoft.com/office/drawing/2014/main" id="{3C25E867-F214-9BD4-8ADD-EA60D98BEB7B}"/>
+              </a:ext>
+            </a:extLst>
+          </p:cNvPr>
+          <p:cNvSpPr txBox="1"/>
+          <p:nvPr/>
+        </p:nvSpPr>
+        <p:spPr>
+          <a:xfrm>
+            <a:off x="19923652" y="16949898"/>
+            <a:ext cx="3269855" cy="523220"/>
+          </a:xfrm>
+          <a:prstGeom prst="rect">
+            <a:avLst/>
+          </a:prstGeom>
+          <a:noFill/>
+        </p:spPr>
+        <p:txBody>
+          <a:bodyPr wrap="square" rtlCol="0">
+            <a:spAutoFit/>
+          </a:bodyPr>
+          <a:lstStyle/>
+          <a:p>
+            <a:pPr algn="ctr"/>
+            <a:r>
+              <a:rPr kumimoji="1" lang="en-US" altLang="zh-CN" sz="2800" dirty="0" err="1">
+                <a:latin typeface="Arial" panose="020B0604020202020204" pitchFamily="34" charset="0"/>
+                <a:cs typeface="Arial" panose="020B0604020202020204" pitchFamily="34" charset="0"/>
+              </a:rPr>
+              <a:t>Relative_size</a:t>
+            </a:r>
+            <a:endParaRPr kumimoji="1" lang="zh-CN" altLang="en-US" sz="2800" dirty="0">
+              <a:latin typeface="Arial" panose="020B0604020202020204" pitchFamily="34" charset="0"/>
+              <a:cs typeface="Arial" panose="020B0604020202020204" pitchFamily="34" charset="0"/>
+            </a:endParaRPr>
+          </a:p>
+        </p:txBody>
+      </p:sp>
+      <p:sp>
+        <p:nvSpPr>
+          <p:cNvPr id="248" name="文本框 247">
+            <a:extLst>
+              <a:ext uri="{FF2B5EF4-FFF2-40B4-BE49-F238E27FC236}">
+                <a16:creationId xmlns:a16="http://schemas.microsoft.com/office/drawing/2014/main" id="{9C168506-A33B-6C28-5B61-EF8DBE8BD418}"/>
+              </a:ext>
+            </a:extLst>
+          </p:cNvPr>
+          <p:cNvSpPr txBox="1"/>
+          <p:nvPr/>
+        </p:nvSpPr>
+        <p:spPr>
+          <a:xfrm>
+            <a:off x="2127600" y="12591480"/>
+            <a:ext cx="1080000" cy="830997"/>
+          </a:xfrm>
+          <a:prstGeom prst="rect">
+            <a:avLst/>
+          </a:prstGeom>
+          <a:noFill/>
+        </p:spPr>
+        <p:txBody>
+          <a:bodyPr wrap="square" rtlCol="0">
+            <a:spAutoFit/>
+          </a:bodyPr>
+          <a:lstStyle/>
+          <a:p>
+            <a:r>
+              <a:rPr kumimoji="1" lang="en-US" altLang="zh-CN" sz="4800" b="1" dirty="0">
+                <a:latin typeface="Arial" panose="020B0604020202020204" pitchFamily="34" charset="0"/>
+                <a:cs typeface="Arial" panose="020B0604020202020204" pitchFamily="34" charset="0"/>
+              </a:rPr>
+              <a:t>b</a:t>
+            </a:r>
+            <a:endParaRPr kumimoji="1" lang="zh-CN" altLang="en-US" sz="4800" b="1" dirty="0">
+              <a:latin typeface="Arial" panose="020B0604020202020204" pitchFamily="34" charset="0"/>
+              <a:cs typeface="Arial" panose="020B0604020202020204" pitchFamily="34" charset="0"/>
+            </a:endParaRPr>
+          </a:p>
+        </p:txBody>
+      </p:sp>
+      <p:sp>
+        <p:nvSpPr>
+          <p:cNvPr id="249" name="文本框 248">
+            <a:extLst>
+              <a:ext uri="{FF2B5EF4-FFF2-40B4-BE49-F238E27FC236}">
+                <a16:creationId xmlns:a16="http://schemas.microsoft.com/office/drawing/2014/main" id="{1B9F55B9-9221-2587-F085-0E89033F140B}"/>
+              </a:ext>
+            </a:extLst>
+          </p:cNvPr>
+          <p:cNvSpPr txBox="1"/>
+          <p:nvPr/>
+        </p:nvSpPr>
+        <p:spPr>
+          <a:xfrm>
+            <a:off x="2127600" y="831730"/>
+            <a:ext cx="1080000" cy="830997"/>
+          </a:xfrm>
+          <a:prstGeom prst="rect">
+            <a:avLst/>
+          </a:prstGeom>
+          <a:noFill/>
+        </p:spPr>
+        <p:txBody>
+          <a:bodyPr wrap="square" rtlCol="0">
+            <a:spAutoFit/>
+          </a:bodyPr>
+          <a:lstStyle/>
+          <a:p>
+            <a:r>
+              <a:rPr kumimoji="1" lang="en-US" altLang="zh-CN" sz="4800" b="1" dirty="0">
+                <a:latin typeface="Arial" panose="020B0604020202020204" pitchFamily="34" charset="0"/>
+                <a:cs typeface="Arial" panose="020B0604020202020204" pitchFamily="34" charset="0"/>
+              </a:rPr>
+              <a:t>a</a:t>
+            </a:r>
+            <a:endParaRPr kumimoji="1" lang="zh-CN" altLang="en-US" sz="4800" b="1" dirty="0">
               <a:latin typeface="Arial" panose="020B0604020202020204" pitchFamily="34" charset="0"/>
               <a:cs typeface="Arial" panose="020B0604020202020204" pitchFamily="34" charset="0"/>
             </a:endParaRPr>

--- a/pptx/data_statistics_2.pptx
+++ b/pptx/data_statistics_2.pptx
@@ -199,7 +199,7 @@
           <a:p>
             <a:fld id="{082B1127-B745-0849-B4DE-90186D8D1D7E}" type="datetimeFigureOut">
               <a:rPr kumimoji="1" lang="zh-CN" altLang="en-US" smtClean="0"/>
-              <a:t>2026/7/13</a:t>
+              <a:t>2026/7/14</a:t>
             </a:fld>
             <a:endParaRPr kumimoji="1" lang="zh-CN" altLang="en-US"/>
           </a:p>
@@ -770,7 +770,7 @@
           <a:p>
             <a:fld id="{33ECD986-F6E6-0842-93B7-4A1320D84B6C}" type="datetimeFigureOut">
               <a:rPr kumimoji="1" lang="zh-CN" altLang="en-US" smtClean="0"/>
-              <a:t>2026/7/13</a:t>
+              <a:t>2026/7/14</a:t>
             </a:fld>
             <a:endParaRPr kumimoji="1" lang="zh-CN" altLang="en-US"/>
           </a:p>
@@ -940,7 +940,7 @@
           <a:p>
             <a:fld id="{33ECD986-F6E6-0842-93B7-4A1320D84B6C}" type="datetimeFigureOut">
               <a:rPr kumimoji="1" lang="zh-CN" altLang="en-US" smtClean="0"/>
-              <a:t>2026/7/13</a:t>
+              <a:t>2026/7/14</a:t>
             </a:fld>
             <a:endParaRPr kumimoji="1" lang="zh-CN" altLang="en-US"/>
           </a:p>
@@ -1120,7 +1120,7 @@
           <a:p>
             <a:fld id="{33ECD986-F6E6-0842-93B7-4A1320D84B6C}" type="datetimeFigureOut">
               <a:rPr kumimoji="1" lang="zh-CN" altLang="en-US" smtClean="0"/>
-              <a:t>2026/7/13</a:t>
+              <a:t>2026/7/14</a:t>
             </a:fld>
             <a:endParaRPr kumimoji="1" lang="zh-CN" altLang="en-US"/>
           </a:p>
@@ -1290,7 +1290,7 @@
           <a:p>
             <a:fld id="{33ECD986-F6E6-0842-93B7-4A1320D84B6C}" type="datetimeFigureOut">
               <a:rPr kumimoji="1" lang="zh-CN" altLang="en-US" smtClean="0"/>
-              <a:t>2026/7/13</a:t>
+              <a:t>2026/7/14</a:t>
             </a:fld>
             <a:endParaRPr kumimoji="1" lang="zh-CN" altLang="en-US"/>
           </a:p>
@@ -1536,7 +1536,7 @@
           <a:p>
             <a:fld id="{33ECD986-F6E6-0842-93B7-4A1320D84B6C}" type="datetimeFigureOut">
               <a:rPr kumimoji="1" lang="zh-CN" altLang="en-US" smtClean="0"/>
-              <a:t>2026/7/13</a:t>
+              <a:t>2026/7/14</a:t>
             </a:fld>
             <a:endParaRPr kumimoji="1" lang="zh-CN" altLang="en-US"/>
           </a:p>
@@ -1768,7 +1768,7 @@
           <a:p>
             <a:fld id="{33ECD986-F6E6-0842-93B7-4A1320D84B6C}" type="datetimeFigureOut">
               <a:rPr kumimoji="1" lang="zh-CN" altLang="en-US" smtClean="0"/>
-              <a:t>2026/7/13</a:t>
+              <a:t>2026/7/14</a:t>
             </a:fld>
             <a:endParaRPr kumimoji="1" lang="zh-CN" altLang="en-US"/>
           </a:p>
@@ -2135,7 +2135,7 @@
           <a:p>
             <a:fld id="{33ECD986-F6E6-0842-93B7-4A1320D84B6C}" type="datetimeFigureOut">
               <a:rPr kumimoji="1" lang="zh-CN" altLang="en-US" smtClean="0"/>
-              <a:t>2026/7/13</a:t>
+              <a:t>2026/7/14</a:t>
             </a:fld>
             <a:endParaRPr kumimoji="1" lang="zh-CN" altLang="en-US"/>
           </a:p>
@@ -2253,7 +2253,7 @@
           <a:p>
             <a:fld id="{33ECD986-F6E6-0842-93B7-4A1320D84B6C}" type="datetimeFigureOut">
               <a:rPr kumimoji="1" lang="zh-CN" altLang="en-US" smtClean="0"/>
-              <a:t>2026/7/13</a:t>
+              <a:t>2026/7/14</a:t>
             </a:fld>
             <a:endParaRPr kumimoji="1" lang="zh-CN" altLang="en-US"/>
           </a:p>
@@ -2348,7 +2348,7 @@
           <a:p>
             <a:fld id="{33ECD986-F6E6-0842-93B7-4A1320D84B6C}" type="datetimeFigureOut">
               <a:rPr kumimoji="1" lang="zh-CN" altLang="en-US" smtClean="0"/>
-              <a:t>2026/7/13</a:t>
+              <a:t>2026/7/14</a:t>
             </a:fld>
             <a:endParaRPr kumimoji="1" lang="zh-CN" altLang="en-US"/>
           </a:p>
@@ -2625,7 +2625,7 @@
           <a:p>
             <a:fld id="{33ECD986-F6E6-0842-93B7-4A1320D84B6C}" type="datetimeFigureOut">
               <a:rPr kumimoji="1" lang="zh-CN" altLang="en-US" smtClean="0"/>
-              <a:t>2026/7/13</a:t>
+              <a:t>2026/7/14</a:t>
             </a:fld>
             <a:endParaRPr kumimoji="1" lang="zh-CN" altLang="en-US"/>
           </a:p>
@@ -2882,7 +2882,7 @@
           <a:p>
             <a:fld id="{33ECD986-F6E6-0842-93B7-4A1320D84B6C}" type="datetimeFigureOut">
               <a:rPr kumimoji="1" lang="zh-CN" altLang="en-US" smtClean="0"/>
-              <a:t>2026/7/13</a:t>
+              <a:t>2026/7/14</a:t>
             </a:fld>
             <a:endParaRPr kumimoji="1" lang="zh-CN" altLang="en-US"/>
           </a:p>
@@ -3095,7 +3095,7 @@
           <a:p>
             <a:fld id="{33ECD986-F6E6-0842-93B7-4A1320D84B6C}" type="datetimeFigureOut">
               <a:rPr kumimoji="1" lang="zh-CN" altLang="en-US" smtClean="0"/>
-              <a:t>2026/7/13</a:t>
+              <a:t>2026/7/14</a:t>
             </a:fld>
             <a:endParaRPr kumimoji="1" lang="zh-CN" altLang="en-US"/>
           </a:p>
@@ -9127,11 +9127,25 @@
           <a:p>
             <a:pPr algn="ctr"/>
             <a:r>
-              <a:rPr kumimoji="1" lang="en-US" altLang="zh-CN" sz="2800" dirty="0" err="1">
-                <a:latin typeface="Arial" panose="020B0604020202020204" pitchFamily="34" charset="0"/>
-                <a:cs typeface="Arial" panose="020B0604020202020204" pitchFamily="34" charset="0"/>
-              </a:rPr>
-              <a:t>Pos_y</a:t>
+              <a:rPr kumimoji="1" lang="en-US" altLang="zh-CN" sz="2800" dirty="0">
+                <a:latin typeface="Arial" panose="020B0604020202020204" pitchFamily="34" charset="0"/>
+                <a:cs typeface="Arial" panose="020B0604020202020204" pitchFamily="34" charset="0"/>
+              </a:rPr>
+              <a:t>Pos</a:t>
+            </a:r>
+            <a:r>
+              <a:rPr kumimoji="1" lang="zh-CN" altLang="en-US" sz="2800" dirty="0">
+                <a:latin typeface="Arial" panose="020B0604020202020204" pitchFamily="34" charset="0"/>
+                <a:cs typeface="Arial" panose="020B0604020202020204" pitchFamily="34" charset="0"/>
+              </a:rPr>
+              <a:t> </a:t>
+            </a:r>
+            <a:r>
+              <a:rPr kumimoji="1" lang="en-US" altLang="zh-CN" sz="2800" dirty="0">
+                <a:latin typeface="Arial" panose="020B0604020202020204" pitchFamily="34" charset="0"/>
+                <a:cs typeface="Arial" panose="020B0604020202020204" pitchFamily="34" charset="0"/>
+              </a:rPr>
+              <a:t>y</a:t>
             </a:r>
             <a:endParaRPr kumimoji="1" lang="zh-CN" altLang="en-US" sz="2800" dirty="0">
               <a:latin typeface="Arial" panose="020B0604020202020204" pitchFamily="34" charset="0"/>
@@ -9458,11 +9472,25 @@
           <a:p>
             <a:pPr algn="ctr"/>
             <a:r>
-              <a:rPr kumimoji="1" lang="en-US" altLang="zh-CN" sz="2800" dirty="0" err="1">
-                <a:latin typeface="Arial" panose="020B0604020202020204" pitchFamily="34" charset="0"/>
-                <a:cs typeface="Arial" panose="020B0604020202020204" pitchFamily="34" charset="0"/>
-              </a:rPr>
-              <a:t>Pos_y</a:t>
+              <a:rPr kumimoji="1" lang="en-US" altLang="zh-CN" sz="2800" dirty="0">
+                <a:latin typeface="Arial" panose="020B0604020202020204" pitchFamily="34" charset="0"/>
+                <a:cs typeface="Arial" panose="020B0604020202020204" pitchFamily="34" charset="0"/>
+              </a:rPr>
+              <a:t>Pos</a:t>
+            </a:r>
+            <a:r>
+              <a:rPr kumimoji="1" lang="zh-CN" altLang="en-US" sz="2800" dirty="0">
+                <a:latin typeface="Arial" panose="020B0604020202020204" pitchFamily="34" charset="0"/>
+                <a:cs typeface="Arial" panose="020B0604020202020204" pitchFamily="34" charset="0"/>
+              </a:rPr>
+              <a:t> </a:t>
+            </a:r>
+            <a:r>
+              <a:rPr kumimoji="1" lang="en-US" altLang="zh-CN" sz="2800" dirty="0">
+                <a:latin typeface="Arial" panose="020B0604020202020204" pitchFamily="34" charset="0"/>
+                <a:cs typeface="Arial" panose="020B0604020202020204" pitchFamily="34" charset="0"/>
+              </a:rPr>
+              <a:t>y</a:t>
             </a:r>
             <a:endParaRPr kumimoji="1" lang="zh-CN" altLang="en-US" sz="2800" dirty="0">
               <a:latin typeface="Arial" panose="020B0604020202020204" pitchFamily="34" charset="0"/>
@@ -9753,11 +9781,25 @@
           <a:p>
             <a:pPr algn="ctr"/>
             <a:r>
-              <a:rPr kumimoji="1" lang="en-US" altLang="zh-CN" sz="2800" dirty="0" err="1">
-                <a:latin typeface="Arial" panose="020B0604020202020204" pitchFamily="34" charset="0"/>
-                <a:cs typeface="Arial" panose="020B0604020202020204" pitchFamily="34" charset="0"/>
-              </a:rPr>
-              <a:t>Pos_y</a:t>
+              <a:rPr kumimoji="1" lang="en-US" altLang="zh-CN" sz="2800" dirty="0">
+                <a:latin typeface="Arial" panose="020B0604020202020204" pitchFamily="34" charset="0"/>
+                <a:cs typeface="Arial" panose="020B0604020202020204" pitchFamily="34" charset="0"/>
+              </a:rPr>
+              <a:t>Pos</a:t>
+            </a:r>
+            <a:r>
+              <a:rPr kumimoji="1" lang="zh-CN" altLang="en-US" sz="2800" dirty="0">
+                <a:latin typeface="Arial" panose="020B0604020202020204" pitchFamily="34" charset="0"/>
+                <a:cs typeface="Arial" panose="020B0604020202020204" pitchFamily="34" charset="0"/>
+              </a:rPr>
+              <a:t> </a:t>
+            </a:r>
+            <a:r>
+              <a:rPr kumimoji="1" lang="en-US" altLang="zh-CN" sz="2800" dirty="0">
+                <a:latin typeface="Arial" panose="020B0604020202020204" pitchFamily="34" charset="0"/>
+                <a:cs typeface="Arial" panose="020B0604020202020204" pitchFamily="34" charset="0"/>
+              </a:rPr>
+              <a:t>y</a:t>
             </a:r>
             <a:endParaRPr kumimoji="1" lang="zh-CN" altLang="en-US" sz="2800" dirty="0">
               <a:latin typeface="Arial" panose="020B0604020202020204" pitchFamily="34" charset="0"/>
@@ -10048,11 +10090,25 @@
           <a:p>
             <a:pPr algn="ctr"/>
             <a:r>
-              <a:rPr kumimoji="1" lang="en-US" altLang="zh-CN" sz="2800" dirty="0" err="1">
-                <a:latin typeface="Arial" panose="020B0604020202020204" pitchFamily="34" charset="0"/>
-                <a:cs typeface="Arial" panose="020B0604020202020204" pitchFamily="34" charset="0"/>
-              </a:rPr>
-              <a:t>Pos_y</a:t>
+              <a:rPr kumimoji="1" lang="en-US" altLang="zh-CN" sz="2800" dirty="0">
+                <a:latin typeface="Arial" panose="020B0604020202020204" pitchFamily="34" charset="0"/>
+                <a:cs typeface="Arial" panose="020B0604020202020204" pitchFamily="34" charset="0"/>
+              </a:rPr>
+              <a:t>Pos</a:t>
+            </a:r>
+            <a:r>
+              <a:rPr kumimoji="1" lang="zh-CN" altLang="en-US" sz="2800" dirty="0">
+                <a:latin typeface="Arial" panose="020B0604020202020204" pitchFamily="34" charset="0"/>
+                <a:cs typeface="Arial" panose="020B0604020202020204" pitchFamily="34" charset="0"/>
+              </a:rPr>
+              <a:t> </a:t>
+            </a:r>
+            <a:r>
+              <a:rPr kumimoji="1" lang="en-US" altLang="zh-CN" sz="2800" dirty="0">
+                <a:latin typeface="Arial" panose="020B0604020202020204" pitchFamily="34" charset="0"/>
+                <a:cs typeface="Arial" panose="020B0604020202020204" pitchFamily="34" charset="0"/>
+              </a:rPr>
+              <a:t>y</a:t>
             </a:r>
             <a:endParaRPr kumimoji="1" lang="zh-CN" altLang="en-US" sz="2800" dirty="0">
               <a:latin typeface="Arial" panose="020B0604020202020204" pitchFamily="34" charset="0"/>
@@ -10638,11 +10694,25 @@
           <a:p>
             <a:pPr algn="ctr"/>
             <a:r>
-              <a:rPr kumimoji="1" lang="en-US" altLang="zh-CN" sz="2800" dirty="0" err="1">
-                <a:latin typeface="Arial" panose="020B0604020202020204" pitchFamily="34" charset="0"/>
-                <a:cs typeface="Arial" panose="020B0604020202020204" pitchFamily="34" charset="0"/>
-              </a:rPr>
-              <a:t>Pos_y</a:t>
+              <a:rPr kumimoji="1" lang="en-US" altLang="zh-CN" sz="2800" dirty="0">
+                <a:latin typeface="Arial" panose="020B0604020202020204" pitchFamily="34" charset="0"/>
+                <a:cs typeface="Arial" panose="020B0604020202020204" pitchFamily="34" charset="0"/>
+              </a:rPr>
+              <a:t>Pos</a:t>
+            </a:r>
+            <a:r>
+              <a:rPr kumimoji="1" lang="zh-CN" altLang="en-US" sz="2800" dirty="0">
+                <a:latin typeface="Arial" panose="020B0604020202020204" pitchFamily="34" charset="0"/>
+                <a:cs typeface="Arial" panose="020B0604020202020204" pitchFamily="34" charset="0"/>
+              </a:rPr>
+              <a:t> </a:t>
+            </a:r>
+            <a:r>
+              <a:rPr kumimoji="1" lang="en-US" altLang="zh-CN" sz="2800" dirty="0">
+                <a:latin typeface="Arial" panose="020B0604020202020204" pitchFamily="34" charset="0"/>
+                <a:cs typeface="Arial" panose="020B0604020202020204" pitchFamily="34" charset="0"/>
+              </a:rPr>
+              <a:t>y</a:t>
             </a:r>
             <a:endParaRPr kumimoji="1" lang="zh-CN" altLang="en-US" sz="2800" dirty="0">
               <a:latin typeface="Arial" panose="020B0604020202020204" pitchFamily="34" charset="0"/>
@@ -10807,11 +10877,25 @@
           <a:p>
             <a:pPr algn="ctr"/>
             <a:r>
-              <a:rPr kumimoji="1" lang="en-US" altLang="zh-CN" sz="2800" dirty="0" err="1">
-                <a:latin typeface="Arial" panose="020B0604020202020204" pitchFamily="34" charset="0"/>
-                <a:cs typeface="Arial" panose="020B0604020202020204" pitchFamily="34" charset="0"/>
-              </a:rPr>
-              <a:t>Pos_x</a:t>
+              <a:rPr kumimoji="1" lang="en-US" altLang="zh-CN" sz="2800" dirty="0">
+                <a:latin typeface="Arial" panose="020B0604020202020204" pitchFamily="34" charset="0"/>
+                <a:cs typeface="Arial" panose="020B0604020202020204" pitchFamily="34" charset="0"/>
+              </a:rPr>
+              <a:t>Pos</a:t>
+            </a:r>
+            <a:r>
+              <a:rPr kumimoji="1" lang="zh-CN" altLang="en-US" sz="2800" dirty="0">
+                <a:latin typeface="Arial" panose="020B0604020202020204" pitchFamily="34" charset="0"/>
+                <a:cs typeface="Arial" panose="020B0604020202020204" pitchFamily="34" charset="0"/>
+              </a:rPr>
+              <a:t> </a:t>
+            </a:r>
+            <a:r>
+              <a:rPr kumimoji="1" lang="en-US" altLang="zh-CN" sz="2800" dirty="0">
+                <a:latin typeface="Arial" panose="020B0604020202020204" pitchFamily="34" charset="0"/>
+                <a:cs typeface="Arial" panose="020B0604020202020204" pitchFamily="34" charset="0"/>
+              </a:rPr>
+              <a:t>x</a:t>
             </a:r>
             <a:endParaRPr kumimoji="1" lang="zh-CN" altLang="en-US" sz="2800" dirty="0">
               <a:latin typeface="Arial" panose="020B0604020202020204" pitchFamily="34" charset="0"/>
@@ -10850,11 +10934,25 @@
           <a:p>
             <a:pPr algn="ctr"/>
             <a:r>
-              <a:rPr kumimoji="1" lang="en-US" altLang="zh-CN" sz="2800" dirty="0" err="1">
-                <a:latin typeface="Arial" panose="020B0604020202020204" pitchFamily="34" charset="0"/>
-                <a:cs typeface="Arial" panose="020B0604020202020204" pitchFamily="34" charset="0"/>
-              </a:rPr>
-              <a:t>Pos_x</a:t>
+              <a:rPr kumimoji="1" lang="en-US" altLang="zh-CN" sz="2800" dirty="0">
+                <a:latin typeface="Arial" panose="020B0604020202020204" pitchFamily="34" charset="0"/>
+                <a:cs typeface="Arial" panose="020B0604020202020204" pitchFamily="34" charset="0"/>
+              </a:rPr>
+              <a:t>Pos</a:t>
+            </a:r>
+            <a:r>
+              <a:rPr kumimoji="1" lang="zh-CN" altLang="en-US" sz="2800" dirty="0">
+                <a:latin typeface="Arial" panose="020B0604020202020204" pitchFamily="34" charset="0"/>
+                <a:cs typeface="Arial" panose="020B0604020202020204" pitchFamily="34" charset="0"/>
+              </a:rPr>
+              <a:t> </a:t>
+            </a:r>
+            <a:r>
+              <a:rPr kumimoji="1" lang="en-US" altLang="zh-CN" sz="2800" dirty="0">
+                <a:latin typeface="Arial" panose="020B0604020202020204" pitchFamily="34" charset="0"/>
+                <a:cs typeface="Arial" panose="020B0604020202020204" pitchFamily="34" charset="0"/>
+              </a:rPr>
+              <a:t>x</a:t>
             </a:r>
             <a:endParaRPr kumimoji="1" lang="zh-CN" altLang="en-US" sz="2800" dirty="0">
               <a:latin typeface="Arial" panose="020B0604020202020204" pitchFamily="34" charset="0"/>
@@ -10893,11 +10991,25 @@
           <a:p>
             <a:pPr algn="ctr"/>
             <a:r>
-              <a:rPr kumimoji="1" lang="en-US" altLang="zh-CN" sz="2800" dirty="0" err="1">
-                <a:latin typeface="Arial" panose="020B0604020202020204" pitchFamily="34" charset="0"/>
-                <a:cs typeface="Arial" panose="020B0604020202020204" pitchFamily="34" charset="0"/>
-              </a:rPr>
-              <a:t>Pos_x</a:t>
+              <a:rPr kumimoji="1" lang="en-US" altLang="zh-CN" sz="2800" dirty="0">
+                <a:latin typeface="Arial" panose="020B0604020202020204" pitchFamily="34" charset="0"/>
+                <a:cs typeface="Arial" panose="020B0604020202020204" pitchFamily="34" charset="0"/>
+              </a:rPr>
+              <a:t>Pos</a:t>
+            </a:r>
+            <a:r>
+              <a:rPr kumimoji="1" lang="zh-CN" altLang="en-US" sz="2800" dirty="0">
+                <a:latin typeface="Arial" panose="020B0604020202020204" pitchFamily="34" charset="0"/>
+                <a:cs typeface="Arial" panose="020B0604020202020204" pitchFamily="34" charset="0"/>
+              </a:rPr>
+              <a:t> </a:t>
+            </a:r>
+            <a:r>
+              <a:rPr kumimoji="1" lang="en-US" altLang="zh-CN" sz="2800" dirty="0">
+                <a:latin typeface="Arial" panose="020B0604020202020204" pitchFamily="34" charset="0"/>
+                <a:cs typeface="Arial" panose="020B0604020202020204" pitchFamily="34" charset="0"/>
+              </a:rPr>
+              <a:t>x</a:t>
             </a:r>
             <a:endParaRPr kumimoji="1" lang="zh-CN" altLang="en-US" sz="2800" dirty="0">
               <a:latin typeface="Arial" panose="020B0604020202020204" pitchFamily="34" charset="0"/>
@@ -10936,11 +11048,25 @@
           <a:p>
             <a:pPr algn="ctr"/>
             <a:r>
-              <a:rPr kumimoji="1" lang="en-US" altLang="zh-CN" sz="2800" dirty="0" err="1">
-                <a:latin typeface="Arial" panose="020B0604020202020204" pitchFamily="34" charset="0"/>
-                <a:cs typeface="Arial" panose="020B0604020202020204" pitchFamily="34" charset="0"/>
-              </a:rPr>
-              <a:t>Pos_x</a:t>
+              <a:rPr kumimoji="1" lang="en-US" altLang="zh-CN" sz="2800" dirty="0">
+                <a:latin typeface="Arial" panose="020B0604020202020204" pitchFamily="34" charset="0"/>
+                <a:cs typeface="Arial" panose="020B0604020202020204" pitchFamily="34" charset="0"/>
+              </a:rPr>
+              <a:t>Pos</a:t>
+            </a:r>
+            <a:r>
+              <a:rPr kumimoji="1" lang="zh-CN" altLang="en-US" sz="2800" dirty="0">
+                <a:latin typeface="Arial" panose="020B0604020202020204" pitchFamily="34" charset="0"/>
+                <a:cs typeface="Arial" panose="020B0604020202020204" pitchFamily="34" charset="0"/>
+              </a:rPr>
+              <a:t> </a:t>
+            </a:r>
+            <a:r>
+              <a:rPr kumimoji="1" lang="en-US" altLang="zh-CN" sz="2800" dirty="0">
+                <a:latin typeface="Arial" panose="020B0604020202020204" pitchFamily="34" charset="0"/>
+                <a:cs typeface="Arial" panose="020B0604020202020204" pitchFamily="34" charset="0"/>
+              </a:rPr>
+              <a:t>x</a:t>
             </a:r>
             <a:endParaRPr kumimoji="1" lang="zh-CN" altLang="en-US" sz="2800" dirty="0">
               <a:latin typeface="Arial" panose="020B0604020202020204" pitchFamily="34" charset="0"/>
@@ -10979,11 +11105,25 @@
           <a:p>
             <a:pPr algn="ctr"/>
             <a:r>
-              <a:rPr kumimoji="1" lang="en-US" altLang="zh-CN" sz="2800" dirty="0" err="1">
-                <a:latin typeface="Arial" panose="020B0604020202020204" pitchFamily="34" charset="0"/>
-                <a:cs typeface="Arial" panose="020B0604020202020204" pitchFamily="34" charset="0"/>
-              </a:rPr>
-              <a:t>Pos_x</a:t>
+              <a:rPr kumimoji="1" lang="en-US" altLang="zh-CN" sz="2800" dirty="0">
+                <a:latin typeface="Arial" panose="020B0604020202020204" pitchFamily="34" charset="0"/>
+                <a:cs typeface="Arial" panose="020B0604020202020204" pitchFamily="34" charset="0"/>
+              </a:rPr>
+              <a:t>Pos</a:t>
+            </a:r>
+            <a:r>
+              <a:rPr kumimoji="1" lang="zh-CN" altLang="en-US" sz="2800" dirty="0">
+                <a:latin typeface="Arial" panose="020B0604020202020204" pitchFamily="34" charset="0"/>
+                <a:cs typeface="Arial" panose="020B0604020202020204" pitchFamily="34" charset="0"/>
+              </a:rPr>
+              <a:t> </a:t>
+            </a:r>
+            <a:r>
+              <a:rPr kumimoji="1" lang="en-US" altLang="zh-CN" sz="2800" dirty="0">
+                <a:latin typeface="Arial" panose="020B0604020202020204" pitchFamily="34" charset="0"/>
+                <a:cs typeface="Arial" panose="020B0604020202020204" pitchFamily="34" charset="0"/>
+              </a:rPr>
+              <a:t>x</a:t>
             </a:r>
             <a:endParaRPr kumimoji="1" lang="zh-CN" altLang="en-US" sz="2800" dirty="0">
               <a:latin typeface="Arial" panose="020B0604020202020204" pitchFamily="34" charset="0"/>
@@ -11022,11 +11162,25 @@
           <a:p>
             <a:pPr algn="ctr"/>
             <a:r>
-              <a:rPr kumimoji="1" lang="en-US" altLang="zh-CN" sz="2800" dirty="0" err="1">
-                <a:latin typeface="Arial" panose="020B0604020202020204" pitchFamily="34" charset="0"/>
-                <a:cs typeface="Arial" panose="020B0604020202020204" pitchFamily="34" charset="0"/>
-              </a:rPr>
-              <a:t>Pos_x</a:t>
+              <a:rPr kumimoji="1" lang="en-US" altLang="zh-CN" sz="2800" dirty="0">
+                <a:latin typeface="Arial" panose="020B0604020202020204" pitchFamily="34" charset="0"/>
+                <a:cs typeface="Arial" panose="020B0604020202020204" pitchFamily="34" charset="0"/>
+              </a:rPr>
+              <a:t>Pos</a:t>
+            </a:r>
+            <a:r>
+              <a:rPr kumimoji="1" lang="zh-CN" altLang="en-US" sz="2800" dirty="0">
+                <a:latin typeface="Arial" panose="020B0604020202020204" pitchFamily="34" charset="0"/>
+                <a:cs typeface="Arial" panose="020B0604020202020204" pitchFamily="34" charset="0"/>
+              </a:rPr>
+              <a:t> </a:t>
+            </a:r>
+            <a:r>
+              <a:rPr kumimoji="1" lang="en-US" altLang="zh-CN" sz="2800" dirty="0">
+                <a:latin typeface="Arial" panose="020B0604020202020204" pitchFamily="34" charset="0"/>
+                <a:cs typeface="Arial" panose="020B0604020202020204" pitchFamily="34" charset="0"/>
+              </a:rPr>
+              <a:t>x</a:t>
             </a:r>
             <a:endParaRPr kumimoji="1" lang="zh-CN" altLang="en-US" sz="2800" dirty="0">
               <a:latin typeface="Arial" panose="020B0604020202020204" pitchFamily="34" charset="0"/>
@@ -11411,7 +11565,7 @@
                 <a:latin typeface="Arial" panose="020B0604020202020204" pitchFamily="34" charset="0"/>
                 <a:cs typeface="Arial" panose="020B0604020202020204" pitchFamily="34" charset="0"/>
               </a:rPr>
-              <a:t>density</a:t>
+              <a:t>Density</a:t>
             </a:r>
             <a:endParaRPr kumimoji="1" lang="zh-CN" altLang="en-US" sz="2800" dirty="0">
               <a:latin typeface="Arial" panose="020B0604020202020204" pitchFamily="34" charset="0"/>
@@ -11874,7 +12028,7 @@
                 <a:latin typeface="Arial" panose="020B0604020202020204" pitchFamily="34" charset="0"/>
                 <a:cs typeface="Arial" panose="020B0604020202020204" pitchFamily="34" charset="0"/>
               </a:rPr>
-              <a:t>density</a:t>
+              <a:t>Density</a:t>
             </a:r>
             <a:endParaRPr kumimoji="1" lang="zh-CN" altLang="en-US" sz="2800" dirty="0">
               <a:latin typeface="Arial" panose="020B0604020202020204" pitchFamily="34" charset="0"/>
@@ -12337,7 +12491,7 @@
                 <a:latin typeface="Arial" panose="020B0604020202020204" pitchFamily="34" charset="0"/>
                 <a:cs typeface="Arial" panose="020B0604020202020204" pitchFamily="34" charset="0"/>
               </a:rPr>
-              <a:t>density</a:t>
+              <a:t>Density</a:t>
             </a:r>
             <a:endParaRPr kumimoji="1" lang="zh-CN" altLang="en-US" sz="2800" dirty="0">
               <a:latin typeface="Arial" panose="020B0604020202020204" pitchFamily="34" charset="0"/>
@@ -12800,7 +12954,7 @@
                 <a:latin typeface="Arial" panose="020B0604020202020204" pitchFamily="34" charset="0"/>
                 <a:cs typeface="Arial" panose="020B0604020202020204" pitchFamily="34" charset="0"/>
               </a:rPr>
-              <a:t>density</a:t>
+              <a:t>Density</a:t>
             </a:r>
             <a:endParaRPr kumimoji="1" lang="zh-CN" altLang="en-US" sz="2800" dirty="0">
               <a:latin typeface="Arial" panose="020B0604020202020204" pitchFamily="34" charset="0"/>
@@ -13263,7 +13417,7 @@
                 <a:latin typeface="Arial" panose="020B0604020202020204" pitchFamily="34" charset="0"/>
                 <a:cs typeface="Arial" panose="020B0604020202020204" pitchFamily="34" charset="0"/>
               </a:rPr>
-              <a:t>density</a:t>
+              <a:t>Density</a:t>
             </a:r>
             <a:endParaRPr kumimoji="1" lang="zh-CN" altLang="en-US" sz="2800" dirty="0">
               <a:latin typeface="Arial" panose="020B0604020202020204" pitchFamily="34" charset="0"/>
@@ -13726,7 +13880,7 @@
                 <a:latin typeface="Arial" panose="020B0604020202020204" pitchFamily="34" charset="0"/>
                 <a:cs typeface="Arial" panose="020B0604020202020204" pitchFamily="34" charset="0"/>
               </a:rPr>
-              <a:t>density</a:t>
+              <a:t>Density</a:t>
             </a:r>
             <a:endParaRPr kumimoji="1" lang="zh-CN" altLang="en-US" sz="2800" dirty="0">
               <a:latin typeface="Arial" panose="020B0604020202020204" pitchFamily="34" charset="0"/>
@@ -14185,11 +14339,25 @@
           <a:p>
             <a:pPr algn="ctr"/>
             <a:r>
-              <a:rPr kumimoji="1" lang="en-US" altLang="zh-CN" sz="2800" dirty="0" err="1">
-                <a:latin typeface="Arial" panose="020B0604020202020204" pitchFamily="34" charset="0"/>
-                <a:cs typeface="Arial" panose="020B0604020202020204" pitchFamily="34" charset="0"/>
-              </a:rPr>
-              <a:t>Relative_size</a:t>
+              <a:rPr kumimoji="1" lang="en-US" altLang="zh-CN" sz="2800" dirty="0">
+                <a:latin typeface="Arial" panose="020B0604020202020204" pitchFamily="34" charset="0"/>
+                <a:cs typeface="Arial" panose="020B0604020202020204" pitchFamily="34" charset="0"/>
+              </a:rPr>
+              <a:t>Relative</a:t>
+            </a:r>
+            <a:r>
+              <a:rPr kumimoji="1" lang="zh-CN" altLang="en-US" sz="2800" dirty="0">
+                <a:latin typeface="Arial" panose="020B0604020202020204" pitchFamily="34" charset="0"/>
+                <a:cs typeface="Arial" panose="020B0604020202020204" pitchFamily="34" charset="0"/>
+              </a:rPr>
+              <a:t> </a:t>
+            </a:r>
+            <a:r>
+              <a:rPr kumimoji="1" lang="en-US" altLang="zh-CN" sz="2800" dirty="0">
+                <a:latin typeface="Arial" panose="020B0604020202020204" pitchFamily="34" charset="0"/>
+                <a:cs typeface="Arial" panose="020B0604020202020204" pitchFamily="34" charset="0"/>
+              </a:rPr>
+              <a:t>size</a:t>
             </a:r>
             <a:endParaRPr kumimoji="1" lang="zh-CN" altLang="en-US" sz="2800" dirty="0">
               <a:latin typeface="Arial" panose="020B0604020202020204" pitchFamily="34" charset="0"/>
@@ -14228,11 +14396,25 @@
           <a:p>
             <a:pPr algn="ctr"/>
             <a:r>
-              <a:rPr kumimoji="1" lang="en-US" altLang="zh-CN" sz="2800" dirty="0" err="1">
-                <a:latin typeface="Arial" panose="020B0604020202020204" pitchFamily="34" charset="0"/>
-                <a:cs typeface="Arial" panose="020B0604020202020204" pitchFamily="34" charset="0"/>
-              </a:rPr>
-              <a:t>Relative_size</a:t>
+              <a:rPr kumimoji="1" lang="en-US" altLang="zh-CN" sz="2800" dirty="0">
+                <a:latin typeface="Arial" panose="020B0604020202020204" pitchFamily="34" charset="0"/>
+                <a:cs typeface="Arial" panose="020B0604020202020204" pitchFamily="34" charset="0"/>
+              </a:rPr>
+              <a:t>Relative</a:t>
+            </a:r>
+            <a:r>
+              <a:rPr kumimoji="1" lang="zh-CN" altLang="en-US" sz="2800" dirty="0">
+                <a:latin typeface="Arial" panose="020B0604020202020204" pitchFamily="34" charset="0"/>
+                <a:cs typeface="Arial" panose="020B0604020202020204" pitchFamily="34" charset="0"/>
+              </a:rPr>
+              <a:t> </a:t>
+            </a:r>
+            <a:r>
+              <a:rPr kumimoji="1" lang="en-US" altLang="zh-CN" sz="2800" dirty="0">
+                <a:latin typeface="Arial" panose="020B0604020202020204" pitchFamily="34" charset="0"/>
+                <a:cs typeface="Arial" panose="020B0604020202020204" pitchFamily="34" charset="0"/>
+              </a:rPr>
+              <a:t>size</a:t>
             </a:r>
             <a:endParaRPr kumimoji="1" lang="zh-CN" altLang="en-US" sz="2800" dirty="0">
               <a:latin typeface="Arial" panose="020B0604020202020204" pitchFamily="34" charset="0"/>
@@ -14271,11 +14453,25 @@
           <a:p>
             <a:pPr algn="ctr"/>
             <a:r>
-              <a:rPr kumimoji="1" lang="en-US" altLang="zh-CN" sz="2800" dirty="0" err="1">
-                <a:latin typeface="Arial" panose="020B0604020202020204" pitchFamily="34" charset="0"/>
-                <a:cs typeface="Arial" panose="020B0604020202020204" pitchFamily="34" charset="0"/>
-              </a:rPr>
-              <a:t>Relative_size</a:t>
+              <a:rPr kumimoji="1" lang="en-US" altLang="zh-CN" sz="2800" dirty="0">
+                <a:latin typeface="Arial" panose="020B0604020202020204" pitchFamily="34" charset="0"/>
+                <a:cs typeface="Arial" panose="020B0604020202020204" pitchFamily="34" charset="0"/>
+              </a:rPr>
+              <a:t>Relative</a:t>
+            </a:r>
+            <a:r>
+              <a:rPr kumimoji="1" lang="zh-CN" altLang="en-US" sz="2800" dirty="0">
+                <a:latin typeface="Arial" panose="020B0604020202020204" pitchFamily="34" charset="0"/>
+                <a:cs typeface="Arial" panose="020B0604020202020204" pitchFamily="34" charset="0"/>
+              </a:rPr>
+              <a:t> </a:t>
+            </a:r>
+            <a:r>
+              <a:rPr kumimoji="1" lang="en-US" altLang="zh-CN" sz="2800" dirty="0">
+                <a:latin typeface="Arial" panose="020B0604020202020204" pitchFamily="34" charset="0"/>
+                <a:cs typeface="Arial" panose="020B0604020202020204" pitchFamily="34" charset="0"/>
+              </a:rPr>
+              <a:t>size</a:t>
             </a:r>
             <a:endParaRPr kumimoji="1" lang="zh-CN" altLang="en-US" sz="2800" dirty="0">
               <a:latin typeface="Arial" panose="020B0604020202020204" pitchFamily="34" charset="0"/>
@@ -14314,11 +14510,25 @@
           <a:p>
             <a:pPr algn="ctr"/>
             <a:r>
-              <a:rPr kumimoji="1" lang="en-US" altLang="zh-CN" sz="2800" dirty="0" err="1">
-                <a:latin typeface="Arial" panose="020B0604020202020204" pitchFamily="34" charset="0"/>
-                <a:cs typeface="Arial" panose="020B0604020202020204" pitchFamily="34" charset="0"/>
-              </a:rPr>
-              <a:t>Relative_size</a:t>
+              <a:rPr kumimoji="1" lang="en-US" altLang="zh-CN" sz="2800" dirty="0">
+                <a:latin typeface="Arial" panose="020B0604020202020204" pitchFamily="34" charset="0"/>
+                <a:cs typeface="Arial" panose="020B0604020202020204" pitchFamily="34" charset="0"/>
+              </a:rPr>
+              <a:t>Relative</a:t>
+            </a:r>
+            <a:r>
+              <a:rPr kumimoji="1" lang="zh-CN" altLang="en-US" sz="2800" dirty="0">
+                <a:latin typeface="Arial" panose="020B0604020202020204" pitchFamily="34" charset="0"/>
+                <a:cs typeface="Arial" panose="020B0604020202020204" pitchFamily="34" charset="0"/>
+              </a:rPr>
+              <a:t> </a:t>
+            </a:r>
+            <a:r>
+              <a:rPr kumimoji="1" lang="en-US" altLang="zh-CN" sz="2800" dirty="0">
+                <a:latin typeface="Arial" panose="020B0604020202020204" pitchFamily="34" charset="0"/>
+                <a:cs typeface="Arial" panose="020B0604020202020204" pitchFamily="34" charset="0"/>
+              </a:rPr>
+              <a:t>size</a:t>
             </a:r>
             <a:endParaRPr kumimoji="1" lang="zh-CN" altLang="en-US" sz="2800" dirty="0">
               <a:latin typeface="Arial" panose="020B0604020202020204" pitchFamily="34" charset="0"/>
@@ -14357,11 +14567,25 @@
           <a:p>
             <a:pPr algn="ctr"/>
             <a:r>
-              <a:rPr kumimoji="1" lang="en-US" altLang="zh-CN" sz="2800" dirty="0" err="1">
-                <a:latin typeface="Arial" panose="020B0604020202020204" pitchFamily="34" charset="0"/>
-                <a:cs typeface="Arial" panose="020B0604020202020204" pitchFamily="34" charset="0"/>
-              </a:rPr>
-              <a:t>Relative_size</a:t>
+              <a:rPr kumimoji="1" lang="en-US" altLang="zh-CN" sz="2800" dirty="0">
+                <a:latin typeface="Arial" panose="020B0604020202020204" pitchFamily="34" charset="0"/>
+                <a:cs typeface="Arial" panose="020B0604020202020204" pitchFamily="34" charset="0"/>
+              </a:rPr>
+              <a:t>Relative</a:t>
+            </a:r>
+            <a:r>
+              <a:rPr kumimoji="1" lang="zh-CN" altLang="en-US" sz="2800" dirty="0">
+                <a:latin typeface="Arial" panose="020B0604020202020204" pitchFamily="34" charset="0"/>
+                <a:cs typeface="Arial" panose="020B0604020202020204" pitchFamily="34" charset="0"/>
+              </a:rPr>
+              <a:t> </a:t>
+            </a:r>
+            <a:r>
+              <a:rPr kumimoji="1" lang="en-US" altLang="zh-CN" sz="2800" dirty="0">
+                <a:latin typeface="Arial" panose="020B0604020202020204" pitchFamily="34" charset="0"/>
+                <a:cs typeface="Arial" panose="020B0604020202020204" pitchFamily="34" charset="0"/>
+              </a:rPr>
+              <a:t>size</a:t>
             </a:r>
             <a:endParaRPr kumimoji="1" lang="zh-CN" altLang="en-US" sz="2800" dirty="0">
               <a:latin typeface="Arial" panose="020B0604020202020204" pitchFamily="34" charset="0"/>
@@ -14400,11 +14624,25 @@
           <a:p>
             <a:pPr algn="ctr"/>
             <a:r>
-              <a:rPr kumimoji="1" lang="en-US" altLang="zh-CN" sz="2800" dirty="0" err="1">
-                <a:latin typeface="Arial" panose="020B0604020202020204" pitchFamily="34" charset="0"/>
-                <a:cs typeface="Arial" panose="020B0604020202020204" pitchFamily="34" charset="0"/>
-              </a:rPr>
-              <a:t>Relative_size</a:t>
+              <a:rPr kumimoji="1" lang="en-US" altLang="zh-CN" sz="2800" dirty="0">
+                <a:latin typeface="Arial" panose="020B0604020202020204" pitchFamily="34" charset="0"/>
+                <a:cs typeface="Arial" panose="020B0604020202020204" pitchFamily="34" charset="0"/>
+              </a:rPr>
+              <a:t>Relative</a:t>
+            </a:r>
+            <a:r>
+              <a:rPr kumimoji="1" lang="zh-CN" altLang="en-US" sz="2800" dirty="0">
+                <a:latin typeface="Arial" panose="020B0604020202020204" pitchFamily="34" charset="0"/>
+                <a:cs typeface="Arial" panose="020B0604020202020204" pitchFamily="34" charset="0"/>
+              </a:rPr>
+              <a:t> </a:t>
+            </a:r>
+            <a:r>
+              <a:rPr kumimoji="1" lang="en-US" altLang="zh-CN" sz="2800" dirty="0">
+                <a:latin typeface="Arial" panose="020B0604020202020204" pitchFamily="34" charset="0"/>
+                <a:cs typeface="Arial" panose="020B0604020202020204" pitchFamily="34" charset="0"/>
+              </a:rPr>
+              <a:t>size</a:t>
             </a:r>
             <a:endParaRPr kumimoji="1" lang="zh-CN" altLang="en-US" sz="2800" dirty="0">
               <a:latin typeface="Arial" panose="020B0604020202020204" pitchFamily="34" charset="0"/>
